--- a/downloads/presentations/modules/lesson-03-machine-learning-basics-for-epidemiology-and-surveillance.pptx
+++ b/downloads/presentations/modules/lesson-03-machine-learning-basics-for-epidemiology-and-surveillance.pptx
@@ -25,9 +25,11 @@
     <p:sldId id="273" r:id="rId19"/>
     <p:sldId id="274" r:id="rId20"/>
     <p:sldId id="275" r:id="rId21"/>
+    <p:sldId id="276" r:id="rId22"/>
+    <p:sldId id="277" r:id="rId23"/>
   </p:sldIdLst>
   <p:notesMasterIdLst>
-    <p:notesMasterId r:id="rId22"/>
+    <p:notesMasterId r:id="rId24"/>
   </p:notesMasterIdLst>
   <p:sldSz cx="12192000" cy="6858000"/>
   <p:notesSz cx="6858000" cy="12192000"/>
@@ -610,10 +612,10 @@
           <a:p>
             <a:r>
               <a:rPr lang="en-US" dirty="0"/>
-              <a:t>Risks, Failure Modes, and Guardrails
-Biased or inconsistent labels. If historical labels reflect unequal detection, inconsistent review, or limited resources, the model may reproduce those patterns. Guardrails include label audits, expert review, subgroup analysis, and documentation of label limitations.
-Data leakage. Data leakage occurs when information that would not be available at the time of decision is used during training. Guardrails include temporal validation, careful feature review, and independent testing.
-Overfitting and poor generalization. A model may perform well on development data but poorly in a new jurisdiction, time period, or population. Guardrails include held-out testing, external validation, drift monitoring, and conservative deployment.</a:t>
+              <a:t>Technical Deep Dive
+Machine learning development typically begins with a defined prediction or classification task. The task should be specific enough to test. “Use AI to improve surveillance” is too vague. “Classify incoming reports into routine review, expedited review, and supervisor review based on defined criteria” is more actionable. A clear task allows staff to define the target label, required features, acceptance criteria, and human review process.
+Data preparation is often the most important and time-consuming step. Public health data may contain missing values, duplicate records, delayed reporting, inconsistent coding, local terminology, free-text notes, and changes over time. Feature engineering translates raw data into model inputs, but it can also embed assumptions. For example, using prior healthcare utilization as a feature may reflect access to care as much as underlying risk.
+Training, validation, and test datasets serve different purposes. Training data are used to fit the model. Validation data are used to tune choices during development. Test data are used to estimate performance on data not used to build the model. Public health teams should be cautious when a vendor reports only development performance without external validation or realistic operational testing.</a:t>
             </a:r>
             <a:endParaRPr lang="en-US" dirty="0"/>
           </a:p>
@@ -701,8 +703,9 @@
           <a:p>
             <a:r>
               <a:rPr lang="en-US" dirty="0"/>
-              <a:t>Risks, Failure Modes, and Guardrails
-Misuse of prediction as explanation. A model can predict risk without explaining cause. Guardrails include clear communication, training, and restrictions against causal claims unless supported by appropriate study design.</a:t>
+              <a:t>Technical Deep Dive
+Model performance should be interpreted in relation to the workflow. A model with high overall accuracy may still miss rare but important events. A model with many false positives may burden staff and create alert fatigue. A model with many false negatives may miss cases, outbreaks, or communities needing support. Thresholds should be selected based on public health consequences, not only technical optimization.
+Human review should be designed into the workflow before deployment. Reviewers need to understand what the model output means, what it does not mean, and when to override or escalate. Staff also need feedback channels so model errors can be documented, analyzed, and used to improve monitoring or retraining decisions.</a:t>
             </a:r>
             <a:endParaRPr lang="en-US" dirty="0"/>
           </a:p>
@@ -790,9 +793,10 @@
           <a:p>
             <a:r>
               <a:rPr lang="en-US" dirty="0"/>
-              <a:t>Application to AI-Supported Workflows
-Machine learning may support generative AI, predictive analytics, NLP, anomaly detection, and agentic workflows. In generative AI systems, machine learning concepts help staff understand why outputs may be fluent but unreliable. In predictive workflows, machine learning literacy helps staff evaluate risk scores, thresholds, and subgroup performance. In agentic workflows, models may trigger actions, making validation, permissions, and human approval especially important.
-The practical application is disciplined use. Staff should define intended use, validate performance, document limitations, monitor drift, and ensure that human reviewers remain accountable for consequential public health actions. Machine learning should be treated as an analytic support method within a governed workflow.</a:t>
+              <a:t>Risks, Failure Modes, and Guardrails
+Biased or inconsistent labels. If historical labels reflect unequal detection, inconsistent review, or limited resources, the model may reproduce those patterns. Guardrails include label audits, expert review, subgroup analysis, and documentation of label limitations.
+Data leakage. Data leakage occurs when information that would not be available at the time of decision is used during training. Guardrails include temporal validation, careful feature review, and independent testing.
+Overfitting and poor generalization. A model may perform well on development data but poorly in a new jurisdiction, time period, or population. Guardrails include held-out testing, external validation, drift monitoring, and conservative deployment.</a:t>
             </a:r>
             <a:endParaRPr lang="en-US" dirty="0"/>
           </a:p>
@@ -880,10 +884,8 @@
           <a:p>
             <a:r>
               <a:rPr lang="en-US" dirty="0"/>
-              <a:t>Reflection Questions
-What public health task would the model support: classification, prediction, ranking, clustering, or exploration?
-What label would be used, and how reliable or equitable is that label?
-Which features might reflect access, documentation, or reporting bias rather than true risk?</a:t>
+              <a:t>Risks, Failure Modes, and Guardrails
+Misuse of prediction as explanation. A model can predict risk without explaining cause. Guardrails include clear communication, training, and restrictions against causal claims unless supported by appropriate study design.</a:t>
             </a:r>
             <a:endParaRPr lang="en-US" dirty="0"/>
           </a:p>
@@ -971,9 +973,9 @@
           <a:p>
             <a:r>
               <a:rPr lang="en-US" dirty="0"/>
-              <a:t>Reflection Questions
-What errors would be most harmful in this workflow?
-Who would review model outputs, override them, and document concerns?</a:t>
+              <a:t>Application to AI-Supported Workflows
+Machine learning may support generative AI, predictive analytics, NLP, anomaly detection, and agentic workflows. In generative AI systems, machine learning concepts help staff understand why outputs may be fluent but unreliable. In predictive workflows, machine learning literacy helps staff evaluate risk scores, thresholds, and subgroup performance. In agentic workflows, models may trigger actions, making validation, permissions, and human approval especially important.
+The practical application is disciplined use. Staff should define intended use, validate performance, document limitations, monitor drift, and ensure that human reviewers remain accountable for consequential public health actions. Machine learning should be treated as an analytic support method within a governed workflow.</a:t>
             </a:r>
             <a:endParaRPr lang="en-US" dirty="0"/>
           </a:p>
@@ -1061,9 +1063,10 @@
           <a:p>
             <a:r>
               <a:rPr lang="en-US" dirty="0"/>
-              <a:t>Practical Exercise
-Create a machine learning use case review worksheet for one public health workflow. The worksheet should describe the public health task, intended use, data sources, candidate features, proposed label, likely users, performance measures, subgroup review needs, human review points, and monitoring requirements.
-This exercise should produce a governance-ready artifact. Learners should identify at least three reasons the model might fail and at least three safeguards that should be in place before pilot testing.</a:t>
+              <a:t>Reflection Questions
+What public health task would the model support: classification, prediction, ranking, clustering, or exploration?
+What label would be used, and how reliable or equitable is that label?
+Which features might reflect access, documentation, or reporting bias rather than true risk?</a:t>
             </a:r>
             <a:endParaRPr lang="en-US" dirty="0"/>
           </a:p>
@@ -1151,10 +1154,9 @@
           <a:p>
             <a:r>
               <a:rPr lang="en-US" dirty="0"/>
-              <a:t>Expected Artifact or Evidence
-Machine learning use case review worksheet
-Feature and label inventory
-Initial model risk and safeguard list</a:t>
+              <a:t>Reflection Questions
+What errors would be most harmful in this workflow?
+Who would review model outputs, override them, and document concerns?</a:t>
             </a:r>
             <a:endParaRPr lang="en-US" dirty="0"/>
           </a:p>
@@ -1242,8 +1244,9 @@
           <a:p>
             <a:r>
               <a:rPr lang="en-US" dirty="0"/>
-              <a:t>Expected Artifact or Evidence
-Human review and monitoring notes</a:t>
+              <a:t>Practical Exercise
+Create a machine learning use case review worksheet for one public health workflow. The worksheet should describe the public health task, intended use, data sources, candidate features, proposed label, likely users, performance measures, subgroup review needs, human review points, and monitoring requirements.
+This exercise should produce a governance-ready artifact. Learners should identify at least three reasons the model might fail and at least three safeguards that should be in place before pilot testing.</a:t>
             </a:r>
             <a:endParaRPr lang="en-US" dirty="0"/>
           </a:p>
@@ -1331,11 +1334,10 @@
           <a:p>
             <a:r>
               <a:rPr lang="en-US" dirty="0"/>
-              <a:t>Expected Assignment
+              <a:t>Expected Artifact or Evidence
 Machine learning use case review worksheet
 Feature and label inventory
-Initial model risk and safeguard list
-Human review and monitoring notes</a:t>
+Initial model risk and safeguard list</a:t>
             </a:r>
             <a:endParaRPr lang="en-US" dirty="0"/>
           </a:p>
@@ -1423,12 +1425,8 @@
           <a:p>
             <a:r>
               <a:rPr lang="en-US" dirty="0"/>
-              <a:t>Knowledge Check
-1. Which statement best describes supervised learning?
-2. Why can historical labels create risk?
-3. What is overfitting?
-4. What should determine model thresholds in public health workflows?
-5. What is strong completion evidence for this module?</a:t>
+              <a:t>Expected Artifact or Evidence
+Human review and monitoring notes</a:t>
             </a:r>
             <a:endParaRPr lang="en-US" dirty="0"/>
           </a:p>
@@ -1608,11 +1606,11 @@
           <a:p>
             <a:r>
               <a:rPr lang="en-US" dirty="0"/>
-              <a:t>References and Resources
-CDC Evaluation Framework: https://www.cdc.gov/evaluation/
-NIST Artificial Intelligence Risk Management Framework: https://www.nist.gov/itl/ai-risk-management-framework
-NIST AI RMF Generative AI Profile: https://www.nist.gov/publications/artificial-intelligence-risk-management-framework-generative-artificial-intelligence
-CDC Public Health Data Strategy: https://www.cdc.gov/public-health-data-strategy/php/about/index.html</a:t>
+              <a:t>Expected Assignment
+Machine learning use case review worksheet
+Feature and label inventory
+Initial model risk and safeguard list
+Human review and monitoring notes</a:t>
             </a:r>
             <a:endParaRPr lang="en-US" dirty="0"/>
           </a:p>
@@ -1636,6 +1634,191 @@
             <a:fld id="{F7021451-1387-4CA6-816F-3879F97B5CBC}" type="slidenum">
               <a:rPr lang="en-US"/>
               <a:t>20</a:t>
+            </a:fld>
+            <a:endParaRPr lang="en-US"/>
+          </a:p>
+        </p:txBody>
+      </p:sp>
+    </p:spTree>
+    <p:extLst>
+      <p:ext uri="{BB962C8B-B14F-4D97-AF65-F5344CB8AC3E}">
+        <p14:creationId xmlns:p14="http://schemas.microsoft.com/office/powerpoint/2010/main" val="1024086991"/>
+      </p:ext>
+    </p:extLst>
+  </p:cSld>
+  <p:clrMapOvr>
+    <a:masterClrMapping/>
+  </p:clrMapOvr>
+</p:notes>
+</file>
+
+<file path=ppt/notesSlides/notesSlide21.xml><?xml version="1.0" encoding="utf-8"?>
+<p:notes xmlns:a="http://schemas.openxmlformats.org/drawingml/2006/main" xmlns:r="http://schemas.openxmlformats.org/officeDocument/2006/relationships" xmlns:p="http://schemas.openxmlformats.org/presentationml/2006/main">
+  <p:cSld>
+    <p:spTree>
+      <p:nvGrpSpPr>
+        <p:cNvPr id="1" name=""/>
+        <p:cNvGrpSpPr/>
+        <p:nvPr/>
+      </p:nvGrpSpPr>
+      <p:grpSpPr>
+        <a:xfrm>
+          <a:off x="0" y="0"/>
+          <a:ext cx="0" cy="0"/>
+          <a:chOff x="0" y="0"/>
+          <a:chExt cx="0" cy="0"/>
+        </a:xfrm>
+      </p:grpSpPr>
+      <p:sp>
+        <p:nvSpPr>
+          <p:cNvPr id="2" name="Slide Image Placeholder 1"/>
+          <p:cNvSpPr>
+            <a:spLocks noGrp="1" noRot="1" noChangeAspect="1"/>
+          </p:cNvSpPr>
+          <p:nvPr>
+            <p:ph type="sldImg"/>
+          </p:nvPr>
+        </p:nvSpPr>
+        <p:spPr/>
+      </p:sp>
+      <p:sp>
+        <p:nvSpPr>
+          <p:cNvPr id="3" name="Notes Placeholder 2"/>
+          <p:cNvSpPr>
+            <a:spLocks noGrp="1"/>
+          </p:cNvSpPr>
+          <p:nvPr>
+            <p:ph type="body" idx="1"/>
+          </p:nvPr>
+        </p:nvSpPr>
+        <p:spPr/>
+        <p:txBody>
+          <a:bodyPr/>
+          <a:lstStyle/>
+          <a:p>
+            <a:r>
+              <a:rPr lang="en-US" dirty="0"/>
+              <a:t>Knowledge Check
+1. Which statement best describes supervised learning?
+2. Why can historical labels create risk?
+3. What is overfitting?
+4. What should determine model thresholds in public health workflows?
+5. What is strong completion evidence for this module?</a:t>
+            </a:r>
+            <a:endParaRPr lang="en-US" dirty="0"/>
+          </a:p>
+        </p:txBody>
+      </p:sp>
+      <p:sp>
+        <p:nvSpPr>
+          <p:cNvPr id="4" name="Slide Number Placeholder 3"/>
+          <p:cNvSpPr>
+            <a:spLocks noGrp="1"/>
+          </p:cNvSpPr>
+          <p:nvPr>
+            <p:ph type="sldNum" sz="quarter" idx="10"/>
+          </p:nvPr>
+        </p:nvSpPr>
+        <p:spPr/>
+        <p:txBody>
+          <a:bodyPr/>
+          <a:lstStyle/>
+          <a:p>
+            <a:fld id="{F7021451-1387-4CA6-816F-3879F97B5CBC}" type="slidenum">
+              <a:rPr lang="en-US"/>
+              <a:t>21</a:t>
+            </a:fld>
+            <a:endParaRPr lang="en-US"/>
+          </a:p>
+        </p:txBody>
+      </p:sp>
+    </p:spTree>
+    <p:extLst>
+      <p:ext uri="{BB962C8B-B14F-4D97-AF65-F5344CB8AC3E}">
+        <p14:creationId xmlns:p14="http://schemas.microsoft.com/office/powerpoint/2010/main" val="1024086991"/>
+      </p:ext>
+    </p:extLst>
+  </p:cSld>
+  <p:clrMapOvr>
+    <a:masterClrMapping/>
+  </p:clrMapOvr>
+</p:notes>
+</file>
+
+<file path=ppt/notesSlides/notesSlide22.xml><?xml version="1.0" encoding="utf-8"?>
+<p:notes xmlns:a="http://schemas.openxmlformats.org/drawingml/2006/main" xmlns:r="http://schemas.openxmlformats.org/officeDocument/2006/relationships" xmlns:p="http://schemas.openxmlformats.org/presentationml/2006/main">
+  <p:cSld>
+    <p:spTree>
+      <p:nvGrpSpPr>
+        <p:cNvPr id="1" name=""/>
+        <p:cNvGrpSpPr/>
+        <p:nvPr/>
+      </p:nvGrpSpPr>
+      <p:grpSpPr>
+        <a:xfrm>
+          <a:off x="0" y="0"/>
+          <a:ext cx="0" cy="0"/>
+          <a:chOff x="0" y="0"/>
+          <a:chExt cx="0" cy="0"/>
+        </a:xfrm>
+      </p:grpSpPr>
+      <p:sp>
+        <p:nvSpPr>
+          <p:cNvPr id="2" name="Slide Image Placeholder 1"/>
+          <p:cNvSpPr>
+            <a:spLocks noGrp="1" noRot="1" noChangeAspect="1"/>
+          </p:cNvSpPr>
+          <p:nvPr>
+            <p:ph type="sldImg"/>
+          </p:nvPr>
+        </p:nvSpPr>
+        <p:spPr/>
+      </p:sp>
+      <p:sp>
+        <p:nvSpPr>
+          <p:cNvPr id="3" name="Notes Placeholder 2"/>
+          <p:cNvSpPr>
+            <a:spLocks noGrp="1"/>
+          </p:cNvSpPr>
+          <p:nvPr>
+            <p:ph type="body" idx="1"/>
+          </p:nvPr>
+        </p:nvSpPr>
+        <p:spPr/>
+        <p:txBody>
+          <a:bodyPr/>
+          <a:lstStyle/>
+          <a:p>
+            <a:r>
+              <a:rPr lang="en-US" dirty="0"/>
+              <a:t>References and Resources
+CDC Evaluation Framework: https://www.cdc.gov/evaluation/
+NIST Artificial Intelligence Risk Management Framework: https://www.nist.gov/itl/ai-risk-management-framework
+NIST AI RMF Generative AI Profile: https://www.nist.gov/publications/artificial-intelligence-risk-management-framework-generative-artificial-intelligence
+CDC Public Health Data Strategy: https://www.cdc.gov/public-health-data-strategy/php/about/index.html</a:t>
+            </a:r>
+            <a:endParaRPr lang="en-US" dirty="0"/>
+          </a:p>
+        </p:txBody>
+      </p:sp>
+      <p:sp>
+        <p:nvSpPr>
+          <p:cNvPr id="4" name="Slide Number Placeholder 3"/>
+          <p:cNvSpPr>
+            <a:spLocks noGrp="1"/>
+          </p:cNvSpPr>
+          <p:nvPr>
+            <p:ph type="sldNum" sz="quarter" idx="10"/>
+          </p:nvPr>
+        </p:nvSpPr>
+        <p:spPr/>
+        <p:txBody>
+          <a:bodyPr/>
+          <a:lstStyle/>
+          <a:p>
+            <a:fld id="{F7021451-1387-4CA6-816F-3879F97B5CBC}" type="slidenum">
+              <a:rPr lang="en-US"/>
+              <a:t>22</a:t>
             </a:fld>
             <a:endParaRPr lang="en-US"/>
           </a:p>
@@ -1700,12 +1883,11 @@
           <a:p>
             <a:r>
               <a:rPr lang="en-US" dirty="0"/>
-              <a:t>Learning Objectives
-Explain the difference between supervised, unsupervised, and semi-supervised learning in public health terms.
-Describe features, labels, training data, validation data, and test data.
-Identify when a machine learning approach may be appropriate for a public health workflow and when a simpler method may be preferable.
-Recognize common machine learning risks, including overfitting, biased labels, data leakage, and poor generalization.
-Interpret basic model performance questions in relation to epidemiologic and operational decision-making.</a:t>
+              <a:t>Related Playbook Plays
+Play 13: Monitor and Evaluate AI Systems - This lesson informs Play 13 by helping learners connect the lesson topic to monitor and evaluate ai systems work in the AI Playbook.
+Play 11: Build and Deploy AI Solutions - This lesson informs Play 11 by helping learners connect the lesson topic to build and deploy ai solutions work in the AI Playbook.
+Play 1: Vision &amp; Guardrails - This lesson informs Play 1 by helping learners connect the lesson topic to vision &amp; guardrails work in the AI Playbook sequence.
+Play 7: Prioritize Use Cases - This lesson informs Play 7 by helping learners connect the lesson topic to prioritize use cases work in the AI Playbook sequence.</a:t>
             </a:r>
             <a:endParaRPr lang="en-US" dirty="0"/>
           </a:p>
@@ -1793,8 +1975,13 @@
           <a:p>
             <a:r>
               <a:rPr lang="en-US" dirty="0"/>
-              <a:t>Learning Objectives
-Produce a machine learning use case review worksheet for a real or realistic public health workflow.</a:t>
+              <a:t>Related Toolkit Resources
+Tool 44: Performance Monitoring Dashboard (Dashboard) - Use this tool to complete or strengthen the practical exercise for the module using fictional, de-identified, or generalized.
+Tool 45: Continuous Improvement Log (Log) - Use this tool to complete or strengthen the practical exercise for the module using fictional, de-identified, or generalized.
+Tool 48: AI Evaluation &amp; Outcomes Reporting (Template) - Use this tool to complete or strengthen the practical exercise for the module using fictional, de-identified, or generalized.
+Tool 1: AI Vision &amp; Principles Workshop (Workshop) - Use AI Vision &amp; Principles Workshop to translate this lesson into a documented public health AI planning, governance,.
+Tool 3: Equity Impact Assessment Checklist (Checklist) - Use Equity Impact Assessment Checklist to translate this lesson into a documented public health AI planning, governance,.
+Tool 4: AI Policy Landscape Scan (Worksheet) - Use AI Policy Landscape Scan to translate this lesson into a documented public health AI planning, governance, implementation,.</a:t>
             </a:r>
             <a:endParaRPr lang="en-US" dirty="0"/>
           </a:p>
@@ -1882,10 +2069,12 @@
           <a:p>
             <a:r>
               <a:rPr lang="en-US" dirty="0"/>
-              <a:t>Module Overview
-Machine learning is a set of methods that allow computer systems to identify patterns in data and use those patterns to classify, predict, cluster, or prioritize information. In public health, machine learning may support surveillance triage, outbreak signal review, risk stratification, case classification, anomaly detection, service planning, or quality improvement. The purpose of this module is not to turn every learner into a data scientist. The purpose is to help public health informaticians, epidemiologists, and technologists understand the concepts needed to evaluate whether a machine learning approach is appropriate, valid, equitable, and operationally useful.
-Machine learning should be understood as one analytic option among many. Traditional epidemiologic methods, rules-based logic, statistical models, and human judgment remain essential in many public health workflows. A machine learning model may be helpful when patterns are complex, high-dimensional, or difficult to express as simple rules. It may be inappropriate when data are sparse, labels are unreliable, the decision is highly consequential, or the public health question requires causal interpretation rather than prediction.
-This module introduces supervised learning, unsupervised learning, features, labels, training data, validation data, test data, overfitting, generalization, and model performance. Learners will connect these concepts to public health examples and identify the safeguards needed before machine learning outputs are used to support public health action.</a:t>
+              <a:t>Learning Objectives
+Explain the difference between supervised, unsupervised, and semi-supervised learning in public health terms.
+Describe features, labels, training data, validation data, and test data.
+Identify when a machine learning approach may be appropriate for a public health workflow and when a simpler method may be preferable.
+Recognize common machine learning risks, including overfitting, biased labels, data leakage, and poor generalization.
+Interpret basic model performance questions in relation to epidemiologic and operational decision-making.</a:t>
             </a:r>
             <a:endParaRPr lang="en-US" dirty="0"/>
           </a:p>
@@ -1973,10 +2162,8 @@
           <a:p>
             <a:r>
               <a:rPr lang="en-US" dirty="0"/>
-              <a:t>Why This Topic Matters for Public Health AI
-Machine learning matters for public health AI because many proposed tools rely on classification, prediction, ranking, or pattern detection. A surveillance team may want to classify incoming reports by urgency. An epidemiology team may want to detect unusual disease patterns. A program may want to prioritize outreach based on predicted risk. Each of these uses can affect who receives attention, services, investigation, or resources.
-Public health staff need enough machine learning literacy to ask whether the model is aligned with the public health purpose. A model built to predict an outcome is not the same as a model that explains why the outcome occurred. A model that performs well in one jurisdiction, population, or reporting environment may not perform well elsewhere. A model trained on historical public health actions may learn historical practice patterns, including under-detection or unequal service access.
-The most important public health question is whether the model improves decision-making safely and equitably. This requires more than a performance score. Staff must understand the source data, label quality, model limitations, subgroup performance, workflow impact, human review process, and monitoring plan. Machine learning should strengthen public health practice, not obscure uncertainty or shift responsibility away from accountable staff.</a:t>
+              <a:t>Learning Objectives
+Produce a machine learning use case review worksheet for a real or realistic public health workflow.</a:t>
             </a:r>
             <a:endParaRPr lang="en-US" dirty="0"/>
           </a:p>
@@ -2064,9 +2251,10 @@
           <a:p>
             <a:r>
               <a:rPr lang="en-US" dirty="0"/>
-              <a:t>Public Health Example
-A health department may consider a machine learning model to classify environmental health complaints by likely urgency. Historical complaint text, location, facility type, prior violations, and resolution outcomes may be used as features. The label might be whether the complaint was ultimately assigned high priority by trained staff. This sounds useful, but the label may reflect staffing capacity or historical prioritization patterns rather than true urgency.
-To use this model responsibly, staff would need to evaluate the training data, define the intended use, test performance on recent complaints, review errors by complaint type and community, and decide whether the output is advisory or operational. The model might help sort a queue, but it should not prevent staff from reviewing complaints that do not match historical patterns. The public health example shows that model design decisions become program decisions.</a:t>
+              <a:t>Module Overview
+Machine learning is a set of methods that allow computer systems to identify patterns in data and use those patterns to classify, predict, cluster, or prioritize information. In public health, machine learning may support surveillance triage, outbreak signal review, risk stratification, case classification, anomaly detection, service planning, or quality improvement. The purpose of this module is not to turn every learner into a data scientist. The purpose is to help public health informaticians, epidemiologists, and technologists understand the concepts needed to evaluate whether a machine learning approach is appropriate, valid, equitable, and operationally useful.
+Machine learning should be understood as one analytic option among many. Traditional epidemiologic methods, rules-based logic, statistical models, and human judgment remain essential in many public health workflows. A machine learning model may be helpful when patterns are complex, high-dimensional, or difficult to express as simple rules. It may be inappropriate when data are sparse, labels are unreliable, the decision is highly consequential, or the public health question requires causal interpretation rather than prediction.
+This module introduces supervised learning, unsupervised learning, features, labels, training data, validation data, test data, overfitting, generalization, and model performance. Learners will connect these concepts to public health examples and identify the safeguards needed before machine learning outputs are used to support public health action.</a:t>
             </a:r>
             <a:endParaRPr lang="en-US" dirty="0"/>
           </a:p>
@@ -2154,10 +2342,10 @@
           <a:p>
             <a:r>
               <a:rPr lang="en-US" dirty="0"/>
-              <a:t>Technical Deep Dive
-Machine learning development typically begins with a defined prediction or classification task. The task should be specific enough to test. “Use AI to improve surveillance” is too vague. “Classify incoming reports into routine review, expedited review, and supervisor review based on defined criteria” is more actionable. A clear task allows staff to define the target label, required features, acceptance criteria, and human review process.
-Data preparation is often the most important and time-consuming step. Public health data may contain missing values, duplicate records, delayed reporting, inconsistent coding, local terminology, free-text notes, and changes over time. Feature engineering translates raw data into model inputs, but it can also embed assumptions. For example, using prior healthcare utilization as a feature may reflect access to care as much as underlying risk.
-Training, validation, and test datasets serve different purposes. Training data are used to fit the model. Validation data are used to tune choices during development. Test data are used to estimate performance on data not used to build the model. Public health teams should be cautious when a vendor reports only development performance without external validation or realistic operational testing.</a:t>
+              <a:t>Why This Topic Matters for Public Health AI
+Machine learning matters for public health AI because many proposed tools rely on classification, prediction, ranking, or pattern detection. A surveillance team may want to classify incoming reports by urgency. An epidemiology team may want to detect unusual disease patterns. A program may want to prioritize outreach based on predicted risk. Each of these uses can affect who receives attention, services, investigation, or resources.
+Public health staff need enough machine learning literacy to ask whether the model is aligned with the public health purpose. A model built to predict an outcome is not the same as a model that explains why the outcome occurred. A model that performs well in one jurisdiction, population, or reporting environment may not perform well elsewhere. A model trained on historical public health actions may learn historical practice patterns, including under-detection or unequal service access.
+The most important public health question is whether the model improves decision-making safely and equitably. This requires more than a performance score. Staff must understand the source data, label quality, model limitations, subgroup performance, workflow impact, human review process, and monitoring plan. Machine learning should strengthen public health practice, not obscure uncertainty or shift responsibility away from accountable staff.</a:t>
             </a:r>
             <a:endParaRPr lang="en-US" dirty="0"/>
           </a:p>
@@ -2245,9 +2433,9 @@
           <a:p>
             <a:r>
               <a:rPr lang="en-US" dirty="0"/>
-              <a:t>Technical Deep Dive
-Model performance should be interpreted in relation to the workflow. A model with high overall accuracy may still miss rare but important events. A model with many false positives may burden staff and create alert fatigue. A model with many false negatives may miss cases, outbreaks, or communities needing support. Thresholds should be selected based on public health consequences, not only technical optimization.
-Human review should be designed into the workflow before deployment. Reviewers need to understand what the model output means, what it does not mean, and when to override or escalate. Staff also need feedback channels so model errors can be documented, analyzed, and used to improve monitoring or retraining decisions.</a:t>
+              <a:t>Public Health Example
+A health department may consider a machine learning model to classify environmental health complaints by likely urgency. Historical complaint text, location, facility type, prior violations, and resolution outcomes may be used as features. The label might be whether the complaint was ultimately assigned high priority by trained staff. This sounds useful, but the label may reflect staffing capacity or historical prioritization patterns rather than true urgency.
+To use this model responsibly, staff would need to evaluate the training data, define the intended use, test performance on recent complaints, review errors by complaint type and community, and decide whether the output is advisory or operational. The model might help sort a queue, but it should not prevent staff from reviewing complaints that do not match historical patterns. The public health example shows that model design decisions become program decisions.</a:t>
             </a:r>
             <a:endParaRPr lang="en-US" dirty="0"/>
           </a:p>
@@ -2870,7 +3058,32 @@
       </p:sp>
       <p:sp>
         <p:nvSpPr>
-          <p:cNvPr id="3" name="Text 1"/>
+          <p:cNvPr id="3" name="Shape 1"/>
+          <p:cNvSpPr/>
+          <p:nvPr/>
+        </p:nvSpPr>
+        <p:spPr>
+          <a:xfrm>
+            <a:off x="0" y="164592"/>
+            <a:ext cx="146304" cy="6693408"/>
+          </a:xfrm>
+          <a:prstGeom prst="rect">
+            <a:avLst/>
+          </a:prstGeom>
+          <a:solidFill>
+            <a:srgbClr val="2F8A28"/>
+          </a:solidFill>
+          <a:ln w="12700">
+            <a:solidFill>
+              <a:srgbClr val="2F8A28"/>
+            </a:solidFill>
+            <a:prstDash val="solid"/>
+          </a:ln>
+        </p:spPr>
+      </p:sp>
+      <p:sp>
+        <p:nvSpPr>
+          <p:cNvPr id="4" name="Text 2"/>
           <p:cNvSpPr/>
           <p:nvPr/>
         </p:nvSpPr>
@@ -2909,7 +3122,7 @@
       </p:sp>
       <p:sp>
         <p:nvSpPr>
-          <p:cNvPr id="4" name="Text 2"/>
+          <p:cNvPr id="5" name="Text 3"/>
           <p:cNvSpPr/>
           <p:nvPr/>
         </p:nvSpPr>
@@ -2948,7 +3161,7 @@
       </p:sp>
       <p:sp>
         <p:nvSpPr>
-          <p:cNvPr id="5" name="Text 3"/>
+          <p:cNvPr id="6" name="Text 4"/>
           <p:cNvSpPr/>
           <p:nvPr/>
         </p:nvSpPr>
@@ -2987,13 +3200,77 @@
       </p:sp>
       <p:sp>
         <p:nvSpPr>
-          <p:cNvPr id="6" name="Text 4"/>
+          <p:cNvPr id="7" name="Shape 5"/>
           <p:cNvSpPr/>
           <p:nvPr/>
         </p:nvSpPr>
         <p:spPr>
           <a:xfrm>
             <a:off x="640080" y="658368"/>
+            <a:ext cx="420624" cy="420624"/>
+          </a:xfrm>
+          <a:prstGeom prst="ellipse">
+            <a:avLst/>
+          </a:prstGeom>
+          <a:solidFill>
+            <a:srgbClr val="0068B7"/>
+          </a:solidFill>
+          <a:ln w="12700">
+            <a:solidFill>
+              <a:srgbClr val="0068B7"/>
+            </a:solidFill>
+            <a:prstDash val="solid"/>
+          </a:ln>
+        </p:spPr>
+      </p:sp>
+      <p:sp>
+        <p:nvSpPr>
+          <p:cNvPr id="8" name="Text 6"/>
+          <p:cNvSpPr/>
+          <p:nvPr/>
+        </p:nvSpPr>
+        <p:spPr>
+          <a:xfrm>
+            <a:off x="640080" y="731520"/>
+            <a:ext cx="420624" cy="164592"/>
+          </a:xfrm>
+          <a:prstGeom prst="rect">
+            <a:avLst/>
+          </a:prstGeom>
+          <a:noFill/>
+          <a:ln/>
+        </p:spPr>
+        <p:txBody>
+          <a:bodyPr wrap="square" lIns="0" tIns="0" rIns="0" bIns="0" rtlCol="0" anchor="ctr"/>
+          <a:lstStyle/>
+          <a:p>
+            <a:pPr algn="ctr" indent="0" marL="0">
+              <a:buNone/>
+            </a:pPr>
+            <a:r>
+              <a:rPr lang="en-US" sz="1100" b="1" dirty="0">
+                <a:solidFill>
+                  <a:srgbClr val="FFFFFF"/>
+                </a:solidFill>
+                <a:latin typeface="Aptos" pitchFamily="34" charset="0"/>
+                <a:ea typeface="Aptos" pitchFamily="34" charset="-122"/>
+                <a:cs typeface="Aptos" pitchFamily="34" charset="-120"/>
+              </a:rPr>
+              <a:t>5</a:t>
+            </a:r>
+            <a:endParaRPr lang="en-US" sz="1100" dirty="0"/>
+          </a:p>
+        </p:txBody>
+      </p:sp>
+      <p:sp>
+        <p:nvSpPr>
+          <p:cNvPr id="9" name="Text 7"/>
+          <p:cNvSpPr/>
+          <p:nvPr/>
+        </p:nvSpPr>
+        <p:spPr>
+          <a:xfrm>
+            <a:off x="640080" y="621792"/>
             <a:ext cx="10881360" cy="566928"/>
           </a:xfrm>
           <a:prstGeom prst="rect">
@@ -3020,7 +3297,7 @@
                 <a:ea typeface="Aptos Display" pitchFamily="34" charset="-122"/>
                 <a:cs typeface="Aptos Display" pitchFamily="34" charset="-120"/>
               </a:rPr>
-              <a:t>Risks, Failure Modes, and Guardrails</a:t>
+              <a:t>Technical Deep Dive</a:t>
             </a:r>
             <a:endParaRPr lang="en-US" sz="2700" dirty="0"/>
           </a:p>
@@ -3028,32 +3305,178 @@
       </p:sp>
       <p:sp>
         <p:nvSpPr>
-          <p:cNvPr id="7" name="Text 5"/>
-          <p:cNvSpPr/>
-          <p:nvPr/>
-        </p:nvSpPr>
-        <p:spPr>
-          <a:xfrm>
-            <a:off x="822960" y="1325880"/>
-            <a:ext cx="10378440" cy="4800600"/>
-          </a:xfrm>
-          <a:prstGeom prst="rect">
-            <a:avLst/>
-          </a:prstGeom>
-          <a:noFill/>
-          <a:ln/>
-        </p:spPr>
-        <p:txBody>
-          <a:bodyPr wrap="square" lIns="1016" tIns="1016" rIns="1016" bIns="1016" rtlCol="0" anchor="t">
+          <p:cNvPr id="10" name="Text 8"/>
+          <p:cNvSpPr/>
+          <p:nvPr/>
+        </p:nvSpPr>
+        <p:spPr>
+          <a:xfrm>
+            <a:off x="868680" y="1417320"/>
+            <a:ext cx="6675120" cy="4434840"/>
+          </a:xfrm>
+          <a:prstGeom prst="rect">
+            <a:avLst/>
+          </a:prstGeom>
+          <a:noFill/>
+          <a:ln/>
+        </p:spPr>
+        <p:txBody>
+          <a:bodyPr wrap="square" lIns="635" tIns="635" rIns="635" bIns="635" rtlCol="0" anchor="t">
             <a:normAutofit/>
           </a:bodyPr>
           <a:lstStyle/>
           <a:p>
+            <a:r>
+              <a:rPr lang="en-US" sz="1700" dirty="0">
+                <a:solidFill>
+                  <a:srgbClr val="17364A"/>
+                </a:solidFill>
+                <a:latin typeface="Aptos" pitchFamily="34" charset="0"/>
+                <a:ea typeface="Aptos" pitchFamily="34" charset="-122"/>
+                <a:cs typeface="Aptos" pitchFamily="34" charset="-120"/>
+              </a:rPr>
+              <a:t>Machine learning development typically begins with a defined prediction or classification task.</a:t>
+            </a:r>
+            <a:endParaRPr lang="en-US" sz="1700" dirty="0"/>
+          </a:p>
+          <a:p>
+            <a:r>
+              <a:rPr lang="en-US" sz="1700" dirty="0">
+                <a:solidFill>
+                  <a:srgbClr val="17364A"/>
+                </a:solidFill>
+                <a:latin typeface="Aptos" pitchFamily="34" charset="0"/>
+                <a:ea typeface="Aptos" pitchFamily="34" charset="-122"/>
+                <a:cs typeface="Aptos" pitchFamily="34" charset="-120"/>
+              </a:rPr>
+              <a:t>The task should be specific enough to test. “Use AI to improve surveillance” is too vague. “Classify incoming reports into.</a:t>
+            </a:r>
+            <a:endParaRPr lang="en-US" sz="1700" dirty="0"/>
+          </a:p>
+          <a:p>
+            <a:r>
+              <a:rPr lang="en-US" sz="1700" dirty="0">
+                <a:solidFill>
+                  <a:srgbClr val="17364A"/>
+                </a:solidFill>
+                <a:latin typeface="Aptos" pitchFamily="34" charset="0"/>
+                <a:ea typeface="Aptos" pitchFamily="34" charset="-122"/>
+                <a:cs typeface="Aptos" pitchFamily="34" charset="-120"/>
+              </a:rPr>
+              <a:t>A clear task allows staff to define the target label, required features, acceptance criteria, and human review process.</a:t>
+            </a:r>
+            <a:endParaRPr lang="en-US" sz="1700" dirty="0"/>
+          </a:p>
+          <a:p>
+            <a:r>
+              <a:rPr lang="en-US" sz="1700" dirty="0">
+                <a:solidFill>
+                  <a:srgbClr val="17364A"/>
+                </a:solidFill>
+                <a:latin typeface="Aptos" pitchFamily="34" charset="0"/>
+                <a:ea typeface="Aptos" pitchFamily="34" charset="-122"/>
+                <a:cs typeface="Aptos" pitchFamily="34" charset="-120"/>
+              </a:rPr>
+              <a:t>Data preparation is often the most important and time-consuming step.</a:t>
+            </a:r>
+            <a:endParaRPr lang="en-US" sz="1700" dirty="0"/>
+          </a:p>
+        </p:txBody>
+      </p:sp>
+      <p:sp>
+        <p:nvSpPr>
+          <p:cNvPr id="11" name="Shape 9"/>
+          <p:cNvSpPr/>
+          <p:nvPr/>
+        </p:nvSpPr>
+        <p:spPr>
+          <a:xfrm>
+            <a:off x="7909560" y="1417320"/>
+            <a:ext cx="3154680" cy="1828800"/>
+          </a:xfrm>
+          <a:prstGeom prst="roundRect">
+            <a:avLst>
+              <a:gd name="adj" fmla="val 6000"/>
+            </a:avLst>
+          </a:prstGeom>
+          <a:solidFill>
+            <a:srgbClr val="EEF8ED"/>
+          </a:solidFill>
+          <a:ln w="12700">
+            <a:solidFill>
+              <a:srgbClr val="B9D7E6"/>
+            </a:solidFill>
+            <a:prstDash val="solid"/>
+          </a:ln>
+        </p:spPr>
+      </p:sp>
+      <p:sp>
+        <p:nvSpPr>
+          <p:cNvPr id="12" name="Text 10"/>
+          <p:cNvSpPr/>
+          <p:nvPr/>
+        </p:nvSpPr>
+        <p:spPr>
+          <a:xfrm>
+            <a:off x="8074152" y="1563624"/>
+            <a:ext cx="2825496" cy="201168"/>
+          </a:xfrm>
+          <a:prstGeom prst="rect">
+            <a:avLst/>
+          </a:prstGeom>
+          <a:noFill/>
+          <a:ln/>
+        </p:spPr>
+        <p:txBody>
+          <a:bodyPr wrap="square" lIns="0" tIns="0" rIns="0" bIns="0" rtlCol="0" anchor="ctr"/>
+          <a:lstStyle/>
+          <a:p>
             <a:pPr indent="0" marL="0">
               <a:buNone/>
             </a:pPr>
             <a:r>
-              <a:rPr lang="en-US" sz="1420" dirty="0">
+              <a:rPr lang="en-US" sz="950" b="1" dirty="0">
+                <a:solidFill>
+                  <a:srgbClr val="0068B7"/>
+                </a:solidFill>
+                <a:latin typeface="Aptos" pitchFamily="34" charset="0"/>
+                <a:ea typeface="Aptos" pitchFamily="34" charset="-122"/>
+                <a:cs typeface="Aptos" pitchFamily="34" charset="-120"/>
+              </a:rPr>
+              <a:t>Key idea</a:t>
+            </a:r>
+            <a:endParaRPr lang="en-US" sz="950" dirty="0"/>
+          </a:p>
+        </p:txBody>
+      </p:sp>
+      <p:sp>
+        <p:nvSpPr>
+          <p:cNvPr id="13" name="Text 11"/>
+          <p:cNvSpPr/>
+          <p:nvPr/>
+        </p:nvSpPr>
+        <p:spPr>
+          <a:xfrm>
+            <a:off x="8074152" y="1856232"/>
+            <a:ext cx="2825496" cy="1261872"/>
+          </a:xfrm>
+          <a:prstGeom prst="rect">
+            <a:avLst/>
+          </a:prstGeom>
+          <a:noFill/>
+          <a:ln/>
+        </p:spPr>
+        <p:txBody>
+          <a:bodyPr wrap="square" lIns="0" tIns="0" rIns="0" bIns="0" rtlCol="0" anchor="t">
+            <a:normAutofit/>
+          </a:bodyPr>
+          <a:lstStyle/>
+          <a:p>
+            <a:pPr indent="0" marL="0">
+              <a:buNone/>
+            </a:pPr>
+            <a:r>
+              <a:rPr lang="en-US" sz="1250" dirty="0">
                 <a:solidFill>
                   <a:srgbClr val="17364A"/>
                 </a:solidFill>
@@ -3061,9 +3484,116 @@
                 <a:ea typeface="Aptos" pitchFamily="34" charset="-122"/>
                 <a:cs typeface="Aptos" pitchFamily="34" charset="-120"/>
               </a:rPr>
-              <a:t>Biased or inconsistent labels. If historical labels reflect unequal detection, inconsistent review, or limited resources, the model may reproduce those patterns. Guardrails include label audits, expert review, subgroup analysis, and documentation of label limitations. Data leakage. Data leakage occurs when information that would not be available at the time of decision is used during training. Guardrails include temporal validation, careful feature review, and independent testing. Overfitting and poor generalization. A model may perform well on development data but poorly in a new jurisdiction, time period, or population. Guardrails include held-out testing, external validation, drift monitoring, and conservative deployment.</a:t>
-            </a:r>
-            <a:endParaRPr lang="en-US" sz="1420" dirty="0"/>
+              <a:t>Machine learning development typically begins with a defined prediction or classification task.</a:t>
+            </a:r>
+            <a:endParaRPr lang="en-US" sz="1250" dirty="0"/>
+          </a:p>
+        </p:txBody>
+      </p:sp>
+      <p:sp>
+        <p:nvSpPr>
+          <p:cNvPr id="14" name="Shape 12"/>
+          <p:cNvSpPr/>
+          <p:nvPr/>
+        </p:nvSpPr>
+        <p:spPr>
+          <a:xfrm>
+            <a:off x="7909560" y="3520440"/>
+            <a:ext cx="3154680" cy="1737360"/>
+          </a:xfrm>
+          <a:prstGeom prst="roundRect">
+            <a:avLst>
+              <a:gd name="adj" fmla="val 6316"/>
+            </a:avLst>
+          </a:prstGeom>
+          <a:solidFill>
+            <a:srgbClr val="EAF6F8"/>
+          </a:solidFill>
+          <a:ln w="12700">
+            <a:solidFill>
+              <a:srgbClr val="B9D7E6"/>
+            </a:solidFill>
+            <a:prstDash val="solid"/>
+          </a:ln>
+        </p:spPr>
+      </p:sp>
+      <p:sp>
+        <p:nvSpPr>
+          <p:cNvPr id="15" name="Text 13"/>
+          <p:cNvSpPr/>
+          <p:nvPr/>
+        </p:nvSpPr>
+        <p:spPr>
+          <a:xfrm>
+            <a:off x="8074152" y="3666744"/>
+            <a:ext cx="2825496" cy="201168"/>
+          </a:xfrm>
+          <a:prstGeom prst="rect">
+            <a:avLst/>
+          </a:prstGeom>
+          <a:noFill/>
+          <a:ln/>
+        </p:spPr>
+        <p:txBody>
+          <a:bodyPr wrap="square" lIns="0" tIns="0" rIns="0" bIns="0" rtlCol="0" anchor="ctr"/>
+          <a:lstStyle/>
+          <a:p>
+            <a:pPr indent="0" marL="0">
+              <a:buNone/>
+            </a:pPr>
+            <a:r>
+              <a:rPr lang="en-US" sz="950" b="1" dirty="0">
+                <a:solidFill>
+                  <a:srgbClr val="0068B7"/>
+                </a:solidFill>
+                <a:latin typeface="Aptos" pitchFamily="34" charset="0"/>
+                <a:ea typeface="Aptos" pitchFamily="34" charset="-122"/>
+                <a:cs typeface="Aptos" pitchFamily="34" charset="-120"/>
+              </a:rPr>
+              <a:t>Use this for</a:t>
+            </a:r>
+            <a:endParaRPr lang="en-US" sz="950" dirty="0"/>
+          </a:p>
+        </p:txBody>
+      </p:sp>
+      <p:sp>
+        <p:nvSpPr>
+          <p:cNvPr id="16" name="Text 14"/>
+          <p:cNvSpPr/>
+          <p:nvPr/>
+        </p:nvSpPr>
+        <p:spPr>
+          <a:xfrm>
+            <a:off x="8074152" y="3959352"/>
+            <a:ext cx="2825496" cy="1170432"/>
+          </a:xfrm>
+          <a:prstGeom prst="rect">
+            <a:avLst/>
+          </a:prstGeom>
+          <a:noFill/>
+          <a:ln/>
+        </p:spPr>
+        <p:txBody>
+          <a:bodyPr wrap="square" lIns="0" tIns="0" rIns="0" bIns="0" rtlCol="0" anchor="t">
+            <a:normAutofit/>
+          </a:bodyPr>
+          <a:lstStyle/>
+          <a:p>
+            <a:pPr indent="0" marL="0">
+              <a:buNone/>
+            </a:pPr>
+            <a:r>
+              <a:rPr lang="en-US" sz="1250" dirty="0">
+                <a:solidFill>
+                  <a:srgbClr val="17364A"/>
+                </a:solidFill>
+                <a:latin typeface="Aptos" pitchFamily="34" charset="0"/>
+                <a:ea typeface="Aptos" pitchFamily="34" charset="-122"/>
+                <a:cs typeface="Aptos" pitchFamily="34" charset="-120"/>
+              </a:rPr>
+              <a:t>Connect the concept to public health decisions, safeguards, documentation, or implementation work.</a:t>
+            </a:r>
+            <a:endParaRPr lang="en-US" sz="1250" dirty="0"/>
           </a:p>
         </p:txBody>
       </p:sp>
@@ -3126,7 +3656,32 @@
       </p:sp>
       <p:sp>
         <p:nvSpPr>
-          <p:cNvPr id="3" name="Text 1"/>
+          <p:cNvPr id="3" name="Shape 1"/>
+          <p:cNvSpPr/>
+          <p:nvPr/>
+        </p:nvSpPr>
+        <p:spPr>
+          <a:xfrm>
+            <a:off x="0" y="164592"/>
+            <a:ext cx="146304" cy="6693408"/>
+          </a:xfrm>
+          <a:prstGeom prst="rect">
+            <a:avLst/>
+          </a:prstGeom>
+          <a:solidFill>
+            <a:srgbClr val="2F8A28"/>
+          </a:solidFill>
+          <a:ln w="12700">
+            <a:solidFill>
+              <a:srgbClr val="2F8A28"/>
+            </a:solidFill>
+            <a:prstDash val="solid"/>
+          </a:ln>
+        </p:spPr>
+      </p:sp>
+      <p:sp>
+        <p:nvSpPr>
+          <p:cNvPr id="4" name="Text 2"/>
           <p:cNvSpPr/>
           <p:nvPr/>
         </p:nvSpPr>
@@ -3165,7 +3720,7 @@
       </p:sp>
       <p:sp>
         <p:nvSpPr>
-          <p:cNvPr id="4" name="Text 2"/>
+          <p:cNvPr id="5" name="Text 3"/>
           <p:cNvSpPr/>
           <p:nvPr/>
         </p:nvSpPr>
@@ -3204,7 +3759,7 @@
       </p:sp>
       <p:sp>
         <p:nvSpPr>
-          <p:cNvPr id="5" name="Text 3"/>
+          <p:cNvPr id="6" name="Text 4"/>
           <p:cNvSpPr/>
           <p:nvPr/>
         </p:nvSpPr>
@@ -3243,7 +3798,7 @@
       </p:sp>
       <p:sp>
         <p:nvSpPr>
-          <p:cNvPr id="6" name="Text 4"/>
+          <p:cNvPr id="7" name="Text 5"/>
           <p:cNvSpPr/>
           <p:nvPr/>
         </p:nvSpPr>
@@ -3276,7 +3831,7 @@
                 <a:ea typeface="Aptos Display" pitchFamily="34" charset="-122"/>
                 <a:cs typeface="Aptos Display" pitchFamily="34" charset="-120"/>
               </a:rPr>
-              <a:t>Risks, Failure Modes, and Guardrails Continued</a:t>
+              <a:t>Technical Deep Dive Continued</a:t>
             </a:r>
             <a:endParaRPr lang="en-US" sz="2700" dirty="0"/>
           </a:p>
@@ -3284,32 +3839,178 @@
       </p:sp>
       <p:sp>
         <p:nvSpPr>
-          <p:cNvPr id="7" name="Text 5"/>
-          <p:cNvSpPr/>
-          <p:nvPr/>
-        </p:nvSpPr>
-        <p:spPr>
-          <a:xfrm>
-            <a:off x="822960" y="1325880"/>
-            <a:ext cx="10378440" cy="4800600"/>
-          </a:xfrm>
-          <a:prstGeom prst="rect">
-            <a:avLst/>
-          </a:prstGeom>
-          <a:noFill/>
-          <a:ln/>
-        </p:spPr>
-        <p:txBody>
-          <a:bodyPr wrap="square" lIns="1016" tIns="1016" rIns="1016" bIns="1016" rtlCol="0" anchor="t">
+          <p:cNvPr id="8" name="Text 6"/>
+          <p:cNvSpPr/>
+          <p:nvPr/>
+        </p:nvSpPr>
+        <p:spPr>
+          <a:xfrm>
+            <a:off x="868680" y="1417320"/>
+            <a:ext cx="6675120" cy="4434840"/>
+          </a:xfrm>
+          <a:prstGeom prst="rect">
+            <a:avLst/>
+          </a:prstGeom>
+          <a:noFill/>
+          <a:ln/>
+        </p:spPr>
+        <p:txBody>
+          <a:bodyPr wrap="square" lIns="635" tIns="635" rIns="635" bIns="635" rtlCol="0" anchor="t">
             <a:normAutofit/>
           </a:bodyPr>
           <a:lstStyle/>
           <a:p>
+            <a:r>
+              <a:rPr lang="en-US" sz="1700" dirty="0">
+                <a:solidFill>
+                  <a:srgbClr val="17364A"/>
+                </a:solidFill>
+                <a:latin typeface="Aptos" pitchFamily="34" charset="0"/>
+                <a:ea typeface="Aptos" pitchFamily="34" charset="-122"/>
+                <a:cs typeface="Aptos" pitchFamily="34" charset="-120"/>
+              </a:rPr>
+              <a:t>Model performance should be interpreted in relation to the workflow.</a:t>
+            </a:r>
+            <a:endParaRPr lang="en-US" sz="1700" dirty="0"/>
+          </a:p>
+          <a:p>
+            <a:r>
+              <a:rPr lang="en-US" sz="1700" dirty="0">
+                <a:solidFill>
+                  <a:srgbClr val="17364A"/>
+                </a:solidFill>
+                <a:latin typeface="Aptos" pitchFamily="34" charset="0"/>
+                <a:ea typeface="Aptos" pitchFamily="34" charset="-122"/>
+                <a:cs typeface="Aptos" pitchFamily="34" charset="-120"/>
+              </a:rPr>
+              <a:t>A model with high overall accuracy may still miss rare but important events.</a:t>
+            </a:r>
+            <a:endParaRPr lang="en-US" sz="1700" dirty="0"/>
+          </a:p>
+          <a:p>
+            <a:r>
+              <a:rPr lang="en-US" sz="1700" dirty="0">
+                <a:solidFill>
+                  <a:srgbClr val="17364A"/>
+                </a:solidFill>
+                <a:latin typeface="Aptos" pitchFamily="34" charset="0"/>
+                <a:ea typeface="Aptos" pitchFamily="34" charset="-122"/>
+                <a:cs typeface="Aptos" pitchFamily="34" charset="-120"/>
+              </a:rPr>
+              <a:t>A model with many false positives may burden staff and create alert fatigue.</a:t>
+            </a:r>
+            <a:endParaRPr lang="en-US" sz="1700" dirty="0"/>
+          </a:p>
+          <a:p>
+            <a:r>
+              <a:rPr lang="en-US" sz="1700" dirty="0">
+                <a:solidFill>
+                  <a:srgbClr val="17364A"/>
+                </a:solidFill>
+                <a:latin typeface="Aptos" pitchFamily="34" charset="0"/>
+                <a:ea typeface="Aptos" pitchFamily="34" charset="-122"/>
+                <a:cs typeface="Aptos" pitchFamily="34" charset="-120"/>
+              </a:rPr>
+              <a:t>A model with many false negatives may miss cases, outbreaks, or communities needing support.</a:t>
+            </a:r>
+            <a:endParaRPr lang="en-US" sz="1700" dirty="0"/>
+          </a:p>
+        </p:txBody>
+      </p:sp>
+      <p:sp>
+        <p:nvSpPr>
+          <p:cNvPr id="9" name="Shape 7"/>
+          <p:cNvSpPr/>
+          <p:nvPr/>
+        </p:nvSpPr>
+        <p:spPr>
+          <a:xfrm>
+            <a:off x="7909560" y="1417320"/>
+            <a:ext cx="3154680" cy="1828800"/>
+          </a:xfrm>
+          <a:prstGeom prst="roundRect">
+            <a:avLst>
+              <a:gd name="adj" fmla="val 6000"/>
+            </a:avLst>
+          </a:prstGeom>
+          <a:solidFill>
+            <a:srgbClr val="EEF8ED"/>
+          </a:solidFill>
+          <a:ln w="12700">
+            <a:solidFill>
+              <a:srgbClr val="B9D7E6"/>
+            </a:solidFill>
+            <a:prstDash val="solid"/>
+          </a:ln>
+        </p:spPr>
+      </p:sp>
+      <p:sp>
+        <p:nvSpPr>
+          <p:cNvPr id="10" name="Text 8"/>
+          <p:cNvSpPr/>
+          <p:nvPr/>
+        </p:nvSpPr>
+        <p:spPr>
+          <a:xfrm>
+            <a:off x="8074152" y="1563624"/>
+            <a:ext cx="2825496" cy="201168"/>
+          </a:xfrm>
+          <a:prstGeom prst="rect">
+            <a:avLst/>
+          </a:prstGeom>
+          <a:noFill/>
+          <a:ln/>
+        </p:spPr>
+        <p:txBody>
+          <a:bodyPr wrap="square" lIns="0" tIns="0" rIns="0" bIns="0" rtlCol="0" anchor="ctr"/>
+          <a:lstStyle/>
+          <a:p>
             <a:pPr indent="0" marL="0">
               <a:buNone/>
             </a:pPr>
             <a:r>
-              <a:rPr lang="en-US" sz="1420" dirty="0">
+              <a:rPr lang="en-US" sz="950" b="1" dirty="0">
+                <a:solidFill>
+                  <a:srgbClr val="0068B7"/>
+                </a:solidFill>
+                <a:latin typeface="Aptos" pitchFamily="34" charset="0"/>
+                <a:ea typeface="Aptos" pitchFamily="34" charset="-122"/>
+                <a:cs typeface="Aptos" pitchFamily="34" charset="-120"/>
+              </a:rPr>
+              <a:t>Key idea</a:t>
+            </a:r>
+            <a:endParaRPr lang="en-US" sz="950" dirty="0"/>
+          </a:p>
+        </p:txBody>
+      </p:sp>
+      <p:sp>
+        <p:nvSpPr>
+          <p:cNvPr id="11" name="Text 9"/>
+          <p:cNvSpPr/>
+          <p:nvPr/>
+        </p:nvSpPr>
+        <p:spPr>
+          <a:xfrm>
+            <a:off x="8074152" y="1856232"/>
+            <a:ext cx="2825496" cy="1261872"/>
+          </a:xfrm>
+          <a:prstGeom prst="rect">
+            <a:avLst/>
+          </a:prstGeom>
+          <a:noFill/>
+          <a:ln/>
+        </p:spPr>
+        <p:txBody>
+          <a:bodyPr wrap="square" lIns="0" tIns="0" rIns="0" bIns="0" rtlCol="0" anchor="t">
+            <a:normAutofit/>
+          </a:bodyPr>
+          <a:lstStyle/>
+          <a:p>
+            <a:pPr indent="0" marL="0">
+              <a:buNone/>
+            </a:pPr>
+            <a:r>
+              <a:rPr lang="en-US" sz="1250" dirty="0">
                 <a:solidFill>
                   <a:srgbClr val="17364A"/>
                 </a:solidFill>
@@ -3317,9 +4018,116 @@
                 <a:ea typeface="Aptos" pitchFamily="34" charset="-122"/>
                 <a:cs typeface="Aptos" pitchFamily="34" charset="-120"/>
               </a:rPr>
-              <a:t>Misuse of prediction as explanation. A model can predict risk without explaining cause. Guardrails include clear communication, training, and restrictions against causal claims unless supported by appropriate study design.</a:t>
-            </a:r>
-            <a:endParaRPr lang="en-US" sz="1420" dirty="0"/>
+              <a:t>Model performance should be interpreted in relation to the workflow.</a:t>
+            </a:r>
+            <a:endParaRPr lang="en-US" sz="1250" dirty="0"/>
+          </a:p>
+        </p:txBody>
+      </p:sp>
+      <p:sp>
+        <p:nvSpPr>
+          <p:cNvPr id="12" name="Shape 10"/>
+          <p:cNvSpPr/>
+          <p:nvPr/>
+        </p:nvSpPr>
+        <p:spPr>
+          <a:xfrm>
+            <a:off x="7909560" y="3520440"/>
+            <a:ext cx="3154680" cy="1737360"/>
+          </a:xfrm>
+          <a:prstGeom prst="roundRect">
+            <a:avLst>
+              <a:gd name="adj" fmla="val 6316"/>
+            </a:avLst>
+          </a:prstGeom>
+          <a:solidFill>
+            <a:srgbClr val="EAF6F8"/>
+          </a:solidFill>
+          <a:ln w="12700">
+            <a:solidFill>
+              <a:srgbClr val="B9D7E6"/>
+            </a:solidFill>
+            <a:prstDash val="solid"/>
+          </a:ln>
+        </p:spPr>
+      </p:sp>
+      <p:sp>
+        <p:nvSpPr>
+          <p:cNvPr id="13" name="Text 11"/>
+          <p:cNvSpPr/>
+          <p:nvPr/>
+        </p:nvSpPr>
+        <p:spPr>
+          <a:xfrm>
+            <a:off x="8074152" y="3666744"/>
+            <a:ext cx="2825496" cy="201168"/>
+          </a:xfrm>
+          <a:prstGeom prst="rect">
+            <a:avLst/>
+          </a:prstGeom>
+          <a:noFill/>
+          <a:ln/>
+        </p:spPr>
+        <p:txBody>
+          <a:bodyPr wrap="square" lIns="0" tIns="0" rIns="0" bIns="0" rtlCol="0" anchor="ctr"/>
+          <a:lstStyle/>
+          <a:p>
+            <a:pPr indent="0" marL="0">
+              <a:buNone/>
+            </a:pPr>
+            <a:r>
+              <a:rPr lang="en-US" sz="950" b="1" dirty="0">
+                <a:solidFill>
+                  <a:srgbClr val="0068B7"/>
+                </a:solidFill>
+                <a:latin typeface="Aptos" pitchFamily="34" charset="0"/>
+                <a:ea typeface="Aptos" pitchFamily="34" charset="-122"/>
+                <a:cs typeface="Aptos" pitchFamily="34" charset="-120"/>
+              </a:rPr>
+              <a:t>Use this for</a:t>
+            </a:r>
+            <a:endParaRPr lang="en-US" sz="950" dirty="0"/>
+          </a:p>
+        </p:txBody>
+      </p:sp>
+      <p:sp>
+        <p:nvSpPr>
+          <p:cNvPr id="14" name="Text 12"/>
+          <p:cNvSpPr/>
+          <p:nvPr/>
+        </p:nvSpPr>
+        <p:spPr>
+          <a:xfrm>
+            <a:off x="8074152" y="3959352"/>
+            <a:ext cx="2825496" cy="1170432"/>
+          </a:xfrm>
+          <a:prstGeom prst="rect">
+            <a:avLst/>
+          </a:prstGeom>
+          <a:noFill/>
+          <a:ln/>
+        </p:spPr>
+        <p:txBody>
+          <a:bodyPr wrap="square" lIns="0" tIns="0" rIns="0" bIns="0" rtlCol="0" anchor="t">
+            <a:normAutofit/>
+          </a:bodyPr>
+          <a:lstStyle/>
+          <a:p>
+            <a:pPr indent="0" marL="0">
+              <a:buNone/>
+            </a:pPr>
+            <a:r>
+              <a:rPr lang="en-US" sz="1250" dirty="0">
+                <a:solidFill>
+                  <a:srgbClr val="17364A"/>
+                </a:solidFill>
+                <a:latin typeface="Aptos" pitchFamily="34" charset="0"/>
+                <a:ea typeface="Aptos" pitchFamily="34" charset="-122"/>
+                <a:cs typeface="Aptos" pitchFamily="34" charset="-120"/>
+              </a:rPr>
+              <a:t>Connect the concept to public health decisions, safeguards, documentation, or implementation work.</a:t>
+            </a:r>
+            <a:endParaRPr lang="en-US" sz="1250" dirty="0"/>
           </a:p>
         </p:txBody>
       </p:sp>
@@ -3382,7 +4190,32 @@
       </p:sp>
       <p:sp>
         <p:nvSpPr>
-          <p:cNvPr id="3" name="Text 1"/>
+          <p:cNvPr id="3" name="Shape 1"/>
+          <p:cNvSpPr/>
+          <p:nvPr/>
+        </p:nvSpPr>
+        <p:spPr>
+          <a:xfrm>
+            <a:off x="0" y="164592"/>
+            <a:ext cx="146304" cy="6693408"/>
+          </a:xfrm>
+          <a:prstGeom prst="rect">
+            <a:avLst/>
+          </a:prstGeom>
+          <a:solidFill>
+            <a:srgbClr val="2F8A28"/>
+          </a:solidFill>
+          <a:ln w="12700">
+            <a:solidFill>
+              <a:srgbClr val="2F8A28"/>
+            </a:solidFill>
+            <a:prstDash val="solid"/>
+          </a:ln>
+        </p:spPr>
+      </p:sp>
+      <p:sp>
+        <p:nvSpPr>
+          <p:cNvPr id="4" name="Text 2"/>
           <p:cNvSpPr/>
           <p:nvPr/>
         </p:nvSpPr>
@@ -3421,7 +4254,7 @@
       </p:sp>
       <p:sp>
         <p:nvSpPr>
-          <p:cNvPr id="4" name="Text 2"/>
+          <p:cNvPr id="5" name="Text 3"/>
           <p:cNvSpPr/>
           <p:nvPr/>
         </p:nvSpPr>
@@ -3460,7 +4293,7 @@
       </p:sp>
       <p:sp>
         <p:nvSpPr>
-          <p:cNvPr id="5" name="Text 3"/>
+          <p:cNvPr id="6" name="Text 4"/>
           <p:cNvSpPr/>
           <p:nvPr/>
         </p:nvSpPr>
@@ -3499,13 +4332,77 @@
       </p:sp>
       <p:sp>
         <p:nvSpPr>
-          <p:cNvPr id="6" name="Text 4"/>
+          <p:cNvPr id="7" name="Shape 5"/>
           <p:cNvSpPr/>
           <p:nvPr/>
         </p:nvSpPr>
         <p:spPr>
           <a:xfrm>
             <a:off x="640080" y="658368"/>
+            <a:ext cx="420624" cy="420624"/>
+          </a:xfrm>
+          <a:prstGeom prst="ellipse">
+            <a:avLst/>
+          </a:prstGeom>
+          <a:solidFill>
+            <a:srgbClr val="0068B7"/>
+          </a:solidFill>
+          <a:ln w="12700">
+            <a:solidFill>
+              <a:srgbClr val="0068B7"/>
+            </a:solidFill>
+            <a:prstDash val="solid"/>
+          </a:ln>
+        </p:spPr>
+      </p:sp>
+      <p:sp>
+        <p:nvSpPr>
+          <p:cNvPr id="8" name="Text 6"/>
+          <p:cNvSpPr/>
+          <p:nvPr/>
+        </p:nvSpPr>
+        <p:spPr>
+          <a:xfrm>
+            <a:off x="640080" y="731520"/>
+            <a:ext cx="420624" cy="164592"/>
+          </a:xfrm>
+          <a:prstGeom prst="rect">
+            <a:avLst/>
+          </a:prstGeom>
+          <a:noFill/>
+          <a:ln/>
+        </p:spPr>
+        <p:txBody>
+          <a:bodyPr wrap="square" lIns="0" tIns="0" rIns="0" bIns="0" rtlCol="0" anchor="ctr"/>
+          <a:lstStyle/>
+          <a:p>
+            <a:pPr algn="ctr" indent="0" marL="0">
+              <a:buNone/>
+            </a:pPr>
+            <a:r>
+              <a:rPr lang="en-US" sz="1100" b="1" dirty="0">
+                <a:solidFill>
+                  <a:srgbClr val="FFFFFF"/>
+                </a:solidFill>
+                <a:latin typeface="Aptos" pitchFamily="34" charset="0"/>
+                <a:ea typeface="Aptos" pitchFamily="34" charset="-122"/>
+                <a:cs typeface="Aptos" pitchFamily="34" charset="-120"/>
+              </a:rPr>
+              <a:t>6</a:t>
+            </a:r>
+            <a:endParaRPr lang="en-US" sz="1100" dirty="0"/>
+          </a:p>
+        </p:txBody>
+      </p:sp>
+      <p:sp>
+        <p:nvSpPr>
+          <p:cNvPr id="9" name="Text 7"/>
+          <p:cNvSpPr/>
+          <p:nvPr/>
+        </p:nvSpPr>
+        <p:spPr>
+          <a:xfrm>
+            <a:off x="640080" y="621792"/>
             <a:ext cx="10881360" cy="566928"/>
           </a:xfrm>
           <a:prstGeom prst="rect">
@@ -3532,7 +4429,7 @@
                 <a:ea typeface="Aptos Display" pitchFamily="34" charset="-122"/>
                 <a:cs typeface="Aptos Display" pitchFamily="34" charset="-120"/>
               </a:rPr>
-              <a:t>Application to AI-Supported Workflows</a:t>
+              <a:t>Risks, Failure Modes, and Guardrails</a:t>
             </a:r>
             <a:endParaRPr lang="en-US" sz="2700" dirty="0"/>
           </a:p>
@@ -3540,32 +4437,178 @@
       </p:sp>
       <p:sp>
         <p:nvSpPr>
-          <p:cNvPr id="7" name="Text 5"/>
-          <p:cNvSpPr/>
-          <p:nvPr/>
-        </p:nvSpPr>
-        <p:spPr>
-          <a:xfrm>
-            <a:off x="822960" y="1325880"/>
-            <a:ext cx="10378440" cy="4800600"/>
-          </a:xfrm>
-          <a:prstGeom prst="rect">
-            <a:avLst/>
-          </a:prstGeom>
-          <a:noFill/>
-          <a:ln/>
-        </p:spPr>
-        <p:txBody>
-          <a:bodyPr wrap="square" lIns="1016" tIns="1016" rIns="1016" bIns="1016" rtlCol="0" anchor="t">
+          <p:cNvPr id="10" name="Text 8"/>
+          <p:cNvSpPr/>
+          <p:nvPr/>
+        </p:nvSpPr>
+        <p:spPr>
+          <a:xfrm>
+            <a:off x="868680" y="1417320"/>
+            <a:ext cx="6675120" cy="4434840"/>
+          </a:xfrm>
+          <a:prstGeom prst="rect">
+            <a:avLst/>
+          </a:prstGeom>
+          <a:noFill/>
+          <a:ln/>
+        </p:spPr>
+        <p:txBody>
+          <a:bodyPr wrap="square" lIns="635" tIns="635" rIns="635" bIns="635" rtlCol="0" anchor="t">
             <a:normAutofit/>
           </a:bodyPr>
           <a:lstStyle/>
           <a:p>
+            <a:r>
+              <a:rPr lang="en-US" sz="1700" dirty="0">
+                <a:solidFill>
+                  <a:srgbClr val="17364A"/>
+                </a:solidFill>
+                <a:latin typeface="Aptos" pitchFamily="34" charset="0"/>
+                <a:ea typeface="Aptos" pitchFamily="34" charset="-122"/>
+                <a:cs typeface="Aptos" pitchFamily="34" charset="-120"/>
+              </a:rPr>
+              <a:t>Biased or inconsistent labels.</a:t>
+            </a:r>
+            <a:endParaRPr lang="en-US" sz="1700" dirty="0"/>
+          </a:p>
+          <a:p>
+            <a:r>
+              <a:rPr lang="en-US" sz="1700" dirty="0">
+                <a:solidFill>
+                  <a:srgbClr val="17364A"/>
+                </a:solidFill>
+                <a:latin typeface="Aptos" pitchFamily="34" charset="0"/>
+                <a:ea typeface="Aptos" pitchFamily="34" charset="-122"/>
+                <a:cs typeface="Aptos" pitchFamily="34" charset="-120"/>
+              </a:rPr>
+              <a:t>If historical labels reflect unequal detection, inconsistent review, or limited resources, the model may reproduce those.</a:t>
+            </a:r>
+            <a:endParaRPr lang="en-US" sz="1700" dirty="0"/>
+          </a:p>
+          <a:p>
+            <a:r>
+              <a:rPr lang="en-US" sz="1700" dirty="0">
+                <a:solidFill>
+                  <a:srgbClr val="17364A"/>
+                </a:solidFill>
+                <a:latin typeface="Aptos" pitchFamily="34" charset="0"/>
+                <a:ea typeface="Aptos" pitchFamily="34" charset="-122"/>
+                <a:cs typeface="Aptos" pitchFamily="34" charset="-120"/>
+              </a:rPr>
+              <a:t>Guardrails include label audits, expert review, subgroup analysis, and documentation of label limitations.</a:t>
+            </a:r>
+            <a:endParaRPr lang="en-US" sz="1700" dirty="0"/>
+          </a:p>
+          <a:p>
+            <a:r>
+              <a:rPr lang="en-US" sz="1700" dirty="0">
+                <a:solidFill>
+                  <a:srgbClr val="17364A"/>
+                </a:solidFill>
+                <a:latin typeface="Aptos" pitchFamily="34" charset="0"/>
+                <a:ea typeface="Aptos" pitchFamily="34" charset="-122"/>
+                <a:cs typeface="Aptos" pitchFamily="34" charset="-120"/>
+              </a:rPr>
+              <a:t>Data leakage.</a:t>
+            </a:r>
+            <a:endParaRPr lang="en-US" sz="1700" dirty="0"/>
+          </a:p>
+        </p:txBody>
+      </p:sp>
+      <p:sp>
+        <p:nvSpPr>
+          <p:cNvPr id="11" name="Shape 9"/>
+          <p:cNvSpPr/>
+          <p:nvPr/>
+        </p:nvSpPr>
+        <p:spPr>
+          <a:xfrm>
+            <a:off x="7909560" y="1417320"/>
+            <a:ext cx="3154680" cy="1828800"/>
+          </a:xfrm>
+          <a:prstGeom prst="roundRect">
+            <a:avLst>
+              <a:gd name="adj" fmla="val 6000"/>
+            </a:avLst>
+          </a:prstGeom>
+          <a:solidFill>
+            <a:srgbClr val="EEF8ED"/>
+          </a:solidFill>
+          <a:ln w="12700">
+            <a:solidFill>
+              <a:srgbClr val="B9D7E6"/>
+            </a:solidFill>
+            <a:prstDash val="solid"/>
+          </a:ln>
+        </p:spPr>
+      </p:sp>
+      <p:sp>
+        <p:nvSpPr>
+          <p:cNvPr id="12" name="Text 10"/>
+          <p:cNvSpPr/>
+          <p:nvPr/>
+        </p:nvSpPr>
+        <p:spPr>
+          <a:xfrm>
+            <a:off x="8074152" y="1563624"/>
+            <a:ext cx="2825496" cy="201168"/>
+          </a:xfrm>
+          <a:prstGeom prst="rect">
+            <a:avLst/>
+          </a:prstGeom>
+          <a:noFill/>
+          <a:ln/>
+        </p:spPr>
+        <p:txBody>
+          <a:bodyPr wrap="square" lIns="0" tIns="0" rIns="0" bIns="0" rtlCol="0" anchor="ctr"/>
+          <a:lstStyle/>
+          <a:p>
             <a:pPr indent="0" marL="0">
               <a:buNone/>
             </a:pPr>
             <a:r>
-              <a:rPr lang="en-US" sz="1420" dirty="0">
+              <a:rPr lang="en-US" sz="950" b="1" dirty="0">
+                <a:solidFill>
+                  <a:srgbClr val="0068B7"/>
+                </a:solidFill>
+                <a:latin typeface="Aptos" pitchFamily="34" charset="0"/>
+                <a:ea typeface="Aptos" pitchFamily="34" charset="-122"/>
+                <a:cs typeface="Aptos" pitchFamily="34" charset="-120"/>
+              </a:rPr>
+              <a:t>Key idea</a:t>
+            </a:r>
+            <a:endParaRPr lang="en-US" sz="950" dirty="0"/>
+          </a:p>
+        </p:txBody>
+      </p:sp>
+      <p:sp>
+        <p:nvSpPr>
+          <p:cNvPr id="13" name="Text 11"/>
+          <p:cNvSpPr/>
+          <p:nvPr/>
+        </p:nvSpPr>
+        <p:spPr>
+          <a:xfrm>
+            <a:off x="8074152" y="1856232"/>
+            <a:ext cx="2825496" cy="1261872"/>
+          </a:xfrm>
+          <a:prstGeom prst="rect">
+            <a:avLst/>
+          </a:prstGeom>
+          <a:noFill/>
+          <a:ln/>
+        </p:spPr>
+        <p:txBody>
+          <a:bodyPr wrap="square" lIns="0" tIns="0" rIns="0" bIns="0" rtlCol="0" anchor="t">
+            <a:normAutofit/>
+          </a:bodyPr>
+          <a:lstStyle/>
+          <a:p>
+            <a:pPr indent="0" marL="0">
+              <a:buNone/>
+            </a:pPr>
+            <a:r>
+              <a:rPr lang="en-US" sz="1250" dirty="0">
                 <a:solidFill>
                   <a:srgbClr val="17364A"/>
                 </a:solidFill>
@@ -3573,9 +4616,116 @@
                 <a:ea typeface="Aptos" pitchFamily="34" charset="-122"/>
                 <a:cs typeface="Aptos" pitchFamily="34" charset="-120"/>
               </a:rPr>
-              <a:t>Machine learning may support generative AI, predictive analytics, NLP, anomaly detection, and agentic workflows. In generative AI systems, machine learning concepts help staff understand why outputs may be fluent but unreliable. In predictive workflows, machine learning literacy helps staff evaluate risk scores, thresholds, and subgroup performance. In agentic workflows, models may trigger actions, making validation, permissions, and human approval especially important. The practical application is disciplined use. Staff should define intended use, validate performance, document limitations, monitor drift, and ensure that human reviewers remain accountable for consequential public health actions. Machine learning should be treated as an analytic support method within a governed workflow.</a:t>
-            </a:r>
-            <a:endParaRPr lang="en-US" sz="1420" dirty="0"/>
+              <a:t>Biased or inconsistent labels.</a:t>
+            </a:r>
+            <a:endParaRPr lang="en-US" sz="1250" dirty="0"/>
+          </a:p>
+        </p:txBody>
+      </p:sp>
+      <p:sp>
+        <p:nvSpPr>
+          <p:cNvPr id="14" name="Shape 12"/>
+          <p:cNvSpPr/>
+          <p:nvPr/>
+        </p:nvSpPr>
+        <p:spPr>
+          <a:xfrm>
+            <a:off x="7909560" y="3520440"/>
+            <a:ext cx="3154680" cy="1737360"/>
+          </a:xfrm>
+          <a:prstGeom prst="roundRect">
+            <a:avLst>
+              <a:gd name="adj" fmla="val 6316"/>
+            </a:avLst>
+          </a:prstGeom>
+          <a:solidFill>
+            <a:srgbClr val="EAF6F8"/>
+          </a:solidFill>
+          <a:ln w="12700">
+            <a:solidFill>
+              <a:srgbClr val="B9D7E6"/>
+            </a:solidFill>
+            <a:prstDash val="solid"/>
+          </a:ln>
+        </p:spPr>
+      </p:sp>
+      <p:sp>
+        <p:nvSpPr>
+          <p:cNvPr id="15" name="Text 13"/>
+          <p:cNvSpPr/>
+          <p:nvPr/>
+        </p:nvSpPr>
+        <p:spPr>
+          <a:xfrm>
+            <a:off x="8074152" y="3666744"/>
+            <a:ext cx="2825496" cy="201168"/>
+          </a:xfrm>
+          <a:prstGeom prst="rect">
+            <a:avLst/>
+          </a:prstGeom>
+          <a:noFill/>
+          <a:ln/>
+        </p:spPr>
+        <p:txBody>
+          <a:bodyPr wrap="square" lIns="0" tIns="0" rIns="0" bIns="0" rtlCol="0" anchor="ctr"/>
+          <a:lstStyle/>
+          <a:p>
+            <a:pPr indent="0" marL="0">
+              <a:buNone/>
+            </a:pPr>
+            <a:r>
+              <a:rPr lang="en-US" sz="950" b="1" dirty="0">
+                <a:solidFill>
+                  <a:srgbClr val="0068B7"/>
+                </a:solidFill>
+                <a:latin typeface="Aptos" pitchFamily="34" charset="0"/>
+                <a:ea typeface="Aptos" pitchFamily="34" charset="-122"/>
+                <a:cs typeface="Aptos" pitchFamily="34" charset="-120"/>
+              </a:rPr>
+              <a:t>Use this for</a:t>
+            </a:r>
+            <a:endParaRPr lang="en-US" sz="950" dirty="0"/>
+          </a:p>
+        </p:txBody>
+      </p:sp>
+      <p:sp>
+        <p:nvSpPr>
+          <p:cNvPr id="16" name="Text 14"/>
+          <p:cNvSpPr/>
+          <p:nvPr/>
+        </p:nvSpPr>
+        <p:spPr>
+          <a:xfrm>
+            <a:off x="8074152" y="3959352"/>
+            <a:ext cx="2825496" cy="1170432"/>
+          </a:xfrm>
+          <a:prstGeom prst="rect">
+            <a:avLst/>
+          </a:prstGeom>
+          <a:noFill/>
+          <a:ln/>
+        </p:spPr>
+        <p:txBody>
+          <a:bodyPr wrap="square" lIns="0" tIns="0" rIns="0" bIns="0" rtlCol="0" anchor="t">
+            <a:normAutofit/>
+          </a:bodyPr>
+          <a:lstStyle/>
+          <a:p>
+            <a:pPr indent="0" marL="0">
+              <a:buNone/>
+            </a:pPr>
+            <a:r>
+              <a:rPr lang="en-US" sz="1250" dirty="0">
+                <a:solidFill>
+                  <a:srgbClr val="17364A"/>
+                </a:solidFill>
+                <a:latin typeface="Aptos" pitchFamily="34" charset="0"/>
+                <a:ea typeface="Aptos" pitchFamily="34" charset="-122"/>
+                <a:cs typeface="Aptos" pitchFamily="34" charset="-120"/>
+              </a:rPr>
+              <a:t>Connect the concept to public health decisions, safeguards, documentation, or implementation work.</a:t>
+            </a:r>
+            <a:endParaRPr lang="en-US" sz="1250" dirty="0"/>
           </a:p>
         </p:txBody>
       </p:sp>
@@ -3638,7 +4788,32 @@
       </p:sp>
       <p:sp>
         <p:nvSpPr>
-          <p:cNvPr id="3" name="Text 1"/>
+          <p:cNvPr id="3" name="Shape 1"/>
+          <p:cNvSpPr/>
+          <p:nvPr/>
+        </p:nvSpPr>
+        <p:spPr>
+          <a:xfrm>
+            <a:off x="0" y="164592"/>
+            <a:ext cx="146304" cy="6693408"/>
+          </a:xfrm>
+          <a:prstGeom prst="rect">
+            <a:avLst/>
+          </a:prstGeom>
+          <a:solidFill>
+            <a:srgbClr val="2F8A28"/>
+          </a:solidFill>
+          <a:ln w="12700">
+            <a:solidFill>
+              <a:srgbClr val="2F8A28"/>
+            </a:solidFill>
+            <a:prstDash val="solid"/>
+          </a:ln>
+        </p:spPr>
+      </p:sp>
+      <p:sp>
+        <p:nvSpPr>
+          <p:cNvPr id="4" name="Text 2"/>
           <p:cNvSpPr/>
           <p:nvPr/>
         </p:nvSpPr>
@@ -3677,7 +4852,7 @@
       </p:sp>
       <p:sp>
         <p:nvSpPr>
-          <p:cNvPr id="4" name="Text 2"/>
+          <p:cNvPr id="5" name="Text 3"/>
           <p:cNvSpPr/>
           <p:nvPr/>
         </p:nvSpPr>
@@ -3716,7 +4891,7 @@
       </p:sp>
       <p:sp>
         <p:nvSpPr>
-          <p:cNvPr id="5" name="Text 3"/>
+          <p:cNvPr id="6" name="Text 4"/>
           <p:cNvSpPr/>
           <p:nvPr/>
         </p:nvSpPr>
@@ -3755,7 +4930,7 @@
       </p:sp>
       <p:sp>
         <p:nvSpPr>
-          <p:cNvPr id="6" name="Text 4"/>
+          <p:cNvPr id="7" name="Text 5"/>
           <p:cNvSpPr/>
           <p:nvPr/>
         </p:nvSpPr>
@@ -3788,7 +4963,7 @@
                 <a:ea typeface="Aptos Display" pitchFamily="34" charset="-122"/>
                 <a:cs typeface="Aptos Display" pitchFamily="34" charset="-120"/>
               </a:rPr>
-              <a:t>Reflection Questions</a:t>
+              <a:t>Risks, Failure Modes, and Guardrails Continued</a:t>
             </a:r>
             <a:endParaRPr lang="en-US" sz="2700" dirty="0"/>
           </a:p>
@@ -3796,32 +4971,164 @@
       </p:sp>
       <p:sp>
         <p:nvSpPr>
-          <p:cNvPr id="7" name="Text 5"/>
-          <p:cNvSpPr/>
-          <p:nvPr/>
-        </p:nvSpPr>
-        <p:spPr>
-          <a:xfrm>
-            <a:off x="822960" y="1325880"/>
-            <a:ext cx="10378440" cy="4800600"/>
-          </a:xfrm>
-          <a:prstGeom prst="rect">
-            <a:avLst/>
-          </a:prstGeom>
-          <a:noFill/>
-          <a:ln/>
-        </p:spPr>
-        <p:txBody>
-          <a:bodyPr wrap="square" lIns="1016" tIns="1016" rIns="1016" bIns="1016" rtlCol="0" anchor="t">
+          <p:cNvPr id="8" name="Text 6"/>
+          <p:cNvSpPr/>
+          <p:nvPr/>
+        </p:nvSpPr>
+        <p:spPr>
+          <a:xfrm>
+            <a:off x="868680" y="1417320"/>
+            <a:ext cx="6675120" cy="4434840"/>
+          </a:xfrm>
+          <a:prstGeom prst="rect">
+            <a:avLst/>
+          </a:prstGeom>
+          <a:noFill/>
+          <a:ln/>
+        </p:spPr>
+        <p:txBody>
+          <a:bodyPr wrap="square" lIns="635" tIns="635" rIns="635" bIns="635" rtlCol="0" anchor="t">
             <a:normAutofit/>
           </a:bodyPr>
           <a:lstStyle/>
           <a:p>
+            <a:r>
+              <a:rPr lang="en-US" sz="1700" dirty="0">
+                <a:solidFill>
+                  <a:srgbClr val="17364A"/>
+                </a:solidFill>
+                <a:latin typeface="Aptos" pitchFamily="34" charset="0"/>
+                <a:ea typeface="Aptos" pitchFamily="34" charset="-122"/>
+                <a:cs typeface="Aptos" pitchFamily="34" charset="-120"/>
+              </a:rPr>
+              <a:t>Misuse of prediction as explanation.</a:t>
+            </a:r>
+            <a:endParaRPr lang="en-US" sz="1700" dirty="0"/>
+          </a:p>
+          <a:p>
+            <a:r>
+              <a:rPr lang="en-US" sz="1700" dirty="0">
+                <a:solidFill>
+                  <a:srgbClr val="17364A"/>
+                </a:solidFill>
+                <a:latin typeface="Aptos" pitchFamily="34" charset="0"/>
+                <a:ea typeface="Aptos" pitchFamily="34" charset="-122"/>
+                <a:cs typeface="Aptos" pitchFamily="34" charset="-120"/>
+              </a:rPr>
+              <a:t>A model can predict risk without explaining cause.</a:t>
+            </a:r>
+            <a:endParaRPr lang="en-US" sz="1700" dirty="0"/>
+          </a:p>
+          <a:p>
+            <a:r>
+              <a:rPr lang="en-US" sz="1700" dirty="0">
+                <a:solidFill>
+                  <a:srgbClr val="17364A"/>
+                </a:solidFill>
+                <a:latin typeface="Aptos" pitchFamily="34" charset="0"/>
+                <a:ea typeface="Aptos" pitchFamily="34" charset="-122"/>
+                <a:cs typeface="Aptos" pitchFamily="34" charset="-120"/>
+              </a:rPr>
+              <a:t>Guardrails include clear communication, training, and restrictions against causal claims unless supported by appropriate.</a:t>
+            </a:r>
+            <a:endParaRPr lang="en-US" sz="1700" dirty="0"/>
+          </a:p>
+        </p:txBody>
+      </p:sp>
+      <p:sp>
+        <p:nvSpPr>
+          <p:cNvPr id="9" name="Shape 7"/>
+          <p:cNvSpPr/>
+          <p:nvPr/>
+        </p:nvSpPr>
+        <p:spPr>
+          <a:xfrm>
+            <a:off x="7909560" y="1417320"/>
+            <a:ext cx="3154680" cy="1828800"/>
+          </a:xfrm>
+          <a:prstGeom prst="roundRect">
+            <a:avLst>
+              <a:gd name="adj" fmla="val 6000"/>
+            </a:avLst>
+          </a:prstGeom>
+          <a:solidFill>
+            <a:srgbClr val="EEF8ED"/>
+          </a:solidFill>
+          <a:ln w="12700">
+            <a:solidFill>
+              <a:srgbClr val="B9D7E6"/>
+            </a:solidFill>
+            <a:prstDash val="solid"/>
+          </a:ln>
+        </p:spPr>
+      </p:sp>
+      <p:sp>
+        <p:nvSpPr>
+          <p:cNvPr id="10" name="Text 8"/>
+          <p:cNvSpPr/>
+          <p:nvPr/>
+        </p:nvSpPr>
+        <p:spPr>
+          <a:xfrm>
+            <a:off x="8074152" y="1563624"/>
+            <a:ext cx="2825496" cy="201168"/>
+          </a:xfrm>
+          <a:prstGeom prst="rect">
+            <a:avLst/>
+          </a:prstGeom>
+          <a:noFill/>
+          <a:ln/>
+        </p:spPr>
+        <p:txBody>
+          <a:bodyPr wrap="square" lIns="0" tIns="0" rIns="0" bIns="0" rtlCol="0" anchor="ctr"/>
+          <a:lstStyle/>
+          <a:p>
             <a:pPr indent="0" marL="0">
               <a:buNone/>
             </a:pPr>
             <a:r>
-              <a:rPr lang="en-US" sz="1420" dirty="0">
+              <a:rPr lang="en-US" sz="950" b="1" dirty="0">
+                <a:solidFill>
+                  <a:srgbClr val="0068B7"/>
+                </a:solidFill>
+                <a:latin typeface="Aptos" pitchFamily="34" charset="0"/>
+                <a:ea typeface="Aptos" pitchFamily="34" charset="-122"/>
+                <a:cs typeface="Aptos" pitchFamily="34" charset="-120"/>
+              </a:rPr>
+              <a:t>Key idea</a:t>
+            </a:r>
+            <a:endParaRPr lang="en-US" sz="950" dirty="0"/>
+          </a:p>
+        </p:txBody>
+      </p:sp>
+      <p:sp>
+        <p:nvSpPr>
+          <p:cNvPr id="11" name="Text 9"/>
+          <p:cNvSpPr/>
+          <p:nvPr/>
+        </p:nvSpPr>
+        <p:spPr>
+          <a:xfrm>
+            <a:off x="8074152" y="1856232"/>
+            <a:ext cx="2825496" cy="1261872"/>
+          </a:xfrm>
+          <a:prstGeom prst="rect">
+            <a:avLst/>
+          </a:prstGeom>
+          <a:noFill/>
+          <a:ln/>
+        </p:spPr>
+        <p:txBody>
+          <a:bodyPr wrap="square" lIns="0" tIns="0" rIns="0" bIns="0" rtlCol="0" anchor="t">
+            <a:normAutofit/>
+          </a:bodyPr>
+          <a:lstStyle/>
+          <a:p>
+            <a:pPr indent="0" marL="0">
+              <a:buNone/>
+            </a:pPr>
+            <a:r>
+              <a:rPr lang="en-US" sz="1250" dirty="0">
                 <a:solidFill>
                   <a:srgbClr val="17364A"/>
                 </a:solidFill>
@@ -3829,9 +5136,116 @@
                 <a:ea typeface="Aptos" pitchFamily="34" charset="-122"/>
                 <a:cs typeface="Aptos" pitchFamily="34" charset="-120"/>
               </a:rPr>
-              <a:t>What public health task would the model support: classification, prediction, ranking, clustering, or exploration? What label would be used, and how reliable or equitable is that label? Which features might reflect access, documentation, or reporting bias rather than true risk?</a:t>
-            </a:r>
-            <a:endParaRPr lang="en-US" sz="1420" dirty="0"/>
+              <a:t>Misuse of prediction as explanation.</a:t>
+            </a:r>
+            <a:endParaRPr lang="en-US" sz="1250" dirty="0"/>
+          </a:p>
+        </p:txBody>
+      </p:sp>
+      <p:sp>
+        <p:nvSpPr>
+          <p:cNvPr id="12" name="Shape 10"/>
+          <p:cNvSpPr/>
+          <p:nvPr/>
+        </p:nvSpPr>
+        <p:spPr>
+          <a:xfrm>
+            <a:off x="7909560" y="3520440"/>
+            <a:ext cx="3154680" cy="1737360"/>
+          </a:xfrm>
+          <a:prstGeom prst="roundRect">
+            <a:avLst>
+              <a:gd name="adj" fmla="val 6316"/>
+            </a:avLst>
+          </a:prstGeom>
+          <a:solidFill>
+            <a:srgbClr val="EAF6F8"/>
+          </a:solidFill>
+          <a:ln w="12700">
+            <a:solidFill>
+              <a:srgbClr val="B9D7E6"/>
+            </a:solidFill>
+            <a:prstDash val="solid"/>
+          </a:ln>
+        </p:spPr>
+      </p:sp>
+      <p:sp>
+        <p:nvSpPr>
+          <p:cNvPr id="13" name="Text 11"/>
+          <p:cNvSpPr/>
+          <p:nvPr/>
+        </p:nvSpPr>
+        <p:spPr>
+          <a:xfrm>
+            <a:off x="8074152" y="3666744"/>
+            <a:ext cx="2825496" cy="201168"/>
+          </a:xfrm>
+          <a:prstGeom prst="rect">
+            <a:avLst/>
+          </a:prstGeom>
+          <a:noFill/>
+          <a:ln/>
+        </p:spPr>
+        <p:txBody>
+          <a:bodyPr wrap="square" lIns="0" tIns="0" rIns="0" bIns="0" rtlCol="0" anchor="ctr"/>
+          <a:lstStyle/>
+          <a:p>
+            <a:pPr indent="0" marL="0">
+              <a:buNone/>
+            </a:pPr>
+            <a:r>
+              <a:rPr lang="en-US" sz="950" b="1" dirty="0">
+                <a:solidFill>
+                  <a:srgbClr val="0068B7"/>
+                </a:solidFill>
+                <a:latin typeface="Aptos" pitchFamily="34" charset="0"/>
+                <a:ea typeface="Aptos" pitchFamily="34" charset="-122"/>
+                <a:cs typeface="Aptos" pitchFamily="34" charset="-120"/>
+              </a:rPr>
+              <a:t>Use this for</a:t>
+            </a:r>
+            <a:endParaRPr lang="en-US" sz="950" dirty="0"/>
+          </a:p>
+        </p:txBody>
+      </p:sp>
+      <p:sp>
+        <p:nvSpPr>
+          <p:cNvPr id="14" name="Text 12"/>
+          <p:cNvSpPr/>
+          <p:nvPr/>
+        </p:nvSpPr>
+        <p:spPr>
+          <a:xfrm>
+            <a:off x="8074152" y="3959352"/>
+            <a:ext cx="2825496" cy="1170432"/>
+          </a:xfrm>
+          <a:prstGeom prst="rect">
+            <a:avLst/>
+          </a:prstGeom>
+          <a:noFill/>
+          <a:ln/>
+        </p:spPr>
+        <p:txBody>
+          <a:bodyPr wrap="square" lIns="0" tIns="0" rIns="0" bIns="0" rtlCol="0" anchor="t">
+            <a:normAutofit/>
+          </a:bodyPr>
+          <a:lstStyle/>
+          <a:p>
+            <a:pPr indent="0" marL="0">
+              <a:buNone/>
+            </a:pPr>
+            <a:r>
+              <a:rPr lang="en-US" sz="1250" dirty="0">
+                <a:solidFill>
+                  <a:srgbClr val="17364A"/>
+                </a:solidFill>
+                <a:latin typeface="Aptos" pitchFamily="34" charset="0"/>
+                <a:ea typeface="Aptos" pitchFamily="34" charset="-122"/>
+                <a:cs typeface="Aptos" pitchFamily="34" charset="-120"/>
+              </a:rPr>
+              <a:t>Connect the concept to public health decisions, safeguards, documentation, or implementation work.</a:t>
+            </a:r>
+            <a:endParaRPr lang="en-US" sz="1250" dirty="0"/>
           </a:p>
         </p:txBody>
       </p:sp>
@@ -3894,7 +5308,32 @@
       </p:sp>
       <p:sp>
         <p:nvSpPr>
-          <p:cNvPr id="3" name="Text 1"/>
+          <p:cNvPr id="3" name="Shape 1"/>
+          <p:cNvSpPr/>
+          <p:nvPr/>
+        </p:nvSpPr>
+        <p:spPr>
+          <a:xfrm>
+            <a:off x="0" y="164592"/>
+            <a:ext cx="146304" cy="6693408"/>
+          </a:xfrm>
+          <a:prstGeom prst="rect">
+            <a:avLst/>
+          </a:prstGeom>
+          <a:solidFill>
+            <a:srgbClr val="2F8A28"/>
+          </a:solidFill>
+          <a:ln w="12700">
+            <a:solidFill>
+              <a:srgbClr val="2F8A28"/>
+            </a:solidFill>
+            <a:prstDash val="solid"/>
+          </a:ln>
+        </p:spPr>
+      </p:sp>
+      <p:sp>
+        <p:nvSpPr>
+          <p:cNvPr id="4" name="Text 2"/>
           <p:cNvSpPr/>
           <p:nvPr/>
         </p:nvSpPr>
@@ -3933,7 +5372,7 @@
       </p:sp>
       <p:sp>
         <p:nvSpPr>
-          <p:cNvPr id="4" name="Text 2"/>
+          <p:cNvPr id="5" name="Text 3"/>
           <p:cNvSpPr/>
           <p:nvPr/>
         </p:nvSpPr>
@@ -3972,7 +5411,7 @@
       </p:sp>
       <p:sp>
         <p:nvSpPr>
-          <p:cNvPr id="5" name="Text 3"/>
+          <p:cNvPr id="6" name="Text 4"/>
           <p:cNvSpPr/>
           <p:nvPr/>
         </p:nvSpPr>
@@ -4011,13 +5450,77 @@
       </p:sp>
       <p:sp>
         <p:nvSpPr>
-          <p:cNvPr id="6" name="Text 4"/>
+          <p:cNvPr id="7" name="Shape 5"/>
           <p:cNvSpPr/>
           <p:nvPr/>
         </p:nvSpPr>
         <p:spPr>
           <a:xfrm>
             <a:off x="640080" y="658368"/>
+            <a:ext cx="420624" cy="420624"/>
+          </a:xfrm>
+          <a:prstGeom prst="ellipse">
+            <a:avLst/>
+          </a:prstGeom>
+          <a:solidFill>
+            <a:srgbClr val="0068B7"/>
+          </a:solidFill>
+          <a:ln w="12700">
+            <a:solidFill>
+              <a:srgbClr val="0068B7"/>
+            </a:solidFill>
+            <a:prstDash val="solid"/>
+          </a:ln>
+        </p:spPr>
+      </p:sp>
+      <p:sp>
+        <p:nvSpPr>
+          <p:cNvPr id="8" name="Text 6"/>
+          <p:cNvSpPr/>
+          <p:nvPr/>
+        </p:nvSpPr>
+        <p:spPr>
+          <a:xfrm>
+            <a:off x="640080" y="731520"/>
+            <a:ext cx="420624" cy="164592"/>
+          </a:xfrm>
+          <a:prstGeom prst="rect">
+            <a:avLst/>
+          </a:prstGeom>
+          <a:noFill/>
+          <a:ln/>
+        </p:spPr>
+        <p:txBody>
+          <a:bodyPr wrap="square" lIns="0" tIns="0" rIns="0" bIns="0" rtlCol="0" anchor="ctr"/>
+          <a:lstStyle/>
+          <a:p>
+            <a:pPr algn="ctr" indent="0" marL="0">
+              <a:buNone/>
+            </a:pPr>
+            <a:r>
+              <a:rPr lang="en-US" sz="1100" b="1" dirty="0">
+                <a:solidFill>
+                  <a:srgbClr val="FFFFFF"/>
+                </a:solidFill>
+                <a:latin typeface="Aptos" pitchFamily="34" charset="0"/>
+                <a:ea typeface="Aptos" pitchFamily="34" charset="-122"/>
+                <a:cs typeface="Aptos" pitchFamily="34" charset="-120"/>
+              </a:rPr>
+              <a:t>7</a:t>
+            </a:r>
+            <a:endParaRPr lang="en-US" sz="1100" dirty="0"/>
+          </a:p>
+        </p:txBody>
+      </p:sp>
+      <p:sp>
+        <p:nvSpPr>
+          <p:cNvPr id="9" name="Text 7"/>
+          <p:cNvSpPr/>
+          <p:nvPr/>
+        </p:nvSpPr>
+        <p:spPr>
+          <a:xfrm>
+            <a:off x="640080" y="621792"/>
             <a:ext cx="10881360" cy="566928"/>
           </a:xfrm>
           <a:prstGeom prst="rect">
@@ -4044,7 +5547,7 @@
                 <a:ea typeface="Aptos Display" pitchFamily="34" charset="-122"/>
                 <a:cs typeface="Aptos Display" pitchFamily="34" charset="-120"/>
               </a:rPr>
-              <a:t>Reflection Questions Continued</a:t>
+              <a:t>Application to AI-Supported Workflows</a:t>
             </a:r>
             <a:endParaRPr lang="en-US" sz="2700" dirty="0"/>
           </a:p>
@@ -4052,32 +5555,178 @@
       </p:sp>
       <p:sp>
         <p:nvSpPr>
-          <p:cNvPr id="7" name="Text 5"/>
-          <p:cNvSpPr/>
-          <p:nvPr/>
-        </p:nvSpPr>
-        <p:spPr>
-          <a:xfrm>
-            <a:off x="822960" y="1325880"/>
-            <a:ext cx="10378440" cy="4800600"/>
-          </a:xfrm>
-          <a:prstGeom prst="rect">
-            <a:avLst/>
-          </a:prstGeom>
-          <a:noFill/>
-          <a:ln/>
-        </p:spPr>
-        <p:txBody>
-          <a:bodyPr wrap="square" lIns="1016" tIns="1016" rIns="1016" bIns="1016" rtlCol="0" anchor="t">
+          <p:cNvPr id="10" name="Text 8"/>
+          <p:cNvSpPr/>
+          <p:nvPr/>
+        </p:nvSpPr>
+        <p:spPr>
+          <a:xfrm>
+            <a:off x="868680" y="1417320"/>
+            <a:ext cx="6675120" cy="4434840"/>
+          </a:xfrm>
+          <a:prstGeom prst="rect">
+            <a:avLst/>
+          </a:prstGeom>
+          <a:noFill/>
+          <a:ln/>
+        </p:spPr>
+        <p:txBody>
+          <a:bodyPr wrap="square" lIns="635" tIns="635" rIns="635" bIns="635" rtlCol="0" anchor="t">
             <a:normAutofit/>
           </a:bodyPr>
           <a:lstStyle/>
           <a:p>
+            <a:r>
+              <a:rPr lang="en-US" sz="1700" dirty="0">
+                <a:solidFill>
+                  <a:srgbClr val="17364A"/>
+                </a:solidFill>
+                <a:latin typeface="Aptos" pitchFamily="34" charset="0"/>
+                <a:ea typeface="Aptos" pitchFamily="34" charset="-122"/>
+                <a:cs typeface="Aptos" pitchFamily="34" charset="-120"/>
+              </a:rPr>
+              <a:t>Machine learning may support generative AI, predictive analytics, NLP, anomaly detection, and agentic workflows.</a:t>
+            </a:r>
+            <a:endParaRPr lang="en-US" sz="1700" dirty="0"/>
+          </a:p>
+          <a:p>
+            <a:r>
+              <a:rPr lang="en-US" sz="1700" dirty="0">
+                <a:solidFill>
+                  <a:srgbClr val="17364A"/>
+                </a:solidFill>
+                <a:latin typeface="Aptos" pitchFamily="34" charset="0"/>
+                <a:ea typeface="Aptos" pitchFamily="34" charset="-122"/>
+                <a:cs typeface="Aptos" pitchFamily="34" charset="-120"/>
+              </a:rPr>
+              <a:t>In generative AI systems, machine learning concepts help staff understand why outputs may be fluent but unreliable.</a:t>
+            </a:r>
+            <a:endParaRPr lang="en-US" sz="1700" dirty="0"/>
+          </a:p>
+          <a:p>
+            <a:r>
+              <a:rPr lang="en-US" sz="1700" dirty="0">
+                <a:solidFill>
+                  <a:srgbClr val="17364A"/>
+                </a:solidFill>
+                <a:latin typeface="Aptos" pitchFamily="34" charset="0"/>
+                <a:ea typeface="Aptos" pitchFamily="34" charset="-122"/>
+                <a:cs typeface="Aptos" pitchFamily="34" charset="-120"/>
+              </a:rPr>
+              <a:t>In predictive workflows, machine learning literacy helps staff evaluate risk scores, thresholds, and subgroup performance.</a:t>
+            </a:r>
+            <a:endParaRPr lang="en-US" sz="1700" dirty="0"/>
+          </a:p>
+          <a:p>
+            <a:r>
+              <a:rPr lang="en-US" sz="1700" dirty="0">
+                <a:solidFill>
+                  <a:srgbClr val="17364A"/>
+                </a:solidFill>
+                <a:latin typeface="Aptos" pitchFamily="34" charset="0"/>
+                <a:ea typeface="Aptos" pitchFamily="34" charset="-122"/>
+                <a:cs typeface="Aptos" pitchFamily="34" charset="-120"/>
+              </a:rPr>
+              <a:t>In agentic workflows, models may trigger actions, making validation, permissions, and human approval especially important.</a:t>
+            </a:r>
+            <a:endParaRPr lang="en-US" sz="1700" dirty="0"/>
+          </a:p>
+        </p:txBody>
+      </p:sp>
+      <p:sp>
+        <p:nvSpPr>
+          <p:cNvPr id="11" name="Shape 9"/>
+          <p:cNvSpPr/>
+          <p:nvPr/>
+        </p:nvSpPr>
+        <p:spPr>
+          <a:xfrm>
+            <a:off x="7909560" y="1417320"/>
+            <a:ext cx="3154680" cy="1828800"/>
+          </a:xfrm>
+          <a:prstGeom prst="roundRect">
+            <a:avLst>
+              <a:gd name="adj" fmla="val 6000"/>
+            </a:avLst>
+          </a:prstGeom>
+          <a:solidFill>
+            <a:srgbClr val="EEF8ED"/>
+          </a:solidFill>
+          <a:ln w="12700">
+            <a:solidFill>
+              <a:srgbClr val="B9D7E6"/>
+            </a:solidFill>
+            <a:prstDash val="solid"/>
+          </a:ln>
+        </p:spPr>
+      </p:sp>
+      <p:sp>
+        <p:nvSpPr>
+          <p:cNvPr id="12" name="Text 10"/>
+          <p:cNvSpPr/>
+          <p:nvPr/>
+        </p:nvSpPr>
+        <p:spPr>
+          <a:xfrm>
+            <a:off x="8074152" y="1563624"/>
+            <a:ext cx="2825496" cy="201168"/>
+          </a:xfrm>
+          <a:prstGeom prst="rect">
+            <a:avLst/>
+          </a:prstGeom>
+          <a:noFill/>
+          <a:ln/>
+        </p:spPr>
+        <p:txBody>
+          <a:bodyPr wrap="square" lIns="0" tIns="0" rIns="0" bIns="0" rtlCol="0" anchor="ctr"/>
+          <a:lstStyle/>
+          <a:p>
             <a:pPr indent="0" marL="0">
               <a:buNone/>
             </a:pPr>
             <a:r>
-              <a:rPr lang="en-US" sz="1420" dirty="0">
+              <a:rPr lang="en-US" sz="950" b="1" dirty="0">
+                <a:solidFill>
+                  <a:srgbClr val="0068B7"/>
+                </a:solidFill>
+                <a:latin typeface="Aptos" pitchFamily="34" charset="0"/>
+                <a:ea typeface="Aptos" pitchFamily="34" charset="-122"/>
+                <a:cs typeface="Aptos" pitchFamily="34" charset="-120"/>
+              </a:rPr>
+              <a:t>Key idea</a:t>
+            </a:r>
+            <a:endParaRPr lang="en-US" sz="950" dirty="0"/>
+          </a:p>
+        </p:txBody>
+      </p:sp>
+      <p:sp>
+        <p:nvSpPr>
+          <p:cNvPr id="13" name="Text 11"/>
+          <p:cNvSpPr/>
+          <p:nvPr/>
+        </p:nvSpPr>
+        <p:spPr>
+          <a:xfrm>
+            <a:off x="8074152" y="1856232"/>
+            <a:ext cx="2825496" cy="1261872"/>
+          </a:xfrm>
+          <a:prstGeom prst="rect">
+            <a:avLst/>
+          </a:prstGeom>
+          <a:noFill/>
+          <a:ln/>
+        </p:spPr>
+        <p:txBody>
+          <a:bodyPr wrap="square" lIns="0" tIns="0" rIns="0" bIns="0" rtlCol="0" anchor="t">
+            <a:normAutofit/>
+          </a:bodyPr>
+          <a:lstStyle/>
+          <a:p>
+            <a:pPr indent="0" marL="0">
+              <a:buNone/>
+            </a:pPr>
+            <a:r>
+              <a:rPr lang="en-US" sz="1250" dirty="0">
                 <a:solidFill>
                   <a:srgbClr val="17364A"/>
                 </a:solidFill>
@@ -4085,9 +5734,116 @@
                 <a:ea typeface="Aptos" pitchFamily="34" charset="-122"/>
                 <a:cs typeface="Aptos" pitchFamily="34" charset="-120"/>
               </a:rPr>
-              <a:t>What errors would be most harmful in this workflow? Who would review model outputs, override them, and document concerns?</a:t>
-            </a:r>
-            <a:endParaRPr lang="en-US" sz="1420" dirty="0"/>
+              <a:t>Machine learning may support generative AI, predictive analytics, NLP, anomaly detection, and agentic workflows.</a:t>
+            </a:r>
+            <a:endParaRPr lang="en-US" sz="1250" dirty="0"/>
+          </a:p>
+        </p:txBody>
+      </p:sp>
+      <p:sp>
+        <p:nvSpPr>
+          <p:cNvPr id="14" name="Shape 12"/>
+          <p:cNvSpPr/>
+          <p:nvPr/>
+        </p:nvSpPr>
+        <p:spPr>
+          <a:xfrm>
+            <a:off x="7909560" y="3520440"/>
+            <a:ext cx="3154680" cy="1737360"/>
+          </a:xfrm>
+          <a:prstGeom prst="roundRect">
+            <a:avLst>
+              <a:gd name="adj" fmla="val 6316"/>
+            </a:avLst>
+          </a:prstGeom>
+          <a:solidFill>
+            <a:srgbClr val="EAF6F8"/>
+          </a:solidFill>
+          <a:ln w="12700">
+            <a:solidFill>
+              <a:srgbClr val="B9D7E6"/>
+            </a:solidFill>
+            <a:prstDash val="solid"/>
+          </a:ln>
+        </p:spPr>
+      </p:sp>
+      <p:sp>
+        <p:nvSpPr>
+          <p:cNvPr id="15" name="Text 13"/>
+          <p:cNvSpPr/>
+          <p:nvPr/>
+        </p:nvSpPr>
+        <p:spPr>
+          <a:xfrm>
+            <a:off x="8074152" y="3666744"/>
+            <a:ext cx="2825496" cy="201168"/>
+          </a:xfrm>
+          <a:prstGeom prst="rect">
+            <a:avLst/>
+          </a:prstGeom>
+          <a:noFill/>
+          <a:ln/>
+        </p:spPr>
+        <p:txBody>
+          <a:bodyPr wrap="square" lIns="0" tIns="0" rIns="0" bIns="0" rtlCol="0" anchor="ctr"/>
+          <a:lstStyle/>
+          <a:p>
+            <a:pPr indent="0" marL="0">
+              <a:buNone/>
+            </a:pPr>
+            <a:r>
+              <a:rPr lang="en-US" sz="950" b="1" dirty="0">
+                <a:solidFill>
+                  <a:srgbClr val="0068B7"/>
+                </a:solidFill>
+                <a:latin typeface="Aptos" pitchFamily="34" charset="0"/>
+                <a:ea typeface="Aptos" pitchFamily="34" charset="-122"/>
+                <a:cs typeface="Aptos" pitchFamily="34" charset="-120"/>
+              </a:rPr>
+              <a:t>Use this for</a:t>
+            </a:r>
+            <a:endParaRPr lang="en-US" sz="950" dirty="0"/>
+          </a:p>
+        </p:txBody>
+      </p:sp>
+      <p:sp>
+        <p:nvSpPr>
+          <p:cNvPr id="16" name="Text 14"/>
+          <p:cNvSpPr/>
+          <p:nvPr/>
+        </p:nvSpPr>
+        <p:spPr>
+          <a:xfrm>
+            <a:off x="8074152" y="3959352"/>
+            <a:ext cx="2825496" cy="1170432"/>
+          </a:xfrm>
+          <a:prstGeom prst="rect">
+            <a:avLst/>
+          </a:prstGeom>
+          <a:noFill/>
+          <a:ln/>
+        </p:spPr>
+        <p:txBody>
+          <a:bodyPr wrap="square" lIns="0" tIns="0" rIns="0" bIns="0" rtlCol="0" anchor="t">
+            <a:normAutofit/>
+          </a:bodyPr>
+          <a:lstStyle/>
+          <a:p>
+            <a:pPr indent="0" marL="0">
+              <a:buNone/>
+            </a:pPr>
+            <a:r>
+              <a:rPr lang="en-US" sz="1250" dirty="0">
+                <a:solidFill>
+                  <a:srgbClr val="17364A"/>
+                </a:solidFill>
+                <a:latin typeface="Aptos" pitchFamily="34" charset="0"/>
+                <a:ea typeface="Aptos" pitchFamily="34" charset="-122"/>
+                <a:cs typeface="Aptos" pitchFamily="34" charset="-120"/>
+              </a:rPr>
+              <a:t>Connect the concept to public health decisions, safeguards, documentation, or implementation work.</a:t>
+            </a:r>
+            <a:endParaRPr lang="en-US" sz="1250" dirty="0"/>
           </a:p>
         </p:txBody>
       </p:sp>
@@ -4150,7 +5906,32 @@
       </p:sp>
       <p:sp>
         <p:nvSpPr>
-          <p:cNvPr id="3" name="Text 1"/>
+          <p:cNvPr id="3" name="Shape 1"/>
+          <p:cNvSpPr/>
+          <p:nvPr/>
+        </p:nvSpPr>
+        <p:spPr>
+          <a:xfrm>
+            <a:off x="0" y="164592"/>
+            <a:ext cx="146304" cy="6693408"/>
+          </a:xfrm>
+          <a:prstGeom prst="rect">
+            <a:avLst/>
+          </a:prstGeom>
+          <a:solidFill>
+            <a:srgbClr val="2F8A28"/>
+          </a:solidFill>
+          <a:ln w="12700">
+            <a:solidFill>
+              <a:srgbClr val="2F8A28"/>
+            </a:solidFill>
+            <a:prstDash val="solid"/>
+          </a:ln>
+        </p:spPr>
+      </p:sp>
+      <p:sp>
+        <p:nvSpPr>
+          <p:cNvPr id="4" name="Text 2"/>
           <p:cNvSpPr/>
           <p:nvPr/>
         </p:nvSpPr>
@@ -4189,7 +5970,7 @@
       </p:sp>
       <p:sp>
         <p:nvSpPr>
-          <p:cNvPr id="4" name="Text 2"/>
+          <p:cNvPr id="5" name="Text 3"/>
           <p:cNvSpPr/>
           <p:nvPr/>
         </p:nvSpPr>
@@ -4228,7 +6009,7 @@
       </p:sp>
       <p:sp>
         <p:nvSpPr>
-          <p:cNvPr id="5" name="Text 3"/>
+          <p:cNvPr id="6" name="Text 4"/>
           <p:cNvSpPr/>
           <p:nvPr/>
         </p:nvSpPr>
@@ -4267,13 +6048,77 @@
       </p:sp>
       <p:sp>
         <p:nvSpPr>
-          <p:cNvPr id="6" name="Text 4"/>
+          <p:cNvPr id="7" name="Shape 5"/>
           <p:cNvSpPr/>
           <p:nvPr/>
         </p:nvSpPr>
         <p:spPr>
           <a:xfrm>
             <a:off x="640080" y="658368"/>
+            <a:ext cx="420624" cy="420624"/>
+          </a:xfrm>
+          <a:prstGeom prst="ellipse">
+            <a:avLst/>
+          </a:prstGeom>
+          <a:solidFill>
+            <a:srgbClr val="0068B7"/>
+          </a:solidFill>
+          <a:ln w="12700">
+            <a:solidFill>
+              <a:srgbClr val="0068B7"/>
+            </a:solidFill>
+            <a:prstDash val="solid"/>
+          </a:ln>
+        </p:spPr>
+      </p:sp>
+      <p:sp>
+        <p:nvSpPr>
+          <p:cNvPr id="8" name="Text 6"/>
+          <p:cNvSpPr/>
+          <p:nvPr/>
+        </p:nvSpPr>
+        <p:spPr>
+          <a:xfrm>
+            <a:off x="640080" y="731520"/>
+            <a:ext cx="420624" cy="164592"/>
+          </a:xfrm>
+          <a:prstGeom prst="rect">
+            <a:avLst/>
+          </a:prstGeom>
+          <a:noFill/>
+          <a:ln/>
+        </p:spPr>
+        <p:txBody>
+          <a:bodyPr wrap="square" lIns="0" tIns="0" rIns="0" bIns="0" rtlCol="0" anchor="ctr"/>
+          <a:lstStyle/>
+          <a:p>
+            <a:pPr algn="ctr" indent="0" marL="0">
+              <a:buNone/>
+            </a:pPr>
+            <a:r>
+              <a:rPr lang="en-US" sz="1100" b="1" dirty="0">
+                <a:solidFill>
+                  <a:srgbClr val="FFFFFF"/>
+                </a:solidFill>
+                <a:latin typeface="Aptos" pitchFamily="34" charset="0"/>
+                <a:ea typeface="Aptos" pitchFamily="34" charset="-122"/>
+                <a:cs typeface="Aptos" pitchFamily="34" charset="-120"/>
+              </a:rPr>
+              <a:t>8</a:t>
+            </a:r>
+            <a:endParaRPr lang="en-US" sz="1100" dirty="0"/>
+          </a:p>
+        </p:txBody>
+      </p:sp>
+      <p:sp>
+        <p:nvSpPr>
+          <p:cNvPr id="9" name="Text 7"/>
+          <p:cNvSpPr/>
+          <p:nvPr/>
+        </p:nvSpPr>
+        <p:spPr>
+          <a:xfrm>
+            <a:off x="640080" y="621792"/>
             <a:ext cx="10881360" cy="566928"/>
           </a:xfrm>
           <a:prstGeom prst="rect">
@@ -4300,7 +6145,7 @@
                 <a:ea typeface="Aptos Display" pitchFamily="34" charset="-122"/>
                 <a:cs typeface="Aptos Display" pitchFamily="34" charset="-120"/>
               </a:rPr>
-              <a:t>Practical Exercise</a:t>
+              <a:t>Reflection Questions</a:t>
             </a:r>
             <a:endParaRPr lang="en-US" sz="2700" dirty="0"/>
           </a:p>
@@ -4308,32 +6153,164 @@
       </p:sp>
       <p:sp>
         <p:nvSpPr>
-          <p:cNvPr id="7" name="Text 5"/>
-          <p:cNvSpPr/>
-          <p:nvPr/>
-        </p:nvSpPr>
-        <p:spPr>
-          <a:xfrm>
-            <a:off x="822960" y="1325880"/>
-            <a:ext cx="10378440" cy="4800600"/>
-          </a:xfrm>
-          <a:prstGeom prst="rect">
-            <a:avLst/>
-          </a:prstGeom>
-          <a:noFill/>
-          <a:ln/>
-        </p:spPr>
-        <p:txBody>
-          <a:bodyPr wrap="square" lIns="1016" tIns="1016" rIns="1016" bIns="1016" rtlCol="0" anchor="t">
+          <p:cNvPr id="10" name="Text 8"/>
+          <p:cNvSpPr/>
+          <p:nvPr/>
+        </p:nvSpPr>
+        <p:spPr>
+          <a:xfrm>
+            <a:off x="868680" y="1417320"/>
+            <a:ext cx="6675120" cy="4434840"/>
+          </a:xfrm>
+          <a:prstGeom prst="rect">
+            <a:avLst/>
+          </a:prstGeom>
+          <a:noFill/>
+          <a:ln/>
+        </p:spPr>
+        <p:txBody>
+          <a:bodyPr wrap="square" lIns="635" tIns="635" rIns="635" bIns="635" rtlCol="0" anchor="t">
             <a:normAutofit/>
           </a:bodyPr>
           <a:lstStyle/>
           <a:p>
+            <a:r>
+              <a:rPr lang="en-US" sz="1700" dirty="0">
+                <a:solidFill>
+                  <a:srgbClr val="17364A"/>
+                </a:solidFill>
+                <a:latin typeface="Aptos" pitchFamily="34" charset="0"/>
+                <a:ea typeface="Aptos" pitchFamily="34" charset="-122"/>
+                <a:cs typeface="Aptos" pitchFamily="34" charset="-120"/>
+              </a:rPr>
+              <a:t>What public health task would the model support: classification, prediction, ranking, clustering, or exploration?</a:t>
+            </a:r>
+            <a:endParaRPr lang="en-US" sz="1700" dirty="0"/>
+          </a:p>
+          <a:p>
+            <a:r>
+              <a:rPr lang="en-US" sz="1700" dirty="0">
+                <a:solidFill>
+                  <a:srgbClr val="17364A"/>
+                </a:solidFill>
+                <a:latin typeface="Aptos" pitchFamily="34" charset="0"/>
+                <a:ea typeface="Aptos" pitchFamily="34" charset="-122"/>
+                <a:cs typeface="Aptos" pitchFamily="34" charset="-120"/>
+              </a:rPr>
+              <a:t>What label would be used, and how reliable or equitable is that label?</a:t>
+            </a:r>
+            <a:endParaRPr lang="en-US" sz="1700" dirty="0"/>
+          </a:p>
+          <a:p>
+            <a:r>
+              <a:rPr lang="en-US" sz="1700" dirty="0">
+                <a:solidFill>
+                  <a:srgbClr val="17364A"/>
+                </a:solidFill>
+                <a:latin typeface="Aptos" pitchFamily="34" charset="0"/>
+                <a:ea typeface="Aptos" pitchFamily="34" charset="-122"/>
+                <a:cs typeface="Aptos" pitchFamily="34" charset="-120"/>
+              </a:rPr>
+              <a:t>Which features might reflect access, documentation, or reporting bias rather than true risk?</a:t>
+            </a:r>
+            <a:endParaRPr lang="en-US" sz="1700" dirty="0"/>
+          </a:p>
+        </p:txBody>
+      </p:sp>
+      <p:sp>
+        <p:nvSpPr>
+          <p:cNvPr id="11" name="Shape 9"/>
+          <p:cNvSpPr/>
+          <p:nvPr/>
+        </p:nvSpPr>
+        <p:spPr>
+          <a:xfrm>
+            <a:off x="7909560" y="1417320"/>
+            <a:ext cx="3154680" cy="1828800"/>
+          </a:xfrm>
+          <a:prstGeom prst="roundRect">
+            <a:avLst>
+              <a:gd name="adj" fmla="val 6000"/>
+            </a:avLst>
+          </a:prstGeom>
+          <a:solidFill>
+            <a:srgbClr val="EEF8ED"/>
+          </a:solidFill>
+          <a:ln w="12700">
+            <a:solidFill>
+              <a:srgbClr val="B9D7E6"/>
+            </a:solidFill>
+            <a:prstDash val="solid"/>
+          </a:ln>
+        </p:spPr>
+      </p:sp>
+      <p:sp>
+        <p:nvSpPr>
+          <p:cNvPr id="12" name="Text 10"/>
+          <p:cNvSpPr/>
+          <p:nvPr/>
+        </p:nvSpPr>
+        <p:spPr>
+          <a:xfrm>
+            <a:off x="8074152" y="1563624"/>
+            <a:ext cx="2825496" cy="201168"/>
+          </a:xfrm>
+          <a:prstGeom prst="rect">
+            <a:avLst/>
+          </a:prstGeom>
+          <a:noFill/>
+          <a:ln/>
+        </p:spPr>
+        <p:txBody>
+          <a:bodyPr wrap="square" lIns="0" tIns="0" rIns="0" bIns="0" rtlCol="0" anchor="ctr"/>
+          <a:lstStyle/>
+          <a:p>
             <a:pPr indent="0" marL="0">
               <a:buNone/>
             </a:pPr>
             <a:r>
-              <a:rPr lang="en-US" sz="1420" dirty="0">
+              <a:rPr lang="en-US" sz="950" b="1" dirty="0">
+                <a:solidFill>
+                  <a:srgbClr val="0068B7"/>
+                </a:solidFill>
+                <a:latin typeface="Aptos" pitchFamily="34" charset="0"/>
+                <a:ea typeface="Aptos" pitchFamily="34" charset="-122"/>
+                <a:cs typeface="Aptos" pitchFamily="34" charset="-120"/>
+              </a:rPr>
+              <a:t>Key idea</a:t>
+            </a:r>
+            <a:endParaRPr lang="en-US" sz="950" dirty="0"/>
+          </a:p>
+        </p:txBody>
+      </p:sp>
+      <p:sp>
+        <p:nvSpPr>
+          <p:cNvPr id="13" name="Text 11"/>
+          <p:cNvSpPr/>
+          <p:nvPr/>
+        </p:nvSpPr>
+        <p:spPr>
+          <a:xfrm>
+            <a:off x="8074152" y="1856232"/>
+            <a:ext cx="2825496" cy="1261872"/>
+          </a:xfrm>
+          <a:prstGeom prst="rect">
+            <a:avLst/>
+          </a:prstGeom>
+          <a:noFill/>
+          <a:ln/>
+        </p:spPr>
+        <p:txBody>
+          <a:bodyPr wrap="square" lIns="0" tIns="0" rIns="0" bIns="0" rtlCol="0" anchor="t">
+            <a:normAutofit/>
+          </a:bodyPr>
+          <a:lstStyle/>
+          <a:p>
+            <a:pPr indent="0" marL="0">
+              <a:buNone/>
+            </a:pPr>
+            <a:r>
+              <a:rPr lang="en-US" sz="1250" dirty="0">
                 <a:solidFill>
                   <a:srgbClr val="17364A"/>
                 </a:solidFill>
@@ -4341,9 +6318,116 @@
                 <a:ea typeface="Aptos" pitchFamily="34" charset="-122"/>
                 <a:cs typeface="Aptos" pitchFamily="34" charset="-120"/>
               </a:rPr>
-              <a:t>Create a machine learning use case review worksheet for one public health workflow. The worksheet should describe the public health task, intended use, data sources, candidate features, proposed label, likely users, performance measures, subgroup review needs, human review points, and monitoring requirements. This exercise should produce a governance-ready artifact. Learners should identify at least three reasons the model might fail and at least three safeguards that should be in place before pilot testing.</a:t>
-            </a:r>
-            <a:endParaRPr lang="en-US" sz="1420" dirty="0"/>
+              <a:t>What public health task would the model support: classification, prediction, ranking, clustering, or exploration?</a:t>
+            </a:r>
+            <a:endParaRPr lang="en-US" sz="1250" dirty="0"/>
+          </a:p>
+        </p:txBody>
+      </p:sp>
+      <p:sp>
+        <p:nvSpPr>
+          <p:cNvPr id="14" name="Shape 12"/>
+          <p:cNvSpPr/>
+          <p:nvPr/>
+        </p:nvSpPr>
+        <p:spPr>
+          <a:xfrm>
+            <a:off x="7909560" y="3520440"/>
+            <a:ext cx="3154680" cy="1737360"/>
+          </a:xfrm>
+          <a:prstGeom prst="roundRect">
+            <a:avLst>
+              <a:gd name="adj" fmla="val 6316"/>
+            </a:avLst>
+          </a:prstGeom>
+          <a:solidFill>
+            <a:srgbClr val="EAF6F8"/>
+          </a:solidFill>
+          <a:ln w="12700">
+            <a:solidFill>
+              <a:srgbClr val="B9D7E6"/>
+            </a:solidFill>
+            <a:prstDash val="solid"/>
+          </a:ln>
+        </p:spPr>
+      </p:sp>
+      <p:sp>
+        <p:nvSpPr>
+          <p:cNvPr id="15" name="Text 13"/>
+          <p:cNvSpPr/>
+          <p:nvPr/>
+        </p:nvSpPr>
+        <p:spPr>
+          <a:xfrm>
+            <a:off x="8074152" y="3666744"/>
+            <a:ext cx="2825496" cy="201168"/>
+          </a:xfrm>
+          <a:prstGeom prst="rect">
+            <a:avLst/>
+          </a:prstGeom>
+          <a:noFill/>
+          <a:ln/>
+        </p:spPr>
+        <p:txBody>
+          <a:bodyPr wrap="square" lIns="0" tIns="0" rIns="0" bIns="0" rtlCol="0" anchor="ctr"/>
+          <a:lstStyle/>
+          <a:p>
+            <a:pPr indent="0" marL="0">
+              <a:buNone/>
+            </a:pPr>
+            <a:r>
+              <a:rPr lang="en-US" sz="950" b="1" dirty="0">
+                <a:solidFill>
+                  <a:srgbClr val="0068B7"/>
+                </a:solidFill>
+                <a:latin typeface="Aptos" pitchFamily="34" charset="0"/>
+                <a:ea typeface="Aptos" pitchFamily="34" charset="-122"/>
+                <a:cs typeface="Aptos" pitchFamily="34" charset="-120"/>
+              </a:rPr>
+              <a:t>Use this for</a:t>
+            </a:r>
+            <a:endParaRPr lang="en-US" sz="950" dirty="0"/>
+          </a:p>
+        </p:txBody>
+      </p:sp>
+      <p:sp>
+        <p:nvSpPr>
+          <p:cNvPr id="16" name="Text 14"/>
+          <p:cNvSpPr/>
+          <p:nvPr/>
+        </p:nvSpPr>
+        <p:spPr>
+          <a:xfrm>
+            <a:off x="8074152" y="3959352"/>
+            <a:ext cx="2825496" cy="1170432"/>
+          </a:xfrm>
+          <a:prstGeom prst="rect">
+            <a:avLst/>
+          </a:prstGeom>
+          <a:noFill/>
+          <a:ln/>
+        </p:spPr>
+        <p:txBody>
+          <a:bodyPr wrap="square" lIns="0" tIns="0" rIns="0" bIns="0" rtlCol="0" anchor="t">
+            <a:normAutofit/>
+          </a:bodyPr>
+          <a:lstStyle/>
+          <a:p>
+            <a:pPr indent="0" marL="0">
+              <a:buNone/>
+            </a:pPr>
+            <a:r>
+              <a:rPr lang="en-US" sz="1250" dirty="0">
+                <a:solidFill>
+                  <a:srgbClr val="17364A"/>
+                </a:solidFill>
+                <a:latin typeface="Aptos" pitchFamily="34" charset="0"/>
+                <a:ea typeface="Aptos" pitchFamily="34" charset="-122"/>
+                <a:cs typeface="Aptos" pitchFamily="34" charset="-120"/>
+              </a:rPr>
+              <a:t>Connect the concept to public health decisions, safeguards, documentation, or implementation work.</a:t>
+            </a:r>
+            <a:endParaRPr lang="en-US" sz="1250" dirty="0"/>
           </a:p>
         </p:txBody>
       </p:sp>
@@ -4406,7 +6490,32 @@
       </p:sp>
       <p:sp>
         <p:nvSpPr>
-          <p:cNvPr id="3" name="Text 1"/>
+          <p:cNvPr id="3" name="Shape 1"/>
+          <p:cNvSpPr/>
+          <p:nvPr/>
+        </p:nvSpPr>
+        <p:spPr>
+          <a:xfrm>
+            <a:off x="0" y="164592"/>
+            <a:ext cx="146304" cy="6693408"/>
+          </a:xfrm>
+          <a:prstGeom prst="rect">
+            <a:avLst/>
+          </a:prstGeom>
+          <a:solidFill>
+            <a:srgbClr val="2F8A28"/>
+          </a:solidFill>
+          <a:ln w="12700">
+            <a:solidFill>
+              <a:srgbClr val="2F8A28"/>
+            </a:solidFill>
+            <a:prstDash val="solid"/>
+          </a:ln>
+        </p:spPr>
+      </p:sp>
+      <p:sp>
+        <p:nvSpPr>
+          <p:cNvPr id="4" name="Text 2"/>
           <p:cNvSpPr/>
           <p:nvPr/>
         </p:nvSpPr>
@@ -4445,7 +6554,7 @@
       </p:sp>
       <p:sp>
         <p:nvSpPr>
-          <p:cNvPr id="4" name="Text 2"/>
+          <p:cNvPr id="5" name="Text 3"/>
           <p:cNvSpPr/>
           <p:nvPr/>
         </p:nvSpPr>
@@ -4484,7 +6593,7 @@
       </p:sp>
       <p:sp>
         <p:nvSpPr>
-          <p:cNvPr id="5" name="Text 3"/>
+          <p:cNvPr id="6" name="Text 4"/>
           <p:cNvSpPr/>
           <p:nvPr/>
         </p:nvSpPr>
@@ -4523,7 +6632,7 @@
       </p:sp>
       <p:sp>
         <p:nvSpPr>
-          <p:cNvPr id="6" name="Text 4"/>
+          <p:cNvPr id="7" name="Text 5"/>
           <p:cNvSpPr/>
           <p:nvPr/>
         </p:nvSpPr>
@@ -4556,7 +6665,7 @@
                 <a:ea typeface="Aptos Display" pitchFamily="34" charset="-122"/>
                 <a:cs typeface="Aptos Display" pitchFamily="34" charset="-120"/>
               </a:rPr>
-              <a:t>Expected Artifact or Evidence</a:t>
+              <a:t>Reflection Questions Continued</a:t>
             </a:r>
             <a:endParaRPr lang="en-US" sz="2700" dirty="0"/>
           </a:p>
@@ -4564,32 +6673,150 @@
       </p:sp>
       <p:sp>
         <p:nvSpPr>
-          <p:cNvPr id="7" name="Text 5"/>
-          <p:cNvSpPr/>
-          <p:nvPr/>
-        </p:nvSpPr>
-        <p:spPr>
-          <a:xfrm>
-            <a:off x="822960" y="1325880"/>
-            <a:ext cx="10378440" cy="4800600"/>
-          </a:xfrm>
-          <a:prstGeom prst="rect">
-            <a:avLst/>
-          </a:prstGeom>
-          <a:noFill/>
-          <a:ln/>
-        </p:spPr>
-        <p:txBody>
-          <a:bodyPr wrap="square" lIns="1016" tIns="1016" rIns="1016" bIns="1016" rtlCol="0" anchor="t">
+          <p:cNvPr id="8" name="Text 6"/>
+          <p:cNvSpPr/>
+          <p:nvPr/>
+        </p:nvSpPr>
+        <p:spPr>
+          <a:xfrm>
+            <a:off x="868680" y="1417320"/>
+            <a:ext cx="6675120" cy="4434840"/>
+          </a:xfrm>
+          <a:prstGeom prst="rect">
+            <a:avLst/>
+          </a:prstGeom>
+          <a:noFill/>
+          <a:ln/>
+        </p:spPr>
+        <p:txBody>
+          <a:bodyPr wrap="square" lIns="635" tIns="635" rIns="635" bIns="635" rtlCol="0" anchor="t">
             <a:normAutofit/>
           </a:bodyPr>
           <a:lstStyle/>
           <a:p>
+            <a:r>
+              <a:rPr lang="en-US" sz="1700" dirty="0">
+                <a:solidFill>
+                  <a:srgbClr val="17364A"/>
+                </a:solidFill>
+                <a:latin typeface="Aptos" pitchFamily="34" charset="0"/>
+                <a:ea typeface="Aptos" pitchFamily="34" charset="-122"/>
+                <a:cs typeface="Aptos" pitchFamily="34" charset="-120"/>
+              </a:rPr>
+              <a:t>What errors would be most harmful in this workflow?</a:t>
+            </a:r>
+            <a:endParaRPr lang="en-US" sz="1700" dirty="0"/>
+          </a:p>
+          <a:p>
+            <a:r>
+              <a:rPr lang="en-US" sz="1700" dirty="0">
+                <a:solidFill>
+                  <a:srgbClr val="17364A"/>
+                </a:solidFill>
+                <a:latin typeface="Aptos" pitchFamily="34" charset="0"/>
+                <a:ea typeface="Aptos" pitchFamily="34" charset="-122"/>
+                <a:cs typeface="Aptos" pitchFamily="34" charset="-120"/>
+              </a:rPr>
+              <a:t>Who would review model outputs, override them, and document concerns?</a:t>
+            </a:r>
+            <a:endParaRPr lang="en-US" sz="1700" dirty="0"/>
+          </a:p>
+        </p:txBody>
+      </p:sp>
+      <p:sp>
+        <p:nvSpPr>
+          <p:cNvPr id="9" name="Shape 7"/>
+          <p:cNvSpPr/>
+          <p:nvPr/>
+        </p:nvSpPr>
+        <p:spPr>
+          <a:xfrm>
+            <a:off x="7909560" y="1417320"/>
+            <a:ext cx="3154680" cy="1828800"/>
+          </a:xfrm>
+          <a:prstGeom prst="roundRect">
+            <a:avLst>
+              <a:gd name="adj" fmla="val 6000"/>
+            </a:avLst>
+          </a:prstGeom>
+          <a:solidFill>
+            <a:srgbClr val="EEF8ED"/>
+          </a:solidFill>
+          <a:ln w="12700">
+            <a:solidFill>
+              <a:srgbClr val="B9D7E6"/>
+            </a:solidFill>
+            <a:prstDash val="solid"/>
+          </a:ln>
+        </p:spPr>
+      </p:sp>
+      <p:sp>
+        <p:nvSpPr>
+          <p:cNvPr id="10" name="Text 8"/>
+          <p:cNvSpPr/>
+          <p:nvPr/>
+        </p:nvSpPr>
+        <p:spPr>
+          <a:xfrm>
+            <a:off x="8074152" y="1563624"/>
+            <a:ext cx="2825496" cy="201168"/>
+          </a:xfrm>
+          <a:prstGeom prst="rect">
+            <a:avLst/>
+          </a:prstGeom>
+          <a:noFill/>
+          <a:ln/>
+        </p:spPr>
+        <p:txBody>
+          <a:bodyPr wrap="square" lIns="0" tIns="0" rIns="0" bIns="0" rtlCol="0" anchor="ctr"/>
+          <a:lstStyle/>
+          <a:p>
             <a:pPr indent="0" marL="0">
               <a:buNone/>
             </a:pPr>
             <a:r>
-              <a:rPr lang="en-US" sz="1420" dirty="0">
+              <a:rPr lang="en-US" sz="950" b="1" dirty="0">
+                <a:solidFill>
+                  <a:srgbClr val="0068B7"/>
+                </a:solidFill>
+                <a:latin typeface="Aptos" pitchFamily="34" charset="0"/>
+                <a:ea typeface="Aptos" pitchFamily="34" charset="-122"/>
+                <a:cs typeface="Aptos" pitchFamily="34" charset="-120"/>
+              </a:rPr>
+              <a:t>Key idea</a:t>
+            </a:r>
+            <a:endParaRPr lang="en-US" sz="950" dirty="0"/>
+          </a:p>
+        </p:txBody>
+      </p:sp>
+      <p:sp>
+        <p:nvSpPr>
+          <p:cNvPr id="11" name="Text 9"/>
+          <p:cNvSpPr/>
+          <p:nvPr/>
+        </p:nvSpPr>
+        <p:spPr>
+          <a:xfrm>
+            <a:off x="8074152" y="1856232"/>
+            <a:ext cx="2825496" cy="1261872"/>
+          </a:xfrm>
+          <a:prstGeom prst="rect">
+            <a:avLst/>
+          </a:prstGeom>
+          <a:noFill/>
+          <a:ln/>
+        </p:spPr>
+        <p:txBody>
+          <a:bodyPr wrap="square" lIns="0" tIns="0" rIns="0" bIns="0" rtlCol="0" anchor="t">
+            <a:normAutofit/>
+          </a:bodyPr>
+          <a:lstStyle/>
+          <a:p>
+            <a:pPr indent="0" marL="0">
+              <a:buNone/>
+            </a:pPr>
+            <a:r>
+              <a:rPr lang="en-US" sz="1250" dirty="0">
                 <a:solidFill>
                   <a:srgbClr val="17364A"/>
                 </a:solidFill>
@@ -4597,9 +6824,116 @@
                 <a:ea typeface="Aptos" pitchFamily="34" charset="-122"/>
                 <a:cs typeface="Aptos" pitchFamily="34" charset="-120"/>
               </a:rPr>
-              <a:t>Machine learning use case review worksheet Feature and label inventory Initial model risk and safeguard list</a:t>
-            </a:r>
-            <a:endParaRPr lang="en-US" sz="1420" dirty="0"/>
+              <a:t>What errors would be most harmful in this workflow?</a:t>
+            </a:r>
+            <a:endParaRPr lang="en-US" sz="1250" dirty="0"/>
+          </a:p>
+        </p:txBody>
+      </p:sp>
+      <p:sp>
+        <p:nvSpPr>
+          <p:cNvPr id="12" name="Shape 10"/>
+          <p:cNvSpPr/>
+          <p:nvPr/>
+        </p:nvSpPr>
+        <p:spPr>
+          <a:xfrm>
+            <a:off x="7909560" y="3520440"/>
+            <a:ext cx="3154680" cy="1737360"/>
+          </a:xfrm>
+          <a:prstGeom prst="roundRect">
+            <a:avLst>
+              <a:gd name="adj" fmla="val 6316"/>
+            </a:avLst>
+          </a:prstGeom>
+          <a:solidFill>
+            <a:srgbClr val="EAF6F8"/>
+          </a:solidFill>
+          <a:ln w="12700">
+            <a:solidFill>
+              <a:srgbClr val="B9D7E6"/>
+            </a:solidFill>
+            <a:prstDash val="solid"/>
+          </a:ln>
+        </p:spPr>
+      </p:sp>
+      <p:sp>
+        <p:nvSpPr>
+          <p:cNvPr id="13" name="Text 11"/>
+          <p:cNvSpPr/>
+          <p:nvPr/>
+        </p:nvSpPr>
+        <p:spPr>
+          <a:xfrm>
+            <a:off x="8074152" y="3666744"/>
+            <a:ext cx="2825496" cy="201168"/>
+          </a:xfrm>
+          <a:prstGeom prst="rect">
+            <a:avLst/>
+          </a:prstGeom>
+          <a:noFill/>
+          <a:ln/>
+        </p:spPr>
+        <p:txBody>
+          <a:bodyPr wrap="square" lIns="0" tIns="0" rIns="0" bIns="0" rtlCol="0" anchor="ctr"/>
+          <a:lstStyle/>
+          <a:p>
+            <a:pPr indent="0" marL="0">
+              <a:buNone/>
+            </a:pPr>
+            <a:r>
+              <a:rPr lang="en-US" sz="950" b="1" dirty="0">
+                <a:solidFill>
+                  <a:srgbClr val="0068B7"/>
+                </a:solidFill>
+                <a:latin typeface="Aptos" pitchFamily="34" charset="0"/>
+                <a:ea typeface="Aptos" pitchFamily="34" charset="-122"/>
+                <a:cs typeface="Aptos" pitchFamily="34" charset="-120"/>
+              </a:rPr>
+              <a:t>Use this for</a:t>
+            </a:r>
+            <a:endParaRPr lang="en-US" sz="950" dirty="0"/>
+          </a:p>
+        </p:txBody>
+      </p:sp>
+      <p:sp>
+        <p:nvSpPr>
+          <p:cNvPr id="14" name="Text 12"/>
+          <p:cNvSpPr/>
+          <p:nvPr/>
+        </p:nvSpPr>
+        <p:spPr>
+          <a:xfrm>
+            <a:off x="8074152" y="3959352"/>
+            <a:ext cx="2825496" cy="1170432"/>
+          </a:xfrm>
+          <a:prstGeom prst="rect">
+            <a:avLst/>
+          </a:prstGeom>
+          <a:noFill/>
+          <a:ln/>
+        </p:spPr>
+        <p:txBody>
+          <a:bodyPr wrap="square" lIns="0" tIns="0" rIns="0" bIns="0" rtlCol="0" anchor="t">
+            <a:normAutofit/>
+          </a:bodyPr>
+          <a:lstStyle/>
+          <a:p>
+            <a:pPr indent="0" marL="0">
+              <a:buNone/>
+            </a:pPr>
+            <a:r>
+              <a:rPr lang="en-US" sz="1250" dirty="0">
+                <a:solidFill>
+                  <a:srgbClr val="17364A"/>
+                </a:solidFill>
+                <a:latin typeface="Aptos" pitchFamily="34" charset="0"/>
+                <a:ea typeface="Aptos" pitchFamily="34" charset="-122"/>
+                <a:cs typeface="Aptos" pitchFamily="34" charset="-120"/>
+              </a:rPr>
+              <a:t>Connect the concept to public health decisions, safeguards, documentation, or implementation work.</a:t>
+            </a:r>
+            <a:endParaRPr lang="en-US" sz="1250" dirty="0"/>
           </a:p>
         </p:txBody>
       </p:sp>
@@ -4662,7 +6996,32 @@
       </p:sp>
       <p:sp>
         <p:nvSpPr>
-          <p:cNvPr id="3" name="Text 1"/>
+          <p:cNvPr id="3" name="Shape 1"/>
+          <p:cNvSpPr/>
+          <p:nvPr/>
+        </p:nvSpPr>
+        <p:spPr>
+          <a:xfrm>
+            <a:off x="0" y="164592"/>
+            <a:ext cx="146304" cy="6693408"/>
+          </a:xfrm>
+          <a:prstGeom prst="rect">
+            <a:avLst/>
+          </a:prstGeom>
+          <a:solidFill>
+            <a:srgbClr val="2F8A28"/>
+          </a:solidFill>
+          <a:ln w="12700">
+            <a:solidFill>
+              <a:srgbClr val="2F8A28"/>
+            </a:solidFill>
+            <a:prstDash val="solid"/>
+          </a:ln>
+        </p:spPr>
+      </p:sp>
+      <p:sp>
+        <p:nvSpPr>
+          <p:cNvPr id="4" name="Text 2"/>
           <p:cNvSpPr/>
           <p:nvPr/>
         </p:nvSpPr>
@@ -4701,7 +7060,7 @@
       </p:sp>
       <p:sp>
         <p:nvSpPr>
-          <p:cNvPr id="4" name="Text 2"/>
+          <p:cNvPr id="5" name="Text 3"/>
           <p:cNvSpPr/>
           <p:nvPr/>
         </p:nvSpPr>
@@ -4740,7 +7099,7 @@
       </p:sp>
       <p:sp>
         <p:nvSpPr>
-          <p:cNvPr id="5" name="Text 3"/>
+          <p:cNvPr id="6" name="Text 4"/>
           <p:cNvSpPr/>
           <p:nvPr/>
         </p:nvSpPr>
@@ -4779,13 +7138,77 @@
       </p:sp>
       <p:sp>
         <p:nvSpPr>
-          <p:cNvPr id="6" name="Text 4"/>
+          <p:cNvPr id="7" name="Shape 5"/>
           <p:cNvSpPr/>
           <p:nvPr/>
         </p:nvSpPr>
         <p:spPr>
           <a:xfrm>
             <a:off x="640080" y="658368"/>
+            <a:ext cx="420624" cy="420624"/>
+          </a:xfrm>
+          <a:prstGeom prst="ellipse">
+            <a:avLst/>
+          </a:prstGeom>
+          <a:solidFill>
+            <a:srgbClr val="0068B7"/>
+          </a:solidFill>
+          <a:ln w="12700">
+            <a:solidFill>
+              <a:srgbClr val="0068B7"/>
+            </a:solidFill>
+            <a:prstDash val="solid"/>
+          </a:ln>
+        </p:spPr>
+      </p:sp>
+      <p:sp>
+        <p:nvSpPr>
+          <p:cNvPr id="8" name="Text 6"/>
+          <p:cNvSpPr/>
+          <p:nvPr/>
+        </p:nvSpPr>
+        <p:spPr>
+          <a:xfrm>
+            <a:off x="640080" y="731520"/>
+            <a:ext cx="420624" cy="164592"/>
+          </a:xfrm>
+          <a:prstGeom prst="rect">
+            <a:avLst/>
+          </a:prstGeom>
+          <a:noFill/>
+          <a:ln/>
+        </p:spPr>
+        <p:txBody>
+          <a:bodyPr wrap="square" lIns="0" tIns="0" rIns="0" bIns="0" rtlCol="0" anchor="ctr"/>
+          <a:lstStyle/>
+          <a:p>
+            <a:pPr algn="ctr" indent="0" marL="0">
+              <a:buNone/>
+            </a:pPr>
+            <a:r>
+              <a:rPr lang="en-US" sz="1100" b="1" dirty="0">
+                <a:solidFill>
+                  <a:srgbClr val="FFFFFF"/>
+                </a:solidFill>
+                <a:latin typeface="Aptos" pitchFamily="34" charset="0"/>
+                <a:ea typeface="Aptos" pitchFamily="34" charset="-122"/>
+                <a:cs typeface="Aptos" pitchFamily="34" charset="-120"/>
+              </a:rPr>
+              <a:t>9</a:t>
+            </a:r>
+            <a:endParaRPr lang="en-US" sz="1100" dirty="0"/>
+          </a:p>
+        </p:txBody>
+      </p:sp>
+      <p:sp>
+        <p:nvSpPr>
+          <p:cNvPr id="9" name="Text 7"/>
+          <p:cNvSpPr/>
+          <p:nvPr/>
+        </p:nvSpPr>
+        <p:spPr>
+          <a:xfrm>
+            <a:off x="640080" y="621792"/>
             <a:ext cx="10881360" cy="566928"/>
           </a:xfrm>
           <a:prstGeom prst="rect">
@@ -4812,7 +7235,7 @@
                 <a:ea typeface="Aptos Display" pitchFamily="34" charset="-122"/>
                 <a:cs typeface="Aptos Display" pitchFamily="34" charset="-120"/>
               </a:rPr>
-              <a:t>Expected Artifact or Evidence Continued</a:t>
+              <a:t>Practical Exercise</a:t>
             </a:r>
             <a:endParaRPr lang="en-US" sz="2700" dirty="0"/>
           </a:p>
@@ -4820,32 +7243,178 @@
       </p:sp>
       <p:sp>
         <p:nvSpPr>
-          <p:cNvPr id="7" name="Text 5"/>
-          <p:cNvSpPr/>
-          <p:nvPr/>
-        </p:nvSpPr>
-        <p:spPr>
-          <a:xfrm>
-            <a:off x="822960" y="1325880"/>
-            <a:ext cx="10378440" cy="4800600"/>
-          </a:xfrm>
-          <a:prstGeom prst="rect">
-            <a:avLst/>
-          </a:prstGeom>
-          <a:noFill/>
-          <a:ln/>
-        </p:spPr>
-        <p:txBody>
-          <a:bodyPr wrap="square" lIns="1016" tIns="1016" rIns="1016" bIns="1016" rtlCol="0" anchor="t">
+          <p:cNvPr id="10" name="Text 8"/>
+          <p:cNvSpPr/>
+          <p:nvPr/>
+        </p:nvSpPr>
+        <p:spPr>
+          <a:xfrm>
+            <a:off x="868680" y="1417320"/>
+            <a:ext cx="6675120" cy="4434840"/>
+          </a:xfrm>
+          <a:prstGeom prst="rect">
+            <a:avLst/>
+          </a:prstGeom>
+          <a:noFill/>
+          <a:ln/>
+        </p:spPr>
+        <p:txBody>
+          <a:bodyPr wrap="square" lIns="635" tIns="635" rIns="635" bIns="635" rtlCol="0" anchor="t">
             <a:normAutofit/>
           </a:bodyPr>
           <a:lstStyle/>
           <a:p>
+            <a:r>
+              <a:rPr lang="en-US" sz="1700" dirty="0">
+                <a:solidFill>
+                  <a:srgbClr val="17364A"/>
+                </a:solidFill>
+                <a:latin typeface="Aptos" pitchFamily="34" charset="0"/>
+                <a:ea typeface="Aptos" pitchFamily="34" charset="-122"/>
+                <a:cs typeface="Aptos" pitchFamily="34" charset="-120"/>
+              </a:rPr>
+              <a:t>Create a machine learning use case review worksheet for one public health workflow.</a:t>
+            </a:r>
+            <a:endParaRPr lang="en-US" sz="1700" dirty="0"/>
+          </a:p>
+          <a:p>
+            <a:r>
+              <a:rPr lang="en-US" sz="1700" dirty="0">
+                <a:solidFill>
+                  <a:srgbClr val="17364A"/>
+                </a:solidFill>
+                <a:latin typeface="Aptos" pitchFamily="34" charset="0"/>
+                <a:ea typeface="Aptos" pitchFamily="34" charset="-122"/>
+                <a:cs typeface="Aptos" pitchFamily="34" charset="-120"/>
+              </a:rPr>
+              <a:t>The worksheet should describe the public health task, intended use, data sources, candidate features, proposed label,.</a:t>
+            </a:r>
+            <a:endParaRPr lang="en-US" sz="1700" dirty="0"/>
+          </a:p>
+          <a:p>
+            <a:r>
+              <a:rPr lang="en-US" sz="1700" dirty="0">
+                <a:solidFill>
+                  <a:srgbClr val="17364A"/>
+                </a:solidFill>
+                <a:latin typeface="Aptos" pitchFamily="34" charset="0"/>
+                <a:ea typeface="Aptos" pitchFamily="34" charset="-122"/>
+                <a:cs typeface="Aptos" pitchFamily="34" charset="-120"/>
+              </a:rPr>
+              <a:t>This exercise should produce a governance-ready artifact.</a:t>
+            </a:r>
+            <a:endParaRPr lang="en-US" sz="1700" dirty="0"/>
+          </a:p>
+          <a:p>
+            <a:r>
+              <a:rPr lang="en-US" sz="1700" dirty="0">
+                <a:solidFill>
+                  <a:srgbClr val="17364A"/>
+                </a:solidFill>
+                <a:latin typeface="Aptos" pitchFamily="34" charset="0"/>
+                <a:ea typeface="Aptos" pitchFamily="34" charset="-122"/>
+                <a:cs typeface="Aptos" pitchFamily="34" charset="-120"/>
+              </a:rPr>
+              <a:t>Learners should identify at least three reasons the model might fail and at least three safeguards that should be in place.</a:t>
+            </a:r>
+            <a:endParaRPr lang="en-US" sz="1700" dirty="0"/>
+          </a:p>
+        </p:txBody>
+      </p:sp>
+      <p:sp>
+        <p:nvSpPr>
+          <p:cNvPr id="11" name="Shape 9"/>
+          <p:cNvSpPr/>
+          <p:nvPr/>
+        </p:nvSpPr>
+        <p:spPr>
+          <a:xfrm>
+            <a:off x="7909560" y="1417320"/>
+            <a:ext cx="3154680" cy="1828800"/>
+          </a:xfrm>
+          <a:prstGeom prst="roundRect">
+            <a:avLst>
+              <a:gd name="adj" fmla="val 6000"/>
+            </a:avLst>
+          </a:prstGeom>
+          <a:solidFill>
+            <a:srgbClr val="EEF8ED"/>
+          </a:solidFill>
+          <a:ln w="12700">
+            <a:solidFill>
+              <a:srgbClr val="B9D7E6"/>
+            </a:solidFill>
+            <a:prstDash val="solid"/>
+          </a:ln>
+        </p:spPr>
+      </p:sp>
+      <p:sp>
+        <p:nvSpPr>
+          <p:cNvPr id="12" name="Text 10"/>
+          <p:cNvSpPr/>
+          <p:nvPr/>
+        </p:nvSpPr>
+        <p:spPr>
+          <a:xfrm>
+            <a:off x="8074152" y="1563624"/>
+            <a:ext cx="2825496" cy="201168"/>
+          </a:xfrm>
+          <a:prstGeom prst="rect">
+            <a:avLst/>
+          </a:prstGeom>
+          <a:noFill/>
+          <a:ln/>
+        </p:spPr>
+        <p:txBody>
+          <a:bodyPr wrap="square" lIns="0" tIns="0" rIns="0" bIns="0" rtlCol="0" anchor="ctr"/>
+          <a:lstStyle/>
+          <a:p>
             <a:pPr indent="0" marL="0">
               <a:buNone/>
             </a:pPr>
             <a:r>
-              <a:rPr lang="en-US" sz="1420" dirty="0">
+              <a:rPr lang="en-US" sz="950" b="1" dirty="0">
+                <a:solidFill>
+                  <a:srgbClr val="0068B7"/>
+                </a:solidFill>
+                <a:latin typeface="Aptos" pitchFamily="34" charset="0"/>
+                <a:ea typeface="Aptos" pitchFamily="34" charset="-122"/>
+                <a:cs typeface="Aptos" pitchFamily="34" charset="-120"/>
+              </a:rPr>
+              <a:t>Key idea</a:t>
+            </a:r>
+            <a:endParaRPr lang="en-US" sz="950" dirty="0"/>
+          </a:p>
+        </p:txBody>
+      </p:sp>
+      <p:sp>
+        <p:nvSpPr>
+          <p:cNvPr id="13" name="Text 11"/>
+          <p:cNvSpPr/>
+          <p:nvPr/>
+        </p:nvSpPr>
+        <p:spPr>
+          <a:xfrm>
+            <a:off x="8074152" y="1856232"/>
+            <a:ext cx="2825496" cy="1261872"/>
+          </a:xfrm>
+          <a:prstGeom prst="rect">
+            <a:avLst/>
+          </a:prstGeom>
+          <a:noFill/>
+          <a:ln/>
+        </p:spPr>
+        <p:txBody>
+          <a:bodyPr wrap="square" lIns="0" tIns="0" rIns="0" bIns="0" rtlCol="0" anchor="t">
+            <a:normAutofit/>
+          </a:bodyPr>
+          <a:lstStyle/>
+          <a:p>
+            <a:pPr indent="0" marL="0">
+              <a:buNone/>
+            </a:pPr>
+            <a:r>
+              <a:rPr lang="en-US" sz="1250" dirty="0">
                 <a:solidFill>
                   <a:srgbClr val="17364A"/>
                 </a:solidFill>
@@ -4853,9 +7422,116 @@
                 <a:ea typeface="Aptos" pitchFamily="34" charset="-122"/>
                 <a:cs typeface="Aptos" pitchFamily="34" charset="-120"/>
               </a:rPr>
-              <a:t>Human review and monitoring notes</a:t>
-            </a:r>
-            <a:endParaRPr lang="en-US" sz="1420" dirty="0"/>
+              <a:t>Create a machine learning use case review worksheet for one public health workflow.</a:t>
+            </a:r>
+            <a:endParaRPr lang="en-US" sz="1250" dirty="0"/>
+          </a:p>
+        </p:txBody>
+      </p:sp>
+      <p:sp>
+        <p:nvSpPr>
+          <p:cNvPr id="14" name="Shape 12"/>
+          <p:cNvSpPr/>
+          <p:nvPr/>
+        </p:nvSpPr>
+        <p:spPr>
+          <a:xfrm>
+            <a:off x="7909560" y="3520440"/>
+            <a:ext cx="3154680" cy="1737360"/>
+          </a:xfrm>
+          <a:prstGeom prst="roundRect">
+            <a:avLst>
+              <a:gd name="adj" fmla="val 6316"/>
+            </a:avLst>
+          </a:prstGeom>
+          <a:solidFill>
+            <a:srgbClr val="EAF6F8"/>
+          </a:solidFill>
+          <a:ln w="12700">
+            <a:solidFill>
+              <a:srgbClr val="B9D7E6"/>
+            </a:solidFill>
+            <a:prstDash val="solid"/>
+          </a:ln>
+        </p:spPr>
+      </p:sp>
+      <p:sp>
+        <p:nvSpPr>
+          <p:cNvPr id="15" name="Text 13"/>
+          <p:cNvSpPr/>
+          <p:nvPr/>
+        </p:nvSpPr>
+        <p:spPr>
+          <a:xfrm>
+            <a:off x="8074152" y="3666744"/>
+            <a:ext cx="2825496" cy="201168"/>
+          </a:xfrm>
+          <a:prstGeom prst="rect">
+            <a:avLst/>
+          </a:prstGeom>
+          <a:noFill/>
+          <a:ln/>
+        </p:spPr>
+        <p:txBody>
+          <a:bodyPr wrap="square" lIns="0" tIns="0" rIns="0" bIns="0" rtlCol="0" anchor="ctr"/>
+          <a:lstStyle/>
+          <a:p>
+            <a:pPr indent="0" marL="0">
+              <a:buNone/>
+            </a:pPr>
+            <a:r>
+              <a:rPr lang="en-US" sz="950" b="1" dirty="0">
+                <a:solidFill>
+                  <a:srgbClr val="0068B7"/>
+                </a:solidFill>
+                <a:latin typeface="Aptos" pitchFamily="34" charset="0"/>
+                <a:ea typeface="Aptos" pitchFamily="34" charset="-122"/>
+                <a:cs typeface="Aptos" pitchFamily="34" charset="-120"/>
+              </a:rPr>
+              <a:t>Use this for</a:t>
+            </a:r>
+            <a:endParaRPr lang="en-US" sz="950" dirty="0"/>
+          </a:p>
+        </p:txBody>
+      </p:sp>
+      <p:sp>
+        <p:nvSpPr>
+          <p:cNvPr id="16" name="Text 14"/>
+          <p:cNvSpPr/>
+          <p:nvPr/>
+        </p:nvSpPr>
+        <p:spPr>
+          <a:xfrm>
+            <a:off x="8074152" y="3959352"/>
+            <a:ext cx="2825496" cy="1170432"/>
+          </a:xfrm>
+          <a:prstGeom prst="rect">
+            <a:avLst/>
+          </a:prstGeom>
+          <a:noFill/>
+          <a:ln/>
+        </p:spPr>
+        <p:txBody>
+          <a:bodyPr wrap="square" lIns="0" tIns="0" rIns="0" bIns="0" rtlCol="0" anchor="t">
+            <a:normAutofit/>
+          </a:bodyPr>
+          <a:lstStyle/>
+          <a:p>
+            <a:pPr indent="0" marL="0">
+              <a:buNone/>
+            </a:pPr>
+            <a:r>
+              <a:rPr lang="en-US" sz="1250" dirty="0">
+                <a:solidFill>
+                  <a:srgbClr val="17364A"/>
+                </a:solidFill>
+                <a:latin typeface="Aptos" pitchFamily="34" charset="0"/>
+                <a:ea typeface="Aptos" pitchFamily="34" charset="-122"/>
+                <a:cs typeface="Aptos" pitchFamily="34" charset="-120"/>
+              </a:rPr>
+              <a:t>Connect the concept to public health decisions, safeguards, documentation, or implementation work.</a:t>
+            </a:r>
+            <a:endParaRPr lang="en-US" sz="1250" dirty="0"/>
           </a:p>
         </p:txBody>
       </p:sp>
@@ -4918,7 +7594,32 @@
       </p:sp>
       <p:sp>
         <p:nvSpPr>
-          <p:cNvPr id="3" name="Text 1"/>
+          <p:cNvPr id="3" name="Shape 1"/>
+          <p:cNvSpPr/>
+          <p:nvPr/>
+        </p:nvSpPr>
+        <p:spPr>
+          <a:xfrm>
+            <a:off x="0" y="164592"/>
+            <a:ext cx="146304" cy="6693408"/>
+          </a:xfrm>
+          <a:prstGeom prst="rect">
+            <a:avLst/>
+          </a:prstGeom>
+          <a:solidFill>
+            <a:srgbClr val="2F8A28"/>
+          </a:solidFill>
+          <a:ln w="12700">
+            <a:solidFill>
+              <a:srgbClr val="2F8A28"/>
+            </a:solidFill>
+            <a:prstDash val="solid"/>
+          </a:ln>
+        </p:spPr>
+      </p:sp>
+      <p:sp>
+        <p:nvSpPr>
+          <p:cNvPr id="4" name="Text 2"/>
           <p:cNvSpPr/>
           <p:nvPr/>
         </p:nvSpPr>
@@ -4957,7 +7658,7 @@
       </p:sp>
       <p:sp>
         <p:nvSpPr>
-          <p:cNvPr id="4" name="Text 2"/>
+          <p:cNvPr id="5" name="Text 3"/>
           <p:cNvSpPr/>
           <p:nvPr/>
         </p:nvSpPr>
@@ -4996,7 +7697,7 @@
       </p:sp>
       <p:sp>
         <p:nvSpPr>
-          <p:cNvPr id="5" name="Text 3"/>
+          <p:cNvPr id="6" name="Text 4"/>
           <p:cNvSpPr/>
           <p:nvPr/>
         </p:nvSpPr>
@@ -5035,13 +7736,77 @@
       </p:sp>
       <p:sp>
         <p:nvSpPr>
-          <p:cNvPr id="6" name="Text 4"/>
+          <p:cNvPr id="7" name="Shape 5"/>
           <p:cNvSpPr/>
           <p:nvPr/>
         </p:nvSpPr>
         <p:spPr>
           <a:xfrm>
             <a:off x="640080" y="658368"/>
+            <a:ext cx="420624" cy="420624"/>
+          </a:xfrm>
+          <a:prstGeom prst="ellipse">
+            <a:avLst/>
+          </a:prstGeom>
+          <a:solidFill>
+            <a:srgbClr val="0068B7"/>
+          </a:solidFill>
+          <a:ln w="12700">
+            <a:solidFill>
+              <a:srgbClr val="0068B7"/>
+            </a:solidFill>
+            <a:prstDash val="solid"/>
+          </a:ln>
+        </p:spPr>
+      </p:sp>
+      <p:sp>
+        <p:nvSpPr>
+          <p:cNvPr id="8" name="Text 6"/>
+          <p:cNvSpPr/>
+          <p:nvPr/>
+        </p:nvSpPr>
+        <p:spPr>
+          <a:xfrm>
+            <a:off x="640080" y="731520"/>
+            <a:ext cx="420624" cy="164592"/>
+          </a:xfrm>
+          <a:prstGeom prst="rect">
+            <a:avLst/>
+          </a:prstGeom>
+          <a:noFill/>
+          <a:ln/>
+        </p:spPr>
+        <p:txBody>
+          <a:bodyPr wrap="square" lIns="0" tIns="0" rIns="0" bIns="0" rtlCol="0" anchor="ctr"/>
+          <a:lstStyle/>
+          <a:p>
+            <a:pPr algn="ctr" indent="0" marL="0">
+              <a:buNone/>
+            </a:pPr>
+            <a:r>
+              <a:rPr lang="en-US" sz="1100" b="1" dirty="0">
+                <a:solidFill>
+                  <a:srgbClr val="FFFFFF"/>
+                </a:solidFill>
+                <a:latin typeface="Aptos" pitchFamily="34" charset="0"/>
+                <a:ea typeface="Aptos" pitchFamily="34" charset="-122"/>
+                <a:cs typeface="Aptos" pitchFamily="34" charset="-120"/>
+              </a:rPr>
+              <a:t>10</a:t>
+            </a:r>
+            <a:endParaRPr lang="en-US" sz="1100" dirty="0"/>
+          </a:p>
+        </p:txBody>
+      </p:sp>
+      <p:sp>
+        <p:nvSpPr>
+          <p:cNvPr id="9" name="Text 7"/>
+          <p:cNvSpPr/>
+          <p:nvPr/>
+        </p:nvSpPr>
+        <p:spPr>
+          <a:xfrm>
+            <a:off x="640080" y="621792"/>
             <a:ext cx="10881360" cy="566928"/>
           </a:xfrm>
           <a:prstGeom prst="rect">
@@ -5068,7 +7833,7 @@
                 <a:ea typeface="Aptos Display" pitchFamily="34" charset="-122"/>
                 <a:cs typeface="Aptos Display" pitchFamily="34" charset="-120"/>
               </a:rPr>
-              <a:t>Expected Assignment</a:t>
+              <a:t>Expected Artifact or Evidence</a:t>
             </a:r>
             <a:endParaRPr lang="en-US" sz="2700" dirty="0"/>
           </a:p>
@@ -5076,14 +7841,14 @@
       </p:sp>
       <p:sp>
         <p:nvSpPr>
-          <p:cNvPr id="7" name="Text 5"/>
-          <p:cNvSpPr/>
-          <p:nvPr/>
-        </p:nvSpPr>
-        <p:spPr>
-          <a:xfrm>
-            <a:off x="822960" y="1325880"/>
-            <a:ext cx="10378440" cy="4800600"/>
+          <p:cNvPr id="10" name="Text 8"/>
+          <p:cNvSpPr/>
+          <p:nvPr/>
+        </p:nvSpPr>
+        <p:spPr>
+          <a:xfrm>
+            <a:off x="868680" y="1417320"/>
+            <a:ext cx="6675120" cy="4434840"/>
           </a:xfrm>
           <a:prstGeom prst="rect">
             <a:avLst/>
@@ -5098,7 +7863,7 @@
           <a:lstStyle/>
           <a:p>
             <a:r>
-              <a:rPr lang="en-US" sz="1450" dirty="0">
+              <a:rPr lang="en-US" sz="1700" dirty="0">
                 <a:solidFill>
                   <a:srgbClr val="17364A"/>
                 </a:solidFill>
@@ -5108,11 +7873,11 @@
               </a:rPr>
               <a:t>Machine learning use case review worksheet</a:t>
             </a:r>
-            <a:endParaRPr lang="en-US" sz="1450" dirty="0"/>
-          </a:p>
-          <a:p>
-            <a:r>
-              <a:rPr lang="en-US" sz="1450" dirty="0">
+            <a:endParaRPr lang="en-US" sz="1700" dirty="0"/>
+          </a:p>
+          <a:p>
+            <a:r>
+              <a:rPr lang="en-US" sz="1700" dirty="0">
                 <a:solidFill>
                   <a:srgbClr val="17364A"/>
                 </a:solidFill>
@@ -5122,11 +7887,11 @@
               </a:rPr>
               <a:t>Feature and label inventory</a:t>
             </a:r>
-            <a:endParaRPr lang="en-US" sz="1450" dirty="0"/>
-          </a:p>
-          <a:p>
-            <a:r>
-              <a:rPr lang="en-US" sz="1450" dirty="0">
+            <a:endParaRPr lang="en-US" sz="1700" dirty="0"/>
+          </a:p>
+          <a:p>
+            <a:r>
+              <a:rPr lang="en-US" sz="1700" dirty="0">
                 <a:solidFill>
                   <a:srgbClr val="17364A"/>
                 </a:solidFill>
@@ -5136,11 +7901,104 @@
               </a:rPr>
               <a:t>Initial model risk and safeguard list</a:t>
             </a:r>
-            <a:endParaRPr lang="en-US" sz="1450" dirty="0"/>
-          </a:p>
-          <a:p>
-            <a:r>
-              <a:rPr lang="en-US" sz="1450" dirty="0">
+            <a:endParaRPr lang="en-US" sz="1700" dirty="0"/>
+          </a:p>
+        </p:txBody>
+      </p:sp>
+      <p:sp>
+        <p:nvSpPr>
+          <p:cNvPr id="11" name="Shape 9"/>
+          <p:cNvSpPr/>
+          <p:nvPr/>
+        </p:nvSpPr>
+        <p:spPr>
+          <a:xfrm>
+            <a:off x="7909560" y="1417320"/>
+            <a:ext cx="3154680" cy="1828800"/>
+          </a:xfrm>
+          <a:prstGeom prst="roundRect">
+            <a:avLst>
+              <a:gd name="adj" fmla="val 6000"/>
+            </a:avLst>
+          </a:prstGeom>
+          <a:solidFill>
+            <a:srgbClr val="EEF8ED"/>
+          </a:solidFill>
+          <a:ln w="12700">
+            <a:solidFill>
+              <a:srgbClr val="B9D7E6"/>
+            </a:solidFill>
+            <a:prstDash val="solid"/>
+          </a:ln>
+        </p:spPr>
+      </p:sp>
+      <p:sp>
+        <p:nvSpPr>
+          <p:cNvPr id="12" name="Text 10"/>
+          <p:cNvSpPr/>
+          <p:nvPr/>
+        </p:nvSpPr>
+        <p:spPr>
+          <a:xfrm>
+            <a:off x="8074152" y="1563624"/>
+            <a:ext cx="2825496" cy="201168"/>
+          </a:xfrm>
+          <a:prstGeom prst="rect">
+            <a:avLst/>
+          </a:prstGeom>
+          <a:noFill/>
+          <a:ln/>
+        </p:spPr>
+        <p:txBody>
+          <a:bodyPr wrap="square" lIns="0" tIns="0" rIns="0" bIns="0" rtlCol="0" anchor="ctr"/>
+          <a:lstStyle/>
+          <a:p>
+            <a:pPr indent="0" marL="0">
+              <a:buNone/>
+            </a:pPr>
+            <a:r>
+              <a:rPr lang="en-US" sz="950" b="1" dirty="0">
+                <a:solidFill>
+                  <a:srgbClr val="0068B7"/>
+                </a:solidFill>
+                <a:latin typeface="Aptos" pitchFamily="34" charset="0"/>
+                <a:ea typeface="Aptos" pitchFamily="34" charset="-122"/>
+                <a:cs typeface="Aptos" pitchFamily="34" charset="-120"/>
+              </a:rPr>
+              <a:t>Key idea</a:t>
+            </a:r>
+            <a:endParaRPr lang="en-US" sz="950" dirty="0"/>
+          </a:p>
+        </p:txBody>
+      </p:sp>
+      <p:sp>
+        <p:nvSpPr>
+          <p:cNvPr id="13" name="Text 11"/>
+          <p:cNvSpPr/>
+          <p:nvPr/>
+        </p:nvSpPr>
+        <p:spPr>
+          <a:xfrm>
+            <a:off x="8074152" y="1856232"/>
+            <a:ext cx="2825496" cy="1261872"/>
+          </a:xfrm>
+          <a:prstGeom prst="rect">
+            <a:avLst/>
+          </a:prstGeom>
+          <a:noFill/>
+          <a:ln/>
+        </p:spPr>
+        <p:txBody>
+          <a:bodyPr wrap="square" lIns="0" tIns="0" rIns="0" bIns="0" rtlCol="0" anchor="t">
+            <a:normAutofit/>
+          </a:bodyPr>
+          <a:lstStyle/>
+          <a:p>
+            <a:pPr indent="0" marL="0">
+              <a:buNone/>
+            </a:pPr>
+            <a:r>
+              <a:rPr lang="en-US" sz="1250" dirty="0">
                 <a:solidFill>
                   <a:srgbClr val="17364A"/>
                 </a:solidFill>
@@ -5148,9 +8006,116 @@
                 <a:ea typeface="Aptos" pitchFamily="34" charset="-122"/>
                 <a:cs typeface="Aptos" pitchFamily="34" charset="-120"/>
               </a:rPr>
-              <a:t>Human review and monitoring notes</a:t>
-            </a:r>
-            <a:endParaRPr lang="en-US" sz="1450" dirty="0"/>
+              <a:t>Machine learning use case review worksheet</a:t>
+            </a:r>
+            <a:endParaRPr lang="en-US" sz="1250" dirty="0"/>
+          </a:p>
+        </p:txBody>
+      </p:sp>
+      <p:sp>
+        <p:nvSpPr>
+          <p:cNvPr id="14" name="Shape 12"/>
+          <p:cNvSpPr/>
+          <p:nvPr/>
+        </p:nvSpPr>
+        <p:spPr>
+          <a:xfrm>
+            <a:off x="7909560" y="3520440"/>
+            <a:ext cx="3154680" cy="1737360"/>
+          </a:xfrm>
+          <a:prstGeom prst="roundRect">
+            <a:avLst>
+              <a:gd name="adj" fmla="val 6316"/>
+            </a:avLst>
+          </a:prstGeom>
+          <a:solidFill>
+            <a:srgbClr val="EAF6F8"/>
+          </a:solidFill>
+          <a:ln w="12700">
+            <a:solidFill>
+              <a:srgbClr val="B9D7E6"/>
+            </a:solidFill>
+            <a:prstDash val="solid"/>
+          </a:ln>
+        </p:spPr>
+      </p:sp>
+      <p:sp>
+        <p:nvSpPr>
+          <p:cNvPr id="15" name="Text 13"/>
+          <p:cNvSpPr/>
+          <p:nvPr/>
+        </p:nvSpPr>
+        <p:spPr>
+          <a:xfrm>
+            <a:off x="8074152" y="3666744"/>
+            <a:ext cx="2825496" cy="201168"/>
+          </a:xfrm>
+          <a:prstGeom prst="rect">
+            <a:avLst/>
+          </a:prstGeom>
+          <a:noFill/>
+          <a:ln/>
+        </p:spPr>
+        <p:txBody>
+          <a:bodyPr wrap="square" lIns="0" tIns="0" rIns="0" bIns="0" rtlCol="0" anchor="ctr"/>
+          <a:lstStyle/>
+          <a:p>
+            <a:pPr indent="0" marL="0">
+              <a:buNone/>
+            </a:pPr>
+            <a:r>
+              <a:rPr lang="en-US" sz="950" b="1" dirty="0">
+                <a:solidFill>
+                  <a:srgbClr val="0068B7"/>
+                </a:solidFill>
+                <a:latin typeface="Aptos" pitchFamily="34" charset="0"/>
+                <a:ea typeface="Aptos" pitchFamily="34" charset="-122"/>
+                <a:cs typeface="Aptos" pitchFamily="34" charset="-120"/>
+              </a:rPr>
+              <a:t>Use this for</a:t>
+            </a:r>
+            <a:endParaRPr lang="en-US" sz="950" dirty="0"/>
+          </a:p>
+        </p:txBody>
+      </p:sp>
+      <p:sp>
+        <p:nvSpPr>
+          <p:cNvPr id="16" name="Text 14"/>
+          <p:cNvSpPr/>
+          <p:nvPr/>
+        </p:nvSpPr>
+        <p:spPr>
+          <a:xfrm>
+            <a:off x="8074152" y="3959352"/>
+            <a:ext cx="2825496" cy="1170432"/>
+          </a:xfrm>
+          <a:prstGeom prst="rect">
+            <a:avLst/>
+          </a:prstGeom>
+          <a:noFill/>
+          <a:ln/>
+        </p:spPr>
+        <p:txBody>
+          <a:bodyPr wrap="square" lIns="0" tIns="0" rIns="0" bIns="0" rtlCol="0" anchor="t">
+            <a:normAutofit/>
+          </a:bodyPr>
+          <a:lstStyle/>
+          <a:p>
+            <a:pPr indent="0" marL="0">
+              <a:buNone/>
+            </a:pPr>
+            <a:r>
+              <a:rPr lang="en-US" sz="1250" dirty="0">
+                <a:solidFill>
+                  <a:srgbClr val="17364A"/>
+                </a:solidFill>
+                <a:latin typeface="Aptos" pitchFamily="34" charset="0"/>
+                <a:ea typeface="Aptos" pitchFamily="34" charset="-122"/>
+                <a:cs typeface="Aptos" pitchFamily="34" charset="-120"/>
+              </a:rPr>
+              <a:t>Connect the concept to public health decisions, safeguards, documentation, or implementation work.</a:t>
+            </a:r>
+            <a:endParaRPr lang="en-US" sz="1250" dirty="0"/>
           </a:p>
         </p:txBody>
       </p:sp>
@@ -5213,7 +8178,32 @@
       </p:sp>
       <p:sp>
         <p:nvSpPr>
-          <p:cNvPr id="3" name="Text 1"/>
+          <p:cNvPr id="3" name="Shape 1"/>
+          <p:cNvSpPr/>
+          <p:nvPr/>
+        </p:nvSpPr>
+        <p:spPr>
+          <a:xfrm>
+            <a:off x="0" y="164592"/>
+            <a:ext cx="146304" cy="6693408"/>
+          </a:xfrm>
+          <a:prstGeom prst="rect">
+            <a:avLst/>
+          </a:prstGeom>
+          <a:solidFill>
+            <a:srgbClr val="2F8A28"/>
+          </a:solidFill>
+          <a:ln w="12700">
+            <a:solidFill>
+              <a:srgbClr val="2F8A28"/>
+            </a:solidFill>
+            <a:prstDash val="solid"/>
+          </a:ln>
+        </p:spPr>
+      </p:sp>
+      <p:sp>
+        <p:nvSpPr>
+          <p:cNvPr id="4" name="Text 2"/>
           <p:cNvSpPr/>
           <p:nvPr/>
         </p:nvSpPr>
@@ -5252,7 +8242,7 @@
       </p:sp>
       <p:sp>
         <p:nvSpPr>
-          <p:cNvPr id="4" name="Text 2"/>
+          <p:cNvPr id="5" name="Text 3"/>
           <p:cNvSpPr/>
           <p:nvPr/>
         </p:nvSpPr>
@@ -5291,7 +8281,7 @@
       </p:sp>
       <p:sp>
         <p:nvSpPr>
-          <p:cNvPr id="5" name="Text 3"/>
+          <p:cNvPr id="6" name="Text 4"/>
           <p:cNvSpPr/>
           <p:nvPr/>
         </p:nvSpPr>
@@ -5330,7 +8320,7 @@
       </p:sp>
       <p:sp>
         <p:nvSpPr>
-          <p:cNvPr id="6" name="Text 4"/>
+          <p:cNvPr id="7" name="Text 5"/>
           <p:cNvSpPr/>
           <p:nvPr/>
         </p:nvSpPr>
@@ -5363,7 +8353,7 @@
                 <a:ea typeface="Aptos Display" pitchFamily="34" charset="-122"/>
                 <a:cs typeface="Aptos Display" pitchFamily="34" charset="-120"/>
               </a:rPr>
-              <a:t>Knowledge Check</a:t>
+              <a:t>Expected Artifact or Evidence Continued</a:t>
             </a:r>
             <a:endParaRPr lang="en-US" sz="2700" dirty="0"/>
           </a:p>
@@ -5371,14 +8361,14 @@
       </p:sp>
       <p:sp>
         <p:nvSpPr>
-          <p:cNvPr id="7" name="Text 5"/>
-          <p:cNvSpPr/>
-          <p:nvPr/>
-        </p:nvSpPr>
-        <p:spPr>
-          <a:xfrm>
-            <a:off x="822960" y="1325880"/>
-            <a:ext cx="10378440" cy="4800600"/>
+          <p:cNvPr id="8" name="Text 6"/>
+          <p:cNvSpPr/>
+          <p:nvPr/>
+        </p:nvSpPr>
+        <p:spPr>
+          <a:xfrm>
+            <a:off x="868680" y="1417320"/>
+            <a:ext cx="6675120" cy="4434840"/>
           </a:xfrm>
           <a:prstGeom prst="rect">
             <a:avLst/>
@@ -5393,7 +8383,7 @@
           <a:lstStyle/>
           <a:p>
             <a:r>
-              <a:rPr lang="en-US" sz="1450" dirty="0">
+              <a:rPr lang="en-US" sz="1700" dirty="0">
                 <a:solidFill>
                   <a:srgbClr val="17364A"/>
                 </a:solidFill>
@@ -5401,13 +8391,106 @@
                 <a:ea typeface="Aptos" pitchFamily="34" charset="-122"/>
                 <a:cs typeface="Aptos" pitchFamily="34" charset="-120"/>
               </a:rPr>
-              <a:t>1. Which statement best describes supervised learning?</a:t>
-            </a:r>
-            <a:endParaRPr lang="en-US" sz="1450" dirty="0"/>
-          </a:p>
-          <a:p>
-            <a:r>
-              <a:rPr lang="en-US" sz="1450" dirty="0">
+              <a:t>Human review and monitoring notes</a:t>
+            </a:r>
+            <a:endParaRPr lang="en-US" sz="1700" dirty="0"/>
+          </a:p>
+        </p:txBody>
+      </p:sp>
+      <p:sp>
+        <p:nvSpPr>
+          <p:cNvPr id="9" name="Shape 7"/>
+          <p:cNvSpPr/>
+          <p:nvPr/>
+        </p:nvSpPr>
+        <p:spPr>
+          <a:xfrm>
+            <a:off x="7909560" y="1417320"/>
+            <a:ext cx="3154680" cy="1828800"/>
+          </a:xfrm>
+          <a:prstGeom prst="roundRect">
+            <a:avLst>
+              <a:gd name="adj" fmla="val 6000"/>
+            </a:avLst>
+          </a:prstGeom>
+          <a:solidFill>
+            <a:srgbClr val="EEF8ED"/>
+          </a:solidFill>
+          <a:ln w="12700">
+            <a:solidFill>
+              <a:srgbClr val="B9D7E6"/>
+            </a:solidFill>
+            <a:prstDash val="solid"/>
+          </a:ln>
+        </p:spPr>
+      </p:sp>
+      <p:sp>
+        <p:nvSpPr>
+          <p:cNvPr id="10" name="Text 8"/>
+          <p:cNvSpPr/>
+          <p:nvPr/>
+        </p:nvSpPr>
+        <p:spPr>
+          <a:xfrm>
+            <a:off x="8074152" y="1563624"/>
+            <a:ext cx="2825496" cy="201168"/>
+          </a:xfrm>
+          <a:prstGeom prst="rect">
+            <a:avLst/>
+          </a:prstGeom>
+          <a:noFill/>
+          <a:ln/>
+        </p:spPr>
+        <p:txBody>
+          <a:bodyPr wrap="square" lIns="0" tIns="0" rIns="0" bIns="0" rtlCol="0" anchor="ctr"/>
+          <a:lstStyle/>
+          <a:p>
+            <a:pPr indent="0" marL="0">
+              <a:buNone/>
+            </a:pPr>
+            <a:r>
+              <a:rPr lang="en-US" sz="950" b="1" dirty="0">
+                <a:solidFill>
+                  <a:srgbClr val="0068B7"/>
+                </a:solidFill>
+                <a:latin typeface="Aptos" pitchFamily="34" charset="0"/>
+                <a:ea typeface="Aptos" pitchFamily="34" charset="-122"/>
+                <a:cs typeface="Aptos" pitchFamily="34" charset="-120"/>
+              </a:rPr>
+              <a:t>Key idea</a:t>
+            </a:r>
+            <a:endParaRPr lang="en-US" sz="950" dirty="0"/>
+          </a:p>
+        </p:txBody>
+      </p:sp>
+      <p:sp>
+        <p:nvSpPr>
+          <p:cNvPr id="11" name="Text 9"/>
+          <p:cNvSpPr/>
+          <p:nvPr/>
+        </p:nvSpPr>
+        <p:spPr>
+          <a:xfrm>
+            <a:off x="8074152" y="1856232"/>
+            <a:ext cx="2825496" cy="1261872"/>
+          </a:xfrm>
+          <a:prstGeom prst="rect">
+            <a:avLst/>
+          </a:prstGeom>
+          <a:noFill/>
+          <a:ln/>
+        </p:spPr>
+        <p:txBody>
+          <a:bodyPr wrap="square" lIns="0" tIns="0" rIns="0" bIns="0" rtlCol="0" anchor="t">
+            <a:normAutofit/>
+          </a:bodyPr>
+          <a:lstStyle/>
+          <a:p>
+            <a:pPr indent="0" marL="0">
+              <a:buNone/>
+            </a:pPr>
+            <a:r>
+              <a:rPr lang="en-US" sz="1250" dirty="0">
                 <a:solidFill>
                   <a:srgbClr val="17364A"/>
                 </a:solidFill>
@@ -5415,13 +8498,106 @@
                 <a:ea typeface="Aptos" pitchFamily="34" charset="-122"/>
                 <a:cs typeface="Aptos" pitchFamily="34" charset="-120"/>
               </a:rPr>
-              <a:t>2. Why can historical labels create risk?</a:t>
-            </a:r>
-            <a:endParaRPr lang="en-US" sz="1450" dirty="0"/>
-          </a:p>
-          <a:p>
-            <a:r>
-              <a:rPr lang="en-US" sz="1450" dirty="0">
+              <a:t>Human review and monitoring notes</a:t>
+            </a:r>
+            <a:endParaRPr lang="en-US" sz="1250" dirty="0"/>
+          </a:p>
+        </p:txBody>
+      </p:sp>
+      <p:sp>
+        <p:nvSpPr>
+          <p:cNvPr id="12" name="Shape 10"/>
+          <p:cNvSpPr/>
+          <p:nvPr/>
+        </p:nvSpPr>
+        <p:spPr>
+          <a:xfrm>
+            <a:off x="7909560" y="3520440"/>
+            <a:ext cx="3154680" cy="1737360"/>
+          </a:xfrm>
+          <a:prstGeom prst="roundRect">
+            <a:avLst>
+              <a:gd name="adj" fmla="val 6316"/>
+            </a:avLst>
+          </a:prstGeom>
+          <a:solidFill>
+            <a:srgbClr val="EAF6F8"/>
+          </a:solidFill>
+          <a:ln w="12700">
+            <a:solidFill>
+              <a:srgbClr val="B9D7E6"/>
+            </a:solidFill>
+            <a:prstDash val="solid"/>
+          </a:ln>
+        </p:spPr>
+      </p:sp>
+      <p:sp>
+        <p:nvSpPr>
+          <p:cNvPr id="13" name="Text 11"/>
+          <p:cNvSpPr/>
+          <p:nvPr/>
+        </p:nvSpPr>
+        <p:spPr>
+          <a:xfrm>
+            <a:off x="8074152" y="3666744"/>
+            <a:ext cx="2825496" cy="201168"/>
+          </a:xfrm>
+          <a:prstGeom prst="rect">
+            <a:avLst/>
+          </a:prstGeom>
+          <a:noFill/>
+          <a:ln/>
+        </p:spPr>
+        <p:txBody>
+          <a:bodyPr wrap="square" lIns="0" tIns="0" rIns="0" bIns="0" rtlCol="0" anchor="ctr"/>
+          <a:lstStyle/>
+          <a:p>
+            <a:pPr indent="0" marL="0">
+              <a:buNone/>
+            </a:pPr>
+            <a:r>
+              <a:rPr lang="en-US" sz="950" b="1" dirty="0">
+                <a:solidFill>
+                  <a:srgbClr val="0068B7"/>
+                </a:solidFill>
+                <a:latin typeface="Aptos" pitchFamily="34" charset="0"/>
+                <a:ea typeface="Aptos" pitchFamily="34" charset="-122"/>
+                <a:cs typeface="Aptos" pitchFamily="34" charset="-120"/>
+              </a:rPr>
+              <a:t>Use this for</a:t>
+            </a:r>
+            <a:endParaRPr lang="en-US" sz="950" dirty="0"/>
+          </a:p>
+        </p:txBody>
+      </p:sp>
+      <p:sp>
+        <p:nvSpPr>
+          <p:cNvPr id="14" name="Text 12"/>
+          <p:cNvSpPr/>
+          <p:nvPr/>
+        </p:nvSpPr>
+        <p:spPr>
+          <a:xfrm>
+            <a:off x="8074152" y="3959352"/>
+            <a:ext cx="2825496" cy="1170432"/>
+          </a:xfrm>
+          <a:prstGeom prst="rect">
+            <a:avLst/>
+          </a:prstGeom>
+          <a:noFill/>
+          <a:ln/>
+        </p:spPr>
+        <p:txBody>
+          <a:bodyPr wrap="square" lIns="0" tIns="0" rIns="0" bIns="0" rtlCol="0" anchor="t">
+            <a:normAutofit/>
+          </a:bodyPr>
+          <a:lstStyle/>
+          <a:p>
+            <a:pPr indent="0" marL="0">
+              <a:buNone/>
+            </a:pPr>
+            <a:r>
+              <a:rPr lang="en-US" sz="1250" dirty="0">
                 <a:solidFill>
                   <a:srgbClr val="17364A"/>
                 </a:solidFill>
@@ -5429,37 +8605,9 @@
                 <a:ea typeface="Aptos" pitchFamily="34" charset="-122"/>
                 <a:cs typeface="Aptos" pitchFamily="34" charset="-120"/>
               </a:rPr>
-              <a:t>3. What is overfitting?</a:t>
-            </a:r>
-            <a:endParaRPr lang="en-US" sz="1450" dirty="0"/>
-          </a:p>
-          <a:p>
-            <a:r>
-              <a:rPr lang="en-US" sz="1450" dirty="0">
-                <a:solidFill>
-                  <a:srgbClr val="17364A"/>
-                </a:solidFill>
-                <a:latin typeface="Aptos" pitchFamily="34" charset="0"/>
-                <a:ea typeface="Aptos" pitchFamily="34" charset="-122"/>
-                <a:cs typeface="Aptos" pitchFamily="34" charset="-120"/>
-              </a:rPr>
-              <a:t>4. What should determine model thresholds in public health workflows?</a:t>
-            </a:r>
-            <a:endParaRPr lang="en-US" sz="1450" dirty="0"/>
-          </a:p>
-          <a:p>
-            <a:r>
-              <a:rPr lang="en-US" sz="1450" dirty="0">
-                <a:solidFill>
-                  <a:srgbClr val="17364A"/>
-                </a:solidFill>
-                <a:latin typeface="Aptos" pitchFamily="34" charset="0"/>
-                <a:ea typeface="Aptos" pitchFamily="34" charset="-122"/>
-                <a:cs typeface="Aptos" pitchFamily="34" charset="-120"/>
-              </a:rPr>
-              <a:t>5. What is strong completion evidence for this module?</a:t>
-            </a:r>
-            <a:endParaRPr lang="en-US" sz="1450" dirty="0"/>
+              <a:t>Connect the concept to public health decisions, safeguards, documentation, or implementation work.</a:t>
+            </a:r>
+            <a:endParaRPr lang="en-US" sz="1250" dirty="0"/>
           </a:p>
         </p:txBody>
       </p:sp>
@@ -5522,7 +8670,32 @@
       </p:sp>
       <p:sp>
         <p:nvSpPr>
-          <p:cNvPr id="3" name="Text 1"/>
+          <p:cNvPr id="3" name="Shape 1"/>
+          <p:cNvSpPr/>
+          <p:nvPr/>
+        </p:nvSpPr>
+        <p:spPr>
+          <a:xfrm>
+            <a:off x="0" y="164592"/>
+            <a:ext cx="146304" cy="6693408"/>
+          </a:xfrm>
+          <a:prstGeom prst="rect">
+            <a:avLst/>
+          </a:prstGeom>
+          <a:solidFill>
+            <a:srgbClr val="2F8A28"/>
+          </a:solidFill>
+          <a:ln w="12700">
+            <a:solidFill>
+              <a:srgbClr val="2F8A28"/>
+            </a:solidFill>
+            <a:prstDash val="solid"/>
+          </a:ln>
+        </p:spPr>
+      </p:sp>
+      <p:sp>
+        <p:nvSpPr>
+          <p:cNvPr id="4" name="Text 2"/>
           <p:cNvSpPr/>
           <p:nvPr/>
         </p:nvSpPr>
@@ -5561,7 +8734,7 @@
       </p:sp>
       <p:sp>
         <p:nvSpPr>
-          <p:cNvPr id="4" name="Text 2"/>
+          <p:cNvPr id="5" name="Text 3"/>
           <p:cNvSpPr/>
           <p:nvPr/>
         </p:nvSpPr>
@@ -5600,7 +8773,7 @@
       </p:sp>
       <p:sp>
         <p:nvSpPr>
-          <p:cNvPr id="5" name="Text 3"/>
+          <p:cNvPr id="6" name="Text 4"/>
           <p:cNvSpPr/>
           <p:nvPr/>
         </p:nvSpPr>
@@ -5639,7 +8812,7 @@
       </p:sp>
       <p:sp>
         <p:nvSpPr>
-          <p:cNvPr id="6" name="Text 4"/>
+          <p:cNvPr id="7" name="Text 5"/>
           <p:cNvSpPr/>
           <p:nvPr/>
         </p:nvSpPr>
@@ -5672,7 +8845,7 @@
                 <a:ea typeface="Aptos Display" pitchFamily="34" charset="-122"/>
                 <a:cs typeface="Aptos Display" pitchFamily="34" charset="-120"/>
               </a:rPr>
-              <a:t>Module Context</a:t>
+              <a:t>What this module helps you do</a:t>
             </a:r>
             <a:endParaRPr lang="en-US" sz="2700" dirty="0"/>
           </a:p>
@@ -5680,14 +8853,14 @@
       </p:sp>
       <p:sp>
         <p:nvSpPr>
-          <p:cNvPr id="7" name="Text 5"/>
-          <p:cNvSpPr/>
-          <p:nvPr/>
-        </p:nvSpPr>
-        <p:spPr>
-          <a:xfrm>
-            <a:off x="822960" y="1325880"/>
-            <a:ext cx="10378440" cy="1371600"/>
+          <p:cNvPr id="8" name="Text 6"/>
+          <p:cNvSpPr/>
+          <p:nvPr/>
+        </p:nvSpPr>
+        <p:spPr>
+          <a:xfrm>
+            <a:off x="868680" y="1417320"/>
+            <a:ext cx="6675120" cy="3291840"/>
           </a:xfrm>
           <a:prstGeom prst="rect">
             <a:avLst/>
@@ -5702,7 +8875,7 @@
           <a:lstStyle/>
           <a:p>
             <a:r>
-              <a:rPr lang="en-US" sz="1600" dirty="0">
+              <a:rPr lang="en-US" sz="1700" dirty="0">
                 <a:solidFill>
                   <a:srgbClr val="17364A"/>
                 </a:solidFill>
@@ -5710,13 +8883,13 @@
                 <a:ea typeface="Aptos" pitchFamily="34" charset="-122"/>
                 <a:cs typeface="Aptos" pitchFamily="34" charset="-120"/>
               </a:rPr>
-              <a:t>Level: applied/foundational</a:t>
-            </a:r>
-            <a:endParaRPr lang="en-US" sz="1600" dirty="0"/>
-          </a:p>
-          <a:p>
-            <a:r>
-              <a:rPr lang="en-US" sz="1600" dirty="0">
+              <a:t>Machine learning is a set of methods that allow computer systems to identify patterns in data and use those patterns to classify, predict, cluster,.</a:t>
+            </a:r>
+            <a:endParaRPr lang="en-US" sz="1700" dirty="0"/>
+          </a:p>
+          <a:p>
+            <a:r>
+              <a:rPr lang="en-US" sz="1700" dirty="0">
                 <a:solidFill>
                   <a:srgbClr val="17364A"/>
                 </a:solidFill>
@@ -5724,13 +8897,13 @@
                 <a:ea typeface="Aptos" pitchFamily="34" charset="-122"/>
                 <a:cs typeface="Aptos" pitchFamily="34" charset="-120"/>
               </a:rPr>
-              <a:t>Primary track: Analytics and Modeling Track</a:t>
-            </a:r>
-            <a:endParaRPr lang="en-US" sz="1600" dirty="0"/>
-          </a:p>
-          <a:p>
-            <a:r>
-              <a:rPr lang="en-US" sz="1600" dirty="0">
+              <a:t>In public health, machine learning may support surveillance triage, outbreak signal review, risk stratification, case classification, anomaly.</a:t>
+            </a:r>
+            <a:endParaRPr lang="en-US" sz="1700" dirty="0"/>
+          </a:p>
+          <a:p>
+            <a:r>
+              <a:rPr lang="en-US" sz="1700" dirty="0">
                 <a:solidFill>
                   <a:srgbClr val="17364A"/>
                 </a:solidFill>
@@ -5738,31 +8911,111 @@
                 <a:ea typeface="Aptos" pitchFamily="34" charset="-122"/>
                 <a:cs typeface="Aptos" pitchFamily="34" charset="-120"/>
               </a:rPr>
-              <a:t>Appears in tracks: analytics-modeling</a:t>
-            </a:r>
-            <a:endParaRPr lang="en-US" sz="1600" dirty="0"/>
-          </a:p>
-        </p:txBody>
-      </p:sp>
-      <p:sp>
-        <p:nvSpPr>
-          <p:cNvPr id="8" name="Text 6"/>
-          <p:cNvSpPr/>
-          <p:nvPr/>
-        </p:nvSpPr>
-        <p:spPr>
-          <a:xfrm>
-            <a:off x="822960" y="2743200"/>
-            <a:ext cx="10378440" cy="2834640"/>
-          </a:xfrm>
-          <a:prstGeom prst="rect">
-            <a:avLst/>
-          </a:prstGeom>
-          <a:noFill/>
-          <a:ln/>
-        </p:spPr>
-        <p:txBody>
-          <a:bodyPr wrap="square" lIns="1016" tIns="1016" rIns="1016" bIns="1016" rtlCol="0" anchor="t">
+              <a:t>The purpose of this module is not to turn every learner into a data scientist.</a:t>
+            </a:r>
+            <a:endParaRPr lang="en-US" sz="1700" dirty="0"/>
+          </a:p>
+          <a:p>
+            <a:r>
+              <a:rPr lang="en-US" sz="1700" dirty="0">
+                <a:solidFill>
+                  <a:srgbClr val="17364A"/>
+                </a:solidFill>
+                <a:latin typeface="Aptos" pitchFamily="34" charset="0"/>
+                <a:ea typeface="Aptos" pitchFamily="34" charset="-122"/>
+                <a:cs typeface="Aptos" pitchFamily="34" charset="-120"/>
+              </a:rPr>
+              <a:t>The purpose is to help public health informaticians, epidemiologists, and technologists understand the concepts needed to evaluate whether a machine.</a:t>
+            </a:r>
+            <a:endParaRPr lang="en-US" sz="1700" dirty="0"/>
+          </a:p>
+        </p:txBody>
+      </p:sp>
+      <p:sp>
+        <p:nvSpPr>
+          <p:cNvPr id="9" name="Shape 7"/>
+          <p:cNvSpPr/>
+          <p:nvPr/>
+        </p:nvSpPr>
+        <p:spPr>
+          <a:xfrm>
+            <a:off x="7909560" y="1417320"/>
+            <a:ext cx="3154680" cy="1920240"/>
+          </a:xfrm>
+          <a:prstGeom prst="roundRect">
+            <a:avLst>
+              <a:gd name="adj" fmla="val 5714"/>
+            </a:avLst>
+          </a:prstGeom>
+          <a:solidFill>
+            <a:srgbClr val="EAF6F8"/>
+          </a:solidFill>
+          <a:ln w="12700">
+            <a:solidFill>
+              <a:srgbClr val="B9D7E6"/>
+            </a:solidFill>
+            <a:prstDash val="solid"/>
+          </a:ln>
+        </p:spPr>
+      </p:sp>
+      <p:sp>
+        <p:nvSpPr>
+          <p:cNvPr id="10" name="Text 8"/>
+          <p:cNvSpPr/>
+          <p:nvPr/>
+        </p:nvSpPr>
+        <p:spPr>
+          <a:xfrm>
+            <a:off x="8074152" y="1563624"/>
+            <a:ext cx="2825496" cy="201168"/>
+          </a:xfrm>
+          <a:prstGeom prst="rect">
+            <a:avLst/>
+          </a:prstGeom>
+          <a:noFill/>
+          <a:ln/>
+        </p:spPr>
+        <p:txBody>
+          <a:bodyPr wrap="square" lIns="0" tIns="0" rIns="0" bIns="0" rtlCol="0" anchor="ctr"/>
+          <a:lstStyle/>
+          <a:p>
+            <a:pPr indent="0" marL="0">
+              <a:buNone/>
+            </a:pPr>
+            <a:r>
+              <a:rPr lang="en-US" sz="950" b="1" dirty="0">
+                <a:solidFill>
+                  <a:srgbClr val="0068B7"/>
+                </a:solidFill>
+                <a:latin typeface="Aptos" pitchFamily="34" charset="0"/>
+                <a:ea typeface="Aptos" pitchFamily="34" charset="-122"/>
+                <a:cs typeface="Aptos" pitchFamily="34" charset="-120"/>
+              </a:rPr>
+              <a:t>Module details</a:t>
+            </a:r>
+            <a:endParaRPr lang="en-US" sz="950" dirty="0"/>
+          </a:p>
+        </p:txBody>
+      </p:sp>
+      <p:sp>
+        <p:nvSpPr>
+          <p:cNvPr id="11" name="Text 9"/>
+          <p:cNvSpPr/>
+          <p:nvPr/>
+        </p:nvSpPr>
+        <p:spPr>
+          <a:xfrm>
+            <a:off x="8074152" y="1856232"/>
+            <a:ext cx="2825496" cy="1353312"/>
+          </a:xfrm>
+          <a:prstGeom prst="rect">
+            <a:avLst/>
+          </a:prstGeom>
+          <a:noFill/>
+          <a:ln/>
+        </p:spPr>
+        <p:txBody>
+          <a:bodyPr wrap="square" lIns="0" tIns="0" rIns="0" bIns="0" rtlCol="0" anchor="t">
             <a:normAutofit/>
           </a:bodyPr>
           <a:lstStyle/>
@@ -5771,7 +9024,7 @@
               <a:buNone/>
             </a:pPr>
             <a:r>
-              <a:rPr lang="en-US" sz="1400" dirty="0">
+              <a:rPr lang="en-US" sz="1250" dirty="0">
                 <a:solidFill>
                   <a:srgbClr val="17364A"/>
                 </a:solidFill>
@@ -5779,9 +9032,150 @@
                 <a:ea typeface="Aptos" pitchFamily="34" charset="-122"/>
                 <a:cs typeface="Aptos" pitchFamily="34" charset="-120"/>
               </a:rPr>
-              <a:t>Machine learning is a set of methods that allow computer systems to identify patterns in data and use those patterns to classify, predict, cluster, or prioritize information. In public health, machine learning may support surveillance triage, outbreak signal review, risk stratification, case classification, anomaly detection, service planning, or quality improvement. The purpose of this module is not to turn every learner into a data scientist. The purpose is to help public health informaticians, epidemiologists, and technologists understand the concepts needed to evaluate whether a machine learning approach is appropriate, valid, equitable, and operationally useful. Machine learning should be understood as one analytic option among many. Traditional epidemiologic methods, rules-based logic, statistical models, and human judgment remain essential in many public health workflows. A machine learning model may be helpful when patterns are complex, high-dimensional, or difficult to express as simple rules. It may be inappropriate when data are sparse, labels are unreliable, the decision is highly consequential, or the public health question requires causal interpretation rather than prediction. This module introduces supervised learning, unsupervised learning, features, labels, training data, validation data, test data, overfitting, generalization, and model performance. Learners will connect these concepts to public health examples and identify the safeguards needed before machine learning outputs are used to support public health action.</a:t>
-            </a:r>
-            <a:endParaRPr lang="en-US" sz="1400" dirty="0"/>
+              <a:t>Level: applied/foundational</a:t>
+            </a:r>
+            <a:endParaRPr lang="en-US" sz="1250" dirty="0"/>
+          </a:p>
+          <a:p>
+            <a:pPr indent="0" marL="0">
+              <a:buNone/>
+            </a:pPr>
+            <a:r>
+              <a:rPr lang="en-US" sz="1250" dirty="0">
+                <a:solidFill>
+                  <a:srgbClr val="17364A"/>
+                </a:solidFill>
+                <a:latin typeface="Aptos" pitchFamily="34" charset="0"/>
+                <a:ea typeface="Aptos" pitchFamily="34" charset="-122"/>
+                <a:cs typeface="Aptos" pitchFamily="34" charset="-120"/>
+              </a:rPr>
+              <a:t>Primary track: Analytics and Modeling Track</a:t>
+            </a:r>
+            <a:endParaRPr lang="en-US" sz="1250" dirty="0"/>
+          </a:p>
+          <a:p>
+            <a:pPr indent="0" marL="0">
+              <a:buNone/>
+            </a:pPr>
+            <a:r>
+              <a:rPr lang="en-US" sz="1250" dirty="0">
+                <a:solidFill>
+                  <a:srgbClr val="17364A"/>
+                </a:solidFill>
+                <a:latin typeface="Aptos" pitchFamily="34" charset="0"/>
+                <a:ea typeface="Aptos" pitchFamily="34" charset="-122"/>
+                <a:cs typeface="Aptos" pitchFamily="34" charset="-120"/>
+              </a:rPr>
+              <a:t>Appears in tracks: analytics-modeling</a:t>
+            </a:r>
+            <a:endParaRPr lang="en-US" sz="1250" dirty="0"/>
+          </a:p>
+        </p:txBody>
+      </p:sp>
+      <p:sp>
+        <p:nvSpPr>
+          <p:cNvPr id="12" name="Shape 10"/>
+          <p:cNvSpPr/>
+          <p:nvPr/>
+        </p:nvSpPr>
+        <p:spPr>
+          <a:xfrm>
+            <a:off x="7909560" y="3611880"/>
+            <a:ext cx="3154680" cy="1783080"/>
+          </a:xfrm>
+          <a:prstGeom prst="roundRect">
+            <a:avLst>
+              <a:gd name="adj" fmla="val 6154"/>
+            </a:avLst>
+          </a:prstGeom>
+          <a:solidFill>
+            <a:srgbClr val="EEF8ED"/>
+          </a:solidFill>
+          <a:ln w="12700">
+            <a:solidFill>
+              <a:srgbClr val="B9D7E6"/>
+            </a:solidFill>
+            <a:prstDash val="solid"/>
+          </a:ln>
+        </p:spPr>
+      </p:sp>
+      <p:sp>
+        <p:nvSpPr>
+          <p:cNvPr id="13" name="Text 11"/>
+          <p:cNvSpPr/>
+          <p:nvPr/>
+        </p:nvSpPr>
+        <p:spPr>
+          <a:xfrm>
+            <a:off x="8074152" y="3758184"/>
+            <a:ext cx="2825496" cy="201168"/>
+          </a:xfrm>
+          <a:prstGeom prst="rect">
+            <a:avLst/>
+          </a:prstGeom>
+          <a:noFill/>
+          <a:ln/>
+        </p:spPr>
+        <p:txBody>
+          <a:bodyPr wrap="square" lIns="0" tIns="0" rIns="0" bIns="0" rtlCol="0" anchor="ctr"/>
+          <a:lstStyle/>
+          <a:p>
+            <a:pPr indent="0" marL="0">
+              <a:buNone/>
+            </a:pPr>
+            <a:r>
+              <a:rPr lang="en-US" sz="950" b="1" dirty="0">
+                <a:solidFill>
+                  <a:srgbClr val="0068B7"/>
+                </a:solidFill>
+                <a:latin typeface="Aptos" pitchFamily="34" charset="0"/>
+                <a:ea typeface="Aptos" pitchFamily="34" charset="-122"/>
+                <a:cs typeface="Aptos" pitchFamily="34" charset="-120"/>
+              </a:rPr>
+              <a:t>Learning approach</a:t>
+            </a:r>
+            <a:endParaRPr lang="en-US" sz="950" dirty="0"/>
+          </a:p>
+        </p:txBody>
+      </p:sp>
+      <p:sp>
+        <p:nvSpPr>
+          <p:cNvPr id="14" name="Text 12"/>
+          <p:cNvSpPr/>
+          <p:nvPr/>
+        </p:nvSpPr>
+        <p:spPr>
+          <a:xfrm>
+            <a:off x="8074152" y="4050792"/>
+            <a:ext cx="2825496" cy="1216152"/>
+          </a:xfrm>
+          <a:prstGeom prst="rect">
+            <a:avLst/>
+          </a:prstGeom>
+          <a:noFill/>
+          <a:ln/>
+        </p:spPr>
+        <p:txBody>
+          <a:bodyPr wrap="square" lIns="0" tIns="0" rIns="0" bIns="0" rtlCol="0" anchor="t">
+            <a:normAutofit/>
+          </a:bodyPr>
+          <a:lstStyle/>
+          <a:p>
+            <a:pPr indent="0" marL="0">
+              <a:buNone/>
+            </a:pPr>
+            <a:r>
+              <a:rPr lang="en-US" sz="1250" dirty="0">
+                <a:solidFill>
+                  <a:srgbClr val="17364A"/>
+                </a:solidFill>
+                <a:latin typeface="Aptos" pitchFamily="34" charset="0"/>
+                <a:ea typeface="Aptos" pitchFamily="34" charset="-122"/>
+                <a:cs typeface="Aptos" pitchFamily="34" charset="-120"/>
+              </a:rPr>
+              <a:t>Review the core ideas, complete the practical exercise, check your understanding, and use the related plays and tools to apply the lesson.</a:t>
+            </a:r>
+            <a:endParaRPr lang="en-US" sz="1250" dirty="0"/>
           </a:p>
         </p:txBody>
       </p:sp>
@@ -5844,7 +9238,32 @@
       </p:sp>
       <p:sp>
         <p:nvSpPr>
-          <p:cNvPr id="3" name="Text 1"/>
+          <p:cNvPr id="3" name="Shape 1"/>
+          <p:cNvSpPr/>
+          <p:nvPr/>
+        </p:nvSpPr>
+        <p:spPr>
+          <a:xfrm>
+            <a:off x="0" y="164592"/>
+            <a:ext cx="146304" cy="6693408"/>
+          </a:xfrm>
+          <a:prstGeom prst="rect">
+            <a:avLst/>
+          </a:prstGeom>
+          <a:solidFill>
+            <a:srgbClr val="2F8A28"/>
+          </a:solidFill>
+          <a:ln w="12700">
+            <a:solidFill>
+              <a:srgbClr val="2F8A28"/>
+            </a:solidFill>
+            <a:prstDash val="solid"/>
+          </a:ln>
+        </p:spPr>
+      </p:sp>
+      <p:sp>
+        <p:nvSpPr>
+          <p:cNvPr id="4" name="Text 2"/>
           <p:cNvSpPr/>
           <p:nvPr/>
         </p:nvSpPr>
@@ -5883,7 +9302,7 @@
       </p:sp>
       <p:sp>
         <p:nvSpPr>
-          <p:cNvPr id="4" name="Text 2"/>
+          <p:cNvPr id="5" name="Text 3"/>
           <p:cNvSpPr/>
           <p:nvPr/>
         </p:nvSpPr>
@@ -5922,7 +9341,7 @@
       </p:sp>
       <p:sp>
         <p:nvSpPr>
-          <p:cNvPr id="5" name="Text 3"/>
+          <p:cNvPr id="6" name="Text 4"/>
           <p:cNvSpPr/>
           <p:nvPr/>
         </p:nvSpPr>
@@ -5961,13 +9380,77 @@
       </p:sp>
       <p:sp>
         <p:nvSpPr>
-          <p:cNvPr id="6" name="Text 4"/>
+          <p:cNvPr id="7" name="Shape 5"/>
           <p:cNvSpPr/>
           <p:nvPr/>
         </p:nvSpPr>
         <p:spPr>
           <a:xfrm>
             <a:off x="640080" y="658368"/>
+            <a:ext cx="420624" cy="420624"/>
+          </a:xfrm>
+          <a:prstGeom prst="ellipse">
+            <a:avLst/>
+          </a:prstGeom>
+          <a:solidFill>
+            <a:srgbClr val="0068B7"/>
+          </a:solidFill>
+          <a:ln w="12700">
+            <a:solidFill>
+              <a:srgbClr val="0068B7"/>
+            </a:solidFill>
+            <a:prstDash val="solid"/>
+          </a:ln>
+        </p:spPr>
+      </p:sp>
+      <p:sp>
+        <p:nvSpPr>
+          <p:cNvPr id="8" name="Text 6"/>
+          <p:cNvSpPr/>
+          <p:nvPr/>
+        </p:nvSpPr>
+        <p:spPr>
+          <a:xfrm>
+            <a:off x="640080" y="731520"/>
+            <a:ext cx="420624" cy="164592"/>
+          </a:xfrm>
+          <a:prstGeom prst="rect">
+            <a:avLst/>
+          </a:prstGeom>
+          <a:noFill/>
+          <a:ln/>
+        </p:spPr>
+        <p:txBody>
+          <a:bodyPr wrap="square" lIns="0" tIns="0" rIns="0" bIns="0" rtlCol="0" anchor="ctr"/>
+          <a:lstStyle/>
+          <a:p>
+            <a:pPr algn="ctr" indent="0" marL="0">
+              <a:buNone/>
+            </a:pPr>
+            <a:r>
+              <a:rPr lang="en-US" sz="1100" b="1" dirty="0">
+                <a:solidFill>
+                  <a:srgbClr val="FFFFFF"/>
+                </a:solidFill>
+                <a:latin typeface="Aptos" pitchFamily="34" charset="0"/>
+                <a:ea typeface="Aptos" pitchFamily="34" charset="-122"/>
+                <a:cs typeface="Aptos" pitchFamily="34" charset="-120"/>
+              </a:rPr>
+              <a:t>11</a:t>
+            </a:r>
+            <a:endParaRPr lang="en-US" sz="1100" dirty="0"/>
+          </a:p>
+        </p:txBody>
+      </p:sp>
+      <p:sp>
+        <p:nvSpPr>
+          <p:cNvPr id="9" name="Text 7"/>
+          <p:cNvSpPr/>
+          <p:nvPr/>
+        </p:nvSpPr>
+        <p:spPr>
+          <a:xfrm>
+            <a:off x="640080" y="621792"/>
             <a:ext cx="10881360" cy="566928"/>
           </a:xfrm>
           <a:prstGeom prst="rect">
@@ -5994,7 +9477,7 @@
                 <a:ea typeface="Aptos Display" pitchFamily="34" charset="-122"/>
                 <a:cs typeface="Aptos Display" pitchFamily="34" charset="-120"/>
               </a:rPr>
-              <a:t>References and Resources</a:t>
+              <a:t>Expected Assignment</a:t>
             </a:r>
             <a:endParaRPr lang="en-US" sz="2700" dirty="0"/>
           </a:p>
@@ -6002,14 +9485,14 @@
       </p:sp>
       <p:sp>
         <p:nvSpPr>
-          <p:cNvPr id="7" name="Text 5"/>
-          <p:cNvSpPr/>
-          <p:nvPr/>
-        </p:nvSpPr>
-        <p:spPr>
-          <a:xfrm>
-            <a:off x="822960" y="1325880"/>
-            <a:ext cx="10378440" cy="4800600"/>
+          <p:cNvPr id="10" name="Text 8"/>
+          <p:cNvSpPr/>
+          <p:nvPr/>
+        </p:nvSpPr>
+        <p:spPr>
+          <a:xfrm>
+            <a:off x="868680" y="1417320"/>
+            <a:ext cx="6675120" cy="4434840"/>
           </a:xfrm>
           <a:prstGeom prst="rect">
             <a:avLst/>
@@ -6024,7 +9507,7 @@
           <a:lstStyle/>
           <a:p>
             <a:r>
-              <a:rPr lang="en-US" sz="1450" dirty="0">
+              <a:rPr lang="en-US" sz="1700" dirty="0">
                 <a:solidFill>
                   <a:srgbClr val="17364A"/>
                 </a:solidFill>
@@ -6032,13 +9515,1209 @@
                 <a:ea typeface="Aptos" pitchFamily="34" charset="-122"/>
                 <a:cs typeface="Aptos" pitchFamily="34" charset="-120"/>
               </a:rPr>
+              <a:t>Machine learning use case review worksheet</a:t>
+            </a:r>
+            <a:endParaRPr lang="en-US" sz="1700" dirty="0"/>
+          </a:p>
+          <a:p>
+            <a:r>
+              <a:rPr lang="en-US" sz="1700" dirty="0">
+                <a:solidFill>
+                  <a:srgbClr val="17364A"/>
+                </a:solidFill>
+                <a:latin typeface="Aptos" pitchFamily="34" charset="0"/>
+                <a:ea typeface="Aptos" pitchFamily="34" charset="-122"/>
+                <a:cs typeface="Aptos" pitchFamily="34" charset="-120"/>
+              </a:rPr>
+              <a:t>Feature and label inventory</a:t>
+            </a:r>
+            <a:endParaRPr lang="en-US" sz="1700" dirty="0"/>
+          </a:p>
+          <a:p>
+            <a:r>
+              <a:rPr lang="en-US" sz="1700" dirty="0">
+                <a:solidFill>
+                  <a:srgbClr val="17364A"/>
+                </a:solidFill>
+                <a:latin typeface="Aptos" pitchFamily="34" charset="0"/>
+                <a:ea typeface="Aptos" pitchFamily="34" charset="-122"/>
+                <a:cs typeface="Aptos" pitchFamily="34" charset="-120"/>
+              </a:rPr>
+              <a:t>Initial model risk and safeguard list</a:t>
+            </a:r>
+            <a:endParaRPr lang="en-US" sz="1700" dirty="0"/>
+          </a:p>
+          <a:p>
+            <a:r>
+              <a:rPr lang="en-US" sz="1700" dirty="0">
+                <a:solidFill>
+                  <a:srgbClr val="17364A"/>
+                </a:solidFill>
+                <a:latin typeface="Aptos" pitchFamily="34" charset="0"/>
+                <a:ea typeface="Aptos" pitchFamily="34" charset="-122"/>
+                <a:cs typeface="Aptos" pitchFamily="34" charset="-120"/>
+              </a:rPr>
+              <a:t>Human review and monitoring notes</a:t>
+            </a:r>
+            <a:endParaRPr lang="en-US" sz="1700" dirty="0"/>
+          </a:p>
+        </p:txBody>
+      </p:sp>
+      <p:sp>
+        <p:nvSpPr>
+          <p:cNvPr id="11" name="Shape 9"/>
+          <p:cNvSpPr/>
+          <p:nvPr/>
+        </p:nvSpPr>
+        <p:spPr>
+          <a:xfrm>
+            <a:off x="7909560" y="1417320"/>
+            <a:ext cx="3154680" cy="1828800"/>
+          </a:xfrm>
+          <a:prstGeom prst="roundRect">
+            <a:avLst>
+              <a:gd name="adj" fmla="val 6000"/>
+            </a:avLst>
+          </a:prstGeom>
+          <a:solidFill>
+            <a:srgbClr val="EEF8ED"/>
+          </a:solidFill>
+          <a:ln w="12700">
+            <a:solidFill>
+              <a:srgbClr val="B9D7E6"/>
+            </a:solidFill>
+            <a:prstDash val="solid"/>
+          </a:ln>
+        </p:spPr>
+      </p:sp>
+      <p:sp>
+        <p:nvSpPr>
+          <p:cNvPr id="12" name="Text 10"/>
+          <p:cNvSpPr/>
+          <p:nvPr/>
+        </p:nvSpPr>
+        <p:spPr>
+          <a:xfrm>
+            <a:off x="8074152" y="1563624"/>
+            <a:ext cx="2825496" cy="201168"/>
+          </a:xfrm>
+          <a:prstGeom prst="rect">
+            <a:avLst/>
+          </a:prstGeom>
+          <a:noFill/>
+          <a:ln/>
+        </p:spPr>
+        <p:txBody>
+          <a:bodyPr wrap="square" lIns="0" tIns="0" rIns="0" bIns="0" rtlCol="0" anchor="ctr"/>
+          <a:lstStyle/>
+          <a:p>
+            <a:pPr indent="0" marL="0">
+              <a:buNone/>
+            </a:pPr>
+            <a:r>
+              <a:rPr lang="en-US" sz="950" b="1" dirty="0">
+                <a:solidFill>
+                  <a:srgbClr val="0068B7"/>
+                </a:solidFill>
+                <a:latin typeface="Aptos" pitchFamily="34" charset="0"/>
+                <a:ea typeface="Aptos" pitchFamily="34" charset="-122"/>
+                <a:cs typeface="Aptos" pitchFamily="34" charset="-120"/>
+              </a:rPr>
+              <a:t>Key idea</a:t>
+            </a:r>
+            <a:endParaRPr lang="en-US" sz="950" dirty="0"/>
+          </a:p>
+        </p:txBody>
+      </p:sp>
+      <p:sp>
+        <p:nvSpPr>
+          <p:cNvPr id="13" name="Text 11"/>
+          <p:cNvSpPr/>
+          <p:nvPr/>
+        </p:nvSpPr>
+        <p:spPr>
+          <a:xfrm>
+            <a:off x="8074152" y="1856232"/>
+            <a:ext cx="2825496" cy="1261872"/>
+          </a:xfrm>
+          <a:prstGeom prst="rect">
+            <a:avLst/>
+          </a:prstGeom>
+          <a:noFill/>
+          <a:ln/>
+        </p:spPr>
+        <p:txBody>
+          <a:bodyPr wrap="square" lIns="0" tIns="0" rIns="0" bIns="0" rtlCol="0" anchor="t">
+            <a:normAutofit/>
+          </a:bodyPr>
+          <a:lstStyle/>
+          <a:p>
+            <a:pPr indent="0" marL="0">
+              <a:buNone/>
+            </a:pPr>
+            <a:r>
+              <a:rPr lang="en-US" sz="1250" dirty="0">
+                <a:solidFill>
+                  <a:srgbClr val="17364A"/>
+                </a:solidFill>
+                <a:latin typeface="Aptos" pitchFamily="34" charset="0"/>
+                <a:ea typeface="Aptos" pitchFamily="34" charset="-122"/>
+                <a:cs typeface="Aptos" pitchFamily="34" charset="-120"/>
+              </a:rPr>
+              <a:t>Machine learning use case review worksheet</a:t>
+            </a:r>
+            <a:endParaRPr lang="en-US" sz="1250" dirty="0"/>
+          </a:p>
+        </p:txBody>
+      </p:sp>
+      <p:sp>
+        <p:nvSpPr>
+          <p:cNvPr id="14" name="Shape 12"/>
+          <p:cNvSpPr/>
+          <p:nvPr/>
+        </p:nvSpPr>
+        <p:spPr>
+          <a:xfrm>
+            <a:off x="7909560" y="3520440"/>
+            <a:ext cx="3154680" cy="1737360"/>
+          </a:xfrm>
+          <a:prstGeom prst="roundRect">
+            <a:avLst>
+              <a:gd name="adj" fmla="val 6316"/>
+            </a:avLst>
+          </a:prstGeom>
+          <a:solidFill>
+            <a:srgbClr val="EAF6F8"/>
+          </a:solidFill>
+          <a:ln w="12700">
+            <a:solidFill>
+              <a:srgbClr val="B9D7E6"/>
+            </a:solidFill>
+            <a:prstDash val="solid"/>
+          </a:ln>
+        </p:spPr>
+      </p:sp>
+      <p:sp>
+        <p:nvSpPr>
+          <p:cNvPr id="15" name="Text 13"/>
+          <p:cNvSpPr/>
+          <p:nvPr/>
+        </p:nvSpPr>
+        <p:spPr>
+          <a:xfrm>
+            <a:off x="8074152" y="3666744"/>
+            <a:ext cx="2825496" cy="201168"/>
+          </a:xfrm>
+          <a:prstGeom prst="rect">
+            <a:avLst/>
+          </a:prstGeom>
+          <a:noFill/>
+          <a:ln/>
+        </p:spPr>
+        <p:txBody>
+          <a:bodyPr wrap="square" lIns="0" tIns="0" rIns="0" bIns="0" rtlCol="0" anchor="ctr"/>
+          <a:lstStyle/>
+          <a:p>
+            <a:pPr indent="0" marL="0">
+              <a:buNone/>
+            </a:pPr>
+            <a:r>
+              <a:rPr lang="en-US" sz="950" b="1" dirty="0">
+                <a:solidFill>
+                  <a:srgbClr val="0068B7"/>
+                </a:solidFill>
+                <a:latin typeface="Aptos" pitchFamily="34" charset="0"/>
+                <a:ea typeface="Aptos" pitchFamily="34" charset="-122"/>
+                <a:cs typeface="Aptos" pitchFamily="34" charset="-120"/>
+              </a:rPr>
+              <a:t>Use this for</a:t>
+            </a:r>
+            <a:endParaRPr lang="en-US" sz="950" dirty="0"/>
+          </a:p>
+        </p:txBody>
+      </p:sp>
+      <p:sp>
+        <p:nvSpPr>
+          <p:cNvPr id="16" name="Text 14"/>
+          <p:cNvSpPr/>
+          <p:nvPr/>
+        </p:nvSpPr>
+        <p:spPr>
+          <a:xfrm>
+            <a:off x="8074152" y="3959352"/>
+            <a:ext cx="2825496" cy="1170432"/>
+          </a:xfrm>
+          <a:prstGeom prst="rect">
+            <a:avLst/>
+          </a:prstGeom>
+          <a:noFill/>
+          <a:ln/>
+        </p:spPr>
+        <p:txBody>
+          <a:bodyPr wrap="square" lIns="0" tIns="0" rIns="0" bIns="0" rtlCol="0" anchor="t">
+            <a:normAutofit/>
+          </a:bodyPr>
+          <a:lstStyle/>
+          <a:p>
+            <a:pPr indent="0" marL="0">
+              <a:buNone/>
+            </a:pPr>
+            <a:r>
+              <a:rPr lang="en-US" sz="1250" dirty="0">
+                <a:solidFill>
+                  <a:srgbClr val="17364A"/>
+                </a:solidFill>
+                <a:latin typeface="Aptos" pitchFamily="34" charset="0"/>
+                <a:ea typeface="Aptos" pitchFamily="34" charset="-122"/>
+                <a:cs typeface="Aptos" pitchFamily="34" charset="-120"/>
+              </a:rPr>
+              <a:t>Connect the concept to public health decisions, safeguards, documentation, or implementation work.</a:t>
+            </a:r>
+            <a:endParaRPr lang="en-US" sz="1250" dirty="0"/>
+          </a:p>
+        </p:txBody>
+      </p:sp>
+    </p:spTree>
+  </p:cSld>
+  <p:clrMapOvr>
+    <a:masterClrMapping/>
+  </p:clrMapOvr>
+</p:sld>
+</file>
+
+<file path=ppt/slides/slide21.xml><?xml version="1.0" encoding="utf-8"?>
+<p:sld xmlns:a="http://schemas.openxmlformats.org/drawingml/2006/main" xmlns:r="http://schemas.openxmlformats.org/officeDocument/2006/relationships" xmlns:p="http://schemas.openxmlformats.org/presentationml/2006/main">
+  <p:cSld name="Slide 21">
+    <p:bg>
+      <p:bgPr>
+        <a:solidFill>
+          <a:srgbClr val="F7FBFD"/>
+        </a:solidFill>
+      </p:bgPr>
+    </p:bg>
+    <p:spTree>
+      <p:nvGrpSpPr>
+        <p:cNvPr id="1" name=""/>
+        <p:cNvGrpSpPr/>
+        <p:nvPr/>
+      </p:nvGrpSpPr>
+      <p:grpSpPr>
+        <a:xfrm>
+          <a:off x="0" y="0"/>
+          <a:ext cx="0" cy="0"/>
+          <a:chOff x="0" y="0"/>
+          <a:chExt cx="0" cy="0"/>
+        </a:xfrm>
+      </p:grpSpPr>
+      <p:sp>
+        <p:nvSpPr>
+          <p:cNvPr id="2" name="Shape 0"/>
+          <p:cNvSpPr/>
+          <p:nvPr/>
+        </p:nvSpPr>
+        <p:spPr>
+          <a:xfrm>
+            <a:off x="0" y="0"/>
+            <a:ext cx="12191695" cy="164592"/>
+          </a:xfrm>
+          <a:prstGeom prst="rect">
+            <a:avLst/>
+          </a:prstGeom>
+          <a:solidFill>
+            <a:srgbClr val="0068B7"/>
+          </a:solidFill>
+          <a:ln w="12700">
+            <a:solidFill>
+              <a:srgbClr val="0068B7"/>
+            </a:solidFill>
+            <a:prstDash val="solid"/>
+          </a:ln>
+        </p:spPr>
+      </p:sp>
+      <p:sp>
+        <p:nvSpPr>
+          <p:cNvPr id="3" name="Shape 1"/>
+          <p:cNvSpPr/>
+          <p:nvPr/>
+        </p:nvSpPr>
+        <p:spPr>
+          <a:xfrm>
+            <a:off x="0" y="164592"/>
+            <a:ext cx="146304" cy="6693408"/>
+          </a:xfrm>
+          <a:prstGeom prst="rect">
+            <a:avLst/>
+          </a:prstGeom>
+          <a:solidFill>
+            <a:srgbClr val="2F8A28"/>
+          </a:solidFill>
+          <a:ln w="12700">
+            <a:solidFill>
+              <a:srgbClr val="2F8A28"/>
+            </a:solidFill>
+            <a:prstDash val="solid"/>
+          </a:ln>
+        </p:spPr>
+      </p:sp>
+      <p:sp>
+        <p:nvSpPr>
+          <p:cNvPr id="4" name="Text 2"/>
+          <p:cNvSpPr/>
+          <p:nvPr/>
+        </p:nvSpPr>
+        <p:spPr>
+          <a:xfrm>
+            <a:off x="502920" y="292608"/>
+            <a:ext cx="10149840" cy="256032"/>
+          </a:xfrm>
+          <a:prstGeom prst="rect">
+            <a:avLst/>
+          </a:prstGeom>
+          <a:noFill/>
+          <a:ln/>
+        </p:spPr>
+        <p:txBody>
+          <a:bodyPr wrap="square" lIns="0" tIns="0" rIns="0" bIns="0" rtlCol="0" anchor="ctr"/>
+          <a:lstStyle/>
+          <a:p>
+            <a:pPr indent="0" marL="0">
+              <a:buNone/>
+            </a:pPr>
+            <a:r>
+              <a:rPr lang="en-US" sz="900" b="1" dirty="0">
+                <a:solidFill>
+                  <a:srgbClr val="5F7181"/>
+                </a:solidFill>
+                <a:latin typeface="Aptos" pitchFamily="34" charset="0"/>
+                <a:ea typeface="Aptos" pitchFamily="34" charset="-122"/>
+                <a:cs typeface="Aptos" pitchFamily="34" charset="-120"/>
+              </a:rPr>
+              <a:t>Machine Learning Basics for Epidemiology and Surveillance</a:t>
+            </a:r>
+            <a:endParaRPr lang="en-US" sz="900" dirty="0"/>
+          </a:p>
+        </p:txBody>
+      </p:sp>
+      <p:sp>
+        <p:nvSpPr>
+          <p:cNvPr id="5" name="Text 3"/>
+          <p:cNvSpPr/>
+          <p:nvPr/>
+        </p:nvSpPr>
+        <p:spPr>
+          <a:xfrm>
+            <a:off x="502920" y="6537960"/>
+            <a:ext cx="7772400" cy="201168"/>
+          </a:xfrm>
+          <a:prstGeom prst="rect">
+            <a:avLst/>
+          </a:prstGeom>
+          <a:noFill/>
+          <a:ln/>
+        </p:spPr>
+        <p:txBody>
+          <a:bodyPr wrap="square" lIns="0" tIns="0" rIns="0" bIns="0" rtlCol="0" anchor="ctr"/>
+          <a:lstStyle/>
+          <a:p>
+            <a:pPr indent="0" marL="0">
+              <a:buNone/>
+            </a:pPr>
+            <a:r>
+              <a:rPr lang="en-US" sz="800" dirty="0">
+                <a:solidFill>
+                  <a:srgbClr val="5F7181"/>
+                </a:solidFill>
+                <a:latin typeface="Aptos" pitchFamily="34" charset="0"/>
+                <a:ea typeface="Aptos" pitchFamily="34" charset="-122"/>
+                <a:cs typeface="Aptos" pitchFamily="34" charset="-120"/>
+              </a:rPr>
+              <a:t>AI Playbook and Toolkit for Public Health Departments</a:t>
+            </a:r>
+            <a:endParaRPr lang="en-US" sz="800" dirty="0"/>
+          </a:p>
+        </p:txBody>
+      </p:sp>
+      <p:sp>
+        <p:nvSpPr>
+          <p:cNvPr id="6" name="Text 4"/>
+          <p:cNvSpPr/>
+          <p:nvPr/>
+        </p:nvSpPr>
+        <p:spPr>
+          <a:xfrm>
+            <a:off x="9966960" y="6537960"/>
+            <a:ext cx="1645920" cy="201168"/>
+          </a:xfrm>
+          <a:prstGeom prst="rect">
+            <a:avLst/>
+          </a:prstGeom>
+          <a:noFill/>
+          <a:ln/>
+        </p:spPr>
+        <p:txBody>
+          <a:bodyPr wrap="square" lIns="0" tIns="0" rIns="0" bIns="0" rtlCol="0" anchor="ctr"/>
+          <a:lstStyle/>
+          <a:p>
+            <a:pPr algn="r" indent="0" marL="0">
+              <a:buNone/>
+            </a:pPr>
+            <a:r>
+              <a:rPr lang="en-US" sz="800" dirty="0">
+                <a:solidFill>
+                  <a:srgbClr val="5F7181"/>
+                </a:solidFill>
+                <a:latin typeface="Aptos" pitchFamily="34" charset="0"/>
+                <a:ea typeface="Aptos" pitchFamily="34" charset="-122"/>
+                <a:cs typeface="Aptos" pitchFamily="34" charset="-120"/>
+              </a:rPr>
+              <a:t>© Paula Soper</a:t>
+            </a:r>
+            <a:endParaRPr lang="en-US" sz="800" dirty="0"/>
+          </a:p>
+        </p:txBody>
+      </p:sp>
+      <p:sp>
+        <p:nvSpPr>
+          <p:cNvPr id="7" name="Shape 5"/>
+          <p:cNvSpPr/>
+          <p:nvPr/>
+        </p:nvSpPr>
+        <p:spPr>
+          <a:xfrm>
+            <a:off x="640080" y="658368"/>
+            <a:ext cx="420624" cy="420624"/>
+          </a:xfrm>
+          <a:prstGeom prst="ellipse">
+            <a:avLst/>
+          </a:prstGeom>
+          <a:solidFill>
+            <a:srgbClr val="0068B7"/>
+          </a:solidFill>
+          <a:ln w="12700">
+            <a:solidFill>
+              <a:srgbClr val="0068B7"/>
+            </a:solidFill>
+            <a:prstDash val="solid"/>
+          </a:ln>
+        </p:spPr>
+      </p:sp>
+      <p:sp>
+        <p:nvSpPr>
+          <p:cNvPr id="8" name="Text 6"/>
+          <p:cNvSpPr/>
+          <p:nvPr/>
+        </p:nvSpPr>
+        <p:spPr>
+          <a:xfrm>
+            <a:off x="640080" y="731520"/>
+            <a:ext cx="420624" cy="164592"/>
+          </a:xfrm>
+          <a:prstGeom prst="rect">
+            <a:avLst/>
+          </a:prstGeom>
+          <a:noFill/>
+          <a:ln/>
+        </p:spPr>
+        <p:txBody>
+          <a:bodyPr wrap="square" lIns="0" tIns="0" rIns="0" bIns="0" rtlCol="0" anchor="ctr"/>
+          <a:lstStyle/>
+          <a:p>
+            <a:pPr algn="ctr" indent="0" marL="0">
+              <a:buNone/>
+            </a:pPr>
+            <a:r>
+              <a:rPr lang="en-US" sz="1100" b="1" dirty="0">
+                <a:solidFill>
+                  <a:srgbClr val="FFFFFF"/>
+                </a:solidFill>
+                <a:latin typeface="Aptos" pitchFamily="34" charset="0"/>
+                <a:ea typeface="Aptos" pitchFamily="34" charset="-122"/>
+                <a:cs typeface="Aptos" pitchFamily="34" charset="-120"/>
+              </a:rPr>
+              <a:t>12</a:t>
+            </a:r>
+            <a:endParaRPr lang="en-US" sz="1100" dirty="0"/>
+          </a:p>
+        </p:txBody>
+      </p:sp>
+      <p:sp>
+        <p:nvSpPr>
+          <p:cNvPr id="9" name="Text 7"/>
+          <p:cNvSpPr/>
+          <p:nvPr/>
+        </p:nvSpPr>
+        <p:spPr>
+          <a:xfrm>
+            <a:off x="640080" y="621792"/>
+            <a:ext cx="10881360" cy="566928"/>
+          </a:xfrm>
+          <a:prstGeom prst="rect">
+            <a:avLst/>
+          </a:prstGeom>
+          <a:noFill/>
+          <a:ln/>
+        </p:spPr>
+        <p:txBody>
+          <a:bodyPr wrap="square" lIns="0" tIns="0" rIns="0" bIns="0" rtlCol="0" anchor="ctr">
+            <a:normAutofit/>
+          </a:bodyPr>
+          <a:lstStyle/>
+          <a:p>
+            <a:pPr indent="0" marL="0">
+              <a:buNone/>
+            </a:pPr>
+            <a:r>
+              <a:rPr lang="en-US" sz="2700" b="1" dirty="0">
+                <a:solidFill>
+                  <a:srgbClr val="003A63"/>
+                </a:solidFill>
+                <a:latin typeface="Aptos Display" pitchFamily="34" charset="0"/>
+                <a:ea typeface="Aptos Display" pitchFamily="34" charset="-122"/>
+                <a:cs typeface="Aptos Display" pitchFamily="34" charset="-120"/>
+              </a:rPr>
+              <a:t>Knowledge Check</a:t>
+            </a:r>
+            <a:endParaRPr lang="en-US" sz="2700" dirty="0"/>
+          </a:p>
+        </p:txBody>
+      </p:sp>
+      <p:sp>
+        <p:nvSpPr>
+          <p:cNvPr id="10" name="Text 8"/>
+          <p:cNvSpPr/>
+          <p:nvPr/>
+        </p:nvSpPr>
+        <p:spPr>
+          <a:xfrm>
+            <a:off x="868680" y="1417320"/>
+            <a:ext cx="6675120" cy="4434840"/>
+          </a:xfrm>
+          <a:prstGeom prst="rect">
+            <a:avLst/>
+          </a:prstGeom>
+          <a:noFill/>
+          <a:ln/>
+        </p:spPr>
+        <p:txBody>
+          <a:bodyPr wrap="square" lIns="635" tIns="635" rIns="635" bIns="635" rtlCol="0" anchor="t">
+            <a:normAutofit/>
+          </a:bodyPr>
+          <a:lstStyle/>
+          <a:p>
+            <a:r>
+              <a:rPr lang="en-US" sz="1700" dirty="0">
+                <a:solidFill>
+                  <a:srgbClr val="17364A"/>
+                </a:solidFill>
+                <a:latin typeface="Aptos" pitchFamily="34" charset="0"/>
+                <a:ea typeface="Aptos" pitchFamily="34" charset="-122"/>
+                <a:cs typeface="Aptos" pitchFamily="34" charset="-120"/>
+              </a:rPr>
+              <a:t>1. Which statement best describes supervised learning?</a:t>
+            </a:r>
+            <a:endParaRPr lang="en-US" sz="1700" dirty="0"/>
+          </a:p>
+          <a:p>
+            <a:r>
+              <a:rPr lang="en-US" sz="1700" dirty="0">
+                <a:solidFill>
+                  <a:srgbClr val="17364A"/>
+                </a:solidFill>
+                <a:latin typeface="Aptos" pitchFamily="34" charset="0"/>
+                <a:ea typeface="Aptos" pitchFamily="34" charset="-122"/>
+                <a:cs typeface="Aptos" pitchFamily="34" charset="-120"/>
+              </a:rPr>
+              <a:t>2. Why can historical labels create risk?</a:t>
+            </a:r>
+            <a:endParaRPr lang="en-US" sz="1700" dirty="0"/>
+          </a:p>
+          <a:p>
+            <a:r>
+              <a:rPr lang="en-US" sz="1700" dirty="0">
+                <a:solidFill>
+                  <a:srgbClr val="17364A"/>
+                </a:solidFill>
+                <a:latin typeface="Aptos" pitchFamily="34" charset="0"/>
+                <a:ea typeface="Aptos" pitchFamily="34" charset="-122"/>
+                <a:cs typeface="Aptos" pitchFamily="34" charset="-120"/>
+              </a:rPr>
+              <a:t>3. What is overfitting?</a:t>
+            </a:r>
+            <a:endParaRPr lang="en-US" sz="1700" dirty="0"/>
+          </a:p>
+          <a:p>
+            <a:r>
+              <a:rPr lang="en-US" sz="1700" dirty="0">
+                <a:solidFill>
+                  <a:srgbClr val="17364A"/>
+                </a:solidFill>
+                <a:latin typeface="Aptos" pitchFamily="34" charset="0"/>
+                <a:ea typeface="Aptos" pitchFamily="34" charset="-122"/>
+                <a:cs typeface="Aptos" pitchFamily="34" charset="-120"/>
+              </a:rPr>
+              <a:t>4. What should determine model thresholds in public health workflows?</a:t>
+            </a:r>
+            <a:endParaRPr lang="en-US" sz="1700" dirty="0"/>
+          </a:p>
+        </p:txBody>
+      </p:sp>
+      <p:sp>
+        <p:nvSpPr>
+          <p:cNvPr id="11" name="Shape 9"/>
+          <p:cNvSpPr/>
+          <p:nvPr/>
+        </p:nvSpPr>
+        <p:spPr>
+          <a:xfrm>
+            <a:off x="7909560" y="1417320"/>
+            <a:ext cx="3154680" cy="1828800"/>
+          </a:xfrm>
+          <a:prstGeom prst="roundRect">
+            <a:avLst>
+              <a:gd name="adj" fmla="val 6000"/>
+            </a:avLst>
+          </a:prstGeom>
+          <a:solidFill>
+            <a:srgbClr val="EEF8ED"/>
+          </a:solidFill>
+          <a:ln w="12700">
+            <a:solidFill>
+              <a:srgbClr val="B9D7E6"/>
+            </a:solidFill>
+            <a:prstDash val="solid"/>
+          </a:ln>
+        </p:spPr>
+      </p:sp>
+      <p:sp>
+        <p:nvSpPr>
+          <p:cNvPr id="12" name="Text 10"/>
+          <p:cNvSpPr/>
+          <p:nvPr/>
+        </p:nvSpPr>
+        <p:spPr>
+          <a:xfrm>
+            <a:off x="8074152" y="1563624"/>
+            <a:ext cx="2825496" cy="201168"/>
+          </a:xfrm>
+          <a:prstGeom prst="rect">
+            <a:avLst/>
+          </a:prstGeom>
+          <a:noFill/>
+          <a:ln/>
+        </p:spPr>
+        <p:txBody>
+          <a:bodyPr wrap="square" lIns="0" tIns="0" rIns="0" bIns="0" rtlCol="0" anchor="ctr"/>
+          <a:lstStyle/>
+          <a:p>
+            <a:pPr indent="0" marL="0">
+              <a:buNone/>
+            </a:pPr>
+            <a:r>
+              <a:rPr lang="en-US" sz="950" b="1" dirty="0">
+                <a:solidFill>
+                  <a:srgbClr val="0068B7"/>
+                </a:solidFill>
+                <a:latin typeface="Aptos" pitchFamily="34" charset="0"/>
+                <a:ea typeface="Aptos" pitchFamily="34" charset="-122"/>
+                <a:cs typeface="Aptos" pitchFamily="34" charset="-120"/>
+              </a:rPr>
+              <a:t>Key idea</a:t>
+            </a:r>
+            <a:endParaRPr lang="en-US" sz="950" dirty="0"/>
+          </a:p>
+        </p:txBody>
+      </p:sp>
+      <p:sp>
+        <p:nvSpPr>
+          <p:cNvPr id="13" name="Text 11"/>
+          <p:cNvSpPr/>
+          <p:nvPr/>
+        </p:nvSpPr>
+        <p:spPr>
+          <a:xfrm>
+            <a:off x="8074152" y="1856232"/>
+            <a:ext cx="2825496" cy="1261872"/>
+          </a:xfrm>
+          <a:prstGeom prst="rect">
+            <a:avLst/>
+          </a:prstGeom>
+          <a:noFill/>
+          <a:ln/>
+        </p:spPr>
+        <p:txBody>
+          <a:bodyPr wrap="square" lIns="0" tIns="0" rIns="0" bIns="0" rtlCol="0" anchor="t">
+            <a:normAutofit/>
+          </a:bodyPr>
+          <a:lstStyle/>
+          <a:p>
+            <a:pPr indent="0" marL="0">
+              <a:buNone/>
+            </a:pPr>
+            <a:r>
+              <a:rPr lang="en-US" sz="1250" dirty="0">
+                <a:solidFill>
+                  <a:srgbClr val="17364A"/>
+                </a:solidFill>
+                <a:latin typeface="Aptos" pitchFamily="34" charset="0"/>
+                <a:ea typeface="Aptos" pitchFamily="34" charset="-122"/>
+                <a:cs typeface="Aptos" pitchFamily="34" charset="-120"/>
+              </a:rPr>
+              <a:t>1. Which statement best describes supervised learning?</a:t>
+            </a:r>
+            <a:endParaRPr lang="en-US" sz="1250" dirty="0"/>
+          </a:p>
+        </p:txBody>
+      </p:sp>
+      <p:sp>
+        <p:nvSpPr>
+          <p:cNvPr id="14" name="Shape 12"/>
+          <p:cNvSpPr/>
+          <p:nvPr/>
+        </p:nvSpPr>
+        <p:spPr>
+          <a:xfrm>
+            <a:off x="7909560" y="3520440"/>
+            <a:ext cx="3154680" cy="1737360"/>
+          </a:xfrm>
+          <a:prstGeom prst="roundRect">
+            <a:avLst>
+              <a:gd name="adj" fmla="val 6316"/>
+            </a:avLst>
+          </a:prstGeom>
+          <a:solidFill>
+            <a:srgbClr val="EAF6F8"/>
+          </a:solidFill>
+          <a:ln w="12700">
+            <a:solidFill>
+              <a:srgbClr val="B9D7E6"/>
+            </a:solidFill>
+            <a:prstDash val="solid"/>
+          </a:ln>
+        </p:spPr>
+      </p:sp>
+      <p:sp>
+        <p:nvSpPr>
+          <p:cNvPr id="15" name="Text 13"/>
+          <p:cNvSpPr/>
+          <p:nvPr/>
+        </p:nvSpPr>
+        <p:spPr>
+          <a:xfrm>
+            <a:off x="8074152" y="3666744"/>
+            <a:ext cx="2825496" cy="201168"/>
+          </a:xfrm>
+          <a:prstGeom prst="rect">
+            <a:avLst/>
+          </a:prstGeom>
+          <a:noFill/>
+          <a:ln/>
+        </p:spPr>
+        <p:txBody>
+          <a:bodyPr wrap="square" lIns="0" tIns="0" rIns="0" bIns="0" rtlCol="0" anchor="ctr"/>
+          <a:lstStyle/>
+          <a:p>
+            <a:pPr indent="0" marL="0">
+              <a:buNone/>
+            </a:pPr>
+            <a:r>
+              <a:rPr lang="en-US" sz="950" b="1" dirty="0">
+                <a:solidFill>
+                  <a:srgbClr val="0068B7"/>
+                </a:solidFill>
+                <a:latin typeface="Aptos" pitchFamily="34" charset="0"/>
+                <a:ea typeface="Aptos" pitchFamily="34" charset="-122"/>
+                <a:cs typeface="Aptos" pitchFamily="34" charset="-120"/>
+              </a:rPr>
+              <a:t>Use this for</a:t>
+            </a:r>
+            <a:endParaRPr lang="en-US" sz="950" dirty="0"/>
+          </a:p>
+        </p:txBody>
+      </p:sp>
+      <p:sp>
+        <p:nvSpPr>
+          <p:cNvPr id="16" name="Text 14"/>
+          <p:cNvSpPr/>
+          <p:nvPr/>
+        </p:nvSpPr>
+        <p:spPr>
+          <a:xfrm>
+            <a:off x="8074152" y="3959352"/>
+            <a:ext cx="2825496" cy="1170432"/>
+          </a:xfrm>
+          <a:prstGeom prst="rect">
+            <a:avLst/>
+          </a:prstGeom>
+          <a:noFill/>
+          <a:ln/>
+        </p:spPr>
+        <p:txBody>
+          <a:bodyPr wrap="square" lIns="0" tIns="0" rIns="0" bIns="0" rtlCol="0" anchor="t">
+            <a:normAutofit/>
+          </a:bodyPr>
+          <a:lstStyle/>
+          <a:p>
+            <a:pPr indent="0" marL="0">
+              <a:buNone/>
+            </a:pPr>
+            <a:r>
+              <a:rPr lang="en-US" sz="1250" dirty="0">
+                <a:solidFill>
+                  <a:srgbClr val="17364A"/>
+                </a:solidFill>
+                <a:latin typeface="Aptos" pitchFamily="34" charset="0"/>
+                <a:ea typeface="Aptos" pitchFamily="34" charset="-122"/>
+                <a:cs typeface="Aptos" pitchFamily="34" charset="-120"/>
+              </a:rPr>
+              <a:t>Connect the concept to public health decisions, safeguards, documentation, or implementation work.</a:t>
+            </a:r>
+            <a:endParaRPr lang="en-US" sz="1250" dirty="0"/>
+          </a:p>
+        </p:txBody>
+      </p:sp>
+    </p:spTree>
+  </p:cSld>
+  <p:clrMapOvr>
+    <a:masterClrMapping/>
+  </p:clrMapOvr>
+</p:sld>
+</file>
+
+<file path=ppt/slides/slide22.xml><?xml version="1.0" encoding="utf-8"?>
+<p:sld xmlns:a="http://schemas.openxmlformats.org/drawingml/2006/main" xmlns:r="http://schemas.openxmlformats.org/officeDocument/2006/relationships" xmlns:p="http://schemas.openxmlformats.org/presentationml/2006/main">
+  <p:cSld name="Slide 22">
+    <p:bg>
+      <p:bgPr>
+        <a:solidFill>
+          <a:srgbClr val="F7FBFD"/>
+        </a:solidFill>
+      </p:bgPr>
+    </p:bg>
+    <p:spTree>
+      <p:nvGrpSpPr>
+        <p:cNvPr id="1" name=""/>
+        <p:cNvGrpSpPr/>
+        <p:nvPr/>
+      </p:nvGrpSpPr>
+      <p:grpSpPr>
+        <a:xfrm>
+          <a:off x="0" y="0"/>
+          <a:ext cx="0" cy="0"/>
+          <a:chOff x="0" y="0"/>
+          <a:chExt cx="0" cy="0"/>
+        </a:xfrm>
+      </p:grpSpPr>
+      <p:sp>
+        <p:nvSpPr>
+          <p:cNvPr id="2" name="Shape 0"/>
+          <p:cNvSpPr/>
+          <p:nvPr/>
+        </p:nvSpPr>
+        <p:spPr>
+          <a:xfrm>
+            <a:off x="0" y="0"/>
+            <a:ext cx="12191695" cy="164592"/>
+          </a:xfrm>
+          <a:prstGeom prst="rect">
+            <a:avLst/>
+          </a:prstGeom>
+          <a:solidFill>
+            <a:srgbClr val="0068B7"/>
+          </a:solidFill>
+          <a:ln w="12700">
+            <a:solidFill>
+              <a:srgbClr val="0068B7"/>
+            </a:solidFill>
+            <a:prstDash val="solid"/>
+          </a:ln>
+        </p:spPr>
+      </p:sp>
+      <p:sp>
+        <p:nvSpPr>
+          <p:cNvPr id="3" name="Shape 1"/>
+          <p:cNvSpPr/>
+          <p:nvPr/>
+        </p:nvSpPr>
+        <p:spPr>
+          <a:xfrm>
+            <a:off x="0" y="164592"/>
+            <a:ext cx="146304" cy="6693408"/>
+          </a:xfrm>
+          <a:prstGeom prst="rect">
+            <a:avLst/>
+          </a:prstGeom>
+          <a:solidFill>
+            <a:srgbClr val="2F8A28"/>
+          </a:solidFill>
+          <a:ln w="12700">
+            <a:solidFill>
+              <a:srgbClr val="2F8A28"/>
+            </a:solidFill>
+            <a:prstDash val="solid"/>
+          </a:ln>
+        </p:spPr>
+      </p:sp>
+      <p:sp>
+        <p:nvSpPr>
+          <p:cNvPr id="4" name="Text 2"/>
+          <p:cNvSpPr/>
+          <p:nvPr/>
+        </p:nvSpPr>
+        <p:spPr>
+          <a:xfrm>
+            <a:off x="502920" y="292608"/>
+            <a:ext cx="10149840" cy="256032"/>
+          </a:xfrm>
+          <a:prstGeom prst="rect">
+            <a:avLst/>
+          </a:prstGeom>
+          <a:noFill/>
+          <a:ln/>
+        </p:spPr>
+        <p:txBody>
+          <a:bodyPr wrap="square" lIns="0" tIns="0" rIns="0" bIns="0" rtlCol="0" anchor="ctr"/>
+          <a:lstStyle/>
+          <a:p>
+            <a:pPr indent="0" marL="0">
+              <a:buNone/>
+            </a:pPr>
+            <a:r>
+              <a:rPr lang="en-US" sz="900" b="1" dirty="0">
+                <a:solidFill>
+                  <a:srgbClr val="5F7181"/>
+                </a:solidFill>
+                <a:latin typeface="Aptos" pitchFamily="34" charset="0"/>
+                <a:ea typeface="Aptos" pitchFamily="34" charset="-122"/>
+                <a:cs typeface="Aptos" pitchFamily="34" charset="-120"/>
+              </a:rPr>
+              <a:t>Machine Learning Basics for Epidemiology and Surveillance</a:t>
+            </a:r>
+            <a:endParaRPr lang="en-US" sz="900" dirty="0"/>
+          </a:p>
+        </p:txBody>
+      </p:sp>
+      <p:sp>
+        <p:nvSpPr>
+          <p:cNvPr id="5" name="Text 3"/>
+          <p:cNvSpPr/>
+          <p:nvPr/>
+        </p:nvSpPr>
+        <p:spPr>
+          <a:xfrm>
+            <a:off x="502920" y="6537960"/>
+            <a:ext cx="7772400" cy="201168"/>
+          </a:xfrm>
+          <a:prstGeom prst="rect">
+            <a:avLst/>
+          </a:prstGeom>
+          <a:noFill/>
+          <a:ln/>
+        </p:spPr>
+        <p:txBody>
+          <a:bodyPr wrap="square" lIns="0" tIns="0" rIns="0" bIns="0" rtlCol="0" anchor="ctr"/>
+          <a:lstStyle/>
+          <a:p>
+            <a:pPr indent="0" marL="0">
+              <a:buNone/>
+            </a:pPr>
+            <a:r>
+              <a:rPr lang="en-US" sz="800" dirty="0">
+                <a:solidFill>
+                  <a:srgbClr val="5F7181"/>
+                </a:solidFill>
+                <a:latin typeface="Aptos" pitchFamily="34" charset="0"/>
+                <a:ea typeface="Aptos" pitchFamily="34" charset="-122"/>
+                <a:cs typeface="Aptos" pitchFamily="34" charset="-120"/>
+              </a:rPr>
+              <a:t>AI Playbook and Toolkit for Public Health Departments</a:t>
+            </a:r>
+            <a:endParaRPr lang="en-US" sz="800" dirty="0"/>
+          </a:p>
+        </p:txBody>
+      </p:sp>
+      <p:sp>
+        <p:nvSpPr>
+          <p:cNvPr id="6" name="Text 4"/>
+          <p:cNvSpPr/>
+          <p:nvPr/>
+        </p:nvSpPr>
+        <p:spPr>
+          <a:xfrm>
+            <a:off x="9966960" y="6537960"/>
+            <a:ext cx="1645920" cy="201168"/>
+          </a:xfrm>
+          <a:prstGeom prst="rect">
+            <a:avLst/>
+          </a:prstGeom>
+          <a:noFill/>
+          <a:ln/>
+        </p:spPr>
+        <p:txBody>
+          <a:bodyPr wrap="square" lIns="0" tIns="0" rIns="0" bIns="0" rtlCol="0" anchor="ctr"/>
+          <a:lstStyle/>
+          <a:p>
+            <a:pPr algn="r" indent="0" marL="0">
+              <a:buNone/>
+            </a:pPr>
+            <a:r>
+              <a:rPr lang="en-US" sz="800" dirty="0">
+                <a:solidFill>
+                  <a:srgbClr val="5F7181"/>
+                </a:solidFill>
+                <a:latin typeface="Aptos" pitchFamily="34" charset="0"/>
+                <a:ea typeface="Aptos" pitchFamily="34" charset="-122"/>
+                <a:cs typeface="Aptos" pitchFamily="34" charset="-120"/>
+              </a:rPr>
+              <a:t>© Paula Soper</a:t>
+            </a:r>
+            <a:endParaRPr lang="en-US" sz="800" dirty="0"/>
+          </a:p>
+        </p:txBody>
+      </p:sp>
+      <p:sp>
+        <p:nvSpPr>
+          <p:cNvPr id="7" name="Shape 5"/>
+          <p:cNvSpPr/>
+          <p:nvPr/>
+        </p:nvSpPr>
+        <p:spPr>
+          <a:xfrm>
+            <a:off x="640080" y="658368"/>
+            <a:ext cx="420624" cy="420624"/>
+          </a:xfrm>
+          <a:prstGeom prst="ellipse">
+            <a:avLst/>
+          </a:prstGeom>
+          <a:solidFill>
+            <a:srgbClr val="0068B7"/>
+          </a:solidFill>
+          <a:ln w="12700">
+            <a:solidFill>
+              <a:srgbClr val="0068B7"/>
+            </a:solidFill>
+            <a:prstDash val="solid"/>
+          </a:ln>
+        </p:spPr>
+      </p:sp>
+      <p:sp>
+        <p:nvSpPr>
+          <p:cNvPr id="8" name="Text 6"/>
+          <p:cNvSpPr/>
+          <p:nvPr/>
+        </p:nvSpPr>
+        <p:spPr>
+          <a:xfrm>
+            <a:off x="640080" y="731520"/>
+            <a:ext cx="420624" cy="164592"/>
+          </a:xfrm>
+          <a:prstGeom prst="rect">
+            <a:avLst/>
+          </a:prstGeom>
+          <a:noFill/>
+          <a:ln/>
+        </p:spPr>
+        <p:txBody>
+          <a:bodyPr wrap="square" lIns="0" tIns="0" rIns="0" bIns="0" rtlCol="0" anchor="ctr"/>
+          <a:lstStyle/>
+          <a:p>
+            <a:pPr algn="ctr" indent="0" marL="0">
+              <a:buNone/>
+            </a:pPr>
+            <a:r>
+              <a:rPr lang="en-US" sz="1100" b="1" dirty="0">
+                <a:solidFill>
+                  <a:srgbClr val="FFFFFF"/>
+                </a:solidFill>
+                <a:latin typeface="Aptos" pitchFamily="34" charset="0"/>
+                <a:ea typeface="Aptos" pitchFamily="34" charset="-122"/>
+                <a:cs typeface="Aptos" pitchFamily="34" charset="-120"/>
+              </a:rPr>
+              <a:t>13</a:t>
+            </a:r>
+            <a:endParaRPr lang="en-US" sz="1100" dirty="0"/>
+          </a:p>
+        </p:txBody>
+      </p:sp>
+      <p:sp>
+        <p:nvSpPr>
+          <p:cNvPr id="9" name="Text 7"/>
+          <p:cNvSpPr/>
+          <p:nvPr/>
+        </p:nvSpPr>
+        <p:spPr>
+          <a:xfrm>
+            <a:off x="640080" y="621792"/>
+            <a:ext cx="10881360" cy="566928"/>
+          </a:xfrm>
+          <a:prstGeom prst="rect">
+            <a:avLst/>
+          </a:prstGeom>
+          <a:noFill/>
+          <a:ln/>
+        </p:spPr>
+        <p:txBody>
+          <a:bodyPr wrap="square" lIns="0" tIns="0" rIns="0" bIns="0" rtlCol="0" anchor="ctr">
+            <a:normAutofit/>
+          </a:bodyPr>
+          <a:lstStyle/>
+          <a:p>
+            <a:pPr indent="0" marL="0">
+              <a:buNone/>
+            </a:pPr>
+            <a:r>
+              <a:rPr lang="en-US" sz="2700" b="1" dirty="0">
+                <a:solidFill>
+                  <a:srgbClr val="003A63"/>
+                </a:solidFill>
+                <a:latin typeface="Aptos Display" pitchFamily="34" charset="0"/>
+                <a:ea typeface="Aptos Display" pitchFamily="34" charset="-122"/>
+                <a:cs typeface="Aptos Display" pitchFamily="34" charset="-120"/>
+              </a:rPr>
+              <a:t>References and Resources</a:t>
+            </a:r>
+            <a:endParaRPr lang="en-US" sz="2700" dirty="0"/>
+          </a:p>
+        </p:txBody>
+      </p:sp>
+      <p:sp>
+        <p:nvSpPr>
+          <p:cNvPr id="10" name="Text 8"/>
+          <p:cNvSpPr/>
+          <p:nvPr/>
+        </p:nvSpPr>
+        <p:spPr>
+          <a:xfrm>
+            <a:off x="868680" y="1417320"/>
+            <a:ext cx="6675120" cy="4434840"/>
+          </a:xfrm>
+          <a:prstGeom prst="rect">
+            <a:avLst/>
+          </a:prstGeom>
+          <a:noFill/>
+          <a:ln/>
+        </p:spPr>
+        <p:txBody>
+          <a:bodyPr wrap="square" lIns="635" tIns="635" rIns="635" bIns="635" rtlCol="0" anchor="t">
+            <a:normAutofit/>
+          </a:bodyPr>
+          <a:lstStyle/>
+          <a:p>
+            <a:r>
+              <a:rPr lang="en-US" sz="1700" dirty="0">
+                <a:solidFill>
+                  <a:srgbClr val="17364A"/>
+                </a:solidFill>
+                <a:latin typeface="Aptos" pitchFamily="34" charset="0"/>
+                <a:ea typeface="Aptos" pitchFamily="34" charset="-122"/>
+                <a:cs typeface="Aptos" pitchFamily="34" charset="-120"/>
+              </a:rPr>
               <a:t>CDC Evaluation Framework: https://www.cdc.gov/evaluation/</a:t>
             </a:r>
-            <a:endParaRPr lang="en-US" sz="1450" dirty="0"/>
-          </a:p>
-          <a:p>
-            <a:r>
-              <a:rPr lang="en-US" sz="1450" dirty="0">
+            <a:endParaRPr lang="en-US" sz="1700" dirty="0"/>
+          </a:p>
+          <a:p>
+            <a:r>
+              <a:rPr lang="en-US" sz="1700" dirty="0">
                 <a:solidFill>
                   <a:srgbClr val="17364A"/>
                 </a:solidFill>
@@ -6048,11 +10727,11 @@
               </a:rPr>
               <a:t>NIST Artificial Intelligence Risk Management Framework: https://www.nist.gov/itl/ai-risk-management-framework</a:t>
             </a:r>
-            <a:endParaRPr lang="en-US" sz="1450" dirty="0"/>
-          </a:p>
-          <a:p>
-            <a:r>
-              <a:rPr lang="en-US" sz="1450" dirty="0">
+            <a:endParaRPr lang="en-US" sz="1700" dirty="0"/>
+          </a:p>
+          <a:p>
+            <a:r>
+              <a:rPr lang="en-US" sz="1700" dirty="0">
                 <a:solidFill>
                   <a:srgbClr val="17364A"/>
                 </a:solidFill>
@@ -6060,13 +10739,13 @@
                 <a:ea typeface="Aptos" pitchFamily="34" charset="-122"/>
                 <a:cs typeface="Aptos" pitchFamily="34" charset="-120"/>
               </a:rPr>
-              <a:t>NIST AI RMF Generative AI Profile: https://www.nist.gov/publications/artificial-intelligence-risk-management-framework-generative-artificial-intelligence</a:t>
-            </a:r>
-            <a:endParaRPr lang="en-US" sz="1450" dirty="0"/>
-          </a:p>
-          <a:p>
-            <a:r>
-              <a:rPr lang="en-US" sz="1450" dirty="0">
+              <a:t>NIST AI RMF Generative AI Profile:.</a:t>
+            </a:r>
+            <a:endParaRPr lang="en-US" sz="1700" dirty="0"/>
+          </a:p>
+          <a:p>
+            <a:r>
+              <a:rPr lang="en-US" sz="1700" dirty="0">
                 <a:solidFill>
                   <a:srgbClr val="17364A"/>
                 </a:solidFill>
@@ -6076,7 +10755,221 @@
               </a:rPr>
               <a:t>CDC Public Health Data Strategy: https://www.cdc.gov/public-health-data-strategy/php/about/index.html</a:t>
             </a:r>
-            <a:endParaRPr lang="en-US" sz="1450" dirty="0"/>
+            <a:endParaRPr lang="en-US" sz="1700" dirty="0"/>
+          </a:p>
+        </p:txBody>
+      </p:sp>
+      <p:sp>
+        <p:nvSpPr>
+          <p:cNvPr id="11" name="Shape 9"/>
+          <p:cNvSpPr/>
+          <p:nvPr/>
+        </p:nvSpPr>
+        <p:spPr>
+          <a:xfrm>
+            <a:off x="7909560" y="1417320"/>
+            <a:ext cx="3154680" cy="1828800"/>
+          </a:xfrm>
+          <a:prstGeom prst="roundRect">
+            <a:avLst>
+              <a:gd name="adj" fmla="val 6000"/>
+            </a:avLst>
+          </a:prstGeom>
+          <a:solidFill>
+            <a:srgbClr val="EEF8ED"/>
+          </a:solidFill>
+          <a:ln w="12700">
+            <a:solidFill>
+              <a:srgbClr val="B9D7E6"/>
+            </a:solidFill>
+            <a:prstDash val="solid"/>
+          </a:ln>
+        </p:spPr>
+      </p:sp>
+      <p:sp>
+        <p:nvSpPr>
+          <p:cNvPr id="12" name="Text 10"/>
+          <p:cNvSpPr/>
+          <p:nvPr/>
+        </p:nvSpPr>
+        <p:spPr>
+          <a:xfrm>
+            <a:off x="8074152" y="1563624"/>
+            <a:ext cx="2825496" cy="201168"/>
+          </a:xfrm>
+          <a:prstGeom prst="rect">
+            <a:avLst/>
+          </a:prstGeom>
+          <a:noFill/>
+          <a:ln/>
+        </p:spPr>
+        <p:txBody>
+          <a:bodyPr wrap="square" lIns="0" tIns="0" rIns="0" bIns="0" rtlCol="0" anchor="ctr"/>
+          <a:lstStyle/>
+          <a:p>
+            <a:pPr indent="0" marL="0">
+              <a:buNone/>
+            </a:pPr>
+            <a:r>
+              <a:rPr lang="en-US" sz="950" b="1" dirty="0">
+                <a:solidFill>
+                  <a:srgbClr val="0068B7"/>
+                </a:solidFill>
+                <a:latin typeface="Aptos" pitchFamily="34" charset="0"/>
+                <a:ea typeface="Aptos" pitchFamily="34" charset="-122"/>
+                <a:cs typeface="Aptos" pitchFamily="34" charset="-120"/>
+              </a:rPr>
+              <a:t>Key idea</a:t>
+            </a:r>
+            <a:endParaRPr lang="en-US" sz="950" dirty="0"/>
+          </a:p>
+        </p:txBody>
+      </p:sp>
+      <p:sp>
+        <p:nvSpPr>
+          <p:cNvPr id="13" name="Text 11"/>
+          <p:cNvSpPr/>
+          <p:nvPr/>
+        </p:nvSpPr>
+        <p:spPr>
+          <a:xfrm>
+            <a:off x="8074152" y="1856232"/>
+            <a:ext cx="2825496" cy="1261872"/>
+          </a:xfrm>
+          <a:prstGeom prst="rect">
+            <a:avLst/>
+          </a:prstGeom>
+          <a:noFill/>
+          <a:ln/>
+        </p:spPr>
+        <p:txBody>
+          <a:bodyPr wrap="square" lIns="0" tIns="0" rIns="0" bIns="0" rtlCol="0" anchor="t">
+            <a:normAutofit/>
+          </a:bodyPr>
+          <a:lstStyle/>
+          <a:p>
+            <a:pPr indent="0" marL="0">
+              <a:buNone/>
+            </a:pPr>
+            <a:r>
+              <a:rPr lang="en-US" sz="1250" dirty="0">
+                <a:solidFill>
+                  <a:srgbClr val="17364A"/>
+                </a:solidFill>
+                <a:latin typeface="Aptos" pitchFamily="34" charset="0"/>
+                <a:ea typeface="Aptos" pitchFamily="34" charset="-122"/>
+                <a:cs typeface="Aptos" pitchFamily="34" charset="-120"/>
+              </a:rPr>
+              <a:t>CDC Evaluation Framework: https://www.cdc.gov/evaluation/</a:t>
+            </a:r>
+            <a:endParaRPr lang="en-US" sz="1250" dirty="0"/>
+          </a:p>
+        </p:txBody>
+      </p:sp>
+      <p:sp>
+        <p:nvSpPr>
+          <p:cNvPr id="14" name="Shape 12"/>
+          <p:cNvSpPr/>
+          <p:nvPr/>
+        </p:nvSpPr>
+        <p:spPr>
+          <a:xfrm>
+            <a:off x="7909560" y="3520440"/>
+            <a:ext cx="3154680" cy="1737360"/>
+          </a:xfrm>
+          <a:prstGeom prst="roundRect">
+            <a:avLst>
+              <a:gd name="adj" fmla="val 6316"/>
+            </a:avLst>
+          </a:prstGeom>
+          <a:solidFill>
+            <a:srgbClr val="EAF6F8"/>
+          </a:solidFill>
+          <a:ln w="12700">
+            <a:solidFill>
+              <a:srgbClr val="B9D7E6"/>
+            </a:solidFill>
+            <a:prstDash val="solid"/>
+          </a:ln>
+        </p:spPr>
+      </p:sp>
+      <p:sp>
+        <p:nvSpPr>
+          <p:cNvPr id="15" name="Text 13"/>
+          <p:cNvSpPr/>
+          <p:nvPr/>
+        </p:nvSpPr>
+        <p:spPr>
+          <a:xfrm>
+            <a:off x="8074152" y="3666744"/>
+            <a:ext cx="2825496" cy="201168"/>
+          </a:xfrm>
+          <a:prstGeom prst="rect">
+            <a:avLst/>
+          </a:prstGeom>
+          <a:noFill/>
+          <a:ln/>
+        </p:spPr>
+        <p:txBody>
+          <a:bodyPr wrap="square" lIns="0" tIns="0" rIns="0" bIns="0" rtlCol="0" anchor="ctr"/>
+          <a:lstStyle/>
+          <a:p>
+            <a:pPr indent="0" marL="0">
+              <a:buNone/>
+            </a:pPr>
+            <a:r>
+              <a:rPr lang="en-US" sz="950" b="1" dirty="0">
+                <a:solidFill>
+                  <a:srgbClr val="0068B7"/>
+                </a:solidFill>
+                <a:latin typeface="Aptos" pitchFamily="34" charset="0"/>
+                <a:ea typeface="Aptos" pitchFamily="34" charset="-122"/>
+                <a:cs typeface="Aptos" pitchFamily="34" charset="-120"/>
+              </a:rPr>
+              <a:t>Use this for</a:t>
+            </a:r>
+            <a:endParaRPr lang="en-US" sz="950" dirty="0"/>
+          </a:p>
+        </p:txBody>
+      </p:sp>
+      <p:sp>
+        <p:nvSpPr>
+          <p:cNvPr id="16" name="Text 14"/>
+          <p:cNvSpPr/>
+          <p:nvPr/>
+        </p:nvSpPr>
+        <p:spPr>
+          <a:xfrm>
+            <a:off x="8074152" y="3959352"/>
+            <a:ext cx="2825496" cy="1170432"/>
+          </a:xfrm>
+          <a:prstGeom prst="rect">
+            <a:avLst/>
+          </a:prstGeom>
+          <a:noFill/>
+          <a:ln/>
+        </p:spPr>
+        <p:txBody>
+          <a:bodyPr wrap="square" lIns="0" tIns="0" rIns="0" bIns="0" rtlCol="0" anchor="t">
+            <a:normAutofit/>
+          </a:bodyPr>
+          <a:lstStyle/>
+          <a:p>
+            <a:pPr indent="0" marL="0">
+              <a:buNone/>
+            </a:pPr>
+            <a:r>
+              <a:rPr lang="en-US" sz="1250" dirty="0">
+                <a:solidFill>
+                  <a:srgbClr val="17364A"/>
+                </a:solidFill>
+                <a:latin typeface="Aptos" pitchFamily="34" charset="0"/>
+                <a:ea typeface="Aptos" pitchFamily="34" charset="-122"/>
+                <a:cs typeface="Aptos" pitchFamily="34" charset="-120"/>
+              </a:rPr>
+              <a:t>Connect the concept to public health decisions, safeguards, documentation, or implementation work.</a:t>
+            </a:r>
+            <a:endParaRPr lang="en-US" sz="1250" dirty="0"/>
           </a:p>
         </p:txBody>
       </p:sp>
@@ -6139,7 +11032,32 @@
       </p:sp>
       <p:sp>
         <p:nvSpPr>
-          <p:cNvPr id="3" name="Text 1"/>
+          <p:cNvPr id="3" name="Shape 1"/>
+          <p:cNvSpPr/>
+          <p:nvPr/>
+        </p:nvSpPr>
+        <p:spPr>
+          <a:xfrm>
+            <a:off x="0" y="164592"/>
+            <a:ext cx="146304" cy="6693408"/>
+          </a:xfrm>
+          <a:prstGeom prst="rect">
+            <a:avLst/>
+          </a:prstGeom>
+          <a:solidFill>
+            <a:srgbClr val="2F8A28"/>
+          </a:solidFill>
+          <a:ln w="12700">
+            <a:solidFill>
+              <a:srgbClr val="2F8A28"/>
+            </a:solidFill>
+            <a:prstDash val="solid"/>
+          </a:ln>
+        </p:spPr>
+      </p:sp>
+      <p:sp>
+        <p:nvSpPr>
+          <p:cNvPr id="4" name="Text 2"/>
           <p:cNvSpPr/>
           <p:nvPr/>
         </p:nvSpPr>
@@ -6178,7 +11096,7 @@
       </p:sp>
       <p:sp>
         <p:nvSpPr>
-          <p:cNvPr id="4" name="Text 2"/>
+          <p:cNvPr id="5" name="Text 3"/>
           <p:cNvSpPr/>
           <p:nvPr/>
         </p:nvSpPr>
@@ -6217,7 +11135,7 @@
       </p:sp>
       <p:sp>
         <p:nvSpPr>
-          <p:cNvPr id="5" name="Text 3"/>
+          <p:cNvPr id="6" name="Text 4"/>
           <p:cNvSpPr/>
           <p:nvPr/>
         </p:nvSpPr>
@@ -6256,7 +11174,7 @@
       </p:sp>
       <p:sp>
         <p:nvSpPr>
-          <p:cNvPr id="6" name="Text 4"/>
+          <p:cNvPr id="7" name="Text 5"/>
           <p:cNvSpPr/>
           <p:nvPr/>
         </p:nvSpPr>
@@ -6289,7 +11207,7 @@
                 <a:ea typeface="Aptos Display" pitchFamily="34" charset="-122"/>
                 <a:cs typeface="Aptos Display" pitchFamily="34" charset="-120"/>
               </a:rPr>
-              <a:t>Learning Objectives</a:t>
+              <a:t>How this module connects to the playbook</a:t>
             </a:r>
             <a:endParaRPr lang="en-US" sz="2700" dirty="0"/>
           </a:p>
@@ -6297,14 +11215,14 @@
       </p:sp>
       <p:sp>
         <p:nvSpPr>
-          <p:cNvPr id="7" name="Text 5"/>
-          <p:cNvSpPr/>
-          <p:nvPr/>
-        </p:nvSpPr>
-        <p:spPr>
-          <a:xfrm>
-            <a:off x="822960" y="1325880"/>
-            <a:ext cx="10378440" cy="4800600"/>
+          <p:cNvPr id="8" name="Text 6"/>
+          <p:cNvSpPr/>
+          <p:nvPr/>
+        </p:nvSpPr>
+        <p:spPr>
+          <a:xfrm>
+            <a:off x="868680" y="1417320"/>
+            <a:ext cx="6903720" cy="4480560"/>
           </a:xfrm>
           <a:prstGeom prst="rect">
             <a:avLst/>
@@ -6319,7 +11237,7 @@
           <a:lstStyle/>
           <a:p>
             <a:r>
-              <a:rPr lang="en-US" sz="1450" dirty="0">
+              <a:rPr lang="en-US" sz="1540" dirty="0">
                 <a:solidFill>
                   <a:srgbClr val="17364A"/>
                 </a:solidFill>
@@ -6327,13 +11245,13 @@
                 <a:ea typeface="Aptos" pitchFamily="34" charset="-122"/>
                 <a:cs typeface="Aptos" pitchFamily="34" charset="-120"/>
               </a:rPr>
-              <a:t>Explain the difference between supervised, unsupervised, and semi-supervised learning in public health terms.</a:t>
-            </a:r>
-            <a:endParaRPr lang="en-US" sz="1450" dirty="0"/>
-          </a:p>
-          <a:p>
-            <a:r>
-              <a:rPr lang="en-US" sz="1450" dirty="0">
+              <a:t>Play 13: Monitor and Evaluate AI Systems - This lesson informs Play 13 by helping learners connect the lesson topic to monitor and.</a:t>
+            </a:r>
+            <a:endParaRPr lang="en-US" sz="1540" dirty="0"/>
+          </a:p>
+          <a:p>
+            <a:r>
+              <a:rPr lang="en-US" sz="1540" dirty="0">
                 <a:solidFill>
                   <a:srgbClr val="17364A"/>
                 </a:solidFill>
@@ -6341,13 +11259,13 @@
                 <a:ea typeface="Aptos" pitchFamily="34" charset="-122"/>
                 <a:cs typeface="Aptos" pitchFamily="34" charset="-120"/>
               </a:rPr>
-              <a:t>Describe features, labels, training data, validation data, and test data.</a:t>
-            </a:r>
-            <a:endParaRPr lang="en-US" sz="1450" dirty="0"/>
-          </a:p>
-          <a:p>
-            <a:r>
-              <a:rPr lang="en-US" sz="1450" dirty="0">
+              <a:t>Play 11: Build and Deploy AI Solutions - This lesson informs Play 11 by helping learners connect the lesson topic to build and deploy.</a:t>
+            </a:r>
+            <a:endParaRPr lang="en-US" sz="1540" dirty="0"/>
+          </a:p>
+          <a:p>
+            <a:r>
+              <a:rPr lang="en-US" sz="1540" dirty="0">
                 <a:solidFill>
                   <a:srgbClr val="17364A"/>
                 </a:solidFill>
@@ -6355,13 +11273,13 @@
                 <a:ea typeface="Aptos" pitchFamily="34" charset="-122"/>
                 <a:cs typeface="Aptos" pitchFamily="34" charset="-120"/>
               </a:rPr>
-              <a:t>Identify when a machine learning approach may be appropriate for a public health workflow and when a simpler method may be preferable.</a:t>
-            </a:r>
-            <a:endParaRPr lang="en-US" sz="1450" dirty="0"/>
-          </a:p>
-          <a:p>
-            <a:r>
-              <a:rPr lang="en-US" sz="1450" dirty="0">
+              <a:t>Play 1: Vision &amp; Guardrails - This lesson informs Play 1 by helping learners connect the lesson topic to vision &amp; guardrails work in.</a:t>
+            </a:r>
+            <a:endParaRPr lang="en-US" sz="1540" dirty="0"/>
+          </a:p>
+          <a:p>
+            <a:r>
+              <a:rPr lang="en-US" sz="1540" dirty="0">
                 <a:solidFill>
                   <a:srgbClr val="17364A"/>
                 </a:solidFill>
@@ -6369,13 +11287,106 @@
                 <a:ea typeface="Aptos" pitchFamily="34" charset="-122"/>
                 <a:cs typeface="Aptos" pitchFamily="34" charset="-120"/>
               </a:rPr>
-              <a:t>Recognize common machine learning risks, including overfitting, biased labels, data leakage, and poor generalization.</a:t>
-            </a:r>
-            <a:endParaRPr lang="en-US" sz="1450" dirty="0"/>
-          </a:p>
-          <a:p>
-            <a:r>
-              <a:rPr lang="en-US" sz="1450" dirty="0">
+              <a:t>Play 7: Prioritize Use Cases - This lesson informs Play 7 by helping learners connect the lesson topic to prioritize use cases work.</a:t>
+            </a:r>
+            <a:endParaRPr lang="en-US" sz="1540" dirty="0"/>
+          </a:p>
+        </p:txBody>
+      </p:sp>
+      <p:sp>
+        <p:nvSpPr>
+          <p:cNvPr id="9" name="Shape 7"/>
+          <p:cNvSpPr/>
+          <p:nvPr/>
+        </p:nvSpPr>
+        <p:spPr>
+          <a:xfrm>
+            <a:off x="8046720" y="1417320"/>
+            <a:ext cx="3063240" cy="2103120"/>
+          </a:xfrm>
+          <a:prstGeom prst="roundRect">
+            <a:avLst>
+              <a:gd name="adj" fmla="val 5217"/>
+            </a:avLst>
+          </a:prstGeom>
+          <a:solidFill>
+            <a:srgbClr val="EEF8ED"/>
+          </a:solidFill>
+          <a:ln w="12700">
+            <a:solidFill>
+              <a:srgbClr val="B9D7E6"/>
+            </a:solidFill>
+            <a:prstDash val="solid"/>
+          </a:ln>
+        </p:spPr>
+      </p:sp>
+      <p:sp>
+        <p:nvSpPr>
+          <p:cNvPr id="10" name="Text 8"/>
+          <p:cNvSpPr/>
+          <p:nvPr/>
+        </p:nvSpPr>
+        <p:spPr>
+          <a:xfrm>
+            <a:off x="8211312" y="1563624"/>
+            <a:ext cx="2734056" cy="201168"/>
+          </a:xfrm>
+          <a:prstGeom prst="rect">
+            <a:avLst/>
+          </a:prstGeom>
+          <a:noFill/>
+          <a:ln/>
+        </p:spPr>
+        <p:txBody>
+          <a:bodyPr wrap="square" lIns="0" tIns="0" rIns="0" bIns="0" rtlCol="0" anchor="ctr"/>
+          <a:lstStyle/>
+          <a:p>
+            <a:pPr indent="0" marL="0">
+              <a:buNone/>
+            </a:pPr>
+            <a:r>
+              <a:rPr lang="en-US" sz="950" b="1" dirty="0">
+                <a:solidFill>
+                  <a:srgbClr val="0068B7"/>
+                </a:solidFill>
+                <a:latin typeface="Aptos" pitchFamily="34" charset="0"/>
+                <a:ea typeface="Aptos" pitchFamily="34" charset="-122"/>
+                <a:cs typeface="Aptos" pitchFamily="34" charset="-120"/>
+              </a:rPr>
+              <a:t>Apply the lesson</a:t>
+            </a:r>
+            <a:endParaRPr lang="en-US" sz="950" dirty="0"/>
+          </a:p>
+        </p:txBody>
+      </p:sp>
+      <p:sp>
+        <p:nvSpPr>
+          <p:cNvPr id="11" name="Text 9"/>
+          <p:cNvSpPr/>
+          <p:nvPr/>
+        </p:nvSpPr>
+        <p:spPr>
+          <a:xfrm>
+            <a:off x="8211312" y="1856232"/>
+            <a:ext cx="2734056" cy="1536192"/>
+          </a:xfrm>
+          <a:prstGeom prst="rect">
+            <a:avLst/>
+          </a:prstGeom>
+          <a:noFill/>
+          <a:ln/>
+        </p:spPr>
+        <p:txBody>
+          <a:bodyPr wrap="square" lIns="0" tIns="0" rIns="0" bIns="0" rtlCol="0" anchor="t">
+            <a:normAutofit/>
+          </a:bodyPr>
+          <a:lstStyle/>
+          <a:p>
+            <a:pPr indent="0" marL="0">
+              <a:buNone/>
+            </a:pPr>
+            <a:r>
+              <a:rPr lang="en-US" sz="1250" dirty="0">
                 <a:solidFill>
                   <a:srgbClr val="17364A"/>
                 </a:solidFill>
@@ -6383,9 +11394,116 @@
                 <a:ea typeface="Aptos" pitchFamily="34" charset="-122"/>
                 <a:cs typeface="Aptos" pitchFamily="34" charset="-120"/>
               </a:rPr>
-              <a:t>Interpret basic model performance questions in relation to epidemiologic and operational decision-making.</a:t>
-            </a:r>
-            <a:endParaRPr lang="en-US" sz="1450" dirty="0"/>
+              <a:t>Use the related plays to identify decisions, participants, timing, approvals, and documentation needed for responsible implementation.</a:t>
+            </a:r>
+            <a:endParaRPr lang="en-US" sz="1250" dirty="0"/>
+          </a:p>
+        </p:txBody>
+      </p:sp>
+      <p:sp>
+        <p:nvSpPr>
+          <p:cNvPr id="12" name="Shape 10"/>
+          <p:cNvSpPr/>
+          <p:nvPr/>
+        </p:nvSpPr>
+        <p:spPr>
+          <a:xfrm>
+            <a:off x="8046720" y="3794760"/>
+            <a:ext cx="3063240" cy="1508760"/>
+          </a:xfrm>
+          <a:prstGeom prst="roundRect">
+            <a:avLst>
+              <a:gd name="adj" fmla="val 7273"/>
+            </a:avLst>
+          </a:prstGeom>
+          <a:solidFill>
+            <a:srgbClr val="FFF4D9"/>
+          </a:solidFill>
+          <a:ln w="12700">
+            <a:solidFill>
+              <a:srgbClr val="B9D7E6"/>
+            </a:solidFill>
+            <a:prstDash val="solid"/>
+          </a:ln>
+        </p:spPr>
+      </p:sp>
+      <p:sp>
+        <p:nvSpPr>
+          <p:cNvPr id="13" name="Text 11"/>
+          <p:cNvSpPr/>
+          <p:nvPr/>
+        </p:nvSpPr>
+        <p:spPr>
+          <a:xfrm>
+            <a:off x="8211312" y="3941064"/>
+            <a:ext cx="2734056" cy="201168"/>
+          </a:xfrm>
+          <a:prstGeom prst="rect">
+            <a:avLst/>
+          </a:prstGeom>
+          <a:noFill/>
+          <a:ln/>
+        </p:spPr>
+        <p:txBody>
+          <a:bodyPr wrap="square" lIns="0" tIns="0" rIns="0" bIns="0" rtlCol="0" anchor="ctr"/>
+          <a:lstStyle/>
+          <a:p>
+            <a:pPr indent="0" marL="0">
+              <a:buNone/>
+            </a:pPr>
+            <a:r>
+              <a:rPr lang="en-US" sz="950" b="1" dirty="0">
+                <a:solidFill>
+                  <a:srgbClr val="0068B7"/>
+                </a:solidFill>
+                <a:latin typeface="Aptos" pitchFamily="34" charset="0"/>
+                <a:ea typeface="Aptos" pitchFamily="34" charset="-122"/>
+                <a:cs typeface="Aptos" pitchFamily="34" charset="-120"/>
+              </a:rPr>
+              <a:t>Keep in mind</a:t>
+            </a:r>
+            <a:endParaRPr lang="en-US" sz="950" dirty="0"/>
+          </a:p>
+        </p:txBody>
+      </p:sp>
+      <p:sp>
+        <p:nvSpPr>
+          <p:cNvPr id="14" name="Text 12"/>
+          <p:cNvSpPr/>
+          <p:nvPr/>
+        </p:nvSpPr>
+        <p:spPr>
+          <a:xfrm>
+            <a:off x="8211312" y="4233672"/>
+            <a:ext cx="2734056" cy="941832"/>
+          </a:xfrm>
+          <a:prstGeom prst="rect">
+            <a:avLst/>
+          </a:prstGeom>
+          <a:noFill/>
+          <a:ln/>
+        </p:spPr>
+        <p:txBody>
+          <a:bodyPr wrap="square" lIns="0" tIns="0" rIns="0" bIns="0" rtlCol="0" anchor="t">
+            <a:normAutofit/>
+          </a:bodyPr>
+          <a:lstStyle/>
+          <a:p>
+            <a:pPr indent="0" marL="0">
+              <a:buNone/>
+            </a:pPr>
+            <a:r>
+              <a:rPr lang="en-US" sz="1250" dirty="0">
+                <a:solidFill>
+                  <a:srgbClr val="17364A"/>
+                </a:solidFill>
+                <a:latin typeface="Aptos" pitchFamily="34" charset="0"/>
+                <a:ea typeface="Aptos" pitchFamily="34" charset="-122"/>
+                <a:cs typeface="Aptos" pitchFamily="34" charset="-120"/>
+              </a:rPr>
+              <a:t>The playbook connection helps turn training into agency work, not just individual knowledge.</a:t>
+            </a:r>
+            <a:endParaRPr lang="en-US" sz="1250" dirty="0"/>
           </a:p>
         </p:txBody>
       </p:sp>
@@ -6448,7 +11566,32 @@
       </p:sp>
       <p:sp>
         <p:nvSpPr>
-          <p:cNvPr id="3" name="Text 1"/>
+          <p:cNvPr id="3" name="Shape 1"/>
+          <p:cNvSpPr/>
+          <p:nvPr/>
+        </p:nvSpPr>
+        <p:spPr>
+          <a:xfrm>
+            <a:off x="0" y="164592"/>
+            <a:ext cx="146304" cy="6693408"/>
+          </a:xfrm>
+          <a:prstGeom prst="rect">
+            <a:avLst/>
+          </a:prstGeom>
+          <a:solidFill>
+            <a:srgbClr val="2F8A28"/>
+          </a:solidFill>
+          <a:ln w="12700">
+            <a:solidFill>
+              <a:srgbClr val="2F8A28"/>
+            </a:solidFill>
+            <a:prstDash val="solid"/>
+          </a:ln>
+        </p:spPr>
+      </p:sp>
+      <p:sp>
+        <p:nvSpPr>
+          <p:cNvPr id="4" name="Text 2"/>
           <p:cNvSpPr/>
           <p:nvPr/>
         </p:nvSpPr>
@@ -6487,7 +11630,7 @@
       </p:sp>
       <p:sp>
         <p:nvSpPr>
-          <p:cNvPr id="4" name="Text 2"/>
+          <p:cNvPr id="5" name="Text 3"/>
           <p:cNvSpPr/>
           <p:nvPr/>
         </p:nvSpPr>
@@ -6526,7 +11669,7 @@
       </p:sp>
       <p:sp>
         <p:nvSpPr>
-          <p:cNvPr id="5" name="Text 3"/>
+          <p:cNvPr id="6" name="Text 4"/>
           <p:cNvSpPr/>
           <p:nvPr/>
         </p:nvSpPr>
@@ -6565,7 +11708,7 @@
       </p:sp>
       <p:sp>
         <p:nvSpPr>
-          <p:cNvPr id="6" name="Text 4"/>
+          <p:cNvPr id="7" name="Text 5"/>
           <p:cNvSpPr/>
           <p:nvPr/>
         </p:nvSpPr>
@@ -6598,7 +11741,7 @@
                 <a:ea typeface="Aptos Display" pitchFamily="34" charset="-122"/>
                 <a:cs typeface="Aptos Display" pitchFamily="34" charset="-120"/>
               </a:rPr>
-              <a:t>Learning Objectives Continued</a:t>
+              <a:t>Related toolkit resources</a:t>
             </a:r>
             <a:endParaRPr lang="en-US" sz="2700" dirty="0"/>
           </a:p>
@@ -6606,14 +11749,14 @@
       </p:sp>
       <p:sp>
         <p:nvSpPr>
-          <p:cNvPr id="7" name="Text 5"/>
-          <p:cNvSpPr/>
-          <p:nvPr/>
-        </p:nvSpPr>
-        <p:spPr>
-          <a:xfrm>
-            <a:off x="822960" y="1325880"/>
-            <a:ext cx="10378440" cy="4800600"/>
+          <p:cNvPr id="8" name="Text 6"/>
+          <p:cNvSpPr/>
+          <p:nvPr/>
+        </p:nvSpPr>
+        <p:spPr>
+          <a:xfrm>
+            <a:off x="868680" y="1417320"/>
+            <a:ext cx="6903720" cy="4480560"/>
           </a:xfrm>
           <a:prstGeom prst="rect">
             <a:avLst/>
@@ -6628,7 +11771,7 @@
           <a:lstStyle/>
           <a:p>
             <a:r>
-              <a:rPr lang="en-US" sz="1450" dirty="0">
+              <a:rPr lang="en-US" sz="1460" dirty="0">
                 <a:solidFill>
                   <a:srgbClr val="17364A"/>
                 </a:solidFill>
@@ -6636,9 +11779,279 @@
                 <a:ea typeface="Aptos" pitchFamily="34" charset="-122"/>
                 <a:cs typeface="Aptos" pitchFamily="34" charset="-120"/>
               </a:rPr>
-              <a:t>Produce a machine learning use case review worksheet for a real or realistic public health workflow.</a:t>
-            </a:r>
-            <a:endParaRPr lang="en-US" sz="1450" dirty="0"/>
+              <a:t>Tool 44: Performance Monitoring Dashboard (Dashboard) - Use this tool to complete or strengthen the practical exercise for the module.</a:t>
+            </a:r>
+            <a:endParaRPr lang="en-US" sz="1460" dirty="0"/>
+          </a:p>
+          <a:p>
+            <a:r>
+              <a:rPr lang="en-US" sz="1460" dirty="0">
+                <a:solidFill>
+                  <a:srgbClr val="17364A"/>
+                </a:solidFill>
+                <a:latin typeface="Aptos" pitchFamily="34" charset="0"/>
+                <a:ea typeface="Aptos" pitchFamily="34" charset="-122"/>
+                <a:cs typeface="Aptos" pitchFamily="34" charset="-120"/>
+              </a:rPr>
+              <a:t>Tool 45: Continuous Improvement Log (Log) - Use this tool to complete or strengthen the practical exercise for the module using.</a:t>
+            </a:r>
+            <a:endParaRPr lang="en-US" sz="1460" dirty="0"/>
+          </a:p>
+          <a:p>
+            <a:r>
+              <a:rPr lang="en-US" sz="1460" dirty="0">
+                <a:solidFill>
+                  <a:srgbClr val="17364A"/>
+                </a:solidFill>
+                <a:latin typeface="Aptos" pitchFamily="34" charset="0"/>
+                <a:ea typeface="Aptos" pitchFamily="34" charset="-122"/>
+                <a:cs typeface="Aptos" pitchFamily="34" charset="-120"/>
+              </a:rPr>
+              <a:t>Tool 48: AI Evaluation &amp; Outcomes Reporting (Template) - Use this tool to complete or strengthen the practical exercise for the.</a:t>
+            </a:r>
+            <a:endParaRPr lang="en-US" sz="1460" dirty="0"/>
+          </a:p>
+          <a:p>
+            <a:r>
+              <a:rPr lang="en-US" sz="1460" dirty="0">
+                <a:solidFill>
+                  <a:srgbClr val="17364A"/>
+                </a:solidFill>
+                <a:latin typeface="Aptos" pitchFamily="34" charset="0"/>
+                <a:ea typeface="Aptos" pitchFamily="34" charset="-122"/>
+                <a:cs typeface="Aptos" pitchFamily="34" charset="-120"/>
+              </a:rPr>
+              <a:t>Tool 1: AI Vision &amp; Principles Workshop (Workshop) - Use AI Vision &amp; Principles Workshop to translate this lesson into a documented.</a:t>
+            </a:r>
+            <a:endParaRPr lang="en-US" sz="1460" dirty="0"/>
+          </a:p>
+          <a:p>
+            <a:r>
+              <a:rPr lang="en-US" sz="1460" dirty="0">
+                <a:solidFill>
+                  <a:srgbClr val="17364A"/>
+                </a:solidFill>
+                <a:latin typeface="Aptos" pitchFamily="34" charset="0"/>
+                <a:ea typeface="Aptos" pitchFamily="34" charset="-122"/>
+                <a:cs typeface="Aptos" pitchFamily="34" charset="-120"/>
+              </a:rPr>
+              <a:t>Tool 3: Equity Impact Assessment Checklist (Checklist) - Use Equity Impact Assessment Checklist to translate this lesson into a.</a:t>
+            </a:r>
+            <a:endParaRPr lang="en-US" sz="1460" dirty="0"/>
+          </a:p>
+        </p:txBody>
+      </p:sp>
+      <p:sp>
+        <p:nvSpPr>
+          <p:cNvPr id="9" name="Shape 7"/>
+          <p:cNvSpPr/>
+          <p:nvPr/>
+        </p:nvSpPr>
+        <p:spPr>
+          <a:xfrm>
+            <a:off x="8046720" y="1417320"/>
+            <a:ext cx="3063240" cy="2103120"/>
+          </a:xfrm>
+          <a:prstGeom prst="roundRect">
+            <a:avLst>
+              <a:gd name="adj" fmla="val 5217"/>
+            </a:avLst>
+          </a:prstGeom>
+          <a:solidFill>
+            <a:srgbClr val="EAF6F8"/>
+          </a:solidFill>
+          <a:ln w="12700">
+            <a:solidFill>
+              <a:srgbClr val="B9D7E6"/>
+            </a:solidFill>
+            <a:prstDash val="solid"/>
+          </a:ln>
+        </p:spPr>
+      </p:sp>
+      <p:sp>
+        <p:nvSpPr>
+          <p:cNvPr id="10" name="Text 8"/>
+          <p:cNvSpPr/>
+          <p:nvPr/>
+        </p:nvSpPr>
+        <p:spPr>
+          <a:xfrm>
+            <a:off x="8211312" y="1563624"/>
+            <a:ext cx="2734056" cy="201168"/>
+          </a:xfrm>
+          <a:prstGeom prst="rect">
+            <a:avLst/>
+          </a:prstGeom>
+          <a:noFill/>
+          <a:ln/>
+        </p:spPr>
+        <p:txBody>
+          <a:bodyPr wrap="square" lIns="0" tIns="0" rIns="0" bIns="0" rtlCol="0" anchor="ctr"/>
+          <a:lstStyle/>
+          <a:p>
+            <a:pPr indent="0" marL="0">
+              <a:buNone/>
+            </a:pPr>
+            <a:r>
+              <a:rPr lang="en-US" sz="950" b="1" dirty="0">
+                <a:solidFill>
+                  <a:srgbClr val="0068B7"/>
+                </a:solidFill>
+                <a:latin typeface="Aptos" pitchFamily="34" charset="0"/>
+                <a:ea typeface="Aptos" pitchFamily="34" charset="-122"/>
+                <a:cs typeface="Aptos" pitchFamily="34" charset="-120"/>
+              </a:rPr>
+              <a:t>Use the tools</a:t>
+            </a:r>
+            <a:endParaRPr lang="en-US" sz="950" dirty="0"/>
+          </a:p>
+        </p:txBody>
+      </p:sp>
+      <p:sp>
+        <p:nvSpPr>
+          <p:cNvPr id="11" name="Text 9"/>
+          <p:cNvSpPr/>
+          <p:nvPr/>
+        </p:nvSpPr>
+        <p:spPr>
+          <a:xfrm>
+            <a:off x="8211312" y="1856232"/>
+            <a:ext cx="2734056" cy="1536192"/>
+          </a:xfrm>
+          <a:prstGeom prst="rect">
+            <a:avLst/>
+          </a:prstGeom>
+          <a:noFill/>
+          <a:ln/>
+        </p:spPr>
+        <p:txBody>
+          <a:bodyPr wrap="square" lIns="0" tIns="0" rIns="0" bIns="0" rtlCol="0" anchor="t">
+            <a:normAutofit/>
+          </a:bodyPr>
+          <a:lstStyle/>
+          <a:p>
+            <a:pPr indent="0" marL="0">
+              <a:buNone/>
+            </a:pPr>
+            <a:r>
+              <a:rPr lang="en-US" sz="1250" dirty="0">
+                <a:solidFill>
+                  <a:srgbClr val="17364A"/>
+                </a:solidFill>
+                <a:latin typeface="Aptos" pitchFamily="34" charset="0"/>
+                <a:ea typeface="Aptos" pitchFamily="34" charset="-122"/>
+                <a:cs typeface="Aptos" pitchFamily="34" charset="-120"/>
+              </a:rPr>
+              <a:t>Use linked tools when your department needs a structured worksheet, template, checklist, review process, or documentation artifact.</a:t>
+            </a:r>
+            <a:endParaRPr lang="en-US" sz="1250" dirty="0"/>
+          </a:p>
+        </p:txBody>
+      </p:sp>
+      <p:sp>
+        <p:nvSpPr>
+          <p:cNvPr id="12" name="Shape 10"/>
+          <p:cNvSpPr/>
+          <p:nvPr/>
+        </p:nvSpPr>
+        <p:spPr>
+          <a:xfrm>
+            <a:off x="8046720" y="3794760"/>
+            <a:ext cx="3063240" cy="1508760"/>
+          </a:xfrm>
+          <a:prstGeom prst="roundRect">
+            <a:avLst>
+              <a:gd name="adj" fmla="val 7273"/>
+            </a:avLst>
+          </a:prstGeom>
+          <a:solidFill>
+            <a:srgbClr val="EEF8ED"/>
+          </a:solidFill>
+          <a:ln w="12700">
+            <a:solidFill>
+              <a:srgbClr val="B9D7E6"/>
+            </a:solidFill>
+            <a:prstDash val="solid"/>
+          </a:ln>
+        </p:spPr>
+      </p:sp>
+      <p:sp>
+        <p:nvSpPr>
+          <p:cNvPr id="13" name="Text 11"/>
+          <p:cNvSpPr/>
+          <p:nvPr/>
+        </p:nvSpPr>
+        <p:spPr>
+          <a:xfrm>
+            <a:off x="8211312" y="3941064"/>
+            <a:ext cx="2734056" cy="201168"/>
+          </a:xfrm>
+          <a:prstGeom prst="rect">
+            <a:avLst/>
+          </a:prstGeom>
+          <a:noFill/>
+          <a:ln/>
+        </p:spPr>
+        <p:txBody>
+          <a:bodyPr wrap="square" lIns="0" tIns="0" rIns="0" bIns="0" rtlCol="0" anchor="ctr"/>
+          <a:lstStyle/>
+          <a:p>
+            <a:pPr indent="0" marL="0">
+              <a:buNone/>
+            </a:pPr>
+            <a:r>
+              <a:rPr lang="en-US" sz="950" b="1" dirty="0">
+                <a:solidFill>
+                  <a:srgbClr val="0068B7"/>
+                </a:solidFill>
+                <a:latin typeface="Aptos" pitchFamily="34" charset="0"/>
+                <a:ea typeface="Aptos" pitchFamily="34" charset="-122"/>
+                <a:cs typeface="Aptos" pitchFamily="34" charset="-120"/>
+              </a:rPr>
+              <a:t>Avoid duplication</a:t>
+            </a:r>
+            <a:endParaRPr lang="en-US" sz="950" dirty="0"/>
+          </a:p>
+        </p:txBody>
+      </p:sp>
+      <p:sp>
+        <p:nvSpPr>
+          <p:cNvPr id="14" name="Text 12"/>
+          <p:cNvSpPr/>
+          <p:nvPr/>
+        </p:nvSpPr>
+        <p:spPr>
+          <a:xfrm>
+            <a:off x="8211312" y="4233672"/>
+            <a:ext cx="2734056" cy="941832"/>
+          </a:xfrm>
+          <a:prstGeom prst="rect">
+            <a:avLst/>
+          </a:prstGeom>
+          <a:noFill/>
+          <a:ln/>
+        </p:spPr>
+        <p:txBody>
+          <a:bodyPr wrap="square" lIns="0" tIns="0" rIns="0" bIns="0" rtlCol="0" anchor="t">
+            <a:normAutofit/>
+          </a:bodyPr>
+          <a:lstStyle/>
+          <a:p>
+            <a:pPr indent="0" marL="0">
+              <a:buNone/>
+            </a:pPr>
+            <a:r>
+              <a:rPr lang="en-US" sz="1250" dirty="0">
+                <a:solidFill>
+                  <a:srgbClr val="17364A"/>
+                </a:solidFill>
+                <a:latin typeface="Aptos" pitchFamily="34" charset="0"/>
+                <a:ea typeface="Aptos" pitchFamily="34" charset="-122"/>
+                <a:cs typeface="Aptos" pitchFamily="34" charset="-120"/>
+              </a:rPr>
+              <a:t>If your department already has a strong equivalent tool, adapt or use the existing process instead of recreating it.</a:t>
+            </a:r>
+            <a:endParaRPr lang="en-US" sz="1250" dirty="0"/>
           </a:p>
         </p:txBody>
       </p:sp>
@@ -6701,7 +12114,32 @@
       </p:sp>
       <p:sp>
         <p:nvSpPr>
-          <p:cNvPr id="3" name="Text 1"/>
+          <p:cNvPr id="3" name="Shape 1"/>
+          <p:cNvSpPr/>
+          <p:nvPr/>
+        </p:nvSpPr>
+        <p:spPr>
+          <a:xfrm>
+            <a:off x="0" y="164592"/>
+            <a:ext cx="146304" cy="6693408"/>
+          </a:xfrm>
+          <a:prstGeom prst="rect">
+            <a:avLst/>
+          </a:prstGeom>
+          <a:solidFill>
+            <a:srgbClr val="2F8A28"/>
+          </a:solidFill>
+          <a:ln w="12700">
+            <a:solidFill>
+              <a:srgbClr val="2F8A28"/>
+            </a:solidFill>
+            <a:prstDash val="solid"/>
+          </a:ln>
+        </p:spPr>
+      </p:sp>
+      <p:sp>
+        <p:nvSpPr>
+          <p:cNvPr id="4" name="Text 2"/>
           <p:cNvSpPr/>
           <p:nvPr/>
         </p:nvSpPr>
@@ -6740,7 +12178,7 @@
       </p:sp>
       <p:sp>
         <p:nvSpPr>
-          <p:cNvPr id="4" name="Text 2"/>
+          <p:cNvPr id="5" name="Text 3"/>
           <p:cNvSpPr/>
           <p:nvPr/>
         </p:nvSpPr>
@@ -6779,7 +12217,7 @@
       </p:sp>
       <p:sp>
         <p:nvSpPr>
-          <p:cNvPr id="5" name="Text 3"/>
+          <p:cNvPr id="6" name="Text 4"/>
           <p:cNvSpPr/>
           <p:nvPr/>
         </p:nvSpPr>
@@ -6818,13 +12256,77 @@
       </p:sp>
       <p:sp>
         <p:nvSpPr>
-          <p:cNvPr id="6" name="Text 4"/>
+          <p:cNvPr id="7" name="Shape 5"/>
           <p:cNvSpPr/>
           <p:nvPr/>
         </p:nvSpPr>
         <p:spPr>
           <a:xfrm>
             <a:off x="640080" y="658368"/>
+            <a:ext cx="420624" cy="420624"/>
+          </a:xfrm>
+          <a:prstGeom prst="ellipse">
+            <a:avLst/>
+          </a:prstGeom>
+          <a:solidFill>
+            <a:srgbClr val="0068B7"/>
+          </a:solidFill>
+          <a:ln w="12700">
+            <a:solidFill>
+              <a:srgbClr val="0068B7"/>
+            </a:solidFill>
+            <a:prstDash val="solid"/>
+          </a:ln>
+        </p:spPr>
+      </p:sp>
+      <p:sp>
+        <p:nvSpPr>
+          <p:cNvPr id="8" name="Text 6"/>
+          <p:cNvSpPr/>
+          <p:nvPr/>
+        </p:nvSpPr>
+        <p:spPr>
+          <a:xfrm>
+            <a:off x="640080" y="731520"/>
+            <a:ext cx="420624" cy="164592"/>
+          </a:xfrm>
+          <a:prstGeom prst="rect">
+            <a:avLst/>
+          </a:prstGeom>
+          <a:noFill/>
+          <a:ln/>
+        </p:spPr>
+        <p:txBody>
+          <a:bodyPr wrap="square" lIns="0" tIns="0" rIns="0" bIns="0" rtlCol="0" anchor="ctr"/>
+          <a:lstStyle/>
+          <a:p>
+            <a:pPr algn="ctr" indent="0" marL="0">
+              <a:buNone/>
+            </a:pPr>
+            <a:r>
+              <a:rPr lang="en-US" sz="1100" b="1" dirty="0">
+                <a:solidFill>
+                  <a:srgbClr val="FFFFFF"/>
+                </a:solidFill>
+                <a:latin typeface="Aptos" pitchFamily="34" charset="0"/>
+                <a:ea typeface="Aptos" pitchFamily="34" charset="-122"/>
+                <a:cs typeface="Aptos" pitchFamily="34" charset="-120"/>
+              </a:rPr>
+              <a:t>1</a:t>
+            </a:r>
+            <a:endParaRPr lang="en-US" sz="1100" dirty="0"/>
+          </a:p>
+        </p:txBody>
+      </p:sp>
+      <p:sp>
+        <p:nvSpPr>
+          <p:cNvPr id="9" name="Text 7"/>
+          <p:cNvSpPr/>
+          <p:nvPr/>
+        </p:nvSpPr>
+        <p:spPr>
+          <a:xfrm>
+            <a:off x="640080" y="621792"/>
             <a:ext cx="10881360" cy="566928"/>
           </a:xfrm>
           <a:prstGeom prst="rect">
@@ -6851,7 +12353,7 @@
                 <a:ea typeface="Aptos Display" pitchFamily="34" charset="-122"/>
                 <a:cs typeface="Aptos Display" pitchFamily="34" charset="-120"/>
               </a:rPr>
-              <a:t>Module Overview</a:t>
+              <a:t>Learning Objectives</a:t>
             </a:r>
             <a:endParaRPr lang="en-US" sz="2700" dirty="0"/>
           </a:p>
@@ -6859,32 +12361,178 @@
       </p:sp>
       <p:sp>
         <p:nvSpPr>
-          <p:cNvPr id="7" name="Text 5"/>
-          <p:cNvSpPr/>
-          <p:nvPr/>
-        </p:nvSpPr>
-        <p:spPr>
-          <a:xfrm>
-            <a:off x="822960" y="1325880"/>
-            <a:ext cx="10378440" cy="4800600"/>
-          </a:xfrm>
-          <a:prstGeom prst="rect">
-            <a:avLst/>
-          </a:prstGeom>
-          <a:noFill/>
-          <a:ln/>
-        </p:spPr>
-        <p:txBody>
-          <a:bodyPr wrap="square" lIns="1016" tIns="1016" rIns="1016" bIns="1016" rtlCol="0" anchor="t">
+          <p:cNvPr id="10" name="Text 8"/>
+          <p:cNvSpPr/>
+          <p:nvPr/>
+        </p:nvSpPr>
+        <p:spPr>
+          <a:xfrm>
+            <a:off x="868680" y="1417320"/>
+            <a:ext cx="6675120" cy="4434840"/>
+          </a:xfrm>
+          <a:prstGeom prst="rect">
+            <a:avLst/>
+          </a:prstGeom>
+          <a:noFill/>
+          <a:ln/>
+        </p:spPr>
+        <p:txBody>
+          <a:bodyPr wrap="square" lIns="635" tIns="635" rIns="635" bIns="635" rtlCol="0" anchor="t">
             <a:normAutofit/>
           </a:bodyPr>
           <a:lstStyle/>
           <a:p>
+            <a:r>
+              <a:rPr lang="en-US" sz="1700" dirty="0">
+                <a:solidFill>
+                  <a:srgbClr val="17364A"/>
+                </a:solidFill>
+                <a:latin typeface="Aptos" pitchFamily="34" charset="0"/>
+                <a:ea typeface="Aptos" pitchFamily="34" charset="-122"/>
+                <a:cs typeface="Aptos" pitchFamily="34" charset="-120"/>
+              </a:rPr>
+              <a:t>Explain the difference between supervised, unsupervised, and semi-supervised learning in public health terms.</a:t>
+            </a:r>
+            <a:endParaRPr lang="en-US" sz="1700" dirty="0"/>
+          </a:p>
+          <a:p>
+            <a:r>
+              <a:rPr lang="en-US" sz="1700" dirty="0">
+                <a:solidFill>
+                  <a:srgbClr val="17364A"/>
+                </a:solidFill>
+                <a:latin typeface="Aptos" pitchFamily="34" charset="0"/>
+                <a:ea typeface="Aptos" pitchFamily="34" charset="-122"/>
+                <a:cs typeface="Aptos" pitchFamily="34" charset="-120"/>
+              </a:rPr>
+              <a:t>Describe features, labels, training data, validation data, and test data.</a:t>
+            </a:r>
+            <a:endParaRPr lang="en-US" sz="1700" dirty="0"/>
+          </a:p>
+          <a:p>
+            <a:r>
+              <a:rPr lang="en-US" sz="1700" dirty="0">
+                <a:solidFill>
+                  <a:srgbClr val="17364A"/>
+                </a:solidFill>
+                <a:latin typeface="Aptos" pitchFamily="34" charset="0"/>
+                <a:ea typeface="Aptos" pitchFamily="34" charset="-122"/>
+                <a:cs typeface="Aptos" pitchFamily="34" charset="-120"/>
+              </a:rPr>
+              <a:t>Identify when a machine learning approach may be appropriate for a public health workflow and when a simpler method may be.</a:t>
+            </a:r>
+            <a:endParaRPr lang="en-US" sz="1700" dirty="0"/>
+          </a:p>
+          <a:p>
+            <a:r>
+              <a:rPr lang="en-US" sz="1700" dirty="0">
+                <a:solidFill>
+                  <a:srgbClr val="17364A"/>
+                </a:solidFill>
+                <a:latin typeface="Aptos" pitchFamily="34" charset="0"/>
+                <a:ea typeface="Aptos" pitchFamily="34" charset="-122"/>
+                <a:cs typeface="Aptos" pitchFamily="34" charset="-120"/>
+              </a:rPr>
+              <a:t>Recognize common machine learning risks, including overfitting, biased labels, data leakage, and poor generalization.</a:t>
+            </a:r>
+            <a:endParaRPr lang="en-US" sz="1700" dirty="0"/>
+          </a:p>
+        </p:txBody>
+      </p:sp>
+      <p:sp>
+        <p:nvSpPr>
+          <p:cNvPr id="11" name="Shape 9"/>
+          <p:cNvSpPr/>
+          <p:nvPr/>
+        </p:nvSpPr>
+        <p:spPr>
+          <a:xfrm>
+            <a:off x="7909560" y="1417320"/>
+            <a:ext cx="3154680" cy="1828800"/>
+          </a:xfrm>
+          <a:prstGeom prst="roundRect">
+            <a:avLst>
+              <a:gd name="adj" fmla="val 6000"/>
+            </a:avLst>
+          </a:prstGeom>
+          <a:solidFill>
+            <a:srgbClr val="EEF8ED"/>
+          </a:solidFill>
+          <a:ln w="12700">
+            <a:solidFill>
+              <a:srgbClr val="B9D7E6"/>
+            </a:solidFill>
+            <a:prstDash val="solid"/>
+          </a:ln>
+        </p:spPr>
+      </p:sp>
+      <p:sp>
+        <p:nvSpPr>
+          <p:cNvPr id="12" name="Text 10"/>
+          <p:cNvSpPr/>
+          <p:nvPr/>
+        </p:nvSpPr>
+        <p:spPr>
+          <a:xfrm>
+            <a:off x="8074152" y="1563624"/>
+            <a:ext cx="2825496" cy="201168"/>
+          </a:xfrm>
+          <a:prstGeom prst="rect">
+            <a:avLst/>
+          </a:prstGeom>
+          <a:noFill/>
+          <a:ln/>
+        </p:spPr>
+        <p:txBody>
+          <a:bodyPr wrap="square" lIns="0" tIns="0" rIns="0" bIns="0" rtlCol="0" anchor="ctr"/>
+          <a:lstStyle/>
+          <a:p>
             <a:pPr indent="0" marL="0">
               <a:buNone/>
             </a:pPr>
             <a:r>
-              <a:rPr lang="en-US" sz="1420" dirty="0">
+              <a:rPr lang="en-US" sz="950" b="1" dirty="0">
+                <a:solidFill>
+                  <a:srgbClr val="0068B7"/>
+                </a:solidFill>
+                <a:latin typeface="Aptos" pitchFamily="34" charset="0"/>
+                <a:ea typeface="Aptos" pitchFamily="34" charset="-122"/>
+                <a:cs typeface="Aptos" pitchFamily="34" charset="-120"/>
+              </a:rPr>
+              <a:t>Key idea</a:t>
+            </a:r>
+            <a:endParaRPr lang="en-US" sz="950" dirty="0"/>
+          </a:p>
+        </p:txBody>
+      </p:sp>
+      <p:sp>
+        <p:nvSpPr>
+          <p:cNvPr id="13" name="Text 11"/>
+          <p:cNvSpPr/>
+          <p:nvPr/>
+        </p:nvSpPr>
+        <p:spPr>
+          <a:xfrm>
+            <a:off x="8074152" y="1856232"/>
+            <a:ext cx="2825496" cy="1261872"/>
+          </a:xfrm>
+          <a:prstGeom prst="rect">
+            <a:avLst/>
+          </a:prstGeom>
+          <a:noFill/>
+          <a:ln/>
+        </p:spPr>
+        <p:txBody>
+          <a:bodyPr wrap="square" lIns="0" tIns="0" rIns="0" bIns="0" rtlCol="0" anchor="t">
+            <a:normAutofit/>
+          </a:bodyPr>
+          <a:lstStyle/>
+          <a:p>
+            <a:pPr indent="0" marL="0">
+              <a:buNone/>
+            </a:pPr>
+            <a:r>
+              <a:rPr lang="en-US" sz="1250" dirty="0">
                 <a:solidFill>
                   <a:srgbClr val="17364A"/>
                 </a:solidFill>
@@ -6892,9 +12540,116 @@
                 <a:ea typeface="Aptos" pitchFamily="34" charset="-122"/>
                 <a:cs typeface="Aptos" pitchFamily="34" charset="-120"/>
               </a:rPr>
-              <a:t>Machine learning is a set of methods that allow computer systems to identify patterns in data and use those patterns to classify, predict, cluster, or prioritize information. In public health, machine learning may support surveillance triage, outbreak signal review, risk stratification, case classification, anomaly detection, service planning, or quality improvement. The purpose of this module is not to turn every learner into a data scientist. The purpose is to help public health informaticians, epidemiologists, and technologists understand the concepts needed to evaluate whether a machine learning approach is appropriate, valid, equitable, and operationally useful. Machine learning should be understood as one analytic option among many. Traditional epidemiologic methods, rules-based logic, statistical models, and human judgment remain essential in many public health workflows. A machine learning model may be helpful when patterns are complex, high-dimensional, or difficult to express as simple rules. It may be inappropriate when data are sparse, labels are unreliable, the decision is highly consequential, or the public health question requires causal interpretation rather than prediction. This module introduces supervised learning, unsupervised learning, features, labels, training data, validation data, test data, overfitting, generalization, and model performance. Learners will connect these concepts to public health examples and identify the safeguards needed before machine learning outputs are used to support public health action.</a:t>
-            </a:r>
-            <a:endParaRPr lang="en-US" sz="1420" dirty="0"/>
+              <a:t>Explain the difference between supervised, unsupervised, and semi-supervised learning in public health terms.</a:t>
+            </a:r>
+            <a:endParaRPr lang="en-US" sz="1250" dirty="0"/>
+          </a:p>
+        </p:txBody>
+      </p:sp>
+      <p:sp>
+        <p:nvSpPr>
+          <p:cNvPr id="14" name="Shape 12"/>
+          <p:cNvSpPr/>
+          <p:nvPr/>
+        </p:nvSpPr>
+        <p:spPr>
+          <a:xfrm>
+            <a:off x="7909560" y="3520440"/>
+            <a:ext cx="3154680" cy="1737360"/>
+          </a:xfrm>
+          <a:prstGeom prst="roundRect">
+            <a:avLst>
+              <a:gd name="adj" fmla="val 6316"/>
+            </a:avLst>
+          </a:prstGeom>
+          <a:solidFill>
+            <a:srgbClr val="EAF6F8"/>
+          </a:solidFill>
+          <a:ln w="12700">
+            <a:solidFill>
+              <a:srgbClr val="B9D7E6"/>
+            </a:solidFill>
+            <a:prstDash val="solid"/>
+          </a:ln>
+        </p:spPr>
+      </p:sp>
+      <p:sp>
+        <p:nvSpPr>
+          <p:cNvPr id="15" name="Text 13"/>
+          <p:cNvSpPr/>
+          <p:nvPr/>
+        </p:nvSpPr>
+        <p:spPr>
+          <a:xfrm>
+            <a:off x="8074152" y="3666744"/>
+            <a:ext cx="2825496" cy="201168"/>
+          </a:xfrm>
+          <a:prstGeom prst="rect">
+            <a:avLst/>
+          </a:prstGeom>
+          <a:noFill/>
+          <a:ln/>
+        </p:spPr>
+        <p:txBody>
+          <a:bodyPr wrap="square" lIns="0" tIns="0" rIns="0" bIns="0" rtlCol="0" anchor="ctr"/>
+          <a:lstStyle/>
+          <a:p>
+            <a:pPr indent="0" marL="0">
+              <a:buNone/>
+            </a:pPr>
+            <a:r>
+              <a:rPr lang="en-US" sz="950" b="1" dirty="0">
+                <a:solidFill>
+                  <a:srgbClr val="0068B7"/>
+                </a:solidFill>
+                <a:latin typeface="Aptos" pitchFamily="34" charset="0"/>
+                <a:ea typeface="Aptos" pitchFamily="34" charset="-122"/>
+                <a:cs typeface="Aptos" pitchFamily="34" charset="-120"/>
+              </a:rPr>
+              <a:t>Use this for</a:t>
+            </a:r>
+            <a:endParaRPr lang="en-US" sz="950" dirty="0"/>
+          </a:p>
+        </p:txBody>
+      </p:sp>
+      <p:sp>
+        <p:nvSpPr>
+          <p:cNvPr id="16" name="Text 14"/>
+          <p:cNvSpPr/>
+          <p:nvPr/>
+        </p:nvSpPr>
+        <p:spPr>
+          <a:xfrm>
+            <a:off x="8074152" y="3959352"/>
+            <a:ext cx="2825496" cy="1170432"/>
+          </a:xfrm>
+          <a:prstGeom prst="rect">
+            <a:avLst/>
+          </a:prstGeom>
+          <a:noFill/>
+          <a:ln/>
+        </p:spPr>
+        <p:txBody>
+          <a:bodyPr wrap="square" lIns="0" tIns="0" rIns="0" bIns="0" rtlCol="0" anchor="t">
+            <a:normAutofit/>
+          </a:bodyPr>
+          <a:lstStyle/>
+          <a:p>
+            <a:pPr indent="0" marL="0">
+              <a:buNone/>
+            </a:pPr>
+            <a:r>
+              <a:rPr lang="en-US" sz="1250" dirty="0">
+                <a:solidFill>
+                  <a:srgbClr val="17364A"/>
+                </a:solidFill>
+                <a:latin typeface="Aptos" pitchFamily="34" charset="0"/>
+                <a:ea typeface="Aptos" pitchFamily="34" charset="-122"/>
+                <a:cs typeface="Aptos" pitchFamily="34" charset="-120"/>
+              </a:rPr>
+              <a:t>Connect the concept to public health decisions, safeguards, documentation, or implementation work.</a:t>
+            </a:r>
+            <a:endParaRPr lang="en-US" sz="1250" dirty="0"/>
           </a:p>
         </p:txBody>
       </p:sp>
@@ -6957,7 +12712,32 @@
       </p:sp>
       <p:sp>
         <p:nvSpPr>
-          <p:cNvPr id="3" name="Text 1"/>
+          <p:cNvPr id="3" name="Shape 1"/>
+          <p:cNvSpPr/>
+          <p:nvPr/>
+        </p:nvSpPr>
+        <p:spPr>
+          <a:xfrm>
+            <a:off x="0" y="164592"/>
+            <a:ext cx="146304" cy="6693408"/>
+          </a:xfrm>
+          <a:prstGeom prst="rect">
+            <a:avLst/>
+          </a:prstGeom>
+          <a:solidFill>
+            <a:srgbClr val="2F8A28"/>
+          </a:solidFill>
+          <a:ln w="12700">
+            <a:solidFill>
+              <a:srgbClr val="2F8A28"/>
+            </a:solidFill>
+            <a:prstDash val="solid"/>
+          </a:ln>
+        </p:spPr>
+      </p:sp>
+      <p:sp>
+        <p:nvSpPr>
+          <p:cNvPr id="4" name="Text 2"/>
           <p:cNvSpPr/>
           <p:nvPr/>
         </p:nvSpPr>
@@ -6996,7 +12776,7 @@
       </p:sp>
       <p:sp>
         <p:nvSpPr>
-          <p:cNvPr id="4" name="Text 2"/>
+          <p:cNvPr id="5" name="Text 3"/>
           <p:cNvSpPr/>
           <p:nvPr/>
         </p:nvSpPr>
@@ -7035,7 +12815,7 @@
       </p:sp>
       <p:sp>
         <p:nvSpPr>
-          <p:cNvPr id="5" name="Text 3"/>
+          <p:cNvPr id="6" name="Text 4"/>
           <p:cNvSpPr/>
           <p:nvPr/>
         </p:nvSpPr>
@@ -7074,7 +12854,7 @@
       </p:sp>
       <p:sp>
         <p:nvSpPr>
-          <p:cNvPr id="6" name="Text 4"/>
+          <p:cNvPr id="7" name="Text 5"/>
           <p:cNvSpPr/>
           <p:nvPr/>
         </p:nvSpPr>
@@ -7107,7 +12887,7 @@
                 <a:ea typeface="Aptos Display" pitchFamily="34" charset="-122"/>
                 <a:cs typeface="Aptos Display" pitchFamily="34" charset="-120"/>
               </a:rPr>
-              <a:t>Why This Topic Matters for Public Health AI</a:t>
+              <a:t>Learning Objectives Continued</a:t>
             </a:r>
             <a:endParaRPr lang="en-US" sz="2700" dirty="0"/>
           </a:p>
@@ -7115,32 +12895,136 @@
       </p:sp>
       <p:sp>
         <p:nvSpPr>
-          <p:cNvPr id="7" name="Text 5"/>
-          <p:cNvSpPr/>
-          <p:nvPr/>
-        </p:nvSpPr>
-        <p:spPr>
-          <a:xfrm>
-            <a:off x="822960" y="1325880"/>
-            <a:ext cx="10378440" cy="4800600"/>
-          </a:xfrm>
-          <a:prstGeom prst="rect">
-            <a:avLst/>
-          </a:prstGeom>
-          <a:noFill/>
-          <a:ln/>
-        </p:spPr>
-        <p:txBody>
-          <a:bodyPr wrap="square" lIns="1016" tIns="1016" rIns="1016" bIns="1016" rtlCol="0" anchor="t">
+          <p:cNvPr id="8" name="Text 6"/>
+          <p:cNvSpPr/>
+          <p:nvPr/>
+        </p:nvSpPr>
+        <p:spPr>
+          <a:xfrm>
+            <a:off x="868680" y="1417320"/>
+            <a:ext cx="6675120" cy="4434840"/>
+          </a:xfrm>
+          <a:prstGeom prst="rect">
+            <a:avLst/>
+          </a:prstGeom>
+          <a:noFill/>
+          <a:ln/>
+        </p:spPr>
+        <p:txBody>
+          <a:bodyPr wrap="square" lIns="635" tIns="635" rIns="635" bIns="635" rtlCol="0" anchor="t">
             <a:normAutofit/>
           </a:bodyPr>
           <a:lstStyle/>
           <a:p>
+            <a:r>
+              <a:rPr lang="en-US" sz="1700" dirty="0">
+                <a:solidFill>
+                  <a:srgbClr val="17364A"/>
+                </a:solidFill>
+                <a:latin typeface="Aptos" pitchFamily="34" charset="0"/>
+                <a:ea typeface="Aptos" pitchFamily="34" charset="-122"/>
+                <a:cs typeface="Aptos" pitchFamily="34" charset="-120"/>
+              </a:rPr>
+              <a:t>Produce a machine learning use case review worksheet for a real or realistic public health workflow.</a:t>
+            </a:r>
+            <a:endParaRPr lang="en-US" sz="1700" dirty="0"/>
+          </a:p>
+        </p:txBody>
+      </p:sp>
+      <p:sp>
+        <p:nvSpPr>
+          <p:cNvPr id="9" name="Shape 7"/>
+          <p:cNvSpPr/>
+          <p:nvPr/>
+        </p:nvSpPr>
+        <p:spPr>
+          <a:xfrm>
+            <a:off x="7909560" y="1417320"/>
+            <a:ext cx="3154680" cy="1828800"/>
+          </a:xfrm>
+          <a:prstGeom prst="roundRect">
+            <a:avLst>
+              <a:gd name="adj" fmla="val 6000"/>
+            </a:avLst>
+          </a:prstGeom>
+          <a:solidFill>
+            <a:srgbClr val="EEF8ED"/>
+          </a:solidFill>
+          <a:ln w="12700">
+            <a:solidFill>
+              <a:srgbClr val="B9D7E6"/>
+            </a:solidFill>
+            <a:prstDash val="solid"/>
+          </a:ln>
+        </p:spPr>
+      </p:sp>
+      <p:sp>
+        <p:nvSpPr>
+          <p:cNvPr id="10" name="Text 8"/>
+          <p:cNvSpPr/>
+          <p:nvPr/>
+        </p:nvSpPr>
+        <p:spPr>
+          <a:xfrm>
+            <a:off x="8074152" y="1563624"/>
+            <a:ext cx="2825496" cy="201168"/>
+          </a:xfrm>
+          <a:prstGeom prst="rect">
+            <a:avLst/>
+          </a:prstGeom>
+          <a:noFill/>
+          <a:ln/>
+        </p:spPr>
+        <p:txBody>
+          <a:bodyPr wrap="square" lIns="0" tIns="0" rIns="0" bIns="0" rtlCol="0" anchor="ctr"/>
+          <a:lstStyle/>
+          <a:p>
             <a:pPr indent="0" marL="0">
               <a:buNone/>
             </a:pPr>
             <a:r>
-              <a:rPr lang="en-US" sz="1420" dirty="0">
+              <a:rPr lang="en-US" sz="950" b="1" dirty="0">
+                <a:solidFill>
+                  <a:srgbClr val="0068B7"/>
+                </a:solidFill>
+                <a:latin typeface="Aptos" pitchFamily="34" charset="0"/>
+                <a:ea typeface="Aptos" pitchFamily="34" charset="-122"/>
+                <a:cs typeface="Aptos" pitchFamily="34" charset="-120"/>
+              </a:rPr>
+              <a:t>Key idea</a:t>
+            </a:r>
+            <a:endParaRPr lang="en-US" sz="950" dirty="0"/>
+          </a:p>
+        </p:txBody>
+      </p:sp>
+      <p:sp>
+        <p:nvSpPr>
+          <p:cNvPr id="11" name="Text 9"/>
+          <p:cNvSpPr/>
+          <p:nvPr/>
+        </p:nvSpPr>
+        <p:spPr>
+          <a:xfrm>
+            <a:off x="8074152" y="1856232"/>
+            <a:ext cx="2825496" cy="1261872"/>
+          </a:xfrm>
+          <a:prstGeom prst="rect">
+            <a:avLst/>
+          </a:prstGeom>
+          <a:noFill/>
+          <a:ln/>
+        </p:spPr>
+        <p:txBody>
+          <a:bodyPr wrap="square" lIns="0" tIns="0" rIns="0" bIns="0" rtlCol="0" anchor="t">
+            <a:normAutofit/>
+          </a:bodyPr>
+          <a:lstStyle/>
+          <a:p>
+            <a:pPr indent="0" marL="0">
+              <a:buNone/>
+            </a:pPr>
+            <a:r>
+              <a:rPr lang="en-US" sz="1250" dirty="0">
                 <a:solidFill>
                   <a:srgbClr val="17364A"/>
                 </a:solidFill>
@@ -7148,9 +13032,116 @@
                 <a:ea typeface="Aptos" pitchFamily="34" charset="-122"/>
                 <a:cs typeface="Aptos" pitchFamily="34" charset="-120"/>
               </a:rPr>
-              <a:t>Machine learning matters for public health AI because many proposed tools rely on classification, prediction, ranking, or pattern detection. A surveillance team may want to classify incoming reports by urgency. An epidemiology team may want to detect unusual disease patterns. A program may want to prioritize outreach based on predicted risk. Each of these uses can affect who receives attention, services, investigation, or resources. Public health staff need enough machine learning literacy to ask whether the model is aligned with the public health purpose. A model built to predict an outcome is not the same as a model that explains why the outcome occurred. A model that performs well in one jurisdiction, population, or reporting environment may not perform well elsewhere. A model trained on historical public health actions may learn historical practice patterns, including under-detection or unequal service access. The most important public health question is whether the model improves decision-making safely and equitably. This requires more than a performance score. Staff must understand the source data, label quality, model limitations, subgroup performance, workflow impact, human review process, and monitoring plan. Machine learning should strengthen public health practice, not obscure uncertainty or shift responsibility away from accountable staff.</a:t>
-            </a:r>
-            <a:endParaRPr lang="en-US" sz="1420" dirty="0"/>
+              <a:t>Produce a machine learning use case review worksheet for a real or realistic public health workflow.</a:t>
+            </a:r>
+            <a:endParaRPr lang="en-US" sz="1250" dirty="0"/>
+          </a:p>
+        </p:txBody>
+      </p:sp>
+      <p:sp>
+        <p:nvSpPr>
+          <p:cNvPr id="12" name="Shape 10"/>
+          <p:cNvSpPr/>
+          <p:nvPr/>
+        </p:nvSpPr>
+        <p:spPr>
+          <a:xfrm>
+            <a:off x="7909560" y="3520440"/>
+            <a:ext cx="3154680" cy="1737360"/>
+          </a:xfrm>
+          <a:prstGeom prst="roundRect">
+            <a:avLst>
+              <a:gd name="adj" fmla="val 6316"/>
+            </a:avLst>
+          </a:prstGeom>
+          <a:solidFill>
+            <a:srgbClr val="EAF6F8"/>
+          </a:solidFill>
+          <a:ln w="12700">
+            <a:solidFill>
+              <a:srgbClr val="B9D7E6"/>
+            </a:solidFill>
+            <a:prstDash val="solid"/>
+          </a:ln>
+        </p:spPr>
+      </p:sp>
+      <p:sp>
+        <p:nvSpPr>
+          <p:cNvPr id="13" name="Text 11"/>
+          <p:cNvSpPr/>
+          <p:nvPr/>
+        </p:nvSpPr>
+        <p:spPr>
+          <a:xfrm>
+            <a:off x="8074152" y="3666744"/>
+            <a:ext cx="2825496" cy="201168"/>
+          </a:xfrm>
+          <a:prstGeom prst="rect">
+            <a:avLst/>
+          </a:prstGeom>
+          <a:noFill/>
+          <a:ln/>
+        </p:spPr>
+        <p:txBody>
+          <a:bodyPr wrap="square" lIns="0" tIns="0" rIns="0" bIns="0" rtlCol="0" anchor="ctr"/>
+          <a:lstStyle/>
+          <a:p>
+            <a:pPr indent="0" marL="0">
+              <a:buNone/>
+            </a:pPr>
+            <a:r>
+              <a:rPr lang="en-US" sz="950" b="1" dirty="0">
+                <a:solidFill>
+                  <a:srgbClr val="0068B7"/>
+                </a:solidFill>
+                <a:latin typeface="Aptos" pitchFamily="34" charset="0"/>
+                <a:ea typeface="Aptos" pitchFamily="34" charset="-122"/>
+                <a:cs typeface="Aptos" pitchFamily="34" charset="-120"/>
+              </a:rPr>
+              <a:t>Use this for</a:t>
+            </a:r>
+            <a:endParaRPr lang="en-US" sz="950" dirty="0"/>
+          </a:p>
+        </p:txBody>
+      </p:sp>
+      <p:sp>
+        <p:nvSpPr>
+          <p:cNvPr id="14" name="Text 12"/>
+          <p:cNvSpPr/>
+          <p:nvPr/>
+        </p:nvSpPr>
+        <p:spPr>
+          <a:xfrm>
+            <a:off x="8074152" y="3959352"/>
+            <a:ext cx="2825496" cy="1170432"/>
+          </a:xfrm>
+          <a:prstGeom prst="rect">
+            <a:avLst/>
+          </a:prstGeom>
+          <a:noFill/>
+          <a:ln/>
+        </p:spPr>
+        <p:txBody>
+          <a:bodyPr wrap="square" lIns="0" tIns="0" rIns="0" bIns="0" rtlCol="0" anchor="t">
+            <a:normAutofit/>
+          </a:bodyPr>
+          <a:lstStyle/>
+          <a:p>
+            <a:pPr indent="0" marL="0">
+              <a:buNone/>
+            </a:pPr>
+            <a:r>
+              <a:rPr lang="en-US" sz="1250" dirty="0">
+                <a:solidFill>
+                  <a:srgbClr val="17364A"/>
+                </a:solidFill>
+                <a:latin typeface="Aptos" pitchFamily="34" charset="0"/>
+                <a:ea typeface="Aptos" pitchFamily="34" charset="-122"/>
+                <a:cs typeface="Aptos" pitchFamily="34" charset="-120"/>
+              </a:rPr>
+              <a:t>Connect the concept to public health decisions, safeguards, documentation, or implementation work.</a:t>
+            </a:r>
+            <a:endParaRPr lang="en-US" sz="1250" dirty="0"/>
           </a:p>
         </p:txBody>
       </p:sp>
@@ -7213,7 +13204,32 @@
       </p:sp>
       <p:sp>
         <p:nvSpPr>
-          <p:cNvPr id="3" name="Text 1"/>
+          <p:cNvPr id="3" name="Shape 1"/>
+          <p:cNvSpPr/>
+          <p:nvPr/>
+        </p:nvSpPr>
+        <p:spPr>
+          <a:xfrm>
+            <a:off x="0" y="164592"/>
+            <a:ext cx="146304" cy="6693408"/>
+          </a:xfrm>
+          <a:prstGeom prst="rect">
+            <a:avLst/>
+          </a:prstGeom>
+          <a:solidFill>
+            <a:srgbClr val="2F8A28"/>
+          </a:solidFill>
+          <a:ln w="12700">
+            <a:solidFill>
+              <a:srgbClr val="2F8A28"/>
+            </a:solidFill>
+            <a:prstDash val="solid"/>
+          </a:ln>
+        </p:spPr>
+      </p:sp>
+      <p:sp>
+        <p:nvSpPr>
+          <p:cNvPr id="4" name="Text 2"/>
           <p:cNvSpPr/>
           <p:nvPr/>
         </p:nvSpPr>
@@ -7252,7 +13268,7 @@
       </p:sp>
       <p:sp>
         <p:nvSpPr>
-          <p:cNvPr id="4" name="Text 2"/>
+          <p:cNvPr id="5" name="Text 3"/>
           <p:cNvSpPr/>
           <p:nvPr/>
         </p:nvSpPr>
@@ -7291,7 +13307,7 @@
       </p:sp>
       <p:sp>
         <p:nvSpPr>
-          <p:cNvPr id="5" name="Text 3"/>
+          <p:cNvPr id="6" name="Text 4"/>
           <p:cNvSpPr/>
           <p:nvPr/>
         </p:nvSpPr>
@@ -7330,13 +13346,77 @@
       </p:sp>
       <p:sp>
         <p:nvSpPr>
-          <p:cNvPr id="6" name="Text 4"/>
+          <p:cNvPr id="7" name="Shape 5"/>
           <p:cNvSpPr/>
           <p:nvPr/>
         </p:nvSpPr>
         <p:spPr>
           <a:xfrm>
             <a:off x="640080" y="658368"/>
+            <a:ext cx="420624" cy="420624"/>
+          </a:xfrm>
+          <a:prstGeom prst="ellipse">
+            <a:avLst/>
+          </a:prstGeom>
+          <a:solidFill>
+            <a:srgbClr val="0068B7"/>
+          </a:solidFill>
+          <a:ln w="12700">
+            <a:solidFill>
+              <a:srgbClr val="0068B7"/>
+            </a:solidFill>
+            <a:prstDash val="solid"/>
+          </a:ln>
+        </p:spPr>
+      </p:sp>
+      <p:sp>
+        <p:nvSpPr>
+          <p:cNvPr id="8" name="Text 6"/>
+          <p:cNvSpPr/>
+          <p:nvPr/>
+        </p:nvSpPr>
+        <p:spPr>
+          <a:xfrm>
+            <a:off x="640080" y="731520"/>
+            <a:ext cx="420624" cy="164592"/>
+          </a:xfrm>
+          <a:prstGeom prst="rect">
+            <a:avLst/>
+          </a:prstGeom>
+          <a:noFill/>
+          <a:ln/>
+        </p:spPr>
+        <p:txBody>
+          <a:bodyPr wrap="square" lIns="0" tIns="0" rIns="0" bIns="0" rtlCol="0" anchor="ctr"/>
+          <a:lstStyle/>
+          <a:p>
+            <a:pPr algn="ctr" indent="0" marL="0">
+              <a:buNone/>
+            </a:pPr>
+            <a:r>
+              <a:rPr lang="en-US" sz="1100" b="1" dirty="0">
+                <a:solidFill>
+                  <a:srgbClr val="FFFFFF"/>
+                </a:solidFill>
+                <a:latin typeface="Aptos" pitchFamily="34" charset="0"/>
+                <a:ea typeface="Aptos" pitchFamily="34" charset="-122"/>
+                <a:cs typeface="Aptos" pitchFamily="34" charset="-120"/>
+              </a:rPr>
+              <a:t>2</a:t>
+            </a:r>
+            <a:endParaRPr lang="en-US" sz="1100" dirty="0"/>
+          </a:p>
+        </p:txBody>
+      </p:sp>
+      <p:sp>
+        <p:nvSpPr>
+          <p:cNvPr id="9" name="Text 7"/>
+          <p:cNvSpPr/>
+          <p:nvPr/>
+        </p:nvSpPr>
+        <p:spPr>
+          <a:xfrm>
+            <a:off x="640080" y="621792"/>
             <a:ext cx="10881360" cy="566928"/>
           </a:xfrm>
           <a:prstGeom prst="rect">
@@ -7363,7 +13443,7 @@
                 <a:ea typeface="Aptos Display" pitchFamily="34" charset="-122"/>
                 <a:cs typeface="Aptos Display" pitchFamily="34" charset="-120"/>
               </a:rPr>
-              <a:t>Public Health Example</a:t>
+              <a:t>Module Overview</a:t>
             </a:r>
             <a:endParaRPr lang="en-US" sz="2700" dirty="0"/>
           </a:p>
@@ -7371,32 +13451,178 @@
       </p:sp>
       <p:sp>
         <p:nvSpPr>
-          <p:cNvPr id="7" name="Text 5"/>
-          <p:cNvSpPr/>
-          <p:nvPr/>
-        </p:nvSpPr>
-        <p:spPr>
-          <a:xfrm>
-            <a:off x="822960" y="1325880"/>
-            <a:ext cx="10378440" cy="4800600"/>
-          </a:xfrm>
-          <a:prstGeom prst="rect">
-            <a:avLst/>
-          </a:prstGeom>
-          <a:noFill/>
-          <a:ln/>
-        </p:spPr>
-        <p:txBody>
-          <a:bodyPr wrap="square" lIns="1016" tIns="1016" rIns="1016" bIns="1016" rtlCol="0" anchor="t">
+          <p:cNvPr id="10" name="Text 8"/>
+          <p:cNvSpPr/>
+          <p:nvPr/>
+        </p:nvSpPr>
+        <p:spPr>
+          <a:xfrm>
+            <a:off x="868680" y="1417320"/>
+            <a:ext cx="6675120" cy="4434840"/>
+          </a:xfrm>
+          <a:prstGeom prst="rect">
+            <a:avLst/>
+          </a:prstGeom>
+          <a:noFill/>
+          <a:ln/>
+        </p:spPr>
+        <p:txBody>
+          <a:bodyPr wrap="square" lIns="635" tIns="635" rIns="635" bIns="635" rtlCol="0" anchor="t">
             <a:normAutofit/>
           </a:bodyPr>
           <a:lstStyle/>
           <a:p>
+            <a:r>
+              <a:rPr lang="en-US" sz="1700" dirty="0">
+                <a:solidFill>
+                  <a:srgbClr val="17364A"/>
+                </a:solidFill>
+                <a:latin typeface="Aptos" pitchFamily="34" charset="0"/>
+                <a:ea typeface="Aptos" pitchFamily="34" charset="-122"/>
+                <a:cs typeface="Aptos" pitchFamily="34" charset="-120"/>
+              </a:rPr>
+              <a:t>Machine learning is a set of methods that allow computer systems to identify patterns in data and use those patterns to.</a:t>
+            </a:r>
+            <a:endParaRPr lang="en-US" sz="1700" dirty="0"/>
+          </a:p>
+          <a:p>
+            <a:r>
+              <a:rPr lang="en-US" sz="1700" dirty="0">
+                <a:solidFill>
+                  <a:srgbClr val="17364A"/>
+                </a:solidFill>
+                <a:latin typeface="Aptos" pitchFamily="34" charset="0"/>
+                <a:ea typeface="Aptos" pitchFamily="34" charset="-122"/>
+                <a:cs typeface="Aptos" pitchFamily="34" charset="-120"/>
+              </a:rPr>
+              <a:t>In public health, machine learning may support surveillance triage, outbreak signal review, risk stratification, case.</a:t>
+            </a:r>
+            <a:endParaRPr lang="en-US" sz="1700" dirty="0"/>
+          </a:p>
+          <a:p>
+            <a:r>
+              <a:rPr lang="en-US" sz="1700" dirty="0">
+                <a:solidFill>
+                  <a:srgbClr val="17364A"/>
+                </a:solidFill>
+                <a:latin typeface="Aptos" pitchFamily="34" charset="0"/>
+                <a:ea typeface="Aptos" pitchFamily="34" charset="-122"/>
+                <a:cs typeface="Aptos" pitchFamily="34" charset="-120"/>
+              </a:rPr>
+              <a:t>The purpose of this module is not to turn every learner into a data scientist.</a:t>
+            </a:r>
+            <a:endParaRPr lang="en-US" sz="1700" dirty="0"/>
+          </a:p>
+          <a:p>
+            <a:r>
+              <a:rPr lang="en-US" sz="1700" dirty="0">
+                <a:solidFill>
+                  <a:srgbClr val="17364A"/>
+                </a:solidFill>
+                <a:latin typeface="Aptos" pitchFamily="34" charset="0"/>
+                <a:ea typeface="Aptos" pitchFamily="34" charset="-122"/>
+                <a:cs typeface="Aptos" pitchFamily="34" charset="-120"/>
+              </a:rPr>
+              <a:t>The purpose is to help public health informaticians, epidemiologists, and technologists understand the concepts needed to.</a:t>
+            </a:r>
+            <a:endParaRPr lang="en-US" sz="1700" dirty="0"/>
+          </a:p>
+        </p:txBody>
+      </p:sp>
+      <p:sp>
+        <p:nvSpPr>
+          <p:cNvPr id="11" name="Shape 9"/>
+          <p:cNvSpPr/>
+          <p:nvPr/>
+        </p:nvSpPr>
+        <p:spPr>
+          <a:xfrm>
+            <a:off x="7909560" y="1417320"/>
+            <a:ext cx="3154680" cy="1828800"/>
+          </a:xfrm>
+          <a:prstGeom prst="roundRect">
+            <a:avLst>
+              <a:gd name="adj" fmla="val 6000"/>
+            </a:avLst>
+          </a:prstGeom>
+          <a:solidFill>
+            <a:srgbClr val="EEF8ED"/>
+          </a:solidFill>
+          <a:ln w="12700">
+            <a:solidFill>
+              <a:srgbClr val="B9D7E6"/>
+            </a:solidFill>
+            <a:prstDash val="solid"/>
+          </a:ln>
+        </p:spPr>
+      </p:sp>
+      <p:sp>
+        <p:nvSpPr>
+          <p:cNvPr id="12" name="Text 10"/>
+          <p:cNvSpPr/>
+          <p:nvPr/>
+        </p:nvSpPr>
+        <p:spPr>
+          <a:xfrm>
+            <a:off x="8074152" y="1563624"/>
+            <a:ext cx="2825496" cy="201168"/>
+          </a:xfrm>
+          <a:prstGeom prst="rect">
+            <a:avLst/>
+          </a:prstGeom>
+          <a:noFill/>
+          <a:ln/>
+        </p:spPr>
+        <p:txBody>
+          <a:bodyPr wrap="square" lIns="0" tIns="0" rIns="0" bIns="0" rtlCol="0" anchor="ctr"/>
+          <a:lstStyle/>
+          <a:p>
             <a:pPr indent="0" marL="0">
               <a:buNone/>
             </a:pPr>
             <a:r>
-              <a:rPr lang="en-US" sz="1420" dirty="0">
+              <a:rPr lang="en-US" sz="950" b="1" dirty="0">
+                <a:solidFill>
+                  <a:srgbClr val="0068B7"/>
+                </a:solidFill>
+                <a:latin typeface="Aptos" pitchFamily="34" charset="0"/>
+                <a:ea typeface="Aptos" pitchFamily="34" charset="-122"/>
+                <a:cs typeface="Aptos" pitchFamily="34" charset="-120"/>
+              </a:rPr>
+              <a:t>Key idea</a:t>
+            </a:r>
+            <a:endParaRPr lang="en-US" sz="950" dirty="0"/>
+          </a:p>
+        </p:txBody>
+      </p:sp>
+      <p:sp>
+        <p:nvSpPr>
+          <p:cNvPr id="13" name="Text 11"/>
+          <p:cNvSpPr/>
+          <p:nvPr/>
+        </p:nvSpPr>
+        <p:spPr>
+          <a:xfrm>
+            <a:off x="8074152" y="1856232"/>
+            <a:ext cx="2825496" cy="1261872"/>
+          </a:xfrm>
+          <a:prstGeom prst="rect">
+            <a:avLst/>
+          </a:prstGeom>
+          <a:noFill/>
+          <a:ln/>
+        </p:spPr>
+        <p:txBody>
+          <a:bodyPr wrap="square" lIns="0" tIns="0" rIns="0" bIns="0" rtlCol="0" anchor="t">
+            <a:normAutofit/>
+          </a:bodyPr>
+          <a:lstStyle/>
+          <a:p>
+            <a:pPr indent="0" marL="0">
+              <a:buNone/>
+            </a:pPr>
+            <a:r>
+              <a:rPr lang="en-US" sz="1250" dirty="0">
                 <a:solidFill>
                   <a:srgbClr val="17364A"/>
                 </a:solidFill>
@@ -7404,9 +13630,116 @@
                 <a:ea typeface="Aptos" pitchFamily="34" charset="-122"/>
                 <a:cs typeface="Aptos" pitchFamily="34" charset="-120"/>
               </a:rPr>
-              <a:t>A health department may consider a machine learning model to classify environmental health complaints by likely urgency. Historical complaint text, location, facility type, prior violations, and resolution outcomes may be used as features. The label might be whether the complaint was ultimately assigned high priority by trained staff. This sounds useful, but the label may reflect staffing capacity or historical prioritization patterns rather than true urgency. To use this model responsibly, staff would need to evaluate the training data, define the intended use, test performance on recent complaints, review errors by complaint type and community, and decide whether the output is advisory or operational. The model might help sort a queue, but it should not prevent staff from reviewing complaints that do not match historical patterns. The public health example shows that model design decisions become program decisions.</a:t>
-            </a:r>
-            <a:endParaRPr lang="en-US" sz="1420" dirty="0"/>
+              <a:t>Machine learning is a set of methods that allow computer systems to identify patterns in data and use those patterns to.</a:t>
+            </a:r>
+            <a:endParaRPr lang="en-US" sz="1250" dirty="0"/>
+          </a:p>
+        </p:txBody>
+      </p:sp>
+      <p:sp>
+        <p:nvSpPr>
+          <p:cNvPr id="14" name="Shape 12"/>
+          <p:cNvSpPr/>
+          <p:nvPr/>
+        </p:nvSpPr>
+        <p:spPr>
+          <a:xfrm>
+            <a:off x="7909560" y="3520440"/>
+            <a:ext cx="3154680" cy="1737360"/>
+          </a:xfrm>
+          <a:prstGeom prst="roundRect">
+            <a:avLst>
+              <a:gd name="adj" fmla="val 6316"/>
+            </a:avLst>
+          </a:prstGeom>
+          <a:solidFill>
+            <a:srgbClr val="EAF6F8"/>
+          </a:solidFill>
+          <a:ln w="12700">
+            <a:solidFill>
+              <a:srgbClr val="B9D7E6"/>
+            </a:solidFill>
+            <a:prstDash val="solid"/>
+          </a:ln>
+        </p:spPr>
+      </p:sp>
+      <p:sp>
+        <p:nvSpPr>
+          <p:cNvPr id="15" name="Text 13"/>
+          <p:cNvSpPr/>
+          <p:nvPr/>
+        </p:nvSpPr>
+        <p:spPr>
+          <a:xfrm>
+            <a:off x="8074152" y="3666744"/>
+            <a:ext cx="2825496" cy="201168"/>
+          </a:xfrm>
+          <a:prstGeom prst="rect">
+            <a:avLst/>
+          </a:prstGeom>
+          <a:noFill/>
+          <a:ln/>
+        </p:spPr>
+        <p:txBody>
+          <a:bodyPr wrap="square" lIns="0" tIns="0" rIns="0" bIns="0" rtlCol="0" anchor="ctr"/>
+          <a:lstStyle/>
+          <a:p>
+            <a:pPr indent="0" marL="0">
+              <a:buNone/>
+            </a:pPr>
+            <a:r>
+              <a:rPr lang="en-US" sz="950" b="1" dirty="0">
+                <a:solidFill>
+                  <a:srgbClr val="0068B7"/>
+                </a:solidFill>
+                <a:latin typeface="Aptos" pitchFamily="34" charset="0"/>
+                <a:ea typeface="Aptos" pitchFamily="34" charset="-122"/>
+                <a:cs typeface="Aptos" pitchFamily="34" charset="-120"/>
+              </a:rPr>
+              <a:t>Use this for</a:t>
+            </a:r>
+            <a:endParaRPr lang="en-US" sz="950" dirty="0"/>
+          </a:p>
+        </p:txBody>
+      </p:sp>
+      <p:sp>
+        <p:nvSpPr>
+          <p:cNvPr id="16" name="Text 14"/>
+          <p:cNvSpPr/>
+          <p:nvPr/>
+        </p:nvSpPr>
+        <p:spPr>
+          <a:xfrm>
+            <a:off x="8074152" y="3959352"/>
+            <a:ext cx="2825496" cy="1170432"/>
+          </a:xfrm>
+          <a:prstGeom prst="rect">
+            <a:avLst/>
+          </a:prstGeom>
+          <a:noFill/>
+          <a:ln/>
+        </p:spPr>
+        <p:txBody>
+          <a:bodyPr wrap="square" lIns="0" tIns="0" rIns="0" bIns="0" rtlCol="0" anchor="t">
+            <a:normAutofit/>
+          </a:bodyPr>
+          <a:lstStyle/>
+          <a:p>
+            <a:pPr indent="0" marL="0">
+              <a:buNone/>
+            </a:pPr>
+            <a:r>
+              <a:rPr lang="en-US" sz="1250" dirty="0">
+                <a:solidFill>
+                  <a:srgbClr val="17364A"/>
+                </a:solidFill>
+                <a:latin typeface="Aptos" pitchFamily="34" charset="0"/>
+                <a:ea typeface="Aptos" pitchFamily="34" charset="-122"/>
+                <a:cs typeface="Aptos" pitchFamily="34" charset="-120"/>
+              </a:rPr>
+              <a:t>Connect the concept to public health decisions, safeguards, documentation, or implementation work.</a:t>
+            </a:r>
+            <a:endParaRPr lang="en-US" sz="1250" dirty="0"/>
           </a:p>
         </p:txBody>
       </p:sp>
@@ -7469,7 +13802,32 @@
       </p:sp>
       <p:sp>
         <p:nvSpPr>
-          <p:cNvPr id="3" name="Text 1"/>
+          <p:cNvPr id="3" name="Shape 1"/>
+          <p:cNvSpPr/>
+          <p:nvPr/>
+        </p:nvSpPr>
+        <p:spPr>
+          <a:xfrm>
+            <a:off x="0" y="164592"/>
+            <a:ext cx="146304" cy="6693408"/>
+          </a:xfrm>
+          <a:prstGeom prst="rect">
+            <a:avLst/>
+          </a:prstGeom>
+          <a:solidFill>
+            <a:srgbClr val="2F8A28"/>
+          </a:solidFill>
+          <a:ln w="12700">
+            <a:solidFill>
+              <a:srgbClr val="2F8A28"/>
+            </a:solidFill>
+            <a:prstDash val="solid"/>
+          </a:ln>
+        </p:spPr>
+      </p:sp>
+      <p:sp>
+        <p:nvSpPr>
+          <p:cNvPr id="4" name="Text 2"/>
           <p:cNvSpPr/>
           <p:nvPr/>
         </p:nvSpPr>
@@ -7508,7 +13866,7 @@
       </p:sp>
       <p:sp>
         <p:nvSpPr>
-          <p:cNvPr id="4" name="Text 2"/>
+          <p:cNvPr id="5" name="Text 3"/>
           <p:cNvSpPr/>
           <p:nvPr/>
         </p:nvSpPr>
@@ -7547,7 +13905,7 @@
       </p:sp>
       <p:sp>
         <p:nvSpPr>
-          <p:cNvPr id="5" name="Text 3"/>
+          <p:cNvPr id="6" name="Text 4"/>
           <p:cNvSpPr/>
           <p:nvPr/>
         </p:nvSpPr>
@@ -7586,13 +13944,77 @@
       </p:sp>
       <p:sp>
         <p:nvSpPr>
-          <p:cNvPr id="6" name="Text 4"/>
+          <p:cNvPr id="7" name="Shape 5"/>
           <p:cNvSpPr/>
           <p:nvPr/>
         </p:nvSpPr>
         <p:spPr>
           <a:xfrm>
             <a:off x="640080" y="658368"/>
+            <a:ext cx="420624" cy="420624"/>
+          </a:xfrm>
+          <a:prstGeom prst="ellipse">
+            <a:avLst/>
+          </a:prstGeom>
+          <a:solidFill>
+            <a:srgbClr val="0068B7"/>
+          </a:solidFill>
+          <a:ln w="12700">
+            <a:solidFill>
+              <a:srgbClr val="0068B7"/>
+            </a:solidFill>
+            <a:prstDash val="solid"/>
+          </a:ln>
+        </p:spPr>
+      </p:sp>
+      <p:sp>
+        <p:nvSpPr>
+          <p:cNvPr id="8" name="Text 6"/>
+          <p:cNvSpPr/>
+          <p:nvPr/>
+        </p:nvSpPr>
+        <p:spPr>
+          <a:xfrm>
+            <a:off x="640080" y="731520"/>
+            <a:ext cx="420624" cy="164592"/>
+          </a:xfrm>
+          <a:prstGeom prst="rect">
+            <a:avLst/>
+          </a:prstGeom>
+          <a:noFill/>
+          <a:ln/>
+        </p:spPr>
+        <p:txBody>
+          <a:bodyPr wrap="square" lIns="0" tIns="0" rIns="0" bIns="0" rtlCol="0" anchor="ctr"/>
+          <a:lstStyle/>
+          <a:p>
+            <a:pPr algn="ctr" indent="0" marL="0">
+              <a:buNone/>
+            </a:pPr>
+            <a:r>
+              <a:rPr lang="en-US" sz="1100" b="1" dirty="0">
+                <a:solidFill>
+                  <a:srgbClr val="FFFFFF"/>
+                </a:solidFill>
+                <a:latin typeface="Aptos" pitchFamily="34" charset="0"/>
+                <a:ea typeface="Aptos" pitchFamily="34" charset="-122"/>
+                <a:cs typeface="Aptos" pitchFamily="34" charset="-120"/>
+              </a:rPr>
+              <a:t>3</a:t>
+            </a:r>
+            <a:endParaRPr lang="en-US" sz="1100" dirty="0"/>
+          </a:p>
+        </p:txBody>
+      </p:sp>
+      <p:sp>
+        <p:nvSpPr>
+          <p:cNvPr id="9" name="Text 7"/>
+          <p:cNvSpPr/>
+          <p:nvPr/>
+        </p:nvSpPr>
+        <p:spPr>
+          <a:xfrm>
+            <a:off x="640080" y="621792"/>
             <a:ext cx="10881360" cy="566928"/>
           </a:xfrm>
           <a:prstGeom prst="rect">
@@ -7619,7 +14041,7 @@
                 <a:ea typeface="Aptos Display" pitchFamily="34" charset="-122"/>
                 <a:cs typeface="Aptos Display" pitchFamily="34" charset="-120"/>
               </a:rPr>
-              <a:t>Technical Deep Dive</a:t>
+              <a:t>Why This Topic Matters for Public Health AI</a:t>
             </a:r>
             <a:endParaRPr lang="en-US" sz="2700" dirty="0"/>
           </a:p>
@@ -7627,32 +14049,178 @@
       </p:sp>
       <p:sp>
         <p:nvSpPr>
-          <p:cNvPr id="7" name="Text 5"/>
-          <p:cNvSpPr/>
-          <p:nvPr/>
-        </p:nvSpPr>
-        <p:spPr>
-          <a:xfrm>
-            <a:off x="822960" y="1325880"/>
-            <a:ext cx="10378440" cy="4800600"/>
-          </a:xfrm>
-          <a:prstGeom prst="rect">
-            <a:avLst/>
-          </a:prstGeom>
-          <a:noFill/>
-          <a:ln/>
-        </p:spPr>
-        <p:txBody>
-          <a:bodyPr wrap="square" lIns="1016" tIns="1016" rIns="1016" bIns="1016" rtlCol="0" anchor="t">
+          <p:cNvPr id="10" name="Text 8"/>
+          <p:cNvSpPr/>
+          <p:nvPr/>
+        </p:nvSpPr>
+        <p:spPr>
+          <a:xfrm>
+            <a:off x="868680" y="1417320"/>
+            <a:ext cx="6675120" cy="4434840"/>
+          </a:xfrm>
+          <a:prstGeom prst="rect">
+            <a:avLst/>
+          </a:prstGeom>
+          <a:noFill/>
+          <a:ln/>
+        </p:spPr>
+        <p:txBody>
+          <a:bodyPr wrap="square" lIns="635" tIns="635" rIns="635" bIns="635" rtlCol="0" anchor="t">
             <a:normAutofit/>
           </a:bodyPr>
           <a:lstStyle/>
           <a:p>
+            <a:r>
+              <a:rPr lang="en-US" sz="1700" dirty="0">
+                <a:solidFill>
+                  <a:srgbClr val="17364A"/>
+                </a:solidFill>
+                <a:latin typeface="Aptos" pitchFamily="34" charset="0"/>
+                <a:ea typeface="Aptos" pitchFamily="34" charset="-122"/>
+                <a:cs typeface="Aptos" pitchFamily="34" charset="-120"/>
+              </a:rPr>
+              <a:t>Machine learning matters for public health AI because many proposed tools rely on classification, prediction, ranking, or.</a:t>
+            </a:r>
+            <a:endParaRPr lang="en-US" sz="1700" dirty="0"/>
+          </a:p>
+          <a:p>
+            <a:r>
+              <a:rPr lang="en-US" sz="1700" dirty="0">
+                <a:solidFill>
+                  <a:srgbClr val="17364A"/>
+                </a:solidFill>
+                <a:latin typeface="Aptos" pitchFamily="34" charset="0"/>
+                <a:ea typeface="Aptos" pitchFamily="34" charset="-122"/>
+                <a:cs typeface="Aptos" pitchFamily="34" charset="-120"/>
+              </a:rPr>
+              <a:t>A surveillance team may want to classify incoming reports by urgency.</a:t>
+            </a:r>
+            <a:endParaRPr lang="en-US" sz="1700" dirty="0"/>
+          </a:p>
+          <a:p>
+            <a:r>
+              <a:rPr lang="en-US" sz="1700" dirty="0">
+                <a:solidFill>
+                  <a:srgbClr val="17364A"/>
+                </a:solidFill>
+                <a:latin typeface="Aptos" pitchFamily="34" charset="0"/>
+                <a:ea typeface="Aptos" pitchFamily="34" charset="-122"/>
+                <a:cs typeface="Aptos" pitchFamily="34" charset="-120"/>
+              </a:rPr>
+              <a:t>An epidemiology team may want to detect unusual disease patterns.</a:t>
+            </a:r>
+            <a:endParaRPr lang="en-US" sz="1700" dirty="0"/>
+          </a:p>
+          <a:p>
+            <a:r>
+              <a:rPr lang="en-US" sz="1700" dirty="0">
+                <a:solidFill>
+                  <a:srgbClr val="17364A"/>
+                </a:solidFill>
+                <a:latin typeface="Aptos" pitchFamily="34" charset="0"/>
+                <a:ea typeface="Aptos" pitchFamily="34" charset="-122"/>
+                <a:cs typeface="Aptos" pitchFamily="34" charset="-120"/>
+              </a:rPr>
+              <a:t>A program may want to prioritize outreach based on predicted risk.</a:t>
+            </a:r>
+            <a:endParaRPr lang="en-US" sz="1700" dirty="0"/>
+          </a:p>
+        </p:txBody>
+      </p:sp>
+      <p:sp>
+        <p:nvSpPr>
+          <p:cNvPr id="11" name="Shape 9"/>
+          <p:cNvSpPr/>
+          <p:nvPr/>
+        </p:nvSpPr>
+        <p:spPr>
+          <a:xfrm>
+            <a:off x="7909560" y="1417320"/>
+            <a:ext cx="3154680" cy="1828800"/>
+          </a:xfrm>
+          <a:prstGeom prst="roundRect">
+            <a:avLst>
+              <a:gd name="adj" fmla="val 6000"/>
+            </a:avLst>
+          </a:prstGeom>
+          <a:solidFill>
+            <a:srgbClr val="EEF8ED"/>
+          </a:solidFill>
+          <a:ln w="12700">
+            <a:solidFill>
+              <a:srgbClr val="B9D7E6"/>
+            </a:solidFill>
+            <a:prstDash val="solid"/>
+          </a:ln>
+        </p:spPr>
+      </p:sp>
+      <p:sp>
+        <p:nvSpPr>
+          <p:cNvPr id="12" name="Text 10"/>
+          <p:cNvSpPr/>
+          <p:nvPr/>
+        </p:nvSpPr>
+        <p:spPr>
+          <a:xfrm>
+            <a:off x="8074152" y="1563624"/>
+            <a:ext cx="2825496" cy="201168"/>
+          </a:xfrm>
+          <a:prstGeom prst="rect">
+            <a:avLst/>
+          </a:prstGeom>
+          <a:noFill/>
+          <a:ln/>
+        </p:spPr>
+        <p:txBody>
+          <a:bodyPr wrap="square" lIns="0" tIns="0" rIns="0" bIns="0" rtlCol="0" anchor="ctr"/>
+          <a:lstStyle/>
+          <a:p>
             <a:pPr indent="0" marL="0">
               <a:buNone/>
             </a:pPr>
             <a:r>
-              <a:rPr lang="en-US" sz="1420" dirty="0">
+              <a:rPr lang="en-US" sz="950" b="1" dirty="0">
+                <a:solidFill>
+                  <a:srgbClr val="0068B7"/>
+                </a:solidFill>
+                <a:latin typeface="Aptos" pitchFamily="34" charset="0"/>
+                <a:ea typeface="Aptos" pitchFamily="34" charset="-122"/>
+                <a:cs typeface="Aptos" pitchFamily="34" charset="-120"/>
+              </a:rPr>
+              <a:t>Key idea</a:t>
+            </a:r>
+            <a:endParaRPr lang="en-US" sz="950" dirty="0"/>
+          </a:p>
+        </p:txBody>
+      </p:sp>
+      <p:sp>
+        <p:nvSpPr>
+          <p:cNvPr id="13" name="Text 11"/>
+          <p:cNvSpPr/>
+          <p:nvPr/>
+        </p:nvSpPr>
+        <p:spPr>
+          <a:xfrm>
+            <a:off x="8074152" y="1856232"/>
+            <a:ext cx="2825496" cy="1261872"/>
+          </a:xfrm>
+          <a:prstGeom prst="rect">
+            <a:avLst/>
+          </a:prstGeom>
+          <a:noFill/>
+          <a:ln/>
+        </p:spPr>
+        <p:txBody>
+          <a:bodyPr wrap="square" lIns="0" tIns="0" rIns="0" bIns="0" rtlCol="0" anchor="t">
+            <a:normAutofit/>
+          </a:bodyPr>
+          <a:lstStyle/>
+          <a:p>
+            <a:pPr indent="0" marL="0">
+              <a:buNone/>
+            </a:pPr>
+            <a:r>
+              <a:rPr lang="en-US" sz="1250" dirty="0">
                 <a:solidFill>
                   <a:srgbClr val="17364A"/>
                 </a:solidFill>
@@ -7660,9 +14228,116 @@
                 <a:ea typeface="Aptos" pitchFamily="34" charset="-122"/>
                 <a:cs typeface="Aptos" pitchFamily="34" charset="-120"/>
               </a:rPr>
-              <a:t>Machine learning development typically begins with a defined prediction or classification task. The task should be specific enough to test. “Use AI to improve surveillance” is too vague. “Classify incoming reports into routine review, expedited review, and supervisor review based on defined criteria” is more actionable. A clear task allows staff to define the target label, required features, acceptance criteria, and human review process. Data preparation is often the most important and time-consuming step. Public health data may contain missing values, duplicate records, delayed reporting, inconsistent coding, local terminology, free-text notes, and changes over time. Feature engineering translates raw data into model inputs, but it can also embed assumptions. For example, using prior healthcare utilization as a feature may reflect access to care as much as underlying risk. Training, validation, and test datasets serve different purposes. Training data are used to fit the model. Validation data are used to tune choices during development. Test data are used to estimate performance on data not used to build the model. Public health teams should be cautious when a vendor reports only development performance without external validation or realistic operational testing.</a:t>
-            </a:r>
-            <a:endParaRPr lang="en-US" sz="1420" dirty="0"/>
+              <a:t>Machine learning matters for public health AI because many proposed tools rely on classification, prediction, ranking, or.</a:t>
+            </a:r>
+            <a:endParaRPr lang="en-US" sz="1250" dirty="0"/>
+          </a:p>
+        </p:txBody>
+      </p:sp>
+      <p:sp>
+        <p:nvSpPr>
+          <p:cNvPr id="14" name="Shape 12"/>
+          <p:cNvSpPr/>
+          <p:nvPr/>
+        </p:nvSpPr>
+        <p:spPr>
+          <a:xfrm>
+            <a:off x="7909560" y="3520440"/>
+            <a:ext cx="3154680" cy="1737360"/>
+          </a:xfrm>
+          <a:prstGeom prst="roundRect">
+            <a:avLst>
+              <a:gd name="adj" fmla="val 6316"/>
+            </a:avLst>
+          </a:prstGeom>
+          <a:solidFill>
+            <a:srgbClr val="EAF6F8"/>
+          </a:solidFill>
+          <a:ln w="12700">
+            <a:solidFill>
+              <a:srgbClr val="B9D7E6"/>
+            </a:solidFill>
+            <a:prstDash val="solid"/>
+          </a:ln>
+        </p:spPr>
+      </p:sp>
+      <p:sp>
+        <p:nvSpPr>
+          <p:cNvPr id="15" name="Text 13"/>
+          <p:cNvSpPr/>
+          <p:nvPr/>
+        </p:nvSpPr>
+        <p:spPr>
+          <a:xfrm>
+            <a:off x="8074152" y="3666744"/>
+            <a:ext cx="2825496" cy="201168"/>
+          </a:xfrm>
+          <a:prstGeom prst="rect">
+            <a:avLst/>
+          </a:prstGeom>
+          <a:noFill/>
+          <a:ln/>
+        </p:spPr>
+        <p:txBody>
+          <a:bodyPr wrap="square" lIns="0" tIns="0" rIns="0" bIns="0" rtlCol="0" anchor="ctr"/>
+          <a:lstStyle/>
+          <a:p>
+            <a:pPr indent="0" marL="0">
+              <a:buNone/>
+            </a:pPr>
+            <a:r>
+              <a:rPr lang="en-US" sz="950" b="1" dirty="0">
+                <a:solidFill>
+                  <a:srgbClr val="0068B7"/>
+                </a:solidFill>
+                <a:latin typeface="Aptos" pitchFamily="34" charset="0"/>
+                <a:ea typeface="Aptos" pitchFamily="34" charset="-122"/>
+                <a:cs typeface="Aptos" pitchFamily="34" charset="-120"/>
+              </a:rPr>
+              <a:t>Use this for</a:t>
+            </a:r>
+            <a:endParaRPr lang="en-US" sz="950" dirty="0"/>
+          </a:p>
+        </p:txBody>
+      </p:sp>
+      <p:sp>
+        <p:nvSpPr>
+          <p:cNvPr id="16" name="Text 14"/>
+          <p:cNvSpPr/>
+          <p:nvPr/>
+        </p:nvSpPr>
+        <p:spPr>
+          <a:xfrm>
+            <a:off x="8074152" y="3959352"/>
+            <a:ext cx="2825496" cy="1170432"/>
+          </a:xfrm>
+          <a:prstGeom prst="rect">
+            <a:avLst/>
+          </a:prstGeom>
+          <a:noFill/>
+          <a:ln/>
+        </p:spPr>
+        <p:txBody>
+          <a:bodyPr wrap="square" lIns="0" tIns="0" rIns="0" bIns="0" rtlCol="0" anchor="t">
+            <a:normAutofit/>
+          </a:bodyPr>
+          <a:lstStyle/>
+          <a:p>
+            <a:pPr indent="0" marL="0">
+              <a:buNone/>
+            </a:pPr>
+            <a:r>
+              <a:rPr lang="en-US" sz="1250" dirty="0">
+                <a:solidFill>
+                  <a:srgbClr val="17364A"/>
+                </a:solidFill>
+                <a:latin typeface="Aptos" pitchFamily="34" charset="0"/>
+                <a:ea typeface="Aptos" pitchFamily="34" charset="-122"/>
+                <a:cs typeface="Aptos" pitchFamily="34" charset="-120"/>
+              </a:rPr>
+              <a:t>Connect the concept to public health decisions, safeguards, documentation, or implementation work.</a:t>
+            </a:r>
+            <a:endParaRPr lang="en-US" sz="1250" dirty="0"/>
           </a:p>
         </p:txBody>
       </p:sp>
@@ -7725,7 +14400,32 @@
       </p:sp>
       <p:sp>
         <p:nvSpPr>
-          <p:cNvPr id="3" name="Text 1"/>
+          <p:cNvPr id="3" name="Shape 1"/>
+          <p:cNvSpPr/>
+          <p:nvPr/>
+        </p:nvSpPr>
+        <p:spPr>
+          <a:xfrm>
+            <a:off x="0" y="164592"/>
+            <a:ext cx="146304" cy="6693408"/>
+          </a:xfrm>
+          <a:prstGeom prst="rect">
+            <a:avLst/>
+          </a:prstGeom>
+          <a:solidFill>
+            <a:srgbClr val="2F8A28"/>
+          </a:solidFill>
+          <a:ln w="12700">
+            <a:solidFill>
+              <a:srgbClr val="2F8A28"/>
+            </a:solidFill>
+            <a:prstDash val="solid"/>
+          </a:ln>
+        </p:spPr>
+      </p:sp>
+      <p:sp>
+        <p:nvSpPr>
+          <p:cNvPr id="4" name="Text 2"/>
           <p:cNvSpPr/>
           <p:nvPr/>
         </p:nvSpPr>
@@ -7764,7 +14464,7 @@
       </p:sp>
       <p:sp>
         <p:nvSpPr>
-          <p:cNvPr id="4" name="Text 2"/>
+          <p:cNvPr id="5" name="Text 3"/>
           <p:cNvSpPr/>
           <p:nvPr/>
         </p:nvSpPr>
@@ -7803,7 +14503,7 @@
       </p:sp>
       <p:sp>
         <p:nvSpPr>
-          <p:cNvPr id="5" name="Text 3"/>
+          <p:cNvPr id="6" name="Text 4"/>
           <p:cNvSpPr/>
           <p:nvPr/>
         </p:nvSpPr>
@@ -7842,13 +14542,77 @@
       </p:sp>
       <p:sp>
         <p:nvSpPr>
-          <p:cNvPr id="6" name="Text 4"/>
+          <p:cNvPr id="7" name="Shape 5"/>
           <p:cNvSpPr/>
           <p:nvPr/>
         </p:nvSpPr>
         <p:spPr>
           <a:xfrm>
             <a:off x="640080" y="658368"/>
+            <a:ext cx="420624" cy="420624"/>
+          </a:xfrm>
+          <a:prstGeom prst="ellipse">
+            <a:avLst/>
+          </a:prstGeom>
+          <a:solidFill>
+            <a:srgbClr val="0068B7"/>
+          </a:solidFill>
+          <a:ln w="12700">
+            <a:solidFill>
+              <a:srgbClr val="0068B7"/>
+            </a:solidFill>
+            <a:prstDash val="solid"/>
+          </a:ln>
+        </p:spPr>
+      </p:sp>
+      <p:sp>
+        <p:nvSpPr>
+          <p:cNvPr id="8" name="Text 6"/>
+          <p:cNvSpPr/>
+          <p:nvPr/>
+        </p:nvSpPr>
+        <p:spPr>
+          <a:xfrm>
+            <a:off x="640080" y="731520"/>
+            <a:ext cx="420624" cy="164592"/>
+          </a:xfrm>
+          <a:prstGeom prst="rect">
+            <a:avLst/>
+          </a:prstGeom>
+          <a:noFill/>
+          <a:ln/>
+        </p:spPr>
+        <p:txBody>
+          <a:bodyPr wrap="square" lIns="0" tIns="0" rIns="0" bIns="0" rtlCol="0" anchor="ctr"/>
+          <a:lstStyle/>
+          <a:p>
+            <a:pPr algn="ctr" indent="0" marL="0">
+              <a:buNone/>
+            </a:pPr>
+            <a:r>
+              <a:rPr lang="en-US" sz="1100" b="1" dirty="0">
+                <a:solidFill>
+                  <a:srgbClr val="FFFFFF"/>
+                </a:solidFill>
+                <a:latin typeface="Aptos" pitchFamily="34" charset="0"/>
+                <a:ea typeface="Aptos" pitchFamily="34" charset="-122"/>
+                <a:cs typeface="Aptos" pitchFamily="34" charset="-120"/>
+              </a:rPr>
+              <a:t>4</a:t>
+            </a:r>
+            <a:endParaRPr lang="en-US" sz="1100" dirty="0"/>
+          </a:p>
+        </p:txBody>
+      </p:sp>
+      <p:sp>
+        <p:nvSpPr>
+          <p:cNvPr id="9" name="Text 7"/>
+          <p:cNvSpPr/>
+          <p:nvPr/>
+        </p:nvSpPr>
+        <p:spPr>
+          <a:xfrm>
+            <a:off x="640080" y="621792"/>
             <a:ext cx="10881360" cy="566928"/>
           </a:xfrm>
           <a:prstGeom prst="rect">
@@ -7875,7 +14639,7 @@
                 <a:ea typeface="Aptos Display" pitchFamily="34" charset="-122"/>
                 <a:cs typeface="Aptos Display" pitchFamily="34" charset="-120"/>
               </a:rPr>
-              <a:t>Technical Deep Dive Continued</a:t>
+              <a:t>Public Health Example</a:t>
             </a:r>
             <a:endParaRPr lang="en-US" sz="2700" dirty="0"/>
           </a:p>
@@ -7883,32 +14647,178 @@
       </p:sp>
       <p:sp>
         <p:nvSpPr>
-          <p:cNvPr id="7" name="Text 5"/>
-          <p:cNvSpPr/>
-          <p:nvPr/>
-        </p:nvSpPr>
-        <p:spPr>
-          <a:xfrm>
-            <a:off x="822960" y="1325880"/>
-            <a:ext cx="10378440" cy="4800600"/>
-          </a:xfrm>
-          <a:prstGeom prst="rect">
-            <a:avLst/>
-          </a:prstGeom>
-          <a:noFill/>
-          <a:ln/>
-        </p:spPr>
-        <p:txBody>
-          <a:bodyPr wrap="square" lIns="1016" tIns="1016" rIns="1016" bIns="1016" rtlCol="0" anchor="t">
+          <p:cNvPr id="10" name="Text 8"/>
+          <p:cNvSpPr/>
+          <p:nvPr/>
+        </p:nvSpPr>
+        <p:spPr>
+          <a:xfrm>
+            <a:off x="868680" y="1417320"/>
+            <a:ext cx="6675120" cy="4434840"/>
+          </a:xfrm>
+          <a:prstGeom prst="rect">
+            <a:avLst/>
+          </a:prstGeom>
+          <a:noFill/>
+          <a:ln/>
+        </p:spPr>
+        <p:txBody>
+          <a:bodyPr wrap="square" lIns="635" tIns="635" rIns="635" bIns="635" rtlCol="0" anchor="t">
             <a:normAutofit/>
           </a:bodyPr>
           <a:lstStyle/>
           <a:p>
+            <a:r>
+              <a:rPr lang="en-US" sz="1700" dirty="0">
+                <a:solidFill>
+                  <a:srgbClr val="17364A"/>
+                </a:solidFill>
+                <a:latin typeface="Aptos" pitchFamily="34" charset="0"/>
+                <a:ea typeface="Aptos" pitchFamily="34" charset="-122"/>
+                <a:cs typeface="Aptos" pitchFamily="34" charset="-120"/>
+              </a:rPr>
+              <a:t>A health department may consider a machine learning model to classify environmental health complaints by likely urgency.</a:t>
+            </a:r>
+            <a:endParaRPr lang="en-US" sz="1700" dirty="0"/>
+          </a:p>
+          <a:p>
+            <a:r>
+              <a:rPr lang="en-US" sz="1700" dirty="0">
+                <a:solidFill>
+                  <a:srgbClr val="17364A"/>
+                </a:solidFill>
+                <a:latin typeface="Aptos" pitchFamily="34" charset="0"/>
+                <a:ea typeface="Aptos" pitchFamily="34" charset="-122"/>
+                <a:cs typeface="Aptos" pitchFamily="34" charset="-120"/>
+              </a:rPr>
+              <a:t>Historical complaint text, location, facility type, prior violations, and resolution outcomes may be used as features.</a:t>
+            </a:r>
+            <a:endParaRPr lang="en-US" sz="1700" dirty="0"/>
+          </a:p>
+          <a:p>
+            <a:r>
+              <a:rPr lang="en-US" sz="1700" dirty="0">
+                <a:solidFill>
+                  <a:srgbClr val="17364A"/>
+                </a:solidFill>
+                <a:latin typeface="Aptos" pitchFamily="34" charset="0"/>
+                <a:ea typeface="Aptos" pitchFamily="34" charset="-122"/>
+                <a:cs typeface="Aptos" pitchFamily="34" charset="-120"/>
+              </a:rPr>
+              <a:t>The label might be whether the complaint was ultimately assigned high priority by trained staff.</a:t>
+            </a:r>
+            <a:endParaRPr lang="en-US" sz="1700" dirty="0"/>
+          </a:p>
+          <a:p>
+            <a:r>
+              <a:rPr lang="en-US" sz="1700" dirty="0">
+                <a:solidFill>
+                  <a:srgbClr val="17364A"/>
+                </a:solidFill>
+                <a:latin typeface="Aptos" pitchFamily="34" charset="0"/>
+                <a:ea typeface="Aptos" pitchFamily="34" charset="-122"/>
+                <a:cs typeface="Aptos" pitchFamily="34" charset="-120"/>
+              </a:rPr>
+              <a:t>This sounds useful, but the label may reflect staffing capacity or historical prioritization patterns rather than true.</a:t>
+            </a:r>
+            <a:endParaRPr lang="en-US" sz="1700" dirty="0"/>
+          </a:p>
+        </p:txBody>
+      </p:sp>
+      <p:sp>
+        <p:nvSpPr>
+          <p:cNvPr id="11" name="Shape 9"/>
+          <p:cNvSpPr/>
+          <p:nvPr/>
+        </p:nvSpPr>
+        <p:spPr>
+          <a:xfrm>
+            <a:off x="7909560" y="1417320"/>
+            <a:ext cx="3154680" cy="1828800"/>
+          </a:xfrm>
+          <a:prstGeom prst="roundRect">
+            <a:avLst>
+              <a:gd name="adj" fmla="val 6000"/>
+            </a:avLst>
+          </a:prstGeom>
+          <a:solidFill>
+            <a:srgbClr val="EEF8ED"/>
+          </a:solidFill>
+          <a:ln w="12700">
+            <a:solidFill>
+              <a:srgbClr val="B9D7E6"/>
+            </a:solidFill>
+            <a:prstDash val="solid"/>
+          </a:ln>
+        </p:spPr>
+      </p:sp>
+      <p:sp>
+        <p:nvSpPr>
+          <p:cNvPr id="12" name="Text 10"/>
+          <p:cNvSpPr/>
+          <p:nvPr/>
+        </p:nvSpPr>
+        <p:spPr>
+          <a:xfrm>
+            <a:off x="8074152" y="1563624"/>
+            <a:ext cx="2825496" cy="201168"/>
+          </a:xfrm>
+          <a:prstGeom prst="rect">
+            <a:avLst/>
+          </a:prstGeom>
+          <a:noFill/>
+          <a:ln/>
+        </p:spPr>
+        <p:txBody>
+          <a:bodyPr wrap="square" lIns="0" tIns="0" rIns="0" bIns="0" rtlCol="0" anchor="ctr"/>
+          <a:lstStyle/>
+          <a:p>
             <a:pPr indent="0" marL="0">
               <a:buNone/>
             </a:pPr>
             <a:r>
-              <a:rPr lang="en-US" sz="1420" dirty="0">
+              <a:rPr lang="en-US" sz="950" b="1" dirty="0">
+                <a:solidFill>
+                  <a:srgbClr val="0068B7"/>
+                </a:solidFill>
+                <a:latin typeface="Aptos" pitchFamily="34" charset="0"/>
+                <a:ea typeface="Aptos" pitchFamily="34" charset="-122"/>
+                <a:cs typeface="Aptos" pitchFamily="34" charset="-120"/>
+              </a:rPr>
+              <a:t>Key idea</a:t>
+            </a:r>
+            <a:endParaRPr lang="en-US" sz="950" dirty="0"/>
+          </a:p>
+        </p:txBody>
+      </p:sp>
+      <p:sp>
+        <p:nvSpPr>
+          <p:cNvPr id="13" name="Text 11"/>
+          <p:cNvSpPr/>
+          <p:nvPr/>
+        </p:nvSpPr>
+        <p:spPr>
+          <a:xfrm>
+            <a:off x="8074152" y="1856232"/>
+            <a:ext cx="2825496" cy="1261872"/>
+          </a:xfrm>
+          <a:prstGeom prst="rect">
+            <a:avLst/>
+          </a:prstGeom>
+          <a:noFill/>
+          <a:ln/>
+        </p:spPr>
+        <p:txBody>
+          <a:bodyPr wrap="square" lIns="0" tIns="0" rIns="0" bIns="0" rtlCol="0" anchor="t">
+            <a:normAutofit/>
+          </a:bodyPr>
+          <a:lstStyle/>
+          <a:p>
+            <a:pPr indent="0" marL="0">
+              <a:buNone/>
+            </a:pPr>
+            <a:r>
+              <a:rPr lang="en-US" sz="1250" dirty="0">
                 <a:solidFill>
                   <a:srgbClr val="17364A"/>
                 </a:solidFill>
@@ -7916,9 +14826,116 @@
                 <a:ea typeface="Aptos" pitchFamily="34" charset="-122"/>
                 <a:cs typeface="Aptos" pitchFamily="34" charset="-120"/>
               </a:rPr>
-              <a:t>Model performance should be interpreted in relation to the workflow. A model with high overall accuracy may still miss rare but important events. A model with many false positives may burden staff and create alert fatigue. A model with many false negatives may miss cases, outbreaks, or communities needing support. Thresholds should be selected based on public health consequences, not only technical optimization. Human review should be designed into the workflow before deployment. Reviewers need to understand what the model output means, what it does not mean, and when to override or escalate. Staff also need feedback channels so model errors can be documented, analyzed, and used to improve monitoring or retraining decisions.</a:t>
-            </a:r>
-            <a:endParaRPr lang="en-US" sz="1420" dirty="0"/>
+              <a:t>A health department may consider a machine learning model to classify environmental health complaints by likely urgency.</a:t>
+            </a:r>
+            <a:endParaRPr lang="en-US" sz="1250" dirty="0"/>
+          </a:p>
+        </p:txBody>
+      </p:sp>
+      <p:sp>
+        <p:nvSpPr>
+          <p:cNvPr id="14" name="Shape 12"/>
+          <p:cNvSpPr/>
+          <p:nvPr/>
+        </p:nvSpPr>
+        <p:spPr>
+          <a:xfrm>
+            <a:off x="7909560" y="3520440"/>
+            <a:ext cx="3154680" cy="1737360"/>
+          </a:xfrm>
+          <a:prstGeom prst="roundRect">
+            <a:avLst>
+              <a:gd name="adj" fmla="val 6316"/>
+            </a:avLst>
+          </a:prstGeom>
+          <a:solidFill>
+            <a:srgbClr val="EAF6F8"/>
+          </a:solidFill>
+          <a:ln w="12700">
+            <a:solidFill>
+              <a:srgbClr val="B9D7E6"/>
+            </a:solidFill>
+            <a:prstDash val="solid"/>
+          </a:ln>
+        </p:spPr>
+      </p:sp>
+      <p:sp>
+        <p:nvSpPr>
+          <p:cNvPr id="15" name="Text 13"/>
+          <p:cNvSpPr/>
+          <p:nvPr/>
+        </p:nvSpPr>
+        <p:spPr>
+          <a:xfrm>
+            <a:off x="8074152" y="3666744"/>
+            <a:ext cx="2825496" cy="201168"/>
+          </a:xfrm>
+          <a:prstGeom prst="rect">
+            <a:avLst/>
+          </a:prstGeom>
+          <a:noFill/>
+          <a:ln/>
+        </p:spPr>
+        <p:txBody>
+          <a:bodyPr wrap="square" lIns="0" tIns="0" rIns="0" bIns="0" rtlCol="0" anchor="ctr"/>
+          <a:lstStyle/>
+          <a:p>
+            <a:pPr indent="0" marL="0">
+              <a:buNone/>
+            </a:pPr>
+            <a:r>
+              <a:rPr lang="en-US" sz="950" b="1" dirty="0">
+                <a:solidFill>
+                  <a:srgbClr val="0068B7"/>
+                </a:solidFill>
+                <a:latin typeface="Aptos" pitchFamily="34" charset="0"/>
+                <a:ea typeface="Aptos" pitchFamily="34" charset="-122"/>
+                <a:cs typeface="Aptos" pitchFamily="34" charset="-120"/>
+              </a:rPr>
+              <a:t>Use this for</a:t>
+            </a:r>
+            <a:endParaRPr lang="en-US" sz="950" dirty="0"/>
+          </a:p>
+        </p:txBody>
+      </p:sp>
+      <p:sp>
+        <p:nvSpPr>
+          <p:cNvPr id="16" name="Text 14"/>
+          <p:cNvSpPr/>
+          <p:nvPr/>
+        </p:nvSpPr>
+        <p:spPr>
+          <a:xfrm>
+            <a:off x="8074152" y="3959352"/>
+            <a:ext cx="2825496" cy="1170432"/>
+          </a:xfrm>
+          <a:prstGeom prst="rect">
+            <a:avLst/>
+          </a:prstGeom>
+          <a:noFill/>
+          <a:ln/>
+        </p:spPr>
+        <p:txBody>
+          <a:bodyPr wrap="square" lIns="0" tIns="0" rIns="0" bIns="0" rtlCol="0" anchor="t">
+            <a:normAutofit/>
+          </a:bodyPr>
+          <a:lstStyle/>
+          <a:p>
+            <a:pPr indent="0" marL="0">
+              <a:buNone/>
+            </a:pPr>
+            <a:r>
+              <a:rPr lang="en-US" sz="1250" dirty="0">
+                <a:solidFill>
+                  <a:srgbClr val="17364A"/>
+                </a:solidFill>
+                <a:latin typeface="Aptos" pitchFamily="34" charset="0"/>
+                <a:ea typeface="Aptos" pitchFamily="34" charset="-122"/>
+                <a:cs typeface="Aptos" pitchFamily="34" charset="-120"/>
+              </a:rPr>
+              <a:t>Connect the concept to public health decisions, safeguards, documentation, or implementation work.</a:t>
+            </a:r>
+            <a:endParaRPr lang="en-US" sz="1250" dirty="0"/>
           </a:p>
         </p:txBody>
       </p:sp>

--- a/downloads/presentations/modules/lesson-03-machine-learning-basics-for-epidemiology-and-surveillance.pptx
+++ b/downloads/presentations/modules/lesson-03-machine-learning-basics-for-epidemiology-and-surveillance.pptx
@@ -2999,6 +2999,45 @@
           </a:p>
         </p:txBody>
       </p:sp>
+      <p:sp>
+        <p:nvSpPr>
+          <p:cNvPr id="8" name="Text 5"/>
+          <p:cNvSpPr/>
+          <p:nvPr/>
+        </p:nvSpPr>
+        <p:spPr>
+          <a:xfrm>
+            <a:off x="11137392" y="6510528"/>
+            <a:ext cx="411480" cy="201168"/>
+          </a:xfrm>
+          <a:prstGeom prst="rect">
+            <a:avLst/>
+          </a:prstGeom>
+          <a:noFill/>
+          <a:ln/>
+        </p:spPr>
+        <p:txBody>
+          <a:bodyPr wrap="square" lIns="0" tIns="0" rIns="0" bIns="0" rtlCol="0" anchor="ctr"/>
+          <a:lstStyle/>
+          <a:p>
+            <a:pPr algn="r" indent="0" marL="0">
+              <a:buNone/>
+            </a:pPr>
+            <a:r>
+              <a:rPr lang="en-US" sz="900" dirty="0">
+                <a:solidFill>
+                  <a:srgbClr val="5F7181"/>
+                </a:solidFill>
+                <a:latin typeface="Aptos" pitchFamily="34" charset="0"/>
+                <a:ea typeface="Aptos" pitchFamily="34" charset="-122"/>
+                <a:cs typeface="Aptos" pitchFamily="34" charset="-120"/>
+              </a:rPr>
+              <a:t>1</a:t>
+            </a:r>
+            <a:endParaRPr lang="en-US" sz="900" dirty="0"/>
+          </a:p>
+        </p:txBody>
+      </p:sp>
     </p:spTree>
   </p:cSld>
   <p:clrMapOvr>
@@ -3192,7 +3231,7 @@
                 <a:ea typeface="Aptos" pitchFamily="34" charset="-122"/>
                 <a:cs typeface="Aptos" pitchFamily="34" charset="-120"/>
               </a:rPr>
-              <a:t>© Paula Soper</a:t>
+              <a:t>Â© Paula Soper</a:t>
             </a:r>
             <a:endParaRPr lang="en-US" sz="800" dirty="0"/>
           </a:p>
@@ -3200,7 +3239,46 @@
       </p:sp>
       <p:sp>
         <p:nvSpPr>
-          <p:cNvPr id="7" name="Shape 5"/>
+          <p:cNvPr id="7" name="Text 5"/>
+          <p:cNvSpPr/>
+          <p:nvPr/>
+        </p:nvSpPr>
+        <p:spPr>
+          <a:xfrm>
+            <a:off x="11137392" y="6510528"/>
+            <a:ext cx="411480" cy="201168"/>
+          </a:xfrm>
+          <a:prstGeom prst="rect">
+            <a:avLst/>
+          </a:prstGeom>
+          <a:noFill/>
+          <a:ln/>
+        </p:spPr>
+        <p:txBody>
+          <a:bodyPr wrap="square" lIns="0" tIns="0" rIns="0" bIns="0" rtlCol="0" anchor="ctr"/>
+          <a:lstStyle/>
+          <a:p>
+            <a:pPr algn="r" indent="0" marL="0">
+              <a:buNone/>
+            </a:pPr>
+            <a:r>
+              <a:rPr lang="en-US" sz="900" dirty="0">
+                <a:solidFill>
+                  <a:srgbClr val="5F7181"/>
+                </a:solidFill>
+                <a:latin typeface="Aptos" pitchFamily="34" charset="0"/>
+                <a:ea typeface="Aptos" pitchFamily="34" charset="-122"/>
+                <a:cs typeface="Aptos" pitchFamily="34" charset="-120"/>
+              </a:rPr>
+              <a:t>10</a:t>
+            </a:r>
+            <a:endParaRPr lang="en-US" sz="900" dirty="0"/>
+          </a:p>
+        </p:txBody>
+      </p:sp>
+      <p:sp>
+        <p:nvSpPr>
+          <p:cNvPr id="8" name="Shape 6"/>
           <p:cNvSpPr/>
           <p:nvPr/>
         </p:nvSpPr>
@@ -3225,7 +3303,7 @@
       </p:sp>
       <p:sp>
         <p:nvSpPr>
-          <p:cNvPr id="8" name="Text 6"/>
+          <p:cNvPr id="9" name="Text 7"/>
           <p:cNvSpPr/>
           <p:nvPr/>
         </p:nvSpPr>
@@ -3264,14 +3342,14 @@
       </p:sp>
       <p:sp>
         <p:nvSpPr>
-          <p:cNvPr id="9" name="Text 7"/>
+          <p:cNvPr id="10" name="Text 8"/>
           <p:cNvSpPr/>
           <p:nvPr/>
         </p:nvSpPr>
         <p:spPr>
           <a:xfrm>
             <a:off x="640080" y="621792"/>
-            <a:ext cx="10881360" cy="566928"/>
+            <a:ext cx="10881360" cy="713232"/>
           </a:xfrm>
           <a:prstGeom prst="rect">
             <a:avLst/>
@@ -3289,7 +3367,7 @@
               <a:buNone/>
             </a:pPr>
             <a:r>
-              <a:rPr lang="en-US" sz="2700" b="1" dirty="0">
+              <a:rPr lang="en-US" sz="3400" b="1" dirty="0">
                 <a:solidFill>
                   <a:srgbClr val="003A63"/>
                 </a:solidFill>
@@ -3299,20 +3377,20 @@
               </a:rPr>
               <a:t>Technical Deep Dive</a:t>
             </a:r>
-            <a:endParaRPr lang="en-US" sz="2700" dirty="0"/>
-          </a:p>
-        </p:txBody>
-      </p:sp>
-      <p:sp>
-        <p:nvSpPr>
-          <p:cNvPr id="10" name="Text 8"/>
-          <p:cNvSpPr/>
-          <p:nvPr/>
-        </p:nvSpPr>
-        <p:spPr>
-          <a:xfrm>
-            <a:off x="868680" y="1417320"/>
-            <a:ext cx="6675120" cy="4434840"/>
+            <a:endParaRPr lang="en-US" sz="3400" dirty="0"/>
+          </a:p>
+        </p:txBody>
+      </p:sp>
+      <p:sp>
+        <p:nvSpPr>
+          <p:cNvPr id="11" name="Text 9"/>
+          <p:cNvSpPr/>
+          <p:nvPr/>
+        </p:nvSpPr>
+        <p:spPr>
+          <a:xfrm>
+            <a:off x="868680" y="1508760"/>
+            <a:ext cx="6537960" cy="4160520"/>
           </a:xfrm>
           <a:prstGeom prst="rect">
             <a:avLst/>
@@ -3327,7 +3405,7 @@
           <a:lstStyle/>
           <a:p>
             <a:r>
-              <a:rPr lang="en-US" sz="1700" dirty="0">
+              <a:rPr lang="en-US" sz="2100" dirty="0">
                 <a:solidFill>
                   <a:srgbClr val="17364A"/>
                 </a:solidFill>
@@ -3337,11 +3415,11 @@
               </a:rPr>
               <a:t>Machine learning development typically begins with a defined prediction or classification task.</a:t>
             </a:r>
-            <a:endParaRPr lang="en-US" sz="1700" dirty="0"/>
-          </a:p>
-          <a:p>
-            <a:r>
-              <a:rPr lang="en-US" sz="1700" dirty="0">
+            <a:endParaRPr lang="en-US" sz="2100" dirty="0"/>
+          </a:p>
+          <a:p>
+            <a:r>
+              <a:rPr lang="en-US" sz="2100" dirty="0">
                 <a:solidFill>
                   <a:srgbClr val="17364A"/>
                 </a:solidFill>
@@ -3349,13 +3427,13 @@
                 <a:ea typeface="Aptos" pitchFamily="34" charset="-122"/>
                 <a:cs typeface="Aptos" pitchFamily="34" charset="-120"/>
               </a:rPr>
-              <a:t>The task should be specific enough to test. “Use AI to improve surveillance” is too vague. “Classify incoming reports into.</a:t>
-            </a:r>
-            <a:endParaRPr lang="en-US" sz="1700" dirty="0"/>
-          </a:p>
-          <a:p>
-            <a:r>
-              <a:rPr lang="en-US" sz="1700" dirty="0">
+              <a:t>The task should be specific enough to test. “Use AI to improve surveillance” is too vague. “Classify.</a:t>
+            </a:r>
+            <a:endParaRPr lang="en-US" sz="2100" dirty="0"/>
+          </a:p>
+          <a:p>
+            <a:r>
+              <a:rPr lang="en-US" sz="2100" dirty="0">
                 <a:solidFill>
                   <a:srgbClr val="17364A"/>
                 </a:solidFill>
@@ -3363,29 +3441,15 @@
                 <a:ea typeface="Aptos" pitchFamily="34" charset="-122"/>
                 <a:cs typeface="Aptos" pitchFamily="34" charset="-120"/>
               </a:rPr>
-              <a:t>A clear task allows staff to define the target label, required features, acceptance criteria, and human review process.</a:t>
-            </a:r>
-            <a:endParaRPr lang="en-US" sz="1700" dirty="0"/>
-          </a:p>
-          <a:p>
-            <a:r>
-              <a:rPr lang="en-US" sz="1700" dirty="0">
-                <a:solidFill>
-                  <a:srgbClr val="17364A"/>
-                </a:solidFill>
-                <a:latin typeface="Aptos" pitchFamily="34" charset="0"/>
-                <a:ea typeface="Aptos" pitchFamily="34" charset="-122"/>
-                <a:cs typeface="Aptos" pitchFamily="34" charset="-120"/>
-              </a:rPr>
-              <a:t>Data preparation is often the most important and time-consuming step.</a:t>
-            </a:r>
-            <a:endParaRPr lang="en-US" sz="1700" dirty="0"/>
-          </a:p>
-        </p:txBody>
-      </p:sp>
-      <p:sp>
-        <p:nvSpPr>
-          <p:cNvPr id="11" name="Shape 9"/>
+              <a:t>A clear task allows staff to define the target label, required features, acceptance criteria, and human.</a:t>
+            </a:r>
+            <a:endParaRPr lang="en-US" sz="2100" dirty="0"/>
+          </a:p>
+        </p:txBody>
+      </p:sp>
+      <p:sp>
+        <p:nvSpPr>
+          <p:cNvPr id="12" name="Shape 10"/>
           <p:cNvSpPr/>
           <p:nvPr/>
         </p:nvSpPr>
@@ -3412,14 +3476,14 @@
       </p:sp>
       <p:sp>
         <p:nvSpPr>
-          <p:cNvPr id="12" name="Text 10"/>
+          <p:cNvPr id="13" name="Text 11"/>
           <p:cNvSpPr/>
           <p:nvPr/>
         </p:nvSpPr>
         <p:spPr>
           <a:xfrm>
             <a:off x="8074152" y="1563624"/>
-            <a:ext cx="2825496" cy="201168"/>
+            <a:ext cx="2825496" cy="256032"/>
           </a:xfrm>
           <a:prstGeom prst="rect">
             <a:avLst/>
@@ -3435,7 +3499,7 @@
               <a:buNone/>
             </a:pPr>
             <a:r>
-              <a:rPr lang="en-US" sz="950" b="1" dirty="0">
+              <a:rPr lang="en-US" sz="1300" b="1" dirty="0">
                 <a:solidFill>
                   <a:srgbClr val="0068B7"/>
                 </a:solidFill>
@@ -3445,20 +3509,20 @@
               </a:rPr>
               <a:t>Key idea</a:t>
             </a:r>
-            <a:endParaRPr lang="en-US" sz="950" dirty="0"/>
-          </a:p>
-        </p:txBody>
-      </p:sp>
-      <p:sp>
-        <p:nvSpPr>
-          <p:cNvPr id="13" name="Text 11"/>
-          <p:cNvSpPr/>
-          <p:nvPr/>
-        </p:nvSpPr>
-        <p:spPr>
-          <a:xfrm>
-            <a:off x="8074152" y="1856232"/>
-            <a:ext cx="2825496" cy="1261872"/>
+            <a:endParaRPr lang="en-US" sz="1300" dirty="0"/>
+          </a:p>
+        </p:txBody>
+      </p:sp>
+      <p:sp>
+        <p:nvSpPr>
+          <p:cNvPr id="14" name="Text 12"/>
+          <p:cNvSpPr/>
+          <p:nvPr/>
+        </p:nvSpPr>
+        <p:spPr>
+          <a:xfrm>
+            <a:off x="8074152" y="1920240"/>
+            <a:ext cx="2825496" cy="1188720"/>
           </a:xfrm>
           <a:prstGeom prst="rect">
             <a:avLst/>
@@ -3476,7 +3540,7 @@
               <a:buNone/>
             </a:pPr>
             <a:r>
-              <a:rPr lang="en-US" sz="1250" dirty="0">
+              <a:rPr lang="en-US" sz="1550" dirty="0">
                 <a:solidFill>
                   <a:srgbClr val="17364A"/>
                 </a:solidFill>
@@ -3486,13 +3550,13 @@
               </a:rPr>
               <a:t>Machine learning development typically begins with a defined prediction or classification task.</a:t>
             </a:r>
-            <a:endParaRPr lang="en-US" sz="1250" dirty="0"/>
-          </a:p>
-        </p:txBody>
-      </p:sp>
-      <p:sp>
-        <p:nvSpPr>
-          <p:cNvPr id="14" name="Shape 12"/>
+            <a:endParaRPr lang="en-US" sz="1550" dirty="0"/>
+          </a:p>
+        </p:txBody>
+      </p:sp>
+      <p:sp>
+        <p:nvSpPr>
+          <p:cNvPr id="15" name="Shape 13"/>
           <p:cNvSpPr/>
           <p:nvPr/>
         </p:nvSpPr>
@@ -3519,14 +3583,14 @@
       </p:sp>
       <p:sp>
         <p:nvSpPr>
-          <p:cNvPr id="15" name="Text 13"/>
+          <p:cNvPr id="16" name="Text 14"/>
           <p:cNvSpPr/>
           <p:nvPr/>
         </p:nvSpPr>
         <p:spPr>
           <a:xfrm>
             <a:off x="8074152" y="3666744"/>
-            <a:ext cx="2825496" cy="201168"/>
+            <a:ext cx="2825496" cy="256032"/>
           </a:xfrm>
           <a:prstGeom prst="rect">
             <a:avLst/>
@@ -3542,7 +3606,7 @@
               <a:buNone/>
             </a:pPr>
             <a:r>
-              <a:rPr lang="en-US" sz="950" b="1" dirty="0">
+              <a:rPr lang="en-US" sz="1300" b="1" dirty="0">
                 <a:solidFill>
                   <a:srgbClr val="0068B7"/>
                 </a:solidFill>
@@ -3552,20 +3616,20 @@
               </a:rPr>
               <a:t>Use this for</a:t>
             </a:r>
-            <a:endParaRPr lang="en-US" sz="950" dirty="0"/>
-          </a:p>
-        </p:txBody>
-      </p:sp>
-      <p:sp>
-        <p:nvSpPr>
-          <p:cNvPr id="16" name="Text 14"/>
-          <p:cNvSpPr/>
-          <p:nvPr/>
-        </p:nvSpPr>
-        <p:spPr>
-          <a:xfrm>
-            <a:off x="8074152" y="3959352"/>
-            <a:ext cx="2825496" cy="1170432"/>
+            <a:endParaRPr lang="en-US" sz="1300" dirty="0"/>
+          </a:p>
+        </p:txBody>
+      </p:sp>
+      <p:sp>
+        <p:nvSpPr>
+          <p:cNvPr id="17" name="Text 15"/>
+          <p:cNvSpPr/>
+          <p:nvPr/>
+        </p:nvSpPr>
+        <p:spPr>
+          <a:xfrm>
+            <a:off x="8074152" y="4023360"/>
+            <a:ext cx="2825496" cy="1097280"/>
           </a:xfrm>
           <a:prstGeom prst="rect">
             <a:avLst/>
@@ -3583,7 +3647,7 @@
               <a:buNone/>
             </a:pPr>
             <a:r>
-              <a:rPr lang="en-US" sz="1250" dirty="0">
+              <a:rPr lang="en-US" sz="1550" dirty="0">
                 <a:solidFill>
                   <a:srgbClr val="17364A"/>
                 </a:solidFill>
@@ -3593,7 +3657,7 @@
               </a:rPr>
               <a:t>Connect the concept to public health decisions, safeguards, documentation, or implementation work.</a:t>
             </a:r>
-            <a:endParaRPr lang="en-US" sz="1250" dirty="0"/>
+            <a:endParaRPr lang="en-US" sz="1550" dirty="0"/>
           </a:p>
         </p:txBody>
       </p:sp>
@@ -3790,7 +3854,7 @@
                 <a:ea typeface="Aptos" pitchFamily="34" charset="-122"/>
                 <a:cs typeface="Aptos" pitchFamily="34" charset="-120"/>
               </a:rPr>
-              <a:t>© Paula Soper</a:t>
+              <a:t>Â© Paula Soper</a:t>
             </a:r>
             <a:endParaRPr lang="en-US" sz="800" dirty="0"/>
           </a:p>
@@ -3804,8 +3868,47 @@
         </p:nvSpPr>
         <p:spPr>
           <a:xfrm>
+            <a:off x="11137392" y="6510528"/>
+            <a:ext cx="411480" cy="201168"/>
+          </a:xfrm>
+          <a:prstGeom prst="rect">
+            <a:avLst/>
+          </a:prstGeom>
+          <a:noFill/>
+          <a:ln/>
+        </p:spPr>
+        <p:txBody>
+          <a:bodyPr wrap="square" lIns="0" tIns="0" rIns="0" bIns="0" rtlCol="0" anchor="ctr"/>
+          <a:lstStyle/>
+          <a:p>
+            <a:pPr algn="r" indent="0" marL="0">
+              <a:buNone/>
+            </a:pPr>
+            <a:r>
+              <a:rPr lang="en-US" sz="900" dirty="0">
+                <a:solidFill>
+                  <a:srgbClr val="5F7181"/>
+                </a:solidFill>
+                <a:latin typeface="Aptos" pitchFamily="34" charset="0"/>
+                <a:ea typeface="Aptos" pitchFamily="34" charset="-122"/>
+                <a:cs typeface="Aptos" pitchFamily="34" charset="-120"/>
+              </a:rPr>
+              <a:t>11</a:t>
+            </a:r>
+            <a:endParaRPr lang="en-US" sz="900" dirty="0"/>
+          </a:p>
+        </p:txBody>
+      </p:sp>
+      <p:sp>
+        <p:nvSpPr>
+          <p:cNvPr id="8" name="Text 6"/>
+          <p:cNvSpPr/>
+          <p:nvPr/>
+        </p:nvSpPr>
+        <p:spPr>
+          <a:xfrm>
             <a:off x="640080" y="658368"/>
-            <a:ext cx="10881360" cy="566928"/>
+            <a:ext cx="10881360" cy="713232"/>
           </a:xfrm>
           <a:prstGeom prst="rect">
             <a:avLst/>
@@ -3823,7 +3926,7 @@
               <a:buNone/>
             </a:pPr>
             <a:r>
-              <a:rPr lang="en-US" sz="2700" b="1" dirty="0">
+              <a:rPr lang="en-US" sz="3400" b="1" dirty="0">
                 <a:solidFill>
                   <a:srgbClr val="003A63"/>
                 </a:solidFill>
@@ -3833,20 +3936,20 @@
               </a:rPr>
               <a:t>Technical Deep Dive Continued</a:t>
             </a:r>
-            <a:endParaRPr lang="en-US" sz="2700" dirty="0"/>
-          </a:p>
-        </p:txBody>
-      </p:sp>
-      <p:sp>
-        <p:nvSpPr>
-          <p:cNvPr id="8" name="Text 6"/>
-          <p:cNvSpPr/>
-          <p:nvPr/>
-        </p:nvSpPr>
-        <p:spPr>
-          <a:xfrm>
-            <a:off x="868680" y="1417320"/>
-            <a:ext cx="6675120" cy="4434840"/>
+            <a:endParaRPr lang="en-US" sz="3400" dirty="0"/>
+          </a:p>
+        </p:txBody>
+      </p:sp>
+      <p:sp>
+        <p:nvSpPr>
+          <p:cNvPr id="9" name="Text 7"/>
+          <p:cNvSpPr/>
+          <p:nvPr/>
+        </p:nvSpPr>
+        <p:spPr>
+          <a:xfrm>
+            <a:off x="868680" y="1508760"/>
+            <a:ext cx="6537960" cy="4160520"/>
           </a:xfrm>
           <a:prstGeom prst="rect">
             <a:avLst/>
@@ -3861,7 +3964,7 @@
           <a:lstStyle/>
           <a:p>
             <a:r>
-              <a:rPr lang="en-US" sz="1700" dirty="0">
+              <a:rPr lang="en-US" sz="2100" dirty="0">
                 <a:solidFill>
                   <a:srgbClr val="17364A"/>
                 </a:solidFill>
@@ -3871,11 +3974,11 @@
               </a:rPr>
               <a:t>Model performance should be interpreted in relation to the workflow.</a:t>
             </a:r>
-            <a:endParaRPr lang="en-US" sz="1700" dirty="0"/>
-          </a:p>
-          <a:p>
-            <a:r>
-              <a:rPr lang="en-US" sz="1700" dirty="0">
+            <a:endParaRPr lang="en-US" sz="2100" dirty="0"/>
+          </a:p>
+          <a:p>
+            <a:r>
+              <a:rPr lang="en-US" sz="2100" dirty="0">
                 <a:solidFill>
                   <a:srgbClr val="17364A"/>
                 </a:solidFill>
@@ -3885,11 +3988,11 @@
               </a:rPr>
               <a:t>A model with high overall accuracy may still miss rare but important events.</a:t>
             </a:r>
-            <a:endParaRPr lang="en-US" sz="1700" dirty="0"/>
-          </a:p>
-          <a:p>
-            <a:r>
-              <a:rPr lang="en-US" sz="1700" dirty="0">
+            <a:endParaRPr lang="en-US" sz="2100" dirty="0"/>
+          </a:p>
+          <a:p>
+            <a:r>
+              <a:rPr lang="en-US" sz="2100" dirty="0">
                 <a:solidFill>
                   <a:srgbClr val="17364A"/>
                 </a:solidFill>
@@ -3899,27 +4002,13 @@
               </a:rPr>
               <a:t>A model with many false positives may burden staff and create alert fatigue.</a:t>
             </a:r>
-            <a:endParaRPr lang="en-US" sz="1700" dirty="0"/>
-          </a:p>
-          <a:p>
-            <a:r>
-              <a:rPr lang="en-US" sz="1700" dirty="0">
-                <a:solidFill>
-                  <a:srgbClr val="17364A"/>
-                </a:solidFill>
-                <a:latin typeface="Aptos" pitchFamily="34" charset="0"/>
-                <a:ea typeface="Aptos" pitchFamily="34" charset="-122"/>
-                <a:cs typeface="Aptos" pitchFamily="34" charset="-120"/>
-              </a:rPr>
-              <a:t>A model with many false negatives may miss cases, outbreaks, or communities needing support.</a:t>
-            </a:r>
-            <a:endParaRPr lang="en-US" sz="1700" dirty="0"/>
-          </a:p>
-        </p:txBody>
-      </p:sp>
-      <p:sp>
-        <p:nvSpPr>
-          <p:cNvPr id="9" name="Shape 7"/>
+            <a:endParaRPr lang="en-US" sz="2100" dirty="0"/>
+          </a:p>
+        </p:txBody>
+      </p:sp>
+      <p:sp>
+        <p:nvSpPr>
+          <p:cNvPr id="10" name="Shape 8"/>
           <p:cNvSpPr/>
           <p:nvPr/>
         </p:nvSpPr>
@@ -3946,14 +4035,14 @@
       </p:sp>
       <p:sp>
         <p:nvSpPr>
-          <p:cNvPr id="10" name="Text 8"/>
+          <p:cNvPr id="11" name="Text 9"/>
           <p:cNvSpPr/>
           <p:nvPr/>
         </p:nvSpPr>
         <p:spPr>
           <a:xfrm>
             <a:off x="8074152" y="1563624"/>
-            <a:ext cx="2825496" cy="201168"/>
+            <a:ext cx="2825496" cy="256032"/>
           </a:xfrm>
           <a:prstGeom prst="rect">
             <a:avLst/>
@@ -3969,7 +4058,7 @@
               <a:buNone/>
             </a:pPr>
             <a:r>
-              <a:rPr lang="en-US" sz="950" b="1" dirty="0">
+              <a:rPr lang="en-US" sz="1300" b="1" dirty="0">
                 <a:solidFill>
                   <a:srgbClr val="0068B7"/>
                 </a:solidFill>
@@ -3979,20 +4068,20 @@
               </a:rPr>
               <a:t>Key idea</a:t>
             </a:r>
-            <a:endParaRPr lang="en-US" sz="950" dirty="0"/>
-          </a:p>
-        </p:txBody>
-      </p:sp>
-      <p:sp>
-        <p:nvSpPr>
-          <p:cNvPr id="11" name="Text 9"/>
-          <p:cNvSpPr/>
-          <p:nvPr/>
-        </p:nvSpPr>
-        <p:spPr>
-          <a:xfrm>
-            <a:off x="8074152" y="1856232"/>
-            <a:ext cx="2825496" cy="1261872"/>
+            <a:endParaRPr lang="en-US" sz="1300" dirty="0"/>
+          </a:p>
+        </p:txBody>
+      </p:sp>
+      <p:sp>
+        <p:nvSpPr>
+          <p:cNvPr id="12" name="Text 10"/>
+          <p:cNvSpPr/>
+          <p:nvPr/>
+        </p:nvSpPr>
+        <p:spPr>
+          <a:xfrm>
+            <a:off x="8074152" y="1920240"/>
+            <a:ext cx="2825496" cy="1188720"/>
           </a:xfrm>
           <a:prstGeom prst="rect">
             <a:avLst/>
@@ -4010,7 +4099,7 @@
               <a:buNone/>
             </a:pPr>
             <a:r>
-              <a:rPr lang="en-US" sz="1250" dirty="0">
+              <a:rPr lang="en-US" sz="1550" dirty="0">
                 <a:solidFill>
                   <a:srgbClr val="17364A"/>
                 </a:solidFill>
@@ -4020,13 +4109,13 @@
               </a:rPr>
               <a:t>Model performance should be interpreted in relation to the workflow.</a:t>
             </a:r>
-            <a:endParaRPr lang="en-US" sz="1250" dirty="0"/>
-          </a:p>
-        </p:txBody>
-      </p:sp>
-      <p:sp>
-        <p:nvSpPr>
-          <p:cNvPr id="12" name="Shape 10"/>
+            <a:endParaRPr lang="en-US" sz="1550" dirty="0"/>
+          </a:p>
+        </p:txBody>
+      </p:sp>
+      <p:sp>
+        <p:nvSpPr>
+          <p:cNvPr id="13" name="Shape 11"/>
           <p:cNvSpPr/>
           <p:nvPr/>
         </p:nvSpPr>
@@ -4053,14 +4142,14 @@
       </p:sp>
       <p:sp>
         <p:nvSpPr>
-          <p:cNvPr id="13" name="Text 11"/>
+          <p:cNvPr id="14" name="Text 12"/>
           <p:cNvSpPr/>
           <p:nvPr/>
         </p:nvSpPr>
         <p:spPr>
           <a:xfrm>
             <a:off x="8074152" y="3666744"/>
-            <a:ext cx="2825496" cy="201168"/>
+            <a:ext cx="2825496" cy="256032"/>
           </a:xfrm>
           <a:prstGeom prst="rect">
             <a:avLst/>
@@ -4076,7 +4165,7 @@
               <a:buNone/>
             </a:pPr>
             <a:r>
-              <a:rPr lang="en-US" sz="950" b="1" dirty="0">
+              <a:rPr lang="en-US" sz="1300" b="1" dirty="0">
                 <a:solidFill>
                   <a:srgbClr val="0068B7"/>
                 </a:solidFill>
@@ -4086,20 +4175,20 @@
               </a:rPr>
               <a:t>Use this for</a:t>
             </a:r>
-            <a:endParaRPr lang="en-US" sz="950" dirty="0"/>
-          </a:p>
-        </p:txBody>
-      </p:sp>
-      <p:sp>
-        <p:nvSpPr>
-          <p:cNvPr id="14" name="Text 12"/>
-          <p:cNvSpPr/>
-          <p:nvPr/>
-        </p:nvSpPr>
-        <p:spPr>
-          <a:xfrm>
-            <a:off x="8074152" y="3959352"/>
-            <a:ext cx="2825496" cy="1170432"/>
+            <a:endParaRPr lang="en-US" sz="1300" dirty="0"/>
+          </a:p>
+        </p:txBody>
+      </p:sp>
+      <p:sp>
+        <p:nvSpPr>
+          <p:cNvPr id="15" name="Text 13"/>
+          <p:cNvSpPr/>
+          <p:nvPr/>
+        </p:nvSpPr>
+        <p:spPr>
+          <a:xfrm>
+            <a:off x="8074152" y="4023360"/>
+            <a:ext cx="2825496" cy="1097280"/>
           </a:xfrm>
           <a:prstGeom prst="rect">
             <a:avLst/>
@@ -4117,7 +4206,7 @@
               <a:buNone/>
             </a:pPr>
             <a:r>
-              <a:rPr lang="en-US" sz="1250" dirty="0">
+              <a:rPr lang="en-US" sz="1550" dirty="0">
                 <a:solidFill>
                   <a:srgbClr val="17364A"/>
                 </a:solidFill>
@@ -4127,7 +4216,7 @@
               </a:rPr>
               <a:t>Connect the concept to public health decisions, safeguards, documentation, or implementation work.</a:t>
             </a:r>
-            <a:endParaRPr lang="en-US" sz="1250" dirty="0"/>
+            <a:endParaRPr lang="en-US" sz="1550" dirty="0"/>
           </a:p>
         </p:txBody>
       </p:sp>
@@ -4324,7 +4413,7 @@
                 <a:ea typeface="Aptos" pitchFamily="34" charset="-122"/>
                 <a:cs typeface="Aptos" pitchFamily="34" charset="-120"/>
               </a:rPr>
-              <a:t>© Paula Soper</a:t>
+              <a:t>Â© Paula Soper</a:t>
             </a:r>
             <a:endParaRPr lang="en-US" sz="800" dirty="0"/>
           </a:p>
@@ -4332,7 +4421,46 @@
       </p:sp>
       <p:sp>
         <p:nvSpPr>
-          <p:cNvPr id="7" name="Shape 5"/>
+          <p:cNvPr id="7" name="Text 5"/>
+          <p:cNvSpPr/>
+          <p:nvPr/>
+        </p:nvSpPr>
+        <p:spPr>
+          <a:xfrm>
+            <a:off x="11137392" y="6510528"/>
+            <a:ext cx="411480" cy="201168"/>
+          </a:xfrm>
+          <a:prstGeom prst="rect">
+            <a:avLst/>
+          </a:prstGeom>
+          <a:noFill/>
+          <a:ln/>
+        </p:spPr>
+        <p:txBody>
+          <a:bodyPr wrap="square" lIns="0" tIns="0" rIns="0" bIns="0" rtlCol="0" anchor="ctr"/>
+          <a:lstStyle/>
+          <a:p>
+            <a:pPr algn="r" indent="0" marL="0">
+              <a:buNone/>
+            </a:pPr>
+            <a:r>
+              <a:rPr lang="en-US" sz="900" dirty="0">
+                <a:solidFill>
+                  <a:srgbClr val="5F7181"/>
+                </a:solidFill>
+                <a:latin typeface="Aptos" pitchFamily="34" charset="0"/>
+                <a:ea typeface="Aptos" pitchFamily="34" charset="-122"/>
+                <a:cs typeface="Aptos" pitchFamily="34" charset="-120"/>
+              </a:rPr>
+              <a:t>12</a:t>
+            </a:r>
+            <a:endParaRPr lang="en-US" sz="900" dirty="0"/>
+          </a:p>
+        </p:txBody>
+      </p:sp>
+      <p:sp>
+        <p:nvSpPr>
+          <p:cNvPr id="8" name="Shape 6"/>
           <p:cNvSpPr/>
           <p:nvPr/>
         </p:nvSpPr>
@@ -4357,7 +4485,7 @@
       </p:sp>
       <p:sp>
         <p:nvSpPr>
-          <p:cNvPr id="8" name="Text 6"/>
+          <p:cNvPr id="9" name="Text 7"/>
           <p:cNvSpPr/>
           <p:nvPr/>
         </p:nvSpPr>
@@ -4396,14 +4524,14 @@
       </p:sp>
       <p:sp>
         <p:nvSpPr>
-          <p:cNvPr id="9" name="Text 7"/>
+          <p:cNvPr id="10" name="Text 8"/>
           <p:cNvSpPr/>
           <p:nvPr/>
         </p:nvSpPr>
         <p:spPr>
           <a:xfrm>
             <a:off x="640080" y="621792"/>
-            <a:ext cx="10881360" cy="566928"/>
+            <a:ext cx="10881360" cy="713232"/>
           </a:xfrm>
           <a:prstGeom prst="rect">
             <a:avLst/>
@@ -4421,7 +4549,7 @@
               <a:buNone/>
             </a:pPr>
             <a:r>
-              <a:rPr lang="en-US" sz="2700" b="1" dirty="0">
+              <a:rPr lang="en-US" sz="3400" b="1" dirty="0">
                 <a:solidFill>
                   <a:srgbClr val="003A63"/>
                 </a:solidFill>
@@ -4431,20 +4559,20 @@
               </a:rPr>
               <a:t>Risks, Failure Modes, and Guardrails</a:t>
             </a:r>
-            <a:endParaRPr lang="en-US" sz="2700" dirty="0"/>
-          </a:p>
-        </p:txBody>
-      </p:sp>
-      <p:sp>
-        <p:nvSpPr>
-          <p:cNvPr id="10" name="Text 8"/>
-          <p:cNvSpPr/>
-          <p:nvPr/>
-        </p:nvSpPr>
-        <p:spPr>
-          <a:xfrm>
-            <a:off x="868680" y="1417320"/>
-            <a:ext cx="6675120" cy="4434840"/>
+            <a:endParaRPr lang="en-US" sz="3400" dirty="0"/>
+          </a:p>
+        </p:txBody>
+      </p:sp>
+      <p:sp>
+        <p:nvSpPr>
+          <p:cNvPr id="11" name="Text 9"/>
+          <p:cNvSpPr/>
+          <p:nvPr/>
+        </p:nvSpPr>
+        <p:spPr>
+          <a:xfrm>
+            <a:off x="868680" y="1508760"/>
+            <a:ext cx="6537960" cy="4160520"/>
           </a:xfrm>
           <a:prstGeom prst="rect">
             <a:avLst/>
@@ -4459,7 +4587,7 @@
           <a:lstStyle/>
           <a:p>
             <a:r>
-              <a:rPr lang="en-US" sz="1700" dirty="0">
+              <a:rPr lang="en-US" sz="2100" dirty="0">
                 <a:solidFill>
                   <a:srgbClr val="17364A"/>
                 </a:solidFill>
@@ -4469,11 +4597,11 @@
               </a:rPr>
               <a:t>Biased or inconsistent labels.</a:t>
             </a:r>
-            <a:endParaRPr lang="en-US" sz="1700" dirty="0"/>
-          </a:p>
-          <a:p>
-            <a:r>
-              <a:rPr lang="en-US" sz="1700" dirty="0">
+            <a:endParaRPr lang="en-US" sz="2100" dirty="0"/>
+          </a:p>
+          <a:p>
+            <a:r>
+              <a:rPr lang="en-US" sz="2100" dirty="0">
                 <a:solidFill>
                   <a:srgbClr val="17364A"/>
                 </a:solidFill>
@@ -4481,13 +4609,13 @@
                 <a:ea typeface="Aptos" pitchFamily="34" charset="-122"/>
                 <a:cs typeface="Aptos" pitchFamily="34" charset="-120"/>
               </a:rPr>
-              <a:t>If historical labels reflect unequal detection, inconsistent review, or limited resources, the model may reproduce those.</a:t>
-            </a:r>
-            <a:endParaRPr lang="en-US" sz="1700" dirty="0"/>
-          </a:p>
-          <a:p>
-            <a:r>
-              <a:rPr lang="en-US" sz="1700" dirty="0">
+              <a:t>If historical labels reflect unequal detection, inconsistent review, or limited resources, the model.</a:t>
+            </a:r>
+            <a:endParaRPr lang="en-US" sz="2100" dirty="0"/>
+          </a:p>
+          <a:p>
+            <a:r>
+              <a:rPr lang="en-US" sz="2100" dirty="0">
                 <a:solidFill>
                   <a:srgbClr val="17364A"/>
                 </a:solidFill>
@@ -4495,29 +4623,15 @@
                 <a:ea typeface="Aptos" pitchFamily="34" charset="-122"/>
                 <a:cs typeface="Aptos" pitchFamily="34" charset="-120"/>
               </a:rPr>
-              <a:t>Guardrails include label audits, expert review, subgroup analysis, and documentation of label limitations.</a:t>
-            </a:r>
-            <a:endParaRPr lang="en-US" sz="1700" dirty="0"/>
-          </a:p>
-          <a:p>
-            <a:r>
-              <a:rPr lang="en-US" sz="1700" dirty="0">
-                <a:solidFill>
-                  <a:srgbClr val="17364A"/>
-                </a:solidFill>
-                <a:latin typeface="Aptos" pitchFamily="34" charset="0"/>
-                <a:ea typeface="Aptos" pitchFamily="34" charset="-122"/>
-                <a:cs typeface="Aptos" pitchFamily="34" charset="-120"/>
-              </a:rPr>
-              <a:t>Data leakage.</a:t>
-            </a:r>
-            <a:endParaRPr lang="en-US" sz="1700" dirty="0"/>
-          </a:p>
-        </p:txBody>
-      </p:sp>
-      <p:sp>
-        <p:nvSpPr>
-          <p:cNvPr id="11" name="Shape 9"/>
+              <a:t>Guardrails include label audits, expert review, subgroup analysis, and documentation of label.</a:t>
+            </a:r>
+            <a:endParaRPr lang="en-US" sz="2100" dirty="0"/>
+          </a:p>
+        </p:txBody>
+      </p:sp>
+      <p:sp>
+        <p:nvSpPr>
+          <p:cNvPr id="12" name="Shape 10"/>
           <p:cNvSpPr/>
           <p:nvPr/>
         </p:nvSpPr>
@@ -4544,14 +4658,14 @@
       </p:sp>
       <p:sp>
         <p:nvSpPr>
-          <p:cNvPr id="12" name="Text 10"/>
+          <p:cNvPr id="13" name="Text 11"/>
           <p:cNvSpPr/>
           <p:nvPr/>
         </p:nvSpPr>
         <p:spPr>
           <a:xfrm>
             <a:off x="8074152" y="1563624"/>
-            <a:ext cx="2825496" cy="201168"/>
+            <a:ext cx="2825496" cy="256032"/>
           </a:xfrm>
           <a:prstGeom prst="rect">
             <a:avLst/>
@@ -4567,7 +4681,7 @@
               <a:buNone/>
             </a:pPr>
             <a:r>
-              <a:rPr lang="en-US" sz="950" b="1" dirty="0">
+              <a:rPr lang="en-US" sz="1300" b="1" dirty="0">
                 <a:solidFill>
                   <a:srgbClr val="0068B7"/>
                 </a:solidFill>
@@ -4577,20 +4691,20 @@
               </a:rPr>
               <a:t>Key idea</a:t>
             </a:r>
-            <a:endParaRPr lang="en-US" sz="950" dirty="0"/>
-          </a:p>
-        </p:txBody>
-      </p:sp>
-      <p:sp>
-        <p:nvSpPr>
-          <p:cNvPr id="13" name="Text 11"/>
-          <p:cNvSpPr/>
-          <p:nvPr/>
-        </p:nvSpPr>
-        <p:spPr>
-          <a:xfrm>
-            <a:off x="8074152" y="1856232"/>
-            <a:ext cx="2825496" cy="1261872"/>
+            <a:endParaRPr lang="en-US" sz="1300" dirty="0"/>
+          </a:p>
+        </p:txBody>
+      </p:sp>
+      <p:sp>
+        <p:nvSpPr>
+          <p:cNvPr id="14" name="Text 12"/>
+          <p:cNvSpPr/>
+          <p:nvPr/>
+        </p:nvSpPr>
+        <p:spPr>
+          <a:xfrm>
+            <a:off x="8074152" y="1920240"/>
+            <a:ext cx="2825496" cy="1188720"/>
           </a:xfrm>
           <a:prstGeom prst="rect">
             <a:avLst/>
@@ -4608,7 +4722,7 @@
               <a:buNone/>
             </a:pPr>
             <a:r>
-              <a:rPr lang="en-US" sz="1250" dirty="0">
+              <a:rPr lang="en-US" sz="1550" dirty="0">
                 <a:solidFill>
                   <a:srgbClr val="17364A"/>
                 </a:solidFill>
@@ -4618,13 +4732,13 @@
               </a:rPr>
               <a:t>Biased or inconsistent labels.</a:t>
             </a:r>
-            <a:endParaRPr lang="en-US" sz="1250" dirty="0"/>
-          </a:p>
-        </p:txBody>
-      </p:sp>
-      <p:sp>
-        <p:nvSpPr>
-          <p:cNvPr id="14" name="Shape 12"/>
+            <a:endParaRPr lang="en-US" sz="1550" dirty="0"/>
+          </a:p>
+        </p:txBody>
+      </p:sp>
+      <p:sp>
+        <p:nvSpPr>
+          <p:cNvPr id="15" name="Shape 13"/>
           <p:cNvSpPr/>
           <p:nvPr/>
         </p:nvSpPr>
@@ -4651,14 +4765,14 @@
       </p:sp>
       <p:sp>
         <p:nvSpPr>
-          <p:cNvPr id="15" name="Text 13"/>
+          <p:cNvPr id="16" name="Text 14"/>
           <p:cNvSpPr/>
           <p:nvPr/>
         </p:nvSpPr>
         <p:spPr>
           <a:xfrm>
             <a:off x="8074152" y="3666744"/>
-            <a:ext cx="2825496" cy="201168"/>
+            <a:ext cx="2825496" cy="256032"/>
           </a:xfrm>
           <a:prstGeom prst="rect">
             <a:avLst/>
@@ -4674,7 +4788,7 @@
               <a:buNone/>
             </a:pPr>
             <a:r>
-              <a:rPr lang="en-US" sz="950" b="1" dirty="0">
+              <a:rPr lang="en-US" sz="1300" b="1" dirty="0">
                 <a:solidFill>
                   <a:srgbClr val="0068B7"/>
                 </a:solidFill>
@@ -4684,20 +4798,20 @@
               </a:rPr>
               <a:t>Use this for</a:t>
             </a:r>
-            <a:endParaRPr lang="en-US" sz="950" dirty="0"/>
-          </a:p>
-        </p:txBody>
-      </p:sp>
-      <p:sp>
-        <p:nvSpPr>
-          <p:cNvPr id="16" name="Text 14"/>
-          <p:cNvSpPr/>
-          <p:nvPr/>
-        </p:nvSpPr>
-        <p:spPr>
-          <a:xfrm>
-            <a:off x="8074152" y="3959352"/>
-            <a:ext cx="2825496" cy="1170432"/>
+            <a:endParaRPr lang="en-US" sz="1300" dirty="0"/>
+          </a:p>
+        </p:txBody>
+      </p:sp>
+      <p:sp>
+        <p:nvSpPr>
+          <p:cNvPr id="17" name="Text 15"/>
+          <p:cNvSpPr/>
+          <p:nvPr/>
+        </p:nvSpPr>
+        <p:spPr>
+          <a:xfrm>
+            <a:off x="8074152" y="4023360"/>
+            <a:ext cx="2825496" cy="1097280"/>
           </a:xfrm>
           <a:prstGeom prst="rect">
             <a:avLst/>
@@ -4715,7 +4829,7 @@
               <a:buNone/>
             </a:pPr>
             <a:r>
-              <a:rPr lang="en-US" sz="1250" dirty="0">
+              <a:rPr lang="en-US" sz="1550" dirty="0">
                 <a:solidFill>
                   <a:srgbClr val="17364A"/>
                 </a:solidFill>
@@ -4725,7 +4839,7 @@
               </a:rPr>
               <a:t>Connect the concept to public health decisions, safeguards, documentation, or implementation work.</a:t>
             </a:r>
-            <a:endParaRPr lang="en-US" sz="1250" dirty="0"/>
+            <a:endParaRPr lang="en-US" sz="1550" dirty="0"/>
           </a:p>
         </p:txBody>
       </p:sp>
@@ -4922,7 +5036,7 @@
                 <a:ea typeface="Aptos" pitchFamily="34" charset="-122"/>
                 <a:cs typeface="Aptos" pitchFamily="34" charset="-120"/>
               </a:rPr>
-              <a:t>© Paula Soper</a:t>
+              <a:t>Â© Paula Soper</a:t>
             </a:r>
             <a:endParaRPr lang="en-US" sz="800" dirty="0"/>
           </a:p>
@@ -4936,8 +5050,47 @@
         </p:nvSpPr>
         <p:spPr>
           <a:xfrm>
+            <a:off x="11137392" y="6510528"/>
+            <a:ext cx="411480" cy="201168"/>
+          </a:xfrm>
+          <a:prstGeom prst="rect">
+            <a:avLst/>
+          </a:prstGeom>
+          <a:noFill/>
+          <a:ln/>
+        </p:spPr>
+        <p:txBody>
+          <a:bodyPr wrap="square" lIns="0" tIns="0" rIns="0" bIns="0" rtlCol="0" anchor="ctr"/>
+          <a:lstStyle/>
+          <a:p>
+            <a:pPr algn="r" indent="0" marL="0">
+              <a:buNone/>
+            </a:pPr>
+            <a:r>
+              <a:rPr lang="en-US" sz="900" dirty="0">
+                <a:solidFill>
+                  <a:srgbClr val="5F7181"/>
+                </a:solidFill>
+                <a:latin typeface="Aptos" pitchFamily="34" charset="0"/>
+                <a:ea typeface="Aptos" pitchFamily="34" charset="-122"/>
+                <a:cs typeface="Aptos" pitchFamily="34" charset="-120"/>
+              </a:rPr>
+              <a:t>13</a:t>
+            </a:r>
+            <a:endParaRPr lang="en-US" sz="900" dirty="0"/>
+          </a:p>
+        </p:txBody>
+      </p:sp>
+      <p:sp>
+        <p:nvSpPr>
+          <p:cNvPr id="8" name="Text 6"/>
+          <p:cNvSpPr/>
+          <p:nvPr/>
+        </p:nvSpPr>
+        <p:spPr>
+          <a:xfrm>
             <a:off x="640080" y="658368"/>
-            <a:ext cx="10881360" cy="566928"/>
+            <a:ext cx="10881360" cy="713232"/>
           </a:xfrm>
           <a:prstGeom prst="rect">
             <a:avLst/>
@@ -4955,7 +5108,7 @@
               <a:buNone/>
             </a:pPr>
             <a:r>
-              <a:rPr lang="en-US" sz="2700" b="1" dirty="0">
+              <a:rPr lang="en-US" sz="3400" b="1" dirty="0">
                 <a:solidFill>
                   <a:srgbClr val="003A63"/>
                 </a:solidFill>
@@ -4965,20 +5118,20 @@
               </a:rPr>
               <a:t>Risks, Failure Modes, and Guardrails Continued</a:t>
             </a:r>
-            <a:endParaRPr lang="en-US" sz="2700" dirty="0"/>
-          </a:p>
-        </p:txBody>
-      </p:sp>
-      <p:sp>
-        <p:nvSpPr>
-          <p:cNvPr id="8" name="Text 6"/>
-          <p:cNvSpPr/>
-          <p:nvPr/>
-        </p:nvSpPr>
-        <p:spPr>
-          <a:xfrm>
-            <a:off x="868680" y="1417320"/>
-            <a:ext cx="6675120" cy="4434840"/>
+            <a:endParaRPr lang="en-US" sz="3400" dirty="0"/>
+          </a:p>
+        </p:txBody>
+      </p:sp>
+      <p:sp>
+        <p:nvSpPr>
+          <p:cNvPr id="9" name="Text 7"/>
+          <p:cNvSpPr/>
+          <p:nvPr/>
+        </p:nvSpPr>
+        <p:spPr>
+          <a:xfrm>
+            <a:off x="868680" y="1508760"/>
+            <a:ext cx="6537960" cy="4160520"/>
           </a:xfrm>
           <a:prstGeom prst="rect">
             <a:avLst/>
@@ -4993,7 +5146,7 @@
           <a:lstStyle/>
           <a:p>
             <a:r>
-              <a:rPr lang="en-US" sz="1700" dirty="0">
+              <a:rPr lang="en-US" sz="2100" dirty="0">
                 <a:solidFill>
                   <a:srgbClr val="17364A"/>
                 </a:solidFill>
@@ -5003,11 +5156,11 @@
               </a:rPr>
               <a:t>Misuse of prediction as explanation.</a:t>
             </a:r>
-            <a:endParaRPr lang="en-US" sz="1700" dirty="0"/>
-          </a:p>
-          <a:p>
-            <a:r>
-              <a:rPr lang="en-US" sz="1700" dirty="0">
+            <a:endParaRPr lang="en-US" sz="2100" dirty="0"/>
+          </a:p>
+          <a:p>
+            <a:r>
+              <a:rPr lang="en-US" sz="2100" dirty="0">
                 <a:solidFill>
                   <a:srgbClr val="17364A"/>
                 </a:solidFill>
@@ -5017,11 +5170,11 @@
               </a:rPr>
               <a:t>A model can predict risk without explaining cause.</a:t>
             </a:r>
-            <a:endParaRPr lang="en-US" sz="1700" dirty="0"/>
-          </a:p>
-          <a:p>
-            <a:r>
-              <a:rPr lang="en-US" sz="1700" dirty="0">
+            <a:endParaRPr lang="en-US" sz="2100" dirty="0"/>
+          </a:p>
+          <a:p>
+            <a:r>
+              <a:rPr lang="en-US" sz="2100" dirty="0">
                 <a:solidFill>
                   <a:srgbClr val="17364A"/>
                 </a:solidFill>
@@ -5029,15 +5182,15 @@
                 <a:ea typeface="Aptos" pitchFamily="34" charset="-122"/>
                 <a:cs typeface="Aptos" pitchFamily="34" charset="-120"/>
               </a:rPr>
-              <a:t>Guardrails include clear communication, training, and restrictions against causal claims unless supported by appropriate.</a:t>
-            </a:r>
-            <a:endParaRPr lang="en-US" sz="1700" dirty="0"/>
-          </a:p>
-        </p:txBody>
-      </p:sp>
-      <p:sp>
-        <p:nvSpPr>
-          <p:cNvPr id="9" name="Shape 7"/>
+              <a:t>Guardrails include clear communication, training, and restrictions against causal claims unless.</a:t>
+            </a:r>
+            <a:endParaRPr lang="en-US" sz="2100" dirty="0"/>
+          </a:p>
+        </p:txBody>
+      </p:sp>
+      <p:sp>
+        <p:nvSpPr>
+          <p:cNvPr id="10" name="Shape 8"/>
           <p:cNvSpPr/>
           <p:nvPr/>
         </p:nvSpPr>
@@ -5064,14 +5217,14 @@
       </p:sp>
       <p:sp>
         <p:nvSpPr>
-          <p:cNvPr id="10" name="Text 8"/>
+          <p:cNvPr id="11" name="Text 9"/>
           <p:cNvSpPr/>
           <p:nvPr/>
         </p:nvSpPr>
         <p:spPr>
           <a:xfrm>
             <a:off x="8074152" y="1563624"/>
-            <a:ext cx="2825496" cy="201168"/>
+            <a:ext cx="2825496" cy="256032"/>
           </a:xfrm>
           <a:prstGeom prst="rect">
             <a:avLst/>
@@ -5087,7 +5240,7 @@
               <a:buNone/>
             </a:pPr>
             <a:r>
-              <a:rPr lang="en-US" sz="950" b="1" dirty="0">
+              <a:rPr lang="en-US" sz="1300" b="1" dirty="0">
                 <a:solidFill>
                   <a:srgbClr val="0068B7"/>
                 </a:solidFill>
@@ -5097,20 +5250,20 @@
               </a:rPr>
               <a:t>Key idea</a:t>
             </a:r>
-            <a:endParaRPr lang="en-US" sz="950" dirty="0"/>
-          </a:p>
-        </p:txBody>
-      </p:sp>
-      <p:sp>
-        <p:nvSpPr>
-          <p:cNvPr id="11" name="Text 9"/>
-          <p:cNvSpPr/>
-          <p:nvPr/>
-        </p:nvSpPr>
-        <p:spPr>
-          <a:xfrm>
-            <a:off x="8074152" y="1856232"/>
-            <a:ext cx="2825496" cy="1261872"/>
+            <a:endParaRPr lang="en-US" sz="1300" dirty="0"/>
+          </a:p>
+        </p:txBody>
+      </p:sp>
+      <p:sp>
+        <p:nvSpPr>
+          <p:cNvPr id="12" name="Text 10"/>
+          <p:cNvSpPr/>
+          <p:nvPr/>
+        </p:nvSpPr>
+        <p:spPr>
+          <a:xfrm>
+            <a:off x="8074152" y="1920240"/>
+            <a:ext cx="2825496" cy="1188720"/>
           </a:xfrm>
           <a:prstGeom prst="rect">
             <a:avLst/>
@@ -5128,7 +5281,7 @@
               <a:buNone/>
             </a:pPr>
             <a:r>
-              <a:rPr lang="en-US" sz="1250" dirty="0">
+              <a:rPr lang="en-US" sz="1550" dirty="0">
                 <a:solidFill>
                   <a:srgbClr val="17364A"/>
                 </a:solidFill>
@@ -5138,13 +5291,13 @@
               </a:rPr>
               <a:t>Misuse of prediction as explanation.</a:t>
             </a:r>
-            <a:endParaRPr lang="en-US" sz="1250" dirty="0"/>
-          </a:p>
-        </p:txBody>
-      </p:sp>
-      <p:sp>
-        <p:nvSpPr>
-          <p:cNvPr id="12" name="Shape 10"/>
+            <a:endParaRPr lang="en-US" sz="1550" dirty="0"/>
+          </a:p>
+        </p:txBody>
+      </p:sp>
+      <p:sp>
+        <p:nvSpPr>
+          <p:cNvPr id="13" name="Shape 11"/>
           <p:cNvSpPr/>
           <p:nvPr/>
         </p:nvSpPr>
@@ -5171,14 +5324,14 @@
       </p:sp>
       <p:sp>
         <p:nvSpPr>
-          <p:cNvPr id="13" name="Text 11"/>
+          <p:cNvPr id="14" name="Text 12"/>
           <p:cNvSpPr/>
           <p:nvPr/>
         </p:nvSpPr>
         <p:spPr>
           <a:xfrm>
             <a:off x="8074152" y="3666744"/>
-            <a:ext cx="2825496" cy="201168"/>
+            <a:ext cx="2825496" cy="256032"/>
           </a:xfrm>
           <a:prstGeom prst="rect">
             <a:avLst/>
@@ -5194,7 +5347,7 @@
               <a:buNone/>
             </a:pPr>
             <a:r>
-              <a:rPr lang="en-US" sz="950" b="1" dirty="0">
+              <a:rPr lang="en-US" sz="1300" b="1" dirty="0">
                 <a:solidFill>
                   <a:srgbClr val="0068B7"/>
                 </a:solidFill>
@@ -5204,20 +5357,20 @@
               </a:rPr>
               <a:t>Use this for</a:t>
             </a:r>
-            <a:endParaRPr lang="en-US" sz="950" dirty="0"/>
-          </a:p>
-        </p:txBody>
-      </p:sp>
-      <p:sp>
-        <p:nvSpPr>
-          <p:cNvPr id="14" name="Text 12"/>
-          <p:cNvSpPr/>
-          <p:nvPr/>
-        </p:nvSpPr>
-        <p:spPr>
-          <a:xfrm>
-            <a:off x="8074152" y="3959352"/>
-            <a:ext cx="2825496" cy="1170432"/>
+            <a:endParaRPr lang="en-US" sz="1300" dirty="0"/>
+          </a:p>
+        </p:txBody>
+      </p:sp>
+      <p:sp>
+        <p:nvSpPr>
+          <p:cNvPr id="15" name="Text 13"/>
+          <p:cNvSpPr/>
+          <p:nvPr/>
+        </p:nvSpPr>
+        <p:spPr>
+          <a:xfrm>
+            <a:off x="8074152" y="4023360"/>
+            <a:ext cx="2825496" cy="1097280"/>
           </a:xfrm>
           <a:prstGeom prst="rect">
             <a:avLst/>
@@ -5235,7 +5388,7 @@
               <a:buNone/>
             </a:pPr>
             <a:r>
-              <a:rPr lang="en-US" sz="1250" dirty="0">
+              <a:rPr lang="en-US" sz="1550" dirty="0">
                 <a:solidFill>
                   <a:srgbClr val="17364A"/>
                 </a:solidFill>
@@ -5245,7 +5398,7 @@
               </a:rPr>
               <a:t>Connect the concept to public health decisions, safeguards, documentation, or implementation work.</a:t>
             </a:r>
-            <a:endParaRPr lang="en-US" sz="1250" dirty="0"/>
+            <a:endParaRPr lang="en-US" sz="1550" dirty="0"/>
           </a:p>
         </p:txBody>
       </p:sp>
@@ -5442,7 +5595,7 @@
                 <a:ea typeface="Aptos" pitchFamily="34" charset="-122"/>
                 <a:cs typeface="Aptos" pitchFamily="34" charset="-120"/>
               </a:rPr>
-              <a:t>© Paula Soper</a:t>
+              <a:t>Â© Paula Soper</a:t>
             </a:r>
             <a:endParaRPr lang="en-US" sz="800" dirty="0"/>
           </a:p>
@@ -5450,7 +5603,46 @@
       </p:sp>
       <p:sp>
         <p:nvSpPr>
-          <p:cNvPr id="7" name="Shape 5"/>
+          <p:cNvPr id="7" name="Text 5"/>
+          <p:cNvSpPr/>
+          <p:nvPr/>
+        </p:nvSpPr>
+        <p:spPr>
+          <a:xfrm>
+            <a:off x="11137392" y="6510528"/>
+            <a:ext cx="411480" cy="201168"/>
+          </a:xfrm>
+          <a:prstGeom prst="rect">
+            <a:avLst/>
+          </a:prstGeom>
+          <a:noFill/>
+          <a:ln/>
+        </p:spPr>
+        <p:txBody>
+          <a:bodyPr wrap="square" lIns="0" tIns="0" rIns="0" bIns="0" rtlCol="0" anchor="ctr"/>
+          <a:lstStyle/>
+          <a:p>
+            <a:pPr algn="r" indent="0" marL="0">
+              <a:buNone/>
+            </a:pPr>
+            <a:r>
+              <a:rPr lang="en-US" sz="900" dirty="0">
+                <a:solidFill>
+                  <a:srgbClr val="5F7181"/>
+                </a:solidFill>
+                <a:latin typeface="Aptos" pitchFamily="34" charset="0"/>
+                <a:ea typeface="Aptos" pitchFamily="34" charset="-122"/>
+                <a:cs typeface="Aptos" pitchFamily="34" charset="-120"/>
+              </a:rPr>
+              <a:t>14</a:t>
+            </a:r>
+            <a:endParaRPr lang="en-US" sz="900" dirty="0"/>
+          </a:p>
+        </p:txBody>
+      </p:sp>
+      <p:sp>
+        <p:nvSpPr>
+          <p:cNvPr id="8" name="Shape 6"/>
           <p:cNvSpPr/>
           <p:nvPr/>
         </p:nvSpPr>
@@ -5475,7 +5667,7 @@
       </p:sp>
       <p:sp>
         <p:nvSpPr>
-          <p:cNvPr id="8" name="Text 6"/>
+          <p:cNvPr id="9" name="Text 7"/>
           <p:cNvSpPr/>
           <p:nvPr/>
         </p:nvSpPr>
@@ -5514,14 +5706,14 @@
       </p:sp>
       <p:sp>
         <p:nvSpPr>
-          <p:cNvPr id="9" name="Text 7"/>
+          <p:cNvPr id="10" name="Text 8"/>
           <p:cNvSpPr/>
           <p:nvPr/>
         </p:nvSpPr>
         <p:spPr>
           <a:xfrm>
             <a:off x="640080" y="621792"/>
-            <a:ext cx="10881360" cy="566928"/>
+            <a:ext cx="10881360" cy="713232"/>
           </a:xfrm>
           <a:prstGeom prst="rect">
             <a:avLst/>
@@ -5539,7 +5731,7 @@
               <a:buNone/>
             </a:pPr>
             <a:r>
-              <a:rPr lang="en-US" sz="2700" b="1" dirty="0">
+              <a:rPr lang="en-US" sz="3400" b="1" dirty="0">
                 <a:solidFill>
                   <a:srgbClr val="003A63"/>
                 </a:solidFill>
@@ -5549,20 +5741,20 @@
               </a:rPr>
               <a:t>Application to AI-Supported Workflows</a:t>
             </a:r>
-            <a:endParaRPr lang="en-US" sz="2700" dirty="0"/>
-          </a:p>
-        </p:txBody>
-      </p:sp>
-      <p:sp>
-        <p:nvSpPr>
-          <p:cNvPr id="10" name="Text 8"/>
-          <p:cNvSpPr/>
-          <p:nvPr/>
-        </p:nvSpPr>
-        <p:spPr>
-          <a:xfrm>
-            <a:off x="868680" y="1417320"/>
-            <a:ext cx="6675120" cy="4434840"/>
+            <a:endParaRPr lang="en-US" sz="3400" dirty="0"/>
+          </a:p>
+        </p:txBody>
+      </p:sp>
+      <p:sp>
+        <p:nvSpPr>
+          <p:cNvPr id="11" name="Text 9"/>
+          <p:cNvSpPr/>
+          <p:nvPr/>
+        </p:nvSpPr>
+        <p:spPr>
+          <a:xfrm>
+            <a:off x="868680" y="1508760"/>
+            <a:ext cx="6537960" cy="4160520"/>
           </a:xfrm>
           <a:prstGeom prst="rect">
             <a:avLst/>
@@ -5577,7 +5769,7 @@
           <a:lstStyle/>
           <a:p>
             <a:r>
-              <a:rPr lang="en-US" sz="1700" dirty="0">
+              <a:rPr lang="en-US" sz="2100" dirty="0">
                 <a:solidFill>
                   <a:srgbClr val="17364A"/>
                 </a:solidFill>
@@ -5585,13 +5777,13 @@
                 <a:ea typeface="Aptos" pitchFamily="34" charset="-122"/>
                 <a:cs typeface="Aptos" pitchFamily="34" charset="-120"/>
               </a:rPr>
-              <a:t>Machine learning may support generative AI, predictive analytics, NLP, anomaly detection, and agentic workflows.</a:t>
-            </a:r>
-            <a:endParaRPr lang="en-US" sz="1700" dirty="0"/>
-          </a:p>
-          <a:p>
-            <a:r>
-              <a:rPr lang="en-US" sz="1700" dirty="0">
+              <a:t>Machine learning may support generative AI, predictive analytics, NLP, anomaly detection, and agentic.</a:t>
+            </a:r>
+            <a:endParaRPr lang="en-US" sz="2100" dirty="0"/>
+          </a:p>
+          <a:p>
+            <a:r>
+              <a:rPr lang="en-US" sz="2100" dirty="0">
                 <a:solidFill>
                   <a:srgbClr val="17364A"/>
                 </a:solidFill>
@@ -5599,13 +5791,13 @@
                 <a:ea typeface="Aptos" pitchFamily="34" charset="-122"/>
                 <a:cs typeface="Aptos" pitchFamily="34" charset="-120"/>
               </a:rPr>
-              <a:t>In generative AI systems, machine learning concepts help staff understand why outputs may be fluent but unreliable.</a:t>
-            </a:r>
-            <a:endParaRPr lang="en-US" sz="1700" dirty="0"/>
-          </a:p>
-          <a:p>
-            <a:r>
-              <a:rPr lang="en-US" sz="1700" dirty="0">
+              <a:t>In generative AI systems, machine learning concepts help staff understand why outputs may be fluent but.</a:t>
+            </a:r>
+            <a:endParaRPr lang="en-US" sz="2100" dirty="0"/>
+          </a:p>
+          <a:p>
+            <a:r>
+              <a:rPr lang="en-US" sz="2100" dirty="0">
                 <a:solidFill>
                   <a:srgbClr val="17364A"/>
                 </a:solidFill>
@@ -5613,29 +5805,15 @@
                 <a:ea typeface="Aptos" pitchFamily="34" charset="-122"/>
                 <a:cs typeface="Aptos" pitchFamily="34" charset="-120"/>
               </a:rPr>
-              <a:t>In predictive workflows, machine learning literacy helps staff evaluate risk scores, thresholds, and subgroup performance.</a:t>
-            </a:r>
-            <a:endParaRPr lang="en-US" sz="1700" dirty="0"/>
-          </a:p>
-          <a:p>
-            <a:r>
-              <a:rPr lang="en-US" sz="1700" dirty="0">
-                <a:solidFill>
-                  <a:srgbClr val="17364A"/>
-                </a:solidFill>
-                <a:latin typeface="Aptos" pitchFamily="34" charset="0"/>
-                <a:ea typeface="Aptos" pitchFamily="34" charset="-122"/>
-                <a:cs typeface="Aptos" pitchFamily="34" charset="-120"/>
-              </a:rPr>
-              <a:t>In agentic workflows, models may trigger actions, making validation, permissions, and human approval especially important.</a:t>
-            </a:r>
-            <a:endParaRPr lang="en-US" sz="1700" dirty="0"/>
-          </a:p>
-        </p:txBody>
-      </p:sp>
-      <p:sp>
-        <p:nvSpPr>
-          <p:cNvPr id="11" name="Shape 9"/>
+              <a:t>In predictive workflows, machine learning literacy helps staff evaluate risk scores, thresholds, and.</a:t>
+            </a:r>
+            <a:endParaRPr lang="en-US" sz="2100" dirty="0"/>
+          </a:p>
+        </p:txBody>
+      </p:sp>
+      <p:sp>
+        <p:nvSpPr>
+          <p:cNvPr id="12" name="Shape 10"/>
           <p:cNvSpPr/>
           <p:nvPr/>
         </p:nvSpPr>
@@ -5662,14 +5840,14 @@
       </p:sp>
       <p:sp>
         <p:nvSpPr>
-          <p:cNvPr id="12" name="Text 10"/>
+          <p:cNvPr id="13" name="Text 11"/>
           <p:cNvSpPr/>
           <p:nvPr/>
         </p:nvSpPr>
         <p:spPr>
           <a:xfrm>
             <a:off x="8074152" y="1563624"/>
-            <a:ext cx="2825496" cy="201168"/>
+            <a:ext cx="2825496" cy="256032"/>
           </a:xfrm>
           <a:prstGeom prst="rect">
             <a:avLst/>
@@ -5685,7 +5863,7 @@
               <a:buNone/>
             </a:pPr>
             <a:r>
-              <a:rPr lang="en-US" sz="950" b="1" dirty="0">
+              <a:rPr lang="en-US" sz="1300" b="1" dirty="0">
                 <a:solidFill>
                   <a:srgbClr val="0068B7"/>
                 </a:solidFill>
@@ -5695,20 +5873,20 @@
               </a:rPr>
               <a:t>Key idea</a:t>
             </a:r>
-            <a:endParaRPr lang="en-US" sz="950" dirty="0"/>
-          </a:p>
-        </p:txBody>
-      </p:sp>
-      <p:sp>
-        <p:nvSpPr>
-          <p:cNvPr id="13" name="Text 11"/>
-          <p:cNvSpPr/>
-          <p:nvPr/>
-        </p:nvSpPr>
-        <p:spPr>
-          <a:xfrm>
-            <a:off x="8074152" y="1856232"/>
-            <a:ext cx="2825496" cy="1261872"/>
+            <a:endParaRPr lang="en-US" sz="1300" dirty="0"/>
+          </a:p>
+        </p:txBody>
+      </p:sp>
+      <p:sp>
+        <p:nvSpPr>
+          <p:cNvPr id="14" name="Text 12"/>
+          <p:cNvSpPr/>
+          <p:nvPr/>
+        </p:nvSpPr>
+        <p:spPr>
+          <a:xfrm>
+            <a:off x="8074152" y="1920240"/>
+            <a:ext cx="2825496" cy="1188720"/>
           </a:xfrm>
           <a:prstGeom prst="rect">
             <a:avLst/>
@@ -5726,7 +5904,7 @@
               <a:buNone/>
             </a:pPr>
             <a:r>
-              <a:rPr lang="en-US" sz="1250" dirty="0">
+              <a:rPr lang="en-US" sz="1550" dirty="0">
                 <a:solidFill>
                   <a:srgbClr val="17364A"/>
                 </a:solidFill>
@@ -5734,15 +5912,15 @@
                 <a:ea typeface="Aptos" pitchFamily="34" charset="-122"/>
                 <a:cs typeface="Aptos" pitchFamily="34" charset="-120"/>
               </a:rPr>
-              <a:t>Machine learning may support generative AI, predictive analytics, NLP, anomaly detection, and agentic workflows.</a:t>
-            </a:r>
-            <a:endParaRPr lang="en-US" sz="1250" dirty="0"/>
-          </a:p>
-        </p:txBody>
-      </p:sp>
-      <p:sp>
-        <p:nvSpPr>
-          <p:cNvPr id="14" name="Shape 12"/>
+              <a:t>Machine learning may support generative AI, predictive analytics, NLP, anomaly detection, and agentic.</a:t>
+            </a:r>
+            <a:endParaRPr lang="en-US" sz="1550" dirty="0"/>
+          </a:p>
+        </p:txBody>
+      </p:sp>
+      <p:sp>
+        <p:nvSpPr>
+          <p:cNvPr id="15" name="Shape 13"/>
           <p:cNvSpPr/>
           <p:nvPr/>
         </p:nvSpPr>
@@ -5769,14 +5947,14 @@
       </p:sp>
       <p:sp>
         <p:nvSpPr>
-          <p:cNvPr id="15" name="Text 13"/>
+          <p:cNvPr id="16" name="Text 14"/>
           <p:cNvSpPr/>
           <p:nvPr/>
         </p:nvSpPr>
         <p:spPr>
           <a:xfrm>
             <a:off x="8074152" y="3666744"/>
-            <a:ext cx="2825496" cy="201168"/>
+            <a:ext cx="2825496" cy="256032"/>
           </a:xfrm>
           <a:prstGeom prst="rect">
             <a:avLst/>
@@ -5792,7 +5970,7 @@
               <a:buNone/>
             </a:pPr>
             <a:r>
-              <a:rPr lang="en-US" sz="950" b="1" dirty="0">
+              <a:rPr lang="en-US" sz="1300" b="1" dirty="0">
                 <a:solidFill>
                   <a:srgbClr val="0068B7"/>
                 </a:solidFill>
@@ -5802,20 +5980,20 @@
               </a:rPr>
               <a:t>Use this for</a:t>
             </a:r>
-            <a:endParaRPr lang="en-US" sz="950" dirty="0"/>
-          </a:p>
-        </p:txBody>
-      </p:sp>
-      <p:sp>
-        <p:nvSpPr>
-          <p:cNvPr id="16" name="Text 14"/>
-          <p:cNvSpPr/>
-          <p:nvPr/>
-        </p:nvSpPr>
-        <p:spPr>
-          <a:xfrm>
-            <a:off x="8074152" y="3959352"/>
-            <a:ext cx="2825496" cy="1170432"/>
+            <a:endParaRPr lang="en-US" sz="1300" dirty="0"/>
+          </a:p>
+        </p:txBody>
+      </p:sp>
+      <p:sp>
+        <p:nvSpPr>
+          <p:cNvPr id="17" name="Text 15"/>
+          <p:cNvSpPr/>
+          <p:nvPr/>
+        </p:nvSpPr>
+        <p:spPr>
+          <a:xfrm>
+            <a:off x="8074152" y="4023360"/>
+            <a:ext cx="2825496" cy="1097280"/>
           </a:xfrm>
           <a:prstGeom prst="rect">
             <a:avLst/>
@@ -5833,7 +6011,7 @@
               <a:buNone/>
             </a:pPr>
             <a:r>
-              <a:rPr lang="en-US" sz="1250" dirty="0">
+              <a:rPr lang="en-US" sz="1550" dirty="0">
                 <a:solidFill>
                   <a:srgbClr val="17364A"/>
                 </a:solidFill>
@@ -5843,7 +6021,7 @@
               </a:rPr>
               <a:t>Connect the concept to public health decisions, safeguards, documentation, or implementation work.</a:t>
             </a:r>
-            <a:endParaRPr lang="en-US" sz="1250" dirty="0"/>
+            <a:endParaRPr lang="en-US" sz="1550" dirty="0"/>
           </a:p>
         </p:txBody>
       </p:sp>
@@ -6040,7 +6218,7 @@
                 <a:ea typeface="Aptos" pitchFamily="34" charset="-122"/>
                 <a:cs typeface="Aptos" pitchFamily="34" charset="-120"/>
               </a:rPr>
-              <a:t>© Paula Soper</a:t>
+              <a:t>Â© Paula Soper</a:t>
             </a:r>
             <a:endParaRPr lang="en-US" sz="800" dirty="0"/>
           </a:p>
@@ -6048,7 +6226,46 @@
       </p:sp>
       <p:sp>
         <p:nvSpPr>
-          <p:cNvPr id="7" name="Shape 5"/>
+          <p:cNvPr id="7" name="Text 5"/>
+          <p:cNvSpPr/>
+          <p:nvPr/>
+        </p:nvSpPr>
+        <p:spPr>
+          <a:xfrm>
+            <a:off x="11137392" y="6510528"/>
+            <a:ext cx="411480" cy="201168"/>
+          </a:xfrm>
+          <a:prstGeom prst="rect">
+            <a:avLst/>
+          </a:prstGeom>
+          <a:noFill/>
+          <a:ln/>
+        </p:spPr>
+        <p:txBody>
+          <a:bodyPr wrap="square" lIns="0" tIns="0" rIns="0" bIns="0" rtlCol="0" anchor="ctr"/>
+          <a:lstStyle/>
+          <a:p>
+            <a:pPr algn="r" indent="0" marL="0">
+              <a:buNone/>
+            </a:pPr>
+            <a:r>
+              <a:rPr lang="en-US" sz="900" dirty="0">
+                <a:solidFill>
+                  <a:srgbClr val="5F7181"/>
+                </a:solidFill>
+                <a:latin typeface="Aptos" pitchFamily="34" charset="0"/>
+                <a:ea typeface="Aptos" pitchFamily="34" charset="-122"/>
+                <a:cs typeface="Aptos" pitchFamily="34" charset="-120"/>
+              </a:rPr>
+              <a:t>15</a:t>
+            </a:r>
+            <a:endParaRPr lang="en-US" sz="900" dirty="0"/>
+          </a:p>
+        </p:txBody>
+      </p:sp>
+      <p:sp>
+        <p:nvSpPr>
+          <p:cNvPr id="8" name="Shape 6"/>
           <p:cNvSpPr/>
           <p:nvPr/>
         </p:nvSpPr>
@@ -6073,7 +6290,7 @@
       </p:sp>
       <p:sp>
         <p:nvSpPr>
-          <p:cNvPr id="8" name="Text 6"/>
+          <p:cNvPr id="9" name="Text 7"/>
           <p:cNvSpPr/>
           <p:nvPr/>
         </p:nvSpPr>
@@ -6112,14 +6329,14 @@
       </p:sp>
       <p:sp>
         <p:nvSpPr>
-          <p:cNvPr id="9" name="Text 7"/>
+          <p:cNvPr id="10" name="Text 8"/>
           <p:cNvSpPr/>
           <p:nvPr/>
         </p:nvSpPr>
         <p:spPr>
           <a:xfrm>
             <a:off x="640080" y="621792"/>
-            <a:ext cx="10881360" cy="566928"/>
+            <a:ext cx="10881360" cy="713232"/>
           </a:xfrm>
           <a:prstGeom prst="rect">
             <a:avLst/>
@@ -6137,7 +6354,7 @@
               <a:buNone/>
             </a:pPr>
             <a:r>
-              <a:rPr lang="en-US" sz="2700" b="1" dirty="0">
+              <a:rPr lang="en-US" sz="3400" b="1" dirty="0">
                 <a:solidFill>
                   <a:srgbClr val="003A63"/>
                 </a:solidFill>
@@ -6147,20 +6364,20 @@
               </a:rPr>
               <a:t>Reflection Questions</a:t>
             </a:r>
-            <a:endParaRPr lang="en-US" sz="2700" dirty="0"/>
-          </a:p>
-        </p:txBody>
-      </p:sp>
-      <p:sp>
-        <p:nvSpPr>
-          <p:cNvPr id="10" name="Text 8"/>
-          <p:cNvSpPr/>
-          <p:nvPr/>
-        </p:nvSpPr>
-        <p:spPr>
-          <a:xfrm>
-            <a:off x="868680" y="1417320"/>
-            <a:ext cx="6675120" cy="4434840"/>
+            <a:endParaRPr lang="en-US" sz="3400" dirty="0"/>
+          </a:p>
+        </p:txBody>
+      </p:sp>
+      <p:sp>
+        <p:nvSpPr>
+          <p:cNvPr id="11" name="Text 9"/>
+          <p:cNvSpPr/>
+          <p:nvPr/>
+        </p:nvSpPr>
+        <p:spPr>
+          <a:xfrm>
+            <a:off x="868680" y="1508760"/>
+            <a:ext cx="6537960" cy="4160520"/>
           </a:xfrm>
           <a:prstGeom prst="rect">
             <a:avLst/>
@@ -6175,7 +6392,7 @@
           <a:lstStyle/>
           <a:p>
             <a:r>
-              <a:rPr lang="en-US" sz="1700" dirty="0">
+              <a:rPr lang="en-US" sz="2100" dirty="0">
                 <a:solidFill>
                   <a:srgbClr val="17364A"/>
                 </a:solidFill>
@@ -6183,13 +6400,13 @@
                 <a:ea typeface="Aptos" pitchFamily="34" charset="-122"/>
                 <a:cs typeface="Aptos" pitchFamily="34" charset="-120"/>
               </a:rPr>
-              <a:t>What public health task would the model support: classification, prediction, ranking, clustering, or exploration?</a:t>
-            </a:r>
-            <a:endParaRPr lang="en-US" sz="1700" dirty="0"/>
-          </a:p>
-          <a:p>
-            <a:r>
-              <a:rPr lang="en-US" sz="1700" dirty="0">
+              <a:t>What public health task would the model support: classification, prediction, ranking, clustering, or.</a:t>
+            </a:r>
+            <a:endParaRPr lang="en-US" sz="2100" dirty="0"/>
+          </a:p>
+          <a:p>
+            <a:r>
+              <a:rPr lang="en-US" sz="2100" dirty="0">
                 <a:solidFill>
                   <a:srgbClr val="17364A"/>
                 </a:solidFill>
@@ -6199,11 +6416,11 @@
               </a:rPr>
               <a:t>What label would be used, and how reliable or equitable is that label?</a:t>
             </a:r>
-            <a:endParaRPr lang="en-US" sz="1700" dirty="0"/>
-          </a:p>
-          <a:p>
-            <a:r>
-              <a:rPr lang="en-US" sz="1700" dirty="0">
+            <a:endParaRPr lang="en-US" sz="2100" dirty="0"/>
+          </a:p>
+          <a:p>
+            <a:r>
+              <a:rPr lang="en-US" sz="2100" dirty="0">
                 <a:solidFill>
                   <a:srgbClr val="17364A"/>
                 </a:solidFill>
@@ -6213,13 +6430,13 @@
               </a:rPr>
               <a:t>Which features might reflect access, documentation, or reporting bias rather than true risk?</a:t>
             </a:r>
-            <a:endParaRPr lang="en-US" sz="1700" dirty="0"/>
-          </a:p>
-        </p:txBody>
-      </p:sp>
-      <p:sp>
-        <p:nvSpPr>
-          <p:cNvPr id="11" name="Shape 9"/>
+            <a:endParaRPr lang="en-US" sz="2100" dirty="0"/>
+          </a:p>
+        </p:txBody>
+      </p:sp>
+      <p:sp>
+        <p:nvSpPr>
+          <p:cNvPr id="12" name="Shape 10"/>
           <p:cNvSpPr/>
           <p:nvPr/>
         </p:nvSpPr>
@@ -6246,14 +6463,14 @@
       </p:sp>
       <p:sp>
         <p:nvSpPr>
-          <p:cNvPr id="12" name="Text 10"/>
+          <p:cNvPr id="13" name="Text 11"/>
           <p:cNvSpPr/>
           <p:nvPr/>
         </p:nvSpPr>
         <p:spPr>
           <a:xfrm>
             <a:off x="8074152" y="1563624"/>
-            <a:ext cx="2825496" cy="201168"/>
+            <a:ext cx="2825496" cy="256032"/>
           </a:xfrm>
           <a:prstGeom prst="rect">
             <a:avLst/>
@@ -6269,7 +6486,7 @@
               <a:buNone/>
             </a:pPr>
             <a:r>
-              <a:rPr lang="en-US" sz="950" b="1" dirty="0">
+              <a:rPr lang="en-US" sz="1300" b="1" dirty="0">
                 <a:solidFill>
                   <a:srgbClr val="0068B7"/>
                 </a:solidFill>
@@ -6279,20 +6496,20 @@
               </a:rPr>
               <a:t>Key idea</a:t>
             </a:r>
-            <a:endParaRPr lang="en-US" sz="950" dirty="0"/>
-          </a:p>
-        </p:txBody>
-      </p:sp>
-      <p:sp>
-        <p:nvSpPr>
-          <p:cNvPr id="13" name="Text 11"/>
-          <p:cNvSpPr/>
-          <p:nvPr/>
-        </p:nvSpPr>
-        <p:spPr>
-          <a:xfrm>
-            <a:off x="8074152" y="1856232"/>
-            <a:ext cx="2825496" cy="1261872"/>
+            <a:endParaRPr lang="en-US" sz="1300" dirty="0"/>
+          </a:p>
+        </p:txBody>
+      </p:sp>
+      <p:sp>
+        <p:nvSpPr>
+          <p:cNvPr id="14" name="Text 12"/>
+          <p:cNvSpPr/>
+          <p:nvPr/>
+        </p:nvSpPr>
+        <p:spPr>
+          <a:xfrm>
+            <a:off x="8074152" y="1920240"/>
+            <a:ext cx="2825496" cy="1188720"/>
           </a:xfrm>
           <a:prstGeom prst="rect">
             <a:avLst/>
@@ -6310,7 +6527,7 @@
               <a:buNone/>
             </a:pPr>
             <a:r>
-              <a:rPr lang="en-US" sz="1250" dirty="0">
+              <a:rPr lang="en-US" sz="1550" dirty="0">
                 <a:solidFill>
                   <a:srgbClr val="17364A"/>
                 </a:solidFill>
@@ -6318,15 +6535,15 @@
                 <a:ea typeface="Aptos" pitchFamily="34" charset="-122"/>
                 <a:cs typeface="Aptos" pitchFamily="34" charset="-120"/>
               </a:rPr>
-              <a:t>What public health task would the model support: classification, prediction, ranking, clustering, or exploration?</a:t>
-            </a:r>
-            <a:endParaRPr lang="en-US" sz="1250" dirty="0"/>
-          </a:p>
-        </p:txBody>
-      </p:sp>
-      <p:sp>
-        <p:nvSpPr>
-          <p:cNvPr id="14" name="Shape 12"/>
+              <a:t>What public health task would the model support: classification, prediction, ranking, clustering, or.</a:t>
+            </a:r>
+            <a:endParaRPr lang="en-US" sz="1550" dirty="0"/>
+          </a:p>
+        </p:txBody>
+      </p:sp>
+      <p:sp>
+        <p:nvSpPr>
+          <p:cNvPr id="15" name="Shape 13"/>
           <p:cNvSpPr/>
           <p:nvPr/>
         </p:nvSpPr>
@@ -6353,14 +6570,14 @@
       </p:sp>
       <p:sp>
         <p:nvSpPr>
-          <p:cNvPr id="15" name="Text 13"/>
+          <p:cNvPr id="16" name="Text 14"/>
           <p:cNvSpPr/>
           <p:nvPr/>
         </p:nvSpPr>
         <p:spPr>
           <a:xfrm>
             <a:off x="8074152" y="3666744"/>
-            <a:ext cx="2825496" cy="201168"/>
+            <a:ext cx="2825496" cy="256032"/>
           </a:xfrm>
           <a:prstGeom prst="rect">
             <a:avLst/>
@@ -6376,7 +6593,7 @@
               <a:buNone/>
             </a:pPr>
             <a:r>
-              <a:rPr lang="en-US" sz="950" b="1" dirty="0">
+              <a:rPr lang="en-US" sz="1300" b="1" dirty="0">
                 <a:solidFill>
                   <a:srgbClr val="0068B7"/>
                 </a:solidFill>
@@ -6386,20 +6603,20 @@
               </a:rPr>
               <a:t>Use this for</a:t>
             </a:r>
-            <a:endParaRPr lang="en-US" sz="950" dirty="0"/>
-          </a:p>
-        </p:txBody>
-      </p:sp>
-      <p:sp>
-        <p:nvSpPr>
-          <p:cNvPr id="16" name="Text 14"/>
-          <p:cNvSpPr/>
-          <p:nvPr/>
-        </p:nvSpPr>
-        <p:spPr>
-          <a:xfrm>
-            <a:off x="8074152" y="3959352"/>
-            <a:ext cx="2825496" cy="1170432"/>
+            <a:endParaRPr lang="en-US" sz="1300" dirty="0"/>
+          </a:p>
+        </p:txBody>
+      </p:sp>
+      <p:sp>
+        <p:nvSpPr>
+          <p:cNvPr id="17" name="Text 15"/>
+          <p:cNvSpPr/>
+          <p:nvPr/>
+        </p:nvSpPr>
+        <p:spPr>
+          <a:xfrm>
+            <a:off x="8074152" y="4023360"/>
+            <a:ext cx="2825496" cy="1097280"/>
           </a:xfrm>
           <a:prstGeom prst="rect">
             <a:avLst/>
@@ -6417,7 +6634,7 @@
               <a:buNone/>
             </a:pPr>
             <a:r>
-              <a:rPr lang="en-US" sz="1250" dirty="0">
+              <a:rPr lang="en-US" sz="1550" dirty="0">
                 <a:solidFill>
                   <a:srgbClr val="17364A"/>
                 </a:solidFill>
@@ -6427,7 +6644,7 @@
               </a:rPr>
               <a:t>Connect the concept to public health decisions, safeguards, documentation, or implementation work.</a:t>
             </a:r>
-            <a:endParaRPr lang="en-US" sz="1250" dirty="0"/>
+            <a:endParaRPr lang="en-US" sz="1550" dirty="0"/>
           </a:p>
         </p:txBody>
       </p:sp>
@@ -6624,7 +6841,7 @@
                 <a:ea typeface="Aptos" pitchFamily="34" charset="-122"/>
                 <a:cs typeface="Aptos" pitchFamily="34" charset="-120"/>
               </a:rPr>
-              <a:t>© Paula Soper</a:t>
+              <a:t>Â© Paula Soper</a:t>
             </a:r>
             <a:endParaRPr lang="en-US" sz="800" dirty="0"/>
           </a:p>
@@ -6638,8 +6855,47 @@
         </p:nvSpPr>
         <p:spPr>
           <a:xfrm>
+            <a:off x="11137392" y="6510528"/>
+            <a:ext cx="411480" cy="201168"/>
+          </a:xfrm>
+          <a:prstGeom prst="rect">
+            <a:avLst/>
+          </a:prstGeom>
+          <a:noFill/>
+          <a:ln/>
+        </p:spPr>
+        <p:txBody>
+          <a:bodyPr wrap="square" lIns="0" tIns="0" rIns="0" bIns="0" rtlCol="0" anchor="ctr"/>
+          <a:lstStyle/>
+          <a:p>
+            <a:pPr algn="r" indent="0" marL="0">
+              <a:buNone/>
+            </a:pPr>
+            <a:r>
+              <a:rPr lang="en-US" sz="900" dirty="0">
+                <a:solidFill>
+                  <a:srgbClr val="5F7181"/>
+                </a:solidFill>
+                <a:latin typeface="Aptos" pitchFamily="34" charset="0"/>
+                <a:ea typeface="Aptos" pitchFamily="34" charset="-122"/>
+                <a:cs typeface="Aptos" pitchFamily="34" charset="-120"/>
+              </a:rPr>
+              <a:t>16</a:t>
+            </a:r>
+            <a:endParaRPr lang="en-US" sz="900" dirty="0"/>
+          </a:p>
+        </p:txBody>
+      </p:sp>
+      <p:sp>
+        <p:nvSpPr>
+          <p:cNvPr id="8" name="Text 6"/>
+          <p:cNvSpPr/>
+          <p:nvPr/>
+        </p:nvSpPr>
+        <p:spPr>
+          <a:xfrm>
             <a:off x="640080" y="658368"/>
-            <a:ext cx="10881360" cy="566928"/>
+            <a:ext cx="10881360" cy="713232"/>
           </a:xfrm>
           <a:prstGeom prst="rect">
             <a:avLst/>
@@ -6657,7 +6913,7 @@
               <a:buNone/>
             </a:pPr>
             <a:r>
-              <a:rPr lang="en-US" sz="2700" b="1" dirty="0">
+              <a:rPr lang="en-US" sz="3400" b="1" dirty="0">
                 <a:solidFill>
                   <a:srgbClr val="003A63"/>
                 </a:solidFill>
@@ -6667,20 +6923,20 @@
               </a:rPr>
               <a:t>Reflection Questions Continued</a:t>
             </a:r>
-            <a:endParaRPr lang="en-US" sz="2700" dirty="0"/>
-          </a:p>
-        </p:txBody>
-      </p:sp>
-      <p:sp>
-        <p:nvSpPr>
-          <p:cNvPr id="8" name="Text 6"/>
-          <p:cNvSpPr/>
-          <p:nvPr/>
-        </p:nvSpPr>
-        <p:spPr>
-          <a:xfrm>
-            <a:off x="868680" y="1417320"/>
-            <a:ext cx="6675120" cy="4434840"/>
+            <a:endParaRPr lang="en-US" sz="3400" dirty="0"/>
+          </a:p>
+        </p:txBody>
+      </p:sp>
+      <p:sp>
+        <p:nvSpPr>
+          <p:cNvPr id="9" name="Text 7"/>
+          <p:cNvSpPr/>
+          <p:nvPr/>
+        </p:nvSpPr>
+        <p:spPr>
+          <a:xfrm>
+            <a:off x="868680" y="1508760"/>
+            <a:ext cx="6537960" cy="4160520"/>
           </a:xfrm>
           <a:prstGeom prst="rect">
             <a:avLst/>
@@ -6695,7 +6951,7 @@
           <a:lstStyle/>
           <a:p>
             <a:r>
-              <a:rPr lang="en-US" sz="1700" dirty="0">
+              <a:rPr lang="en-US" sz="2100" dirty="0">
                 <a:solidFill>
                   <a:srgbClr val="17364A"/>
                 </a:solidFill>
@@ -6705,11 +6961,11 @@
               </a:rPr>
               <a:t>What errors would be most harmful in this workflow?</a:t>
             </a:r>
-            <a:endParaRPr lang="en-US" sz="1700" dirty="0"/>
-          </a:p>
-          <a:p>
-            <a:r>
-              <a:rPr lang="en-US" sz="1700" dirty="0">
+            <a:endParaRPr lang="en-US" sz="2100" dirty="0"/>
+          </a:p>
+          <a:p>
+            <a:r>
+              <a:rPr lang="en-US" sz="2100" dirty="0">
                 <a:solidFill>
                   <a:srgbClr val="17364A"/>
                 </a:solidFill>
@@ -6719,13 +6975,13 @@
               </a:rPr>
               <a:t>Who would review model outputs, override them, and document concerns?</a:t>
             </a:r>
-            <a:endParaRPr lang="en-US" sz="1700" dirty="0"/>
-          </a:p>
-        </p:txBody>
-      </p:sp>
-      <p:sp>
-        <p:nvSpPr>
-          <p:cNvPr id="9" name="Shape 7"/>
+            <a:endParaRPr lang="en-US" sz="2100" dirty="0"/>
+          </a:p>
+        </p:txBody>
+      </p:sp>
+      <p:sp>
+        <p:nvSpPr>
+          <p:cNvPr id="10" name="Shape 8"/>
           <p:cNvSpPr/>
           <p:nvPr/>
         </p:nvSpPr>
@@ -6752,14 +7008,14 @@
       </p:sp>
       <p:sp>
         <p:nvSpPr>
-          <p:cNvPr id="10" name="Text 8"/>
+          <p:cNvPr id="11" name="Text 9"/>
           <p:cNvSpPr/>
           <p:nvPr/>
         </p:nvSpPr>
         <p:spPr>
           <a:xfrm>
             <a:off x="8074152" y="1563624"/>
-            <a:ext cx="2825496" cy="201168"/>
+            <a:ext cx="2825496" cy="256032"/>
           </a:xfrm>
           <a:prstGeom prst="rect">
             <a:avLst/>
@@ -6775,7 +7031,7 @@
               <a:buNone/>
             </a:pPr>
             <a:r>
-              <a:rPr lang="en-US" sz="950" b="1" dirty="0">
+              <a:rPr lang="en-US" sz="1300" b="1" dirty="0">
                 <a:solidFill>
                   <a:srgbClr val="0068B7"/>
                 </a:solidFill>
@@ -6785,20 +7041,20 @@
               </a:rPr>
               <a:t>Key idea</a:t>
             </a:r>
-            <a:endParaRPr lang="en-US" sz="950" dirty="0"/>
-          </a:p>
-        </p:txBody>
-      </p:sp>
-      <p:sp>
-        <p:nvSpPr>
-          <p:cNvPr id="11" name="Text 9"/>
-          <p:cNvSpPr/>
-          <p:nvPr/>
-        </p:nvSpPr>
-        <p:spPr>
-          <a:xfrm>
-            <a:off x="8074152" y="1856232"/>
-            <a:ext cx="2825496" cy="1261872"/>
+            <a:endParaRPr lang="en-US" sz="1300" dirty="0"/>
+          </a:p>
+        </p:txBody>
+      </p:sp>
+      <p:sp>
+        <p:nvSpPr>
+          <p:cNvPr id="12" name="Text 10"/>
+          <p:cNvSpPr/>
+          <p:nvPr/>
+        </p:nvSpPr>
+        <p:spPr>
+          <a:xfrm>
+            <a:off x="8074152" y="1920240"/>
+            <a:ext cx="2825496" cy="1188720"/>
           </a:xfrm>
           <a:prstGeom prst="rect">
             <a:avLst/>
@@ -6816,7 +7072,7 @@
               <a:buNone/>
             </a:pPr>
             <a:r>
-              <a:rPr lang="en-US" sz="1250" dirty="0">
+              <a:rPr lang="en-US" sz="1550" dirty="0">
                 <a:solidFill>
                   <a:srgbClr val="17364A"/>
                 </a:solidFill>
@@ -6826,13 +7082,13 @@
               </a:rPr>
               <a:t>What errors would be most harmful in this workflow?</a:t>
             </a:r>
-            <a:endParaRPr lang="en-US" sz="1250" dirty="0"/>
-          </a:p>
-        </p:txBody>
-      </p:sp>
-      <p:sp>
-        <p:nvSpPr>
-          <p:cNvPr id="12" name="Shape 10"/>
+            <a:endParaRPr lang="en-US" sz="1550" dirty="0"/>
+          </a:p>
+        </p:txBody>
+      </p:sp>
+      <p:sp>
+        <p:nvSpPr>
+          <p:cNvPr id="13" name="Shape 11"/>
           <p:cNvSpPr/>
           <p:nvPr/>
         </p:nvSpPr>
@@ -6859,14 +7115,14 @@
       </p:sp>
       <p:sp>
         <p:nvSpPr>
-          <p:cNvPr id="13" name="Text 11"/>
+          <p:cNvPr id="14" name="Text 12"/>
           <p:cNvSpPr/>
           <p:nvPr/>
         </p:nvSpPr>
         <p:spPr>
           <a:xfrm>
             <a:off x="8074152" y="3666744"/>
-            <a:ext cx="2825496" cy="201168"/>
+            <a:ext cx="2825496" cy="256032"/>
           </a:xfrm>
           <a:prstGeom prst="rect">
             <a:avLst/>
@@ -6882,7 +7138,7 @@
               <a:buNone/>
             </a:pPr>
             <a:r>
-              <a:rPr lang="en-US" sz="950" b="1" dirty="0">
+              <a:rPr lang="en-US" sz="1300" b="1" dirty="0">
                 <a:solidFill>
                   <a:srgbClr val="0068B7"/>
                 </a:solidFill>
@@ -6892,20 +7148,20 @@
               </a:rPr>
               <a:t>Use this for</a:t>
             </a:r>
-            <a:endParaRPr lang="en-US" sz="950" dirty="0"/>
-          </a:p>
-        </p:txBody>
-      </p:sp>
-      <p:sp>
-        <p:nvSpPr>
-          <p:cNvPr id="14" name="Text 12"/>
-          <p:cNvSpPr/>
-          <p:nvPr/>
-        </p:nvSpPr>
-        <p:spPr>
-          <a:xfrm>
-            <a:off x="8074152" y="3959352"/>
-            <a:ext cx="2825496" cy="1170432"/>
+            <a:endParaRPr lang="en-US" sz="1300" dirty="0"/>
+          </a:p>
+        </p:txBody>
+      </p:sp>
+      <p:sp>
+        <p:nvSpPr>
+          <p:cNvPr id="15" name="Text 13"/>
+          <p:cNvSpPr/>
+          <p:nvPr/>
+        </p:nvSpPr>
+        <p:spPr>
+          <a:xfrm>
+            <a:off x="8074152" y="4023360"/>
+            <a:ext cx="2825496" cy="1097280"/>
           </a:xfrm>
           <a:prstGeom prst="rect">
             <a:avLst/>
@@ -6923,7 +7179,7 @@
               <a:buNone/>
             </a:pPr>
             <a:r>
-              <a:rPr lang="en-US" sz="1250" dirty="0">
+              <a:rPr lang="en-US" sz="1550" dirty="0">
                 <a:solidFill>
                   <a:srgbClr val="17364A"/>
                 </a:solidFill>
@@ -6933,7 +7189,7 @@
               </a:rPr>
               <a:t>Connect the concept to public health decisions, safeguards, documentation, or implementation work.</a:t>
             </a:r>
-            <a:endParaRPr lang="en-US" sz="1250" dirty="0"/>
+            <a:endParaRPr lang="en-US" sz="1550" dirty="0"/>
           </a:p>
         </p:txBody>
       </p:sp>
@@ -7130,7 +7386,7 @@
                 <a:ea typeface="Aptos" pitchFamily="34" charset="-122"/>
                 <a:cs typeface="Aptos" pitchFamily="34" charset="-120"/>
               </a:rPr>
-              <a:t>© Paula Soper</a:t>
+              <a:t>Â© Paula Soper</a:t>
             </a:r>
             <a:endParaRPr lang="en-US" sz="800" dirty="0"/>
           </a:p>
@@ -7138,7 +7394,46 @@
       </p:sp>
       <p:sp>
         <p:nvSpPr>
-          <p:cNvPr id="7" name="Shape 5"/>
+          <p:cNvPr id="7" name="Text 5"/>
+          <p:cNvSpPr/>
+          <p:nvPr/>
+        </p:nvSpPr>
+        <p:spPr>
+          <a:xfrm>
+            <a:off x="11137392" y="6510528"/>
+            <a:ext cx="411480" cy="201168"/>
+          </a:xfrm>
+          <a:prstGeom prst="rect">
+            <a:avLst/>
+          </a:prstGeom>
+          <a:noFill/>
+          <a:ln/>
+        </p:spPr>
+        <p:txBody>
+          <a:bodyPr wrap="square" lIns="0" tIns="0" rIns="0" bIns="0" rtlCol="0" anchor="ctr"/>
+          <a:lstStyle/>
+          <a:p>
+            <a:pPr algn="r" indent="0" marL="0">
+              <a:buNone/>
+            </a:pPr>
+            <a:r>
+              <a:rPr lang="en-US" sz="900" dirty="0">
+                <a:solidFill>
+                  <a:srgbClr val="5F7181"/>
+                </a:solidFill>
+                <a:latin typeface="Aptos" pitchFamily="34" charset="0"/>
+                <a:ea typeface="Aptos" pitchFamily="34" charset="-122"/>
+                <a:cs typeface="Aptos" pitchFamily="34" charset="-120"/>
+              </a:rPr>
+              <a:t>17</a:t>
+            </a:r>
+            <a:endParaRPr lang="en-US" sz="900" dirty="0"/>
+          </a:p>
+        </p:txBody>
+      </p:sp>
+      <p:sp>
+        <p:nvSpPr>
+          <p:cNvPr id="8" name="Shape 6"/>
           <p:cNvSpPr/>
           <p:nvPr/>
         </p:nvSpPr>
@@ -7163,7 +7458,7 @@
       </p:sp>
       <p:sp>
         <p:nvSpPr>
-          <p:cNvPr id="8" name="Text 6"/>
+          <p:cNvPr id="9" name="Text 7"/>
           <p:cNvSpPr/>
           <p:nvPr/>
         </p:nvSpPr>
@@ -7202,14 +7497,14 @@
       </p:sp>
       <p:sp>
         <p:nvSpPr>
-          <p:cNvPr id="9" name="Text 7"/>
+          <p:cNvPr id="10" name="Text 8"/>
           <p:cNvSpPr/>
           <p:nvPr/>
         </p:nvSpPr>
         <p:spPr>
           <a:xfrm>
             <a:off x="640080" y="621792"/>
-            <a:ext cx="10881360" cy="566928"/>
+            <a:ext cx="10881360" cy="713232"/>
           </a:xfrm>
           <a:prstGeom prst="rect">
             <a:avLst/>
@@ -7227,7 +7522,7 @@
               <a:buNone/>
             </a:pPr>
             <a:r>
-              <a:rPr lang="en-US" sz="2700" b="1" dirty="0">
+              <a:rPr lang="en-US" sz="3400" b="1" dirty="0">
                 <a:solidFill>
                   <a:srgbClr val="003A63"/>
                 </a:solidFill>
@@ -7237,20 +7532,20 @@
               </a:rPr>
               <a:t>Practical Exercise</a:t>
             </a:r>
-            <a:endParaRPr lang="en-US" sz="2700" dirty="0"/>
-          </a:p>
-        </p:txBody>
-      </p:sp>
-      <p:sp>
-        <p:nvSpPr>
-          <p:cNvPr id="10" name="Text 8"/>
-          <p:cNvSpPr/>
-          <p:nvPr/>
-        </p:nvSpPr>
-        <p:spPr>
-          <a:xfrm>
-            <a:off x="868680" y="1417320"/>
-            <a:ext cx="6675120" cy="4434840"/>
+            <a:endParaRPr lang="en-US" sz="3400" dirty="0"/>
+          </a:p>
+        </p:txBody>
+      </p:sp>
+      <p:sp>
+        <p:nvSpPr>
+          <p:cNvPr id="11" name="Text 9"/>
+          <p:cNvSpPr/>
+          <p:nvPr/>
+        </p:nvSpPr>
+        <p:spPr>
+          <a:xfrm>
+            <a:off x="868680" y="1508760"/>
+            <a:ext cx="6537960" cy="4160520"/>
           </a:xfrm>
           <a:prstGeom prst="rect">
             <a:avLst/>
@@ -7265,7 +7560,7 @@
           <a:lstStyle/>
           <a:p>
             <a:r>
-              <a:rPr lang="en-US" sz="1700" dirty="0">
+              <a:rPr lang="en-US" sz="2100" dirty="0">
                 <a:solidFill>
                   <a:srgbClr val="17364A"/>
                 </a:solidFill>
@@ -7275,11 +7570,11 @@
               </a:rPr>
               <a:t>Create a machine learning use case review worksheet for one public health workflow.</a:t>
             </a:r>
-            <a:endParaRPr lang="en-US" sz="1700" dirty="0"/>
-          </a:p>
-          <a:p>
-            <a:r>
-              <a:rPr lang="en-US" sz="1700" dirty="0">
+            <a:endParaRPr lang="en-US" sz="2100" dirty="0"/>
+          </a:p>
+          <a:p>
+            <a:r>
+              <a:rPr lang="en-US" sz="2100" dirty="0">
                 <a:solidFill>
                   <a:srgbClr val="17364A"/>
                 </a:solidFill>
@@ -7287,13 +7582,13 @@
                 <a:ea typeface="Aptos" pitchFamily="34" charset="-122"/>
                 <a:cs typeface="Aptos" pitchFamily="34" charset="-120"/>
               </a:rPr>
-              <a:t>The worksheet should describe the public health task, intended use, data sources, candidate features, proposed label,.</a:t>
-            </a:r>
-            <a:endParaRPr lang="en-US" sz="1700" dirty="0"/>
-          </a:p>
-          <a:p>
-            <a:r>
-              <a:rPr lang="en-US" sz="1700" dirty="0">
+              <a:t>The worksheet should describe the public health task, intended use, data sources, candidate features,.</a:t>
+            </a:r>
+            <a:endParaRPr lang="en-US" sz="2100" dirty="0"/>
+          </a:p>
+          <a:p>
+            <a:r>
+              <a:rPr lang="en-US" sz="2100" dirty="0">
                 <a:solidFill>
                   <a:srgbClr val="17364A"/>
                 </a:solidFill>
@@ -7303,27 +7598,13 @@
               </a:rPr>
               <a:t>This exercise should produce a governance-ready artifact.</a:t>
             </a:r>
-            <a:endParaRPr lang="en-US" sz="1700" dirty="0"/>
-          </a:p>
-          <a:p>
-            <a:r>
-              <a:rPr lang="en-US" sz="1700" dirty="0">
-                <a:solidFill>
-                  <a:srgbClr val="17364A"/>
-                </a:solidFill>
-                <a:latin typeface="Aptos" pitchFamily="34" charset="0"/>
-                <a:ea typeface="Aptos" pitchFamily="34" charset="-122"/>
-                <a:cs typeface="Aptos" pitchFamily="34" charset="-120"/>
-              </a:rPr>
-              <a:t>Learners should identify at least three reasons the model might fail and at least three safeguards that should be in place.</a:t>
-            </a:r>
-            <a:endParaRPr lang="en-US" sz="1700" dirty="0"/>
-          </a:p>
-        </p:txBody>
-      </p:sp>
-      <p:sp>
-        <p:nvSpPr>
-          <p:cNvPr id="11" name="Shape 9"/>
+            <a:endParaRPr lang="en-US" sz="2100" dirty="0"/>
+          </a:p>
+        </p:txBody>
+      </p:sp>
+      <p:sp>
+        <p:nvSpPr>
+          <p:cNvPr id="12" name="Shape 10"/>
           <p:cNvSpPr/>
           <p:nvPr/>
         </p:nvSpPr>
@@ -7350,14 +7631,14 @@
       </p:sp>
       <p:sp>
         <p:nvSpPr>
-          <p:cNvPr id="12" name="Text 10"/>
+          <p:cNvPr id="13" name="Text 11"/>
           <p:cNvSpPr/>
           <p:nvPr/>
         </p:nvSpPr>
         <p:spPr>
           <a:xfrm>
             <a:off x="8074152" y="1563624"/>
-            <a:ext cx="2825496" cy="201168"/>
+            <a:ext cx="2825496" cy="256032"/>
           </a:xfrm>
           <a:prstGeom prst="rect">
             <a:avLst/>
@@ -7373,7 +7654,7 @@
               <a:buNone/>
             </a:pPr>
             <a:r>
-              <a:rPr lang="en-US" sz="950" b="1" dirty="0">
+              <a:rPr lang="en-US" sz="1300" b="1" dirty="0">
                 <a:solidFill>
                   <a:srgbClr val="0068B7"/>
                 </a:solidFill>
@@ -7383,20 +7664,20 @@
               </a:rPr>
               <a:t>Key idea</a:t>
             </a:r>
-            <a:endParaRPr lang="en-US" sz="950" dirty="0"/>
-          </a:p>
-        </p:txBody>
-      </p:sp>
-      <p:sp>
-        <p:nvSpPr>
-          <p:cNvPr id="13" name="Text 11"/>
-          <p:cNvSpPr/>
-          <p:nvPr/>
-        </p:nvSpPr>
-        <p:spPr>
-          <a:xfrm>
-            <a:off x="8074152" y="1856232"/>
-            <a:ext cx="2825496" cy="1261872"/>
+            <a:endParaRPr lang="en-US" sz="1300" dirty="0"/>
+          </a:p>
+        </p:txBody>
+      </p:sp>
+      <p:sp>
+        <p:nvSpPr>
+          <p:cNvPr id="14" name="Text 12"/>
+          <p:cNvSpPr/>
+          <p:nvPr/>
+        </p:nvSpPr>
+        <p:spPr>
+          <a:xfrm>
+            <a:off x="8074152" y="1920240"/>
+            <a:ext cx="2825496" cy="1188720"/>
           </a:xfrm>
           <a:prstGeom prst="rect">
             <a:avLst/>
@@ -7414,7 +7695,7 @@
               <a:buNone/>
             </a:pPr>
             <a:r>
-              <a:rPr lang="en-US" sz="1250" dirty="0">
+              <a:rPr lang="en-US" sz="1550" dirty="0">
                 <a:solidFill>
                   <a:srgbClr val="17364A"/>
                 </a:solidFill>
@@ -7424,13 +7705,13 @@
               </a:rPr>
               <a:t>Create a machine learning use case review worksheet for one public health workflow.</a:t>
             </a:r>
-            <a:endParaRPr lang="en-US" sz="1250" dirty="0"/>
-          </a:p>
-        </p:txBody>
-      </p:sp>
-      <p:sp>
-        <p:nvSpPr>
-          <p:cNvPr id="14" name="Shape 12"/>
+            <a:endParaRPr lang="en-US" sz="1550" dirty="0"/>
+          </a:p>
+        </p:txBody>
+      </p:sp>
+      <p:sp>
+        <p:nvSpPr>
+          <p:cNvPr id="15" name="Shape 13"/>
           <p:cNvSpPr/>
           <p:nvPr/>
         </p:nvSpPr>
@@ -7457,14 +7738,14 @@
       </p:sp>
       <p:sp>
         <p:nvSpPr>
-          <p:cNvPr id="15" name="Text 13"/>
+          <p:cNvPr id="16" name="Text 14"/>
           <p:cNvSpPr/>
           <p:nvPr/>
         </p:nvSpPr>
         <p:spPr>
           <a:xfrm>
             <a:off x="8074152" y="3666744"/>
-            <a:ext cx="2825496" cy="201168"/>
+            <a:ext cx="2825496" cy="256032"/>
           </a:xfrm>
           <a:prstGeom prst="rect">
             <a:avLst/>
@@ -7480,7 +7761,7 @@
               <a:buNone/>
             </a:pPr>
             <a:r>
-              <a:rPr lang="en-US" sz="950" b="1" dirty="0">
+              <a:rPr lang="en-US" sz="1300" b="1" dirty="0">
                 <a:solidFill>
                   <a:srgbClr val="0068B7"/>
                 </a:solidFill>
@@ -7490,20 +7771,20 @@
               </a:rPr>
               <a:t>Use this for</a:t>
             </a:r>
-            <a:endParaRPr lang="en-US" sz="950" dirty="0"/>
-          </a:p>
-        </p:txBody>
-      </p:sp>
-      <p:sp>
-        <p:nvSpPr>
-          <p:cNvPr id="16" name="Text 14"/>
-          <p:cNvSpPr/>
-          <p:nvPr/>
-        </p:nvSpPr>
-        <p:spPr>
-          <a:xfrm>
-            <a:off x="8074152" y="3959352"/>
-            <a:ext cx="2825496" cy="1170432"/>
+            <a:endParaRPr lang="en-US" sz="1300" dirty="0"/>
+          </a:p>
+        </p:txBody>
+      </p:sp>
+      <p:sp>
+        <p:nvSpPr>
+          <p:cNvPr id="17" name="Text 15"/>
+          <p:cNvSpPr/>
+          <p:nvPr/>
+        </p:nvSpPr>
+        <p:spPr>
+          <a:xfrm>
+            <a:off x="8074152" y="4023360"/>
+            <a:ext cx="2825496" cy="1097280"/>
           </a:xfrm>
           <a:prstGeom prst="rect">
             <a:avLst/>
@@ -7521,7 +7802,7 @@
               <a:buNone/>
             </a:pPr>
             <a:r>
-              <a:rPr lang="en-US" sz="1250" dirty="0">
+              <a:rPr lang="en-US" sz="1550" dirty="0">
                 <a:solidFill>
                   <a:srgbClr val="17364A"/>
                 </a:solidFill>
@@ -7531,7 +7812,7 @@
               </a:rPr>
               <a:t>Connect the concept to public health decisions, safeguards, documentation, or implementation work.</a:t>
             </a:r>
-            <a:endParaRPr lang="en-US" sz="1250" dirty="0"/>
+            <a:endParaRPr lang="en-US" sz="1550" dirty="0"/>
           </a:p>
         </p:txBody>
       </p:sp>
@@ -7728,7 +8009,7 @@
                 <a:ea typeface="Aptos" pitchFamily="34" charset="-122"/>
                 <a:cs typeface="Aptos" pitchFamily="34" charset="-120"/>
               </a:rPr>
-              <a:t>© Paula Soper</a:t>
+              <a:t>Â© Paula Soper</a:t>
             </a:r>
             <a:endParaRPr lang="en-US" sz="800" dirty="0"/>
           </a:p>
@@ -7736,7 +8017,46 @@
       </p:sp>
       <p:sp>
         <p:nvSpPr>
-          <p:cNvPr id="7" name="Shape 5"/>
+          <p:cNvPr id="7" name="Text 5"/>
+          <p:cNvSpPr/>
+          <p:nvPr/>
+        </p:nvSpPr>
+        <p:spPr>
+          <a:xfrm>
+            <a:off x="11137392" y="6510528"/>
+            <a:ext cx="411480" cy="201168"/>
+          </a:xfrm>
+          <a:prstGeom prst="rect">
+            <a:avLst/>
+          </a:prstGeom>
+          <a:noFill/>
+          <a:ln/>
+        </p:spPr>
+        <p:txBody>
+          <a:bodyPr wrap="square" lIns="0" tIns="0" rIns="0" bIns="0" rtlCol="0" anchor="ctr"/>
+          <a:lstStyle/>
+          <a:p>
+            <a:pPr algn="r" indent="0" marL="0">
+              <a:buNone/>
+            </a:pPr>
+            <a:r>
+              <a:rPr lang="en-US" sz="900" dirty="0">
+                <a:solidFill>
+                  <a:srgbClr val="5F7181"/>
+                </a:solidFill>
+                <a:latin typeface="Aptos" pitchFamily="34" charset="0"/>
+                <a:ea typeface="Aptos" pitchFamily="34" charset="-122"/>
+                <a:cs typeface="Aptos" pitchFamily="34" charset="-120"/>
+              </a:rPr>
+              <a:t>18</a:t>
+            </a:r>
+            <a:endParaRPr lang="en-US" sz="900" dirty="0"/>
+          </a:p>
+        </p:txBody>
+      </p:sp>
+      <p:sp>
+        <p:nvSpPr>
+          <p:cNvPr id="8" name="Shape 6"/>
           <p:cNvSpPr/>
           <p:nvPr/>
         </p:nvSpPr>
@@ -7761,7 +8081,7 @@
       </p:sp>
       <p:sp>
         <p:nvSpPr>
-          <p:cNvPr id="8" name="Text 6"/>
+          <p:cNvPr id="9" name="Text 7"/>
           <p:cNvSpPr/>
           <p:nvPr/>
         </p:nvSpPr>
@@ -7800,14 +8120,14 @@
       </p:sp>
       <p:sp>
         <p:nvSpPr>
-          <p:cNvPr id="9" name="Text 7"/>
+          <p:cNvPr id="10" name="Text 8"/>
           <p:cNvSpPr/>
           <p:nvPr/>
         </p:nvSpPr>
         <p:spPr>
           <a:xfrm>
             <a:off x="640080" y="621792"/>
-            <a:ext cx="10881360" cy="566928"/>
+            <a:ext cx="10881360" cy="713232"/>
           </a:xfrm>
           <a:prstGeom prst="rect">
             <a:avLst/>
@@ -7825,7 +8145,7 @@
               <a:buNone/>
             </a:pPr>
             <a:r>
-              <a:rPr lang="en-US" sz="2700" b="1" dirty="0">
+              <a:rPr lang="en-US" sz="3400" b="1" dirty="0">
                 <a:solidFill>
                   <a:srgbClr val="003A63"/>
                 </a:solidFill>
@@ -7835,20 +8155,20 @@
               </a:rPr>
               <a:t>Expected Artifact or Evidence</a:t>
             </a:r>
-            <a:endParaRPr lang="en-US" sz="2700" dirty="0"/>
-          </a:p>
-        </p:txBody>
-      </p:sp>
-      <p:sp>
-        <p:nvSpPr>
-          <p:cNvPr id="10" name="Text 8"/>
-          <p:cNvSpPr/>
-          <p:nvPr/>
-        </p:nvSpPr>
-        <p:spPr>
-          <a:xfrm>
-            <a:off x="868680" y="1417320"/>
-            <a:ext cx="6675120" cy="4434840"/>
+            <a:endParaRPr lang="en-US" sz="3400" dirty="0"/>
+          </a:p>
+        </p:txBody>
+      </p:sp>
+      <p:sp>
+        <p:nvSpPr>
+          <p:cNvPr id="11" name="Text 9"/>
+          <p:cNvSpPr/>
+          <p:nvPr/>
+        </p:nvSpPr>
+        <p:spPr>
+          <a:xfrm>
+            <a:off x="868680" y="1508760"/>
+            <a:ext cx="6537960" cy="4160520"/>
           </a:xfrm>
           <a:prstGeom prst="rect">
             <a:avLst/>
@@ -7863,7 +8183,7 @@
           <a:lstStyle/>
           <a:p>
             <a:r>
-              <a:rPr lang="en-US" sz="1700" dirty="0">
+              <a:rPr lang="en-US" sz="2100" dirty="0">
                 <a:solidFill>
                   <a:srgbClr val="17364A"/>
                 </a:solidFill>
@@ -7873,11 +8193,11 @@
               </a:rPr>
               <a:t>Machine learning use case review worksheet</a:t>
             </a:r>
-            <a:endParaRPr lang="en-US" sz="1700" dirty="0"/>
-          </a:p>
-          <a:p>
-            <a:r>
-              <a:rPr lang="en-US" sz="1700" dirty="0">
+            <a:endParaRPr lang="en-US" sz="2100" dirty="0"/>
+          </a:p>
+          <a:p>
+            <a:r>
+              <a:rPr lang="en-US" sz="2100" dirty="0">
                 <a:solidFill>
                   <a:srgbClr val="17364A"/>
                 </a:solidFill>
@@ -7887,11 +8207,11 @@
               </a:rPr>
               <a:t>Feature and label inventory</a:t>
             </a:r>
-            <a:endParaRPr lang="en-US" sz="1700" dirty="0"/>
-          </a:p>
-          <a:p>
-            <a:r>
-              <a:rPr lang="en-US" sz="1700" dirty="0">
+            <a:endParaRPr lang="en-US" sz="2100" dirty="0"/>
+          </a:p>
+          <a:p>
+            <a:r>
+              <a:rPr lang="en-US" sz="2100" dirty="0">
                 <a:solidFill>
                   <a:srgbClr val="17364A"/>
                 </a:solidFill>
@@ -7901,13 +8221,13 @@
               </a:rPr>
               <a:t>Initial model risk and safeguard list</a:t>
             </a:r>
-            <a:endParaRPr lang="en-US" sz="1700" dirty="0"/>
-          </a:p>
-        </p:txBody>
-      </p:sp>
-      <p:sp>
-        <p:nvSpPr>
-          <p:cNvPr id="11" name="Shape 9"/>
+            <a:endParaRPr lang="en-US" sz="2100" dirty="0"/>
+          </a:p>
+        </p:txBody>
+      </p:sp>
+      <p:sp>
+        <p:nvSpPr>
+          <p:cNvPr id="12" name="Shape 10"/>
           <p:cNvSpPr/>
           <p:nvPr/>
         </p:nvSpPr>
@@ -7934,14 +8254,14 @@
       </p:sp>
       <p:sp>
         <p:nvSpPr>
-          <p:cNvPr id="12" name="Text 10"/>
+          <p:cNvPr id="13" name="Text 11"/>
           <p:cNvSpPr/>
           <p:nvPr/>
         </p:nvSpPr>
         <p:spPr>
           <a:xfrm>
             <a:off x="8074152" y="1563624"/>
-            <a:ext cx="2825496" cy="201168"/>
+            <a:ext cx="2825496" cy="256032"/>
           </a:xfrm>
           <a:prstGeom prst="rect">
             <a:avLst/>
@@ -7957,7 +8277,7 @@
               <a:buNone/>
             </a:pPr>
             <a:r>
-              <a:rPr lang="en-US" sz="950" b="1" dirty="0">
+              <a:rPr lang="en-US" sz="1300" b="1" dirty="0">
                 <a:solidFill>
                   <a:srgbClr val="0068B7"/>
                 </a:solidFill>
@@ -7967,20 +8287,20 @@
               </a:rPr>
               <a:t>Key idea</a:t>
             </a:r>
-            <a:endParaRPr lang="en-US" sz="950" dirty="0"/>
-          </a:p>
-        </p:txBody>
-      </p:sp>
-      <p:sp>
-        <p:nvSpPr>
-          <p:cNvPr id="13" name="Text 11"/>
-          <p:cNvSpPr/>
-          <p:nvPr/>
-        </p:nvSpPr>
-        <p:spPr>
-          <a:xfrm>
-            <a:off x="8074152" y="1856232"/>
-            <a:ext cx="2825496" cy="1261872"/>
+            <a:endParaRPr lang="en-US" sz="1300" dirty="0"/>
+          </a:p>
+        </p:txBody>
+      </p:sp>
+      <p:sp>
+        <p:nvSpPr>
+          <p:cNvPr id="14" name="Text 12"/>
+          <p:cNvSpPr/>
+          <p:nvPr/>
+        </p:nvSpPr>
+        <p:spPr>
+          <a:xfrm>
+            <a:off x="8074152" y="1920240"/>
+            <a:ext cx="2825496" cy="1188720"/>
           </a:xfrm>
           <a:prstGeom prst="rect">
             <a:avLst/>
@@ -7998,7 +8318,7 @@
               <a:buNone/>
             </a:pPr>
             <a:r>
-              <a:rPr lang="en-US" sz="1250" dirty="0">
+              <a:rPr lang="en-US" sz="1550" dirty="0">
                 <a:solidFill>
                   <a:srgbClr val="17364A"/>
                 </a:solidFill>
@@ -8008,13 +8328,13 @@
               </a:rPr>
               <a:t>Machine learning use case review worksheet</a:t>
             </a:r>
-            <a:endParaRPr lang="en-US" sz="1250" dirty="0"/>
-          </a:p>
-        </p:txBody>
-      </p:sp>
-      <p:sp>
-        <p:nvSpPr>
-          <p:cNvPr id="14" name="Shape 12"/>
+            <a:endParaRPr lang="en-US" sz="1550" dirty="0"/>
+          </a:p>
+        </p:txBody>
+      </p:sp>
+      <p:sp>
+        <p:nvSpPr>
+          <p:cNvPr id="15" name="Shape 13"/>
           <p:cNvSpPr/>
           <p:nvPr/>
         </p:nvSpPr>
@@ -8041,14 +8361,14 @@
       </p:sp>
       <p:sp>
         <p:nvSpPr>
-          <p:cNvPr id="15" name="Text 13"/>
+          <p:cNvPr id="16" name="Text 14"/>
           <p:cNvSpPr/>
           <p:nvPr/>
         </p:nvSpPr>
         <p:spPr>
           <a:xfrm>
             <a:off x="8074152" y="3666744"/>
-            <a:ext cx="2825496" cy="201168"/>
+            <a:ext cx="2825496" cy="256032"/>
           </a:xfrm>
           <a:prstGeom prst="rect">
             <a:avLst/>
@@ -8064,7 +8384,7 @@
               <a:buNone/>
             </a:pPr>
             <a:r>
-              <a:rPr lang="en-US" sz="950" b="1" dirty="0">
+              <a:rPr lang="en-US" sz="1300" b="1" dirty="0">
                 <a:solidFill>
                   <a:srgbClr val="0068B7"/>
                 </a:solidFill>
@@ -8074,20 +8394,20 @@
               </a:rPr>
               <a:t>Use this for</a:t>
             </a:r>
-            <a:endParaRPr lang="en-US" sz="950" dirty="0"/>
-          </a:p>
-        </p:txBody>
-      </p:sp>
-      <p:sp>
-        <p:nvSpPr>
-          <p:cNvPr id="16" name="Text 14"/>
-          <p:cNvSpPr/>
-          <p:nvPr/>
-        </p:nvSpPr>
-        <p:spPr>
-          <a:xfrm>
-            <a:off x="8074152" y="3959352"/>
-            <a:ext cx="2825496" cy="1170432"/>
+            <a:endParaRPr lang="en-US" sz="1300" dirty="0"/>
+          </a:p>
+        </p:txBody>
+      </p:sp>
+      <p:sp>
+        <p:nvSpPr>
+          <p:cNvPr id="17" name="Text 15"/>
+          <p:cNvSpPr/>
+          <p:nvPr/>
+        </p:nvSpPr>
+        <p:spPr>
+          <a:xfrm>
+            <a:off x="8074152" y="4023360"/>
+            <a:ext cx="2825496" cy="1097280"/>
           </a:xfrm>
           <a:prstGeom prst="rect">
             <a:avLst/>
@@ -8105,7 +8425,7 @@
               <a:buNone/>
             </a:pPr>
             <a:r>
-              <a:rPr lang="en-US" sz="1250" dirty="0">
+              <a:rPr lang="en-US" sz="1550" dirty="0">
                 <a:solidFill>
                   <a:srgbClr val="17364A"/>
                 </a:solidFill>
@@ -8115,7 +8435,7 @@
               </a:rPr>
               <a:t>Connect the concept to public health decisions, safeguards, documentation, or implementation work.</a:t>
             </a:r>
-            <a:endParaRPr lang="en-US" sz="1250" dirty="0"/>
+            <a:endParaRPr lang="en-US" sz="1550" dirty="0"/>
           </a:p>
         </p:txBody>
       </p:sp>
@@ -8312,7 +8632,7 @@
                 <a:ea typeface="Aptos" pitchFamily="34" charset="-122"/>
                 <a:cs typeface="Aptos" pitchFamily="34" charset="-120"/>
               </a:rPr>
-              <a:t>© Paula Soper</a:t>
+              <a:t>Â© Paula Soper</a:t>
             </a:r>
             <a:endParaRPr lang="en-US" sz="800" dirty="0"/>
           </a:p>
@@ -8326,8 +8646,47 @@
         </p:nvSpPr>
         <p:spPr>
           <a:xfrm>
+            <a:off x="11137392" y="6510528"/>
+            <a:ext cx="411480" cy="201168"/>
+          </a:xfrm>
+          <a:prstGeom prst="rect">
+            <a:avLst/>
+          </a:prstGeom>
+          <a:noFill/>
+          <a:ln/>
+        </p:spPr>
+        <p:txBody>
+          <a:bodyPr wrap="square" lIns="0" tIns="0" rIns="0" bIns="0" rtlCol="0" anchor="ctr"/>
+          <a:lstStyle/>
+          <a:p>
+            <a:pPr algn="r" indent="0" marL="0">
+              <a:buNone/>
+            </a:pPr>
+            <a:r>
+              <a:rPr lang="en-US" sz="900" dirty="0">
+                <a:solidFill>
+                  <a:srgbClr val="5F7181"/>
+                </a:solidFill>
+                <a:latin typeface="Aptos" pitchFamily="34" charset="0"/>
+                <a:ea typeface="Aptos" pitchFamily="34" charset="-122"/>
+                <a:cs typeface="Aptos" pitchFamily="34" charset="-120"/>
+              </a:rPr>
+              <a:t>19</a:t>
+            </a:r>
+            <a:endParaRPr lang="en-US" sz="900" dirty="0"/>
+          </a:p>
+        </p:txBody>
+      </p:sp>
+      <p:sp>
+        <p:nvSpPr>
+          <p:cNvPr id="8" name="Text 6"/>
+          <p:cNvSpPr/>
+          <p:nvPr/>
+        </p:nvSpPr>
+        <p:spPr>
+          <a:xfrm>
             <a:off x="640080" y="658368"/>
-            <a:ext cx="10881360" cy="566928"/>
+            <a:ext cx="10881360" cy="713232"/>
           </a:xfrm>
           <a:prstGeom prst="rect">
             <a:avLst/>
@@ -8345,7 +8704,7 @@
               <a:buNone/>
             </a:pPr>
             <a:r>
-              <a:rPr lang="en-US" sz="2700" b="1" dirty="0">
+              <a:rPr lang="en-US" sz="3400" b="1" dirty="0">
                 <a:solidFill>
                   <a:srgbClr val="003A63"/>
                 </a:solidFill>
@@ -8355,20 +8714,20 @@
               </a:rPr>
               <a:t>Expected Artifact or Evidence Continued</a:t>
             </a:r>
-            <a:endParaRPr lang="en-US" sz="2700" dirty="0"/>
-          </a:p>
-        </p:txBody>
-      </p:sp>
-      <p:sp>
-        <p:nvSpPr>
-          <p:cNvPr id="8" name="Text 6"/>
-          <p:cNvSpPr/>
-          <p:nvPr/>
-        </p:nvSpPr>
-        <p:spPr>
-          <a:xfrm>
-            <a:off x="868680" y="1417320"/>
-            <a:ext cx="6675120" cy="4434840"/>
+            <a:endParaRPr lang="en-US" sz="3400" dirty="0"/>
+          </a:p>
+        </p:txBody>
+      </p:sp>
+      <p:sp>
+        <p:nvSpPr>
+          <p:cNvPr id="9" name="Text 7"/>
+          <p:cNvSpPr/>
+          <p:nvPr/>
+        </p:nvSpPr>
+        <p:spPr>
+          <a:xfrm>
+            <a:off x="868680" y="1508760"/>
+            <a:ext cx="6537960" cy="4160520"/>
           </a:xfrm>
           <a:prstGeom prst="rect">
             <a:avLst/>
@@ -8383,7 +8742,7 @@
           <a:lstStyle/>
           <a:p>
             <a:r>
-              <a:rPr lang="en-US" sz="1700" dirty="0">
+              <a:rPr lang="en-US" sz="2100" dirty="0">
                 <a:solidFill>
                   <a:srgbClr val="17364A"/>
                 </a:solidFill>
@@ -8393,13 +8752,13 @@
               </a:rPr>
               <a:t>Human review and monitoring notes</a:t>
             </a:r>
-            <a:endParaRPr lang="en-US" sz="1700" dirty="0"/>
-          </a:p>
-        </p:txBody>
-      </p:sp>
-      <p:sp>
-        <p:nvSpPr>
-          <p:cNvPr id="9" name="Shape 7"/>
+            <a:endParaRPr lang="en-US" sz="2100" dirty="0"/>
+          </a:p>
+        </p:txBody>
+      </p:sp>
+      <p:sp>
+        <p:nvSpPr>
+          <p:cNvPr id="10" name="Shape 8"/>
           <p:cNvSpPr/>
           <p:nvPr/>
         </p:nvSpPr>
@@ -8426,14 +8785,14 @@
       </p:sp>
       <p:sp>
         <p:nvSpPr>
-          <p:cNvPr id="10" name="Text 8"/>
+          <p:cNvPr id="11" name="Text 9"/>
           <p:cNvSpPr/>
           <p:nvPr/>
         </p:nvSpPr>
         <p:spPr>
           <a:xfrm>
             <a:off x="8074152" y="1563624"/>
-            <a:ext cx="2825496" cy="201168"/>
+            <a:ext cx="2825496" cy="256032"/>
           </a:xfrm>
           <a:prstGeom prst="rect">
             <a:avLst/>
@@ -8449,7 +8808,7 @@
               <a:buNone/>
             </a:pPr>
             <a:r>
-              <a:rPr lang="en-US" sz="950" b="1" dirty="0">
+              <a:rPr lang="en-US" sz="1300" b="1" dirty="0">
                 <a:solidFill>
                   <a:srgbClr val="0068B7"/>
                 </a:solidFill>
@@ -8459,20 +8818,20 @@
               </a:rPr>
               <a:t>Key idea</a:t>
             </a:r>
-            <a:endParaRPr lang="en-US" sz="950" dirty="0"/>
-          </a:p>
-        </p:txBody>
-      </p:sp>
-      <p:sp>
-        <p:nvSpPr>
-          <p:cNvPr id="11" name="Text 9"/>
-          <p:cNvSpPr/>
-          <p:nvPr/>
-        </p:nvSpPr>
-        <p:spPr>
-          <a:xfrm>
-            <a:off x="8074152" y="1856232"/>
-            <a:ext cx="2825496" cy="1261872"/>
+            <a:endParaRPr lang="en-US" sz="1300" dirty="0"/>
+          </a:p>
+        </p:txBody>
+      </p:sp>
+      <p:sp>
+        <p:nvSpPr>
+          <p:cNvPr id="12" name="Text 10"/>
+          <p:cNvSpPr/>
+          <p:nvPr/>
+        </p:nvSpPr>
+        <p:spPr>
+          <a:xfrm>
+            <a:off x="8074152" y="1920240"/>
+            <a:ext cx="2825496" cy="1188720"/>
           </a:xfrm>
           <a:prstGeom prst="rect">
             <a:avLst/>
@@ -8490,7 +8849,7 @@
               <a:buNone/>
             </a:pPr>
             <a:r>
-              <a:rPr lang="en-US" sz="1250" dirty="0">
+              <a:rPr lang="en-US" sz="1550" dirty="0">
                 <a:solidFill>
                   <a:srgbClr val="17364A"/>
                 </a:solidFill>
@@ -8500,13 +8859,13 @@
               </a:rPr>
               <a:t>Human review and monitoring notes</a:t>
             </a:r>
-            <a:endParaRPr lang="en-US" sz="1250" dirty="0"/>
-          </a:p>
-        </p:txBody>
-      </p:sp>
-      <p:sp>
-        <p:nvSpPr>
-          <p:cNvPr id="12" name="Shape 10"/>
+            <a:endParaRPr lang="en-US" sz="1550" dirty="0"/>
+          </a:p>
+        </p:txBody>
+      </p:sp>
+      <p:sp>
+        <p:nvSpPr>
+          <p:cNvPr id="13" name="Shape 11"/>
           <p:cNvSpPr/>
           <p:nvPr/>
         </p:nvSpPr>
@@ -8533,14 +8892,14 @@
       </p:sp>
       <p:sp>
         <p:nvSpPr>
-          <p:cNvPr id="13" name="Text 11"/>
+          <p:cNvPr id="14" name="Text 12"/>
           <p:cNvSpPr/>
           <p:nvPr/>
         </p:nvSpPr>
         <p:spPr>
           <a:xfrm>
             <a:off x="8074152" y="3666744"/>
-            <a:ext cx="2825496" cy="201168"/>
+            <a:ext cx="2825496" cy="256032"/>
           </a:xfrm>
           <a:prstGeom prst="rect">
             <a:avLst/>
@@ -8556,7 +8915,7 @@
               <a:buNone/>
             </a:pPr>
             <a:r>
-              <a:rPr lang="en-US" sz="950" b="1" dirty="0">
+              <a:rPr lang="en-US" sz="1300" b="1" dirty="0">
                 <a:solidFill>
                   <a:srgbClr val="0068B7"/>
                 </a:solidFill>
@@ -8566,20 +8925,20 @@
               </a:rPr>
               <a:t>Use this for</a:t>
             </a:r>
-            <a:endParaRPr lang="en-US" sz="950" dirty="0"/>
-          </a:p>
-        </p:txBody>
-      </p:sp>
-      <p:sp>
-        <p:nvSpPr>
-          <p:cNvPr id="14" name="Text 12"/>
-          <p:cNvSpPr/>
-          <p:nvPr/>
-        </p:nvSpPr>
-        <p:spPr>
-          <a:xfrm>
-            <a:off x="8074152" y="3959352"/>
-            <a:ext cx="2825496" cy="1170432"/>
+            <a:endParaRPr lang="en-US" sz="1300" dirty="0"/>
+          </a:p>
+        </p:txBody>
+      </p:sp>
+      <p:sp>
+        <p:nvSpPr>
+          <p:cNvPr id="15" name="Text 13"/>
+          <p:cNvSpPr/>
+          <p:nvPr/>
+        </p:nvSpPr>
+        <p:spPr>
+          <a:xfrm>
+            <a:off x="8074152" y="4023360"/>
+            <a:ext cx="2825496" cy="1097280"/>
           </a:xfrm>
           <a:prstGeom prst="rect">
             <a:avLst/>
@@ -8597,7 +8956,7 @@
               <a:buNone/>
             </a:pPr>
             <a:r>
-              <a:rPr lang="en-US" sz="1250" dirty="0">
+              <a:rPr lang="en-US" sz="1550" dirty="0">
                 <a:solidFill>
                   <a:srgbClr val="17364A"/>
                 </a:solidFill>
@@ -8607,7 +8966,7 @@
               </a:rPr>
               <a:t>Connect the concept to public health decisions, safeguards, documentation, or implementation work.</a:t>
             </a:r>
-            <a:endParaRPr lang="en-US" sz="1250" dirty="0"/>
+            <a:endParaRPr lang="en-US" sz="1550" dirty="0"/>
           </a:p>
         </p:txBody>
       </p:sp>
@@ -8804,7 +9163,7 @@
                 <a:ea typeface="Aptos" pitchFamily="34" charset="-122"/>
                 <a:cs typeface="Aptos" pitchFamily="34" charset="-120"/>
               </a:rPr>
-              <a:t>© Paula Soper</a:t>
+              <a:t>Â© Paula Soper</a:t>
             </a:r>
             <a:endParaRPr lang="en-US" sz="800" dirty="0"/>
           </a:p>
@@ -8818,8 +9177,47 @@
         </p:nvSpPr>
         <p:spPr>
           <a:xfrm>
+            <a:off x="11137392" y="6510528"/>
+            <a:ext cx="411480" cy="201168"/>
+          </a:xfrm>
+          <a:prstGeom prst="rect">
+            <a:avLst/>
+          </a:prstGeom>
+          <a:noFill/>
+          <a:ln/>
+        </p:spPr>
+        <p:txBody>
+          <a:bodyPr wrap="square" lIns="0" tIns="0" rIns="0" bIns="0" rtlCol="0" anchor="ctr"/>
+          <a:lstStyle/>
+          <a:p>
+            <a:pPr algn="r" indent="0" marL="0">
+              <a:buNone/>
+            </a:pPr>
+            <a:r>
+              <a:rPr lang="en-US" sz="900" dirty="0">
+                <a:solidFill>
+                  <a:srgbClr val="5F7181"/>
+                </a:solidFill>
+                <a:latin typeface="Aptos" pitchFamily="34" charset="0"/>
+                <a:ea typeface="Aptos" pitchFamily="34" charset="-122"/>
+                <a:cs typeface="Aptos" pitchFamily="34" charset="-120"/>
+              </a:rPr>
+              <a:t>2</a:t>
+            </a:r>
+            <a:endParaRPr lang="en-US" sz="900" dirty="0"/>
+          </a:p>
+        </p:txBody>
+      </p:sp>
+      <p:sp>
+        <p:nvSpPr>
+          <p:cNvPr id="8" name="Text 6"/>
+          <p:cNvSpPr/>
+          <p:nvPr/>
+        </p:nvSpPr>
+        <p:spPr>
+          <a:xfrm>
             <a:off x="640080" y="658368"/>
-            <a:ext cx="10881360" cy="566928"/>
+            <a:ext cx="10881360" cy="713232"/>
           </a:xfrm>
           <a:prstGeom prst="rect">
             <a:avLst/>
@@ -8837,7 +9235,7 @@
               <a:buNone/>
             </a:pPr>
             <a:r>
-              <a:rPr lang="en-US" sz="2700" b="1" dirty="0">
+              <a:rPr lang="en-US" sz="3400" b="1" dirty="0">
                 <a:solidFill>
                   <a:srgbClr val="003A63"/>
                 </a:solidFill>
@@ -8847,20 +9245,20 @@
               </a:rPr>
               <a:t>What this module helps you do</a:t>
             </a:r>
-            <a:endParaRPr lang="en-US" sz="2700" dirty="0"/>
-          </a:p>
-        </p:txBody>
-      </p:sp>
-      <p:sp>
-        <p:nvSpPr>
-          <p:cNvPr id="8" name="Text 6"/>
-          <p:cNvSpPr/>
-          <p:nvPr/>
-        </p:nvSpPr>
-        <p:spPr>
-          <a:xfrm>
-            <a:off x="868680" y="1417320"/>
-            <a:ext cx="6675120" cy="3291840"/>
+            <a:endParaRPr lang="en-US" sz="3400" dirty="0"/>
+          </a:p>
+        </p:txBody>
+      </p:sp>
+      <p:sp>
+        <p:nvSpPr>
+          <p:cNvPr id="9" name="Text 7"/>
+          <p:cNvSpPr/>
+          <p:nvPr/>
+        </p:nvSpPr>
+        <p:spPr>
+          <a:xfrm>
+            <a:off x="868680" y="1508760"/>
+            <a:ext cx="6446520" cy="2926080"/>
           </a:xfrm>
           <a:prstGeom prst="rect">
             <a:avLst/>
@@ -8875,7 +9273,7 @@
           <a:lstStyle/>
           <a:p>
             <a:r>
-              <a:rPr lang="en-US" sz="1700" dirty="0">
+              <a:rPr lang="en-US" sz="2100" dirty="0">
                 <a:solidFill>
                   <a:srgbClr val="17364A"/>
                 </a:solidFill>
@@ -8883,13 +9281,13 @@
                 <a:ea typeface="Aptos" pitchFamily="34" charset="-122"/>
                 <a:cs typeface="Aptos" pitchFamily="34" charset="-120"/>
               </a:rPr>
-              <a:t>Machine learning is a set of methods that allow computer systems to identify patterns in data and use those patterns to classify, predict, cluster,.</a:t>
-            </a:r>
-            <a:endParaRPr lang="en-US" sz="1700" dirty="0"/>
-          </a:p>
-          <a:p>
-            <a:r>
-              <a:rPr lang="en-US" sz="1700" dirty="0">
+              <a:t>Machine learning is a set of methods that allow computer systems to identify patterns in data and use those.</a:t>
+            </a:r>
+            <a:endParaRPr lang="en-US" sz="2100" dirty="0"/>
+          </a:p>
+          <a:p>
+            <a:r>
+              <a:rPr lang="en-US" sz="2100" dirty="0">
                 <a:solidFill>
                   <a:srgbClr val="17364A"/>
                 </a:solidFill>
@@ -8897,13 +9295,13 @@
                 <a:ea typeface="Aptos" pitchFamily="34" charset="-122"/>
                 <a:cs typeface="Aptos" pitchFamily="34" charset="-120"/>
               </a:rPr>
-              <a:t>In public health, machine learning may support surveillance triage, outbreak signal review, risk stratification, case classification, anomaly.</a:t>
-            </a:r>
-            <a:endParaRPr lang="en-US" sz="1700" dirty="0"/>
-          </a:p>
-          <a:p>
-            <a:r>
-              <a:rPr lang="en-US" sz="1700" dirty="0">
+              <a:t>In public health, machine learning may support surveillance triage, outbreak signal review, risk stratification,.</a:t>
+            </a:r>
+            <a:endParaRPr lang="en-US" sz="2100" dirty="0"/>
+          </a:p>
+          <a:p>
+            <a:r>
+              <a:rPr lang="en-US" sz="2100" dirty="0">
                 <a:solidFill>
                   <a:srgbClr val="17364A"/>
                 </a:solidFill>
@@ -8913,27 +9311,13 @@
               </a:rPr>
               <a:t>The purpose of this module is not to turn every learner into a data scientist.</a:t>
             </a:r>
-            <a:endParaRPr lang="en-US" sz="1700" dirty="0"/>
-          </a:p>
-          <a:p>
-            <a:r>
-              <a:rPr lang="en-US" sz="1700" dirty="0">
-                <a:solidFill>
-                  <a:srgbClr val="17364A"/>
-                </a:solidFill>
-                <a:latin typeface="Aptos" pitchFamily="34" charset="0"/>
-                <a:ea typeface="Aptos" pitchFamily="34" charset="-122"/>
-                <a:cs typeface="Aptos" pitchFamily="34" charset="-120"/>
-              </a:rPr>
-              <a:t>The purpose is to help public health informaticians, epidemiologists, and technologists understand the concepts needed to evaluate whether a machine.</a:t>
-            </a:r>
-            <a:endParaRPr lang="en-US" sz="1700" dirty="0"/>
-          </a:p>
-        </p:txBody>
-      </p:sp>
-      <p:sp>
-        <p:nvSpPr>
-          <p:cNvPr id="9" name="Shape 7"/>
+            <a:endParaRPr lang="en-US" sz="2100" dirty="0"/>
+          </a:p>
+        </p:txBody>
+      </p:sp>
+      <p:sp>
+        <p:nvSpPr>
+          <p:cNvPr id="10" name="Shape 8"/>
           <p:cNvSpPr/>
           <p:nvPr/>
         </p:nvSpPr>
@@ -8960,14 +9344,14 @@
       </p:sp>
       <p:sp>
         <p:nvSpPr>
-          <p:cNvPr id="10" name="Text 8"/>
+          <p:cNvPr id="11" name="Text 9"/>
           <p:cNvSpPr/>
           <p:nvPr/>
         </p:nvSpPr>
         <p:spPr>
           <a:xfrm>
             <a:off x="8074152" y="1563624"/>
-            <a:ext cx="2825496" cy="201168"/>
+            <a:ext cx="2825496" cy="256032"/>
           </a:xfrm>
           <a:prstGeom prst="rect">
             <a:avLst/>
@@ -8983,7 +9367,7 @@
               <a:buNone/>
             </a:pPr>
             <a:r>
-              <a:rPr lang="en-US" sz="950" b="1" dirty="0">
+              <a:rPr lang="en-US" sz="1300" b="1" dirty="0">
                 <a:solidFill>
                   <a:srgbClr val="0068B7"/>
                 </a:solidFill>
@@ -8993,20 +9377,20 @@
               </a:rPr>
               <a:t>Module details</a:t>
             </a:r>
-            <a:endParaRPr lang="en-US" sz="950" dirty="0"/>
-          </a:p>
-        </p:txBody>
-      </p:sp>
-      <p:sp>
-        <p:nvSpPr>
-          <p:cNvPr id="11" name="Text 9"/>
-          <p:cNvSpPr/>
-          <p:nvPr/>
-        </p:nvSpPr>
-        <p:spPr>
-          <a:xfrm>
-            <a:off x="8074152" y="1856232"/>
-            <a:ext cx="2825496" cy="1353312"/>
+            <a:endParaRPr lang="en-US" sz="1300" dirty="0"/>
+          </a:p>
+        </p:txBody>
+      </p:sp>
+      <p:sp>
+        <p:nvSpPr>
+          <p:cNvPr id="12" name="Text 10"/>
+          <p:cNvSpPr/>
+          <p:nvPr/>
+        </p:nvSpPr>
+        <p:spPr>
+          <a:xfrm>
+            <a:off x="8074152" y="1920240"/>
+            <a:ext cx="2825496" cy="1280160"/>
           </a:xfrm>
           <a:prstGeom prst="rect">
             <a:avLst/>
@@ -9024,7 +9408,7 @@
               <a:buNone/>
             </a:pPr>
             <a:r>
-              <a:rPr lang="en-US" sz="1250" dirty="0">
+              <a:rPr lang="en-US" sz="1550" dirty="0">
                 <a:solidFill>
                   <a:srgbClr val="17364A"/>
                 </a:solidFill>
@@ -9034,14 +9418,14 @@
               </a:rPr>
               <a:t>Level: applied/foundational</a:t>
             </a:r>
-            <a:endParaRPr lang="en-US" sz="1250" dirty="0"/>
+            <a:endParaRPr lang="en-US" sz="1550" dirty="0"/>
           </a:p>
           <a:p>
             <a:pPr indent="0" marL="0">
               <a:buNone/>
             </a:pPr>
             <a:r>
-              <a:rPr lang="en-US" sz="1250" dirty="0">
+              <a:rPr lang="en-US" sz="1550" dirty="0">
                 <a:solidFill>
                   <a:srgbClr val="17364A"/>
                 </a:solidFill>
@@ -9051,14 +9435,14 @@
               </a:rPr>
               <a:t>Primary track: Analytics and Modeling Track</a:t>
             </a:r>
-            <a:endParaRPr lang="en-US" sz="1250" dirty="0"/>
+            <a:endParaRPr lang="en-US" sz="1550" dirty="0"/>
           </a:p>
           <a:p>
             <a:pPr indent="0" marL="0">
               <a:buNone/>
             </a:pPr>
             <a:r>
-              <a:rPr lang="en-US" sz="1250" dirty="0">
+              <a:rPr lang="en-US" sz="1550" dirty="0">
                 <a:solidFill>
                   <a:srgbClr val="17364A"/>
                 </a:solidFill>
@@ -9068,32 +9452,32 @@
               </a:rPr>
               <a:t>Appears in tracks: analytics-modeling</a:t>
             </a:r>
-            <a:endParaRPr lang="en-US" sz="1250" dirty="0"/>
-          </a:p>
-        </p:txBody>
-      </p:sp>
-      <p:sp>
-        <p:nvSpPr>
-          <p:cNvPr id="12" name="Shape 10"/>
-          <p:cNvSpPr/>
-          <p:nvPr/>
-        </p:nvSpPr>
-        <p:spPr>
-          <a:xfrm>
-            <a:off x="7909560" y="3611880"/>
-            <a:ext cx="3154680" cy="1783080"/>
+            <a:endParaRPr lang="en-US" sz="1550" dirty="0"/>
+          </a:p>
+        </p:txBody>
+      </p:sp>
+      <p:sp>
+        <p:nvSpPr>
+          <p:cNvPr id="13" name="Shape 11"/>
+          <p:cNvSpPr/>
+          <p:nvPr/>
+        </p:nvSpPr>
+        <p:spPr>
+          <a:xfrm>
+            <a:off x="7635240" y="3730752"/>
+            <a:ext cx="1033272" cy="749808"/>
           </a:xfrm>
           <a:prstGeom prst="roundRect">
             <a:avLst>
-              <a:gd name="adj" fmla="val 6154"/>
+              <a:gd name="adj" fmla="val 14634"/>
             </a:avLst>
           </a:prstGeom>
           <a:solidFill>
-            <a:srgbClr val="EEF8ED"/>
+            <a:srgbClr val="0068B7"/>
           </a:solidFill>
           <a:ln w="12700">
             <a:solidFill>
-              <a:srgbClr val="B9D7E6"/>
+              <a:srgbClr val="0068B7"/>
             </a:solidFill>
             <a:prstDash val="solid"/>
           </a:ln>
@@ -9101,81 +9485,256 @@
       </p:sp>
       <p:sp>
         <p:nvSpPr>
-          <p:cNvPr id="13" name="Text 11"/>
-          <p:cNvSpPr/>
-          <p:nvPr/>
-        </p:nvSpPr>
-        <p:spPr>
-          <a:xfrm>
-            <a:off x="8074152" y="3758184"/>
-            <a:ext cx="2825496" cy="201168"/>
-          </a:xfrm>
-          <a:prstGeom prst="rect">
-            <a:avLst/>
-          </a:prstGeom>
-          <a:noFill/>
-          <a:ln/>
-        </p:spPr>
-        <p:txBody>
-          <a:bodyPr wrap="square" lIns="0" tIns="0" rIns="0" bIns="0" rtlCol="0" anchor="ctr"/>
-          <a:lstStyle/>
-          <a:p>
-            <a:pPr indent="0" marL="0">
-              <a:buNone/>
-            </a:pPr>
-            <a:r>
-              <a:rPr lang="en-US" sz="950" b="1" dirty="0">
-                <a:solidFill>
-                  <a:srgbClr val="0068B7"/>
-                </a:solidFill>
-                <a:latin typeface="Aptos" pitchFamily="34" charset="0"/>
-                <a:ea typeface="Aptos" pitchFamily="34" charset="-122"/>
-                <a:cs typeface="Aptos" pitchFamily="34" charset="-120"/>
-              </a:rPr>
-              <a:t>Learning approach</a:t>
-            </a:r>
-            <a:endParaRPr lang="en-US" sz="950" dirty="0"/>
-          </a:p>
-        </p:txBody>
-      </p:sp>
-      <p:sp>
-        <p:nvSpPr>
           <p:cNvPr id="14" name="Text 12"/>
           <p:cNvSpPr/>
           <p:nvPr/>
         </p:nvSpPr>
         <p:spPr>
           <a:xfrm>
-            <a:off x="8074152" y="4050792"/>
-            <a:ext cx="2825496" cy="1216152"/>
-          </a:xfrm>
-          <a:prstGeom prst="rect">
-            <a:avLst/>
-          </a:prstGeom>
-          <a:noFill/>
-          <a:ln/>
-        </p:spPr>
-        <p:txBody>
-          <a:bodyPr wrap="square" lIns="0" tIns="0" rIns="0" bIns="0" rtlCol="0" anchor="t">
+            <a:off x="7708392" y="3922776"/>
+            <a:ext cx="886968" cy="310896"/>
+          </a:xfrm>
+          <a:prstGeom prst="rect">
+            <a:avLst/>
+          </a:prstGeom>
+          <a:noFill/>
+          <a:ln/>
+        </p:spPr>
+        <p:txBody>
+          <a:bodyPr wrap="square" lIns="0" tIns="0" rIns="0" bIns="0" rtlCol="0" anchor="ctr">
             <a:normAutofit/>
           </a:bodyPr>
           <a:lstStyle/>
           <a:p>
-            <a:pPr indent="0" marL="0">
-              <a:buNone/>
-            </a:pPr>
-            <a:r>
-              <a:rPr lang="en-US" sz="1250" dirty="0">
-                <a:solidFill>
-                  <a:srgbClr val="17364A"/>
-                </a:solidFill>
-                <a:latin typeface="Aptos" pitchFamily="34" charset="0"/>
-                <a:ea typeface="Aptos" pitchFamily="34" charset="-122"/>
-                <a:cs typeface="Aptos" pitchFamily="34" charset="-120"/>
-              </a:rPr>
-              <a:t>Review the core ideas, complete the practical exercise, check your understanding, and use the related plays and tools to apply the lesson.</a:t>
-            </a:r>
-            <a:endParaRPr lang="en-US" sz="1250" dirty="0"/>
+            <a:pPr algn="ctr" indent="0" marL="0">
+              <a:buNone/>
+            </a:pPr>
+            <a:r>
+              <a:rPr lang="en-US" sz="1500" b="1" dirty="0">
+                <a:solidFill>
+                  <a:srgbClr val="FFFFFF"/>
+                </a:solidFill>
+                <a:latin typeface="Aptos" pitchFamily="34" charset="0"/>
+                <a:ea typeface="Aptos" pitchFamily="34" charset="-122"/>
+                <a:cs typeface="Aptos" pitchFamily="34" charset="-120"/>
+              </a:rPr>
+              <a:t>Learn</a:t>
+            </a:r>
+            <a:endParaRPr lang="en-US" sz="1500" dirty="0"/>
+          </a:p>
+        </p:txBody>
+      </p:sp>
+      <p:sp>
+        <p:nvSpPr>
+          <p:cNvPr id="15" name="Text 13"/>
+          <p:cNvSpPr/>
+          <p:nvPr/>
+        </p:nvSpPr>
+        <p:spPr>
+          <a:xfrm>
+            <a:off x="8695944" y="3941064"/>
+            <a:ext cx="201168" cy="256032"/>
+          </a:xfrm>
+          <a:prstGeom prst="rect">
+            <a:avLst/>
+          </a:prstGeom>
+          <a:noFill/>
+          <a:ln/>
+        </p:spPr>
+        <p:txBody>
+          <a:bodyPr wrap="square" lIns="0" tIns="0" rIns="0" bIns="0" rtlCol="0" anchor="ctr"/>
+          <a:lstStyle/>
+          <a:p>
+            <a:pPr algn="ctr" indent="0" marL="0">
+              <a:buNone/>
+            </a:pPr>
+            <a:r>
+              <a:rPr lang="en-US" sz="1800" b="1" dirty="0">
+                <a:solidFill>
+                  <a:srgbClr val="0068B7"/>
+                </a:solidFill>
+                <a:latin typeface="Aptos" pitchFamily="34" charset="0"/>
+                <a:ea typeface="Aptos" pitchFamily="34" charset="-122"/>
+                <a:cs typeface="Aptos" pitchFamily="34" charset="-120"/>
+              </a:rPr>
+              <a:t>â†’</a:t>
+            </a:r>
+            <a:endParaRPr lang="en-US" sz="1800" dirty="0"/>
+          </a:p>
+        </p:txBody>
+      </p:sp>
+      <p:sp>
+        <p:nvSpPr>
+          <p:cNvPr id="16" name="Shape 14"/>
+          <p:cNvSpPr/>
+          <p:nvPr/>
+        </p:nvSpPr>
+        <p:spPr>
+          <a:xfrm>
+            <a:off x="8924544" y="3730752"/>
+            <a:ext cx="1033272" cy="749808"/>
+          </a:xfrm>
+          <a:prstGeom prst="roundRect">
+            <a:avLst>
+              <a:gd name="adj" fmla="val 14634"/>
+            </a:avLst>
+          </a:prstGeom>
+          <a:solidFill>
+            <a:srgbClr val="2F8A28"/>
+          </a:solidFill>
+          <a:ln w="12700">
+            <a:solidFill>
+              <a:srgbClr val="2F8A28"/>
+            </a:solidFill>
+            <a:prstDash val="solid"/>
+          </a:ln>
+        </p:spPr>
+      </p:sp>
+      <p:sp>
+        <p:nvSpPr>
+          <p:cNvPr id="17" name="Text 15"/>
+          <p:cNvSpPr/>
+          <p:nvPr/>
+        </p:nvSpPr>
+        <p:spPr>
+          <a:xfrm>
+            <a:off x="8997696" y="3922776"/>
+            <a:ext cx="886968" cy="310896"/>
+          </a:xfrm>
+          <a:prstGeom prst="rect">
+            <a:avLst/>
+          </a:prstGeom>
+          <a:noFill/>
+          <a:ln/>
+        </p:spPr>
+        <p:txBody>
+          <a:bodyPr wrap="square" lIns="0" tIns="0" rIns="0" bIns="0" rtlCol="0" anchor="ctr">
+            <a:normAutofit/>
+          </a:bodyPr>
+          <a:lstStyle/>
+          <a:p>
+            <a:pPr algn="ctr" indent="0" marL="0">
+              <a:buNone/>
+            </a:pPr>
+            <a:r>
+              <a:rPr lang="en-US" sz="1500" b="1" dirty="0">
+                <a:solidFill>
+                  <a:srgbClr val="FFFFFF"/>
+                </a:solidFill>
+                <a:latin typeface="Aptos" pitchFamily="34" charset="0"/>
+                <a:ea typeface="Aptos" pitchFamily="34" charset="-122"/>
+                <a:cs typeface="Aptos" pitchFamily="34" charset="-120"/>
+              </a:rPr>
+              <a:t>Apply</a:t>
+            </a:r>
+            <a:endParaRPr lang="en-US" sz="1500" dirty="0"/>
+          </a:p>
+        </p:txBody>
+      </p:sp>
+      <p:sp>
+        <p:nvSpPr>
+          <p:cNvPr id="18" name="Text 16"/>
+          <p:cNvSpPr/>
+          <p:nvPr/>
+        </p:nvSpPr>
+        <p:spPr>
+          <a:xfrm>
+            <a:off x="9985248" y="3941064"/>
+            <a:ext cx="201168" cy="256032"/>
+          </a:xfrm>
+          <a:prstGeom prst="rect">
+            <a:avLst/>
+          </a:prstGeom>
+          <a:noFill/>
+          <a:ln/>
+        </p:spPr>
+        <p:txBody>
+          <a:bodyPr wrap="square" lIns="0" tIns="0" rIns="0" bIns="0" rtlCol="0" anchor="ctr"/>
+          <a:lstStyle/>
+          <a:p>
+            <a:pPr algn="ctr" indent="0" marL="0">
+              <a:buNone/>
+            </a:pPr>
+            <a:r>
+              <a:rPr lang="en-US" sz="1800" b="1" dirty="0">
+                <a:solidFill>
+                  <a:srgbClr val="0068B7"/>
+                </a:solidFill>
+                <a:latin typeface="Aptos" pitchFamily="34" charset="0"/>
+                <a:ea typeface="Aptos" pitchFamily="34" charset="-122"/>
+                <a:cs typeface="Aptos" pitchFamily="34" charset="-120"/>
+              </a:rPr>
+              <a:t>â†’</a:t>
+            </a:r>
+            <a:endParaRPr lang="en-US" sz="1800" dirty="0"/>
+          </a:p>
+        </p:txBody>
+      </p:sp>
+      <p:sp>
+        <p:nvSpPr>
+          <p:cNvPr id="19" name="Shape 17"/>
+          <p:cNvSpPr/>
+          <p:nvPr/>
+        </p:nvSpPr>
+        <p:spPr>
+          <a:xfrm>
+            <a:off x="10213848" y="3730752"/>
+            <a:ext cx="1033272" cy="749808"/>
+          </a:xfrm>
+          <a:prstGeom prst="roundRect">
+            <a:avLst>
+              <a:gd name="adj" fmla="val 14634"/>
+            </a:avLst>
+          </a:prstGeom>
+          <a:solidFill>
+            <a:srgbClr val="6A4CA3"/>
+          </a:solidFill>
+          <a:ln w="12700">
+            <a:solidFill>
+              <a:srgbClr val="6A4CA3"/>
+            </a:solidFill>
+            <a:prstDash val="solid"/>
+          </a:ln>
+        </p:spPr>
+      </p:sp>
+      <p:sp>
+        <p:nvSpPr>
+          <p:cNvPr id="20" name="Text 18"/>
+          <p:cNvSpPr/>
+          <p:nvPr/>
+        </p:nvSpPr>
+        <p:spPr>
+          <a:xfrm>
+            <a:off x="10287000" y="3922776"/>
+            <a:ext cx="886968" cy="310896"/>
+          </a:xfrm>
+          <a:prstGeom prst="rect">
+            <a:avLst/>
+          </a:prstGeom>
+          <a:noFill/>
+          <a:ln/>
+        </p:spPr>
+        <p:txBody>
+          <a:bodyPr wrap="square" lIns="0" tIns="0" rIns="0" bIns="0" rtlCol="0" anchor="ctr">
+            <a:normAutofit/>
+          </a:bodyPr>
+          <a:lstStyle/>
+          <a:p>
+            <a:pPr algn="ctr" indent="0" marL="0">
+              <a:buNone/>
+            </a:pPr>
+            <a:r>
+              <a:rPr lang="en-US" sz="1500" b="1" dirty="0">
+                <a:solidFill>
+                  <a:srgbClr val="FFFFFF"/>
+                </a:solidFill>
+                <a:latin typeface="Aptos" pitchFamily="34" charset="0"/>
+                <a:ea typeface="Aptos" pitchFamily="34" charset="-122"/>
+                <a:cs typeface="Aptos" pitchFamily="34" charset="-120"/>
+              </a:rPr>
+              <a:t>Document</a:t>
+            </a:r>
+            <a:endParaRPr lang="en-US" sz="1500" dirty="0"/>
           </a:p>
         </p:txBody>
       </p:sp>
@@ -9372,7 +9931,7 @@
                 <a:ea typeface="Aptos" pitchFamily="34" charset="-122"/>
                 <a:cs typeface="Aptos" pitchFamily="34" charset="-120"/>
               </a:rPr>
-              <a:t>© Paula Soper</a:t>
+              <a:t>Â© Paula Soper</a:t>
             </a:r>
             <a:endParaRPr lang="en-US" sz="800" dirty="0"/>
           </a:p>
@@ -9380,7 +9939,46 @@
       </p:sp>
       <p:sp>
         <p:nvSpPr>
-          <p:cNvPr id="7" name="Shape 5"/>
+          <p:cNvPr id="7" name="Text 5"/>
+          <p:cNvSpPr/>
+          <p:nvPr/>
+        </p:nvSpPr>
+        <p:spPr>
+          <a:xfrm>
+            <a:off x="11137392" y="6510528"/>
+            <a:ext cx="411480" cy="201168"/>
+          </a:xfrm>
+          <a:prstGeom prst="rect">
+            <a:avLst/>
+          </a:prstGeom>
+          <a:noFill/>
+          <a:ln/>
+        </p:spPr>
+        <p:txBody>
+          <a:bodyPr wrap="square" lIns="0" tIns="0" rIns="0" bIns="0" rtlCol="0" anchor="ctr"/>
+          <a:lstStyle/>
+          <a:p>
+            <a:pPr algn="r" indent="0" marL="0">
+              <a:buNone/>
+            </a:pPr>
+            <a:r>
+              <a:rPr lang="en-US" sz="900" dirty="0">
+                <a:solidFill>
+                  <a:srgbClr val="5F7181"/>
+                </a:solidFill>
+                <a:latin typeface="Aptos" pitchFamily="34" charset="0"/>
+                <a:ea typeface="Aptos" pitchFamily="34" charset="-122"/>
+                <a:cs typeface="Aptos" pitchFamily="34" charset="-120"/>
+              </a:rPr>
+              <a:t>20</a:t>
+            </a:r>
+            <a:endParaRPr lang="en-US" sz="900" dirty="0"/>
+          </a:p>
+        </p:txBody>
+      </p:sp>
+      <p:sp>
+        <p:nvSpPr>
+          <p:cNvPr id="8" name="Shape 6"/>
           <p:cNvSpPr/>
           <p:nvPr/>
         </p:nvSpPr>
@@ -9405,7 +10003,7 @@
       </p:sp>
       <p:sp>
         <p:nvSpPr>
-          <p:cNvPr id="8" name="Text 6"/>
+          <p:cNvPr id="9" name="Text 7"/>
           <p:cNvSpPr/>
           <p:nvPr/>
         </p:nvSpPr>
@@ -9444,14 +10042,14 @@
       </p:sp>
       <p:sp>
         <p:nvSpPr>
-          <p:cNvPr id="9" name="Text 7"/>
+          <p:cNvPr id="10" name="Text 8"/>
           <p:cNvSpPr/>
           <p:nvPr/>
         </p:nvSpPr>
         <p:spPr>
           <a:xfrm>
             <a:off x="640080" y="621792"/>
-            <a:ext cx="10881360" cy="566928"/>
+            <a:ext cx="10881360" cy="713232"/>
           </a:xfrm>
           <a:prstGeom prst="rect">
             <a:avLst/>
@@ -9469,7 +10067,7 @@
               <a:buNone/>
             </a:pPr>
             <a:r>
-              <a:rPr lang="en-US" sz="2700" b="1" dirty="0">
+              <a:rPr lang="en-US" sz="3400" b="1" dirty="0">
                 <a:solidFill>
                   <a:srgbClr val="003A63"/>
                 </a:solidFill>
@@ -9479,20 +10077,20 @@
               </a:rPr>
               <a:t>Expected Assignment</a:t>
             </a:r>
-            <a:endParaRPr lang="en-US" sz="2700" dirty="0"/>
-          </a:p>
-        </p:txBody>
-      </p:sp>
-      <p:sp>
-        <p:nvSpPr>
-          <p:cNvPr id="10" name="Text 8"/>
-          <p:cNvSpPr/>
-          <p:nvPr/>
-        </p:nvSpPr>
-        <p:spPr>
-          <a:xfrm>
-            <a:off x="868680" y="1417320"/>
-            <a:ext cx="6675120" cy="4434840"/>
+            <a:endParaRPr lang="en-US" sz="3400" dirty="0"/>
+          </a:p>
+        </p:txBody>
+      </p:sp>
+      <p:sp>
+        <p:nvSpPr>
+          <p:cNvPr id="11" name="Text 9"/>
+          <p:cNvSpPr/>
+          <p:nvPr/>
+        </p:nvSpPr>
+        <p:spPr>
+          <a:xfrm>
+            <a:off x="868680" y="1508760"/>
+            <a:ext cx="6537960" cy="4160520"/>
           </a:xfrm>
           <a:prstGeom prst="rect">
             <a:avLst/>
@@ -9507,7 +10105,7 @@
           <a:lstStyle/>
           <a:p>
             <a:r>
-              <a:rPr lang="en-US" sz="1700" dirty="0">
+              <a:rPr lang="en-US" sz="2100" dirty="0">
                 <a:solidFill>
                   <a:srgbClr val="17364A"/>
                 </a:solidFill>
@@ -9517,11 +10115,11 @@
               </a:rPr>
               <a:t>Machine learning use case review worksheet</a:t>
             </a:r>
-            <a:endParaRPr lang="en-US" sz="1700" dirty="0"/>
-          </a:p>
-          <a:p>
-            <a:r>
-              <a:rPr lang="en-US" sz="1700" dirty="0">
+            <a:endParaRPr lang="en-US" sz="2100" dirty="0"/>
+          </a:p>
+          <a:p>
+            <a:r>
+              <a:rPr lang="en-US" sz="2100" dirty="0">
                 <a:solidFill>
                   <a:srgbClr val="17364A"/>
                 </a:solidFill>
@@ -9531,11 +10129,11 @@
               </a:rPr>
               <a:t>Feature and label inventory</a:t>
             </a:r>
-            <a:endParaRPr lang="en-US" sz="1700" dirty="0"/>
-          </a:p>
-          <a:p>
-            <a:r>
-              <a:rPr lang="en-US" sz="1700" dirty="0">
+            <a:endParaRPr lang="en-US" sz="2100" dirty="0"/>
+          </a:p>
+          <a:p>
+            <a:r>
+              <a:rPr lang="en-US" sz="2100" dirty="0">
                 <a:solidFill>
                   <a:srgbClr val="17364A"/>
                 </a:solidFill>
@@ -9545,27 +10143,13 @@
               </a:rPr>
               <a:t>Initial model risk and safeguard list</a:t>
             </a:r>
-            <a:endParaRPr lang="en-US" sz="1700" dirty="0"/>
-          </a:p>
-          <a:p>
-            <a:r>
-              <a:rPr lang="en-US" sz="1700" dirty="0">
-                <a:solidFill>
-                  <a:srgbClr val="17364A"/>
-                </a:solidFill>
-                <a:latin typeface="Aptos" pitchFamily="34" charset="0"/>
-                <a:ea typeface="Aptos" pitchFamily="34" charset="-122"/>
-                <a:cs typeface="Aptos" pitchFamily="34" charset="-120"/>
-              </a:rPr>
-              <a:t>Human review and monitoring notes</a:t>
-            </a:r>
-            <a:endParaRPr lang="en-US" sz="1700" dirty="0"/>
-          </a:p>
-        </p:txBody>
-      </p:sp>
-      <p:sp>
-        <p:nvSpPr>
-          <p:cNvPr id="11" name="Shape 9"/>
+            <a:endParaRPr lang="en-US" sz="2100" dirty="0"/>
+          </a:p>
+        </p:txBody>
+      </p:sp>
+      <p:sp>
+        <p:nvSpPr>
+          <p:cNvPr id="12" name="Shape 10"/>
           <p:cNvSpPr/>
           <p:nvPr/>
         </p:nvSpPr>
@@ -9592,14 +10176,14 @@
       </p:sp>
       <p:sp>
         <p:nvSpPr>
-          <p:cNvPr id="12" name="Text 10"/>
+          <p:cNvPr id="13" name="Text 11"/>
           <p:cNvSpPr/>
           <p:nvPr/>
         </p:nvSpPr>
         <p:spPr>
           <a:xfrm>
             <a:off x="8074152" y="1563624"/>
-            <a:ext cx="2825496" cy="201168"/>
+            <a:ext cx="2825496" cy="256032"/>
           </a:xfrm>
           <a:prstGeom prst="rect">
             <a:avLst/>
@@ -9615,7 +10199,7 @@
               <a:buNone/>
             </a:pPr>
             <a:r>
-              <a:rPr lang="en-US" sz="950" b="1" dirty="0">
+              <a:rPr lang="en-US" sz="1300" b="1" dirty="0">
                 <a:solidFill>
                   <a:srgbClr val="0068B7"/>
                 </a:solidFill>
@@ -9625,20 +10209,20 @@
               </a:rPr>
               <a:t>Key idea</a:t>
             </a:r>
-            <a:endParaRPr lang="en-US" sz="950" dirty="0"/>
-          </a:p>
-        </p:txBody>
-      </p:sp>
-      <p:sp>
-        <p:nvSpPr>
-          <p:cNvPr id="13" name="Text 11"/>
-          <p:cNvSpPr/>
-          <p:nvPr/>
-        </p:nvSpPr>
-        <p:spPr>
-          <a:xfrm>
-            <a:off x="8074152" y="1856232"/>
-            <a:ext cx="2825496" cy="1261872"/>
+            <a:endParaRPr lang="en-US" sz="1300" dirty="0"/>
+          </a:p>
+        </p:txBody>
+      </p:sp>
+      <p:sp>
+        <p:nvSpPr>
+          <p:cNvPr id="14" name="Text 12"/>
+          <p:cNvSpPr/>
+          <p:nvPr/>
+        </p:nvSpPr>
+        <p:spPr>
+          <a:xfrm>
+            <a:off x="8074152" y="1920240"/>
+            <a:ext cx="2825496" cy="1188720"/>
           </a:xfrm>
           <a:prstGeom prst="rect">
             <a:avLst/>
@@ -9656,7 +10240,7 @@
               <a:buNone/>
             </a:pPr>
             <a:r>
-              <a:rPr lang="en-US" sz="1250" dirty="0">
+              <a:rPr lang="en-US" sz="1550" dirty="0">
                 <a:solidFill>
                   <a:srgbClr val="17364A"/>
                 </a:solidFill>
@@ -9666,13 +10250,13 @@
               </a:rPr>
               <a:t>Machine learning use case review worksheet</a:t>
             </a:r>
-            <a:endParaRPr lang="en-US" sz="1250" dirty="0"/>
-          </a:p>
-        </p:txBody>
-      </p:sp>
-      <p:sp>
-        <p:nvSpPr>
-          <p:cNvPr id="14" name="Shape 12"/>
+            <a:endParaRPr lang="en-US" sz="1550" dirty="0"/>
+          </a:p>
+        </p:txBody>
+      </p:sp>
+      <p:sp>
+        <p:nvSpPr>
+          <p:cNvPr id="15" name="Shape 13"/>
           <p:cNvSpPr/>
           <p:nvPr/>
         </p:nvSpPr>
@@ -9699,14 +10283,14 @@
       </p:sp>
       <p:sp>
         <p:nvSpPr>
-          <p:cNvPr id="15" name="Text 13"/>
+          <p:cNvPr id="16" name="Text 14"/>
           <p:cNvSpPr/>
           <p:nvPr/>
         </p:nvSpPr>
         <p:spPr>
           <a:xfrm>
             <a:off x="8074152" y="3666744"/>
-            <a:ext cx="2825496" cy="201168"/>
+            <a:ext cx="2825496" cy="256032"/>
           </a:xfrm>
           <a:prstGeom prst="rect">
             <a:avLst/>
@@ -9722,7 +10306,7 @@
               <a:buNone/>
             </a:pPr>
             <a:r>
-              <a:rPr lang="en-US" sz="950" b="1" dirty="0">
+              <a:rPr lang="en-US" sz="1300" b="1" dirty="0">
                 <a:solidFill>
                   <a:srgbClr val="0068B7"/>
                 </a:solidFill>
@@ -9732,20 +10316,20 @@
               </a:rPr>
               <a:t>Use this for</a:t>
             </a:r>
-            <a:endParaRPr lang="en-US" sz="950" dirty="0"/>
-          </a:p>
-        </p:txBody>
-      </p:sp>
-      <p:sp>
-        <p:nvSpPr>
-          <p:cNvPr id="16" name="Text 14"/>
-          <p:cNvSpPr/>
-          <p:nvPr/>
-        </p:nvSpPr>
-        <p:spPr>
-          <a:xfrm>
-            <a:off x="8074152" y="3959352"/>
-            <a:ext cx="2825496" cy="1170432"/>
+            <a:endParaRPr lang="en-US" sz="1300" dirty="0"/>
+          </a:p>
+        </p:txBody>
+      </p:sp>
+      <p:sp>
+        <p:nvSpPr>
+          <p:cNvPr id="17" name="Text 15"/>
+          <p:cNvSpPr/>
+          <p:nvPr/>
+        </p:nvSpPr>
+        <p:spPr>
+          <a:xfrm>
+            <a:off x="8074152" y="4023360"/>
+            <a:ext cx="2825496" cy="1097280"/>
           </a:xfrm>
           <a:prstGeom prst="rect">
             <a:avLst/>
@@ -9763,7 +10347,7 @@
               <a:buNone/>
             </a:pPr>
             <a:r>
-              <a:rPr lang="en-US" sz="1250" dirty="0">
+              <a:rPr lang="en-US" sz="1550" dirty="0">
                 <a:solidFill>
                   <a:srgbClr val="17364A"/>
                 </a:solidFill>
@@ -9773,7 +10357,7 @@
               </a:rPr>
               <a:t>Connect the concept to public health decisions, safeguards, documentation, or implementation work.</a:t>
             </a:r>
-            <a:endParaRPr lang="en-US" sz="1250" dirty="0"/>
+            <a:endParaRPr lang="en-US" sz="1550" dirty="0"/>
           </a:p>
         </p:txBody>
       </p:sp>
@@ -9970,7 +10554,7 @@
                 <a:ea typeface="Aptos" pitchFamily="34" charset="-122"/>
                 <a:cs typeface="Aptos" pitchFamily="34" charset="-120"/>
               </a:rPr>
-              <a:t>© Paula Soper</a:t>
+              <a:t>Â© Paula Soper</a:t>
             </a:r>
             <a:endParaRPr lang="en-US" sz="800" dirty="0"/>
           </a:p>
@@ -9978,7 +10562,46 @@
       </p:sp>
       <p:sp>
         <p:nvSpPr>
-          <p:cNvPr id="7" name="Shape 5"/>
+          <p:cNvPr id="7" name="Text 5"/>
+          <p:cNvSpPr/>
+          <p:nvPr/>
+        </p:nvSpPr>
+        <p:spPr>
+          <a:xfrm>
+            <a:off x="11137392" y="6510528"/>
+            <a:ext cx="411480" cy="201168"/>
+          </a:xfrm>
+          <a:prstGeom prst="rect">
+            <a:avLst/>
+          </a:prstGeom>
+          <a:noFill/>
+          <a:ln/>
+        </p:spPr>
+        <p:txBody>
+          <a:bodyPr wrap="square" lIns="0" tIns="0" rIns="0" bIns="0" rtlCol="0" anchor="ctr"/>
+          <a:lstStyle/>
+          <a:p>
+            <a:pPr algn="r" indent="0" marL="0">
+              <a:buNone/>
+            </a:pPr>
+            <a:r>
+              <a:rPr lang="en-US" sz="900" dirty="0">
+                <a:solidFill>
+                  <a:srgbClr val="5F7181"/>
+                </a:solidFill>
+                <a:latin typeface="Aptos" pitchFamily="34" charset="0"/>
+                <a:ea typeface="Aptos" pitchFamily="34" charset="-122"/>
+                <a:cs typeface="Aptos" pitchFamily="34" charset="-120"/>
+              </a:rPr>
+              <a:t>21</a:t>
+            </a:r>
+            <a:endParaRPr lang="en-US" sz="900" dirty="0"/>
+          </a:p>
+        </p:txBody>
+      </p:sp>
+      <p:sp>
+        <p:nvSpPr>
+          <p:cNvPr id="8" name="Shape 6"/>
           <p:cNvSpPr/>
           <p:nvPr/>
         </p:nvSpPr>
@@ -10003,7 +10626,7 @@
       </p:sp>
       <p:sp>
         <p:nvSpPr>
-          <p:cNvPr id="8" name="Text 6"/>
+          <p:cNvPr id="9" name="Text 7"/>
           <p:cNvSpPr/>
           <p:nvPr/>
         </p:nvSpPr>
@@ -10042,14 +10665,14 @@
       </p:sp>
       <p:sp>
         <p:nvSpPr>
-          <p:cNvPr id="9" name="Text 7"/>
+          <p:cNvPr id="10" name="Text 8"/>
           <p:cNvSpPr/>
           <p:nvPr/>
         </p:nvSpPr>
         <p:spPr>
           <a:xfrm>
             <a:off x="640080" y="621792"/>
-            <a:ext cx="10881360" cy="566928"/>
+            <a:ext cx="10881360" cy="713232"/>
           </a:xfrm>
           <a:prstGeom prst="rect">
             <a:avLst/>
@@ -10067,7 +10690,7 @@
               <a:buNone/>
             </a:pPr>
             <a:r>
-              <a:rPr lang="en-US" sz="2700" b="1" dirty="0">
+              <a:rPr lang="en-US" sz="3400" b="1" dirty="0">
                 <a:solidFill>
                   <a:srgbClr val="003A63"/>
                 </a:solidFill>
@@ -10077,20 +10700,20 @@
               </a:rPr>
               <a:t>Knowledge Check</a:t>
             </a:r>
-            <a:endParaRPr lang="en-US" sz="2700" dirty="0"/>
-          </a:p>
-        </p:txBody>
-      </p:sp>
-      <p:sp>
-        <p:nvSpPr>
-          <p:cNvPr id="10" name="Text 8"/>
-          <p:cNvSpPr/>
-          <p:nvPr/>
-        </p:nvSpPr>
-        <p:spPr>
-          <a:xfrm>
-            <a:off x="868680" y="1417320"/>
-            <a:ext cx="6675120" cy="4434840"/>
+            <a:endParaRPr lang="en-US" sz="3400" dirty="0"/>
+          </a:p>
+        </p:txBody>
+      </p:sp>
+      <p:sp>
+        <p:nvSpPr>
+          <p:cNvPr id="11" name="Text 9"/>
+          <p:cNvSpPr/>
+          <p:nvPr/>
+        </p:nvSpPr>
+        <p:spPr>
+          <a:xfrm>
+            <a:off x="868680" y="1508760"/>
+            <a:ext cx="6537960" cy="4160520"/>
           </a:xfrm>
           <a:prstGeom prst="rect">
             <a:avLst/>
@@ -10105,7 +10728,7 @@
           <a:lstStyle/>
           <a:p>
             <a:r>
-              <a:rPr lang="en-US" sz="1700" dirty="0">
+              <a:rPr lang="en-US" sz="2100" dirty="0">
                 <a:solidFill>
                   <a:srgbClr val="17364A"/>
                 </a:solidFill>
@@ -10115,11 +10738,11 @@
               </a:rPr>
               <a:t>1. Which statement best describes supervised learning?</a:t>
             </a:r>
-            <a:endParaRPr lang="en-US" sz="1700" dirty="0"/>
-          </a:p>
-          <a:p>
-            <a:r>
-              <a:rPr lang="en-US" sz="1700" dirty="0">
+            <a:endParaRPr lang="en-US" sz="2100" dirty="0"/>
+          </a:p>
+          <a:p>
+            <a:r>
+              <a:rPr lang="en-US" sz="2100" dirty="0">
                 <a:solidFill>
                   <a:srgbClr val="17364A"/>
                 </a:solidFill>
@@ -10129,11 +10752,11 @@
               </a:rPr>
               <a:t>2. Why can historical labels create risk?</a:t>
             </a:r>
-            <a:endParaRPr lang="en-US" sz="1700" dirty="0"/>
-          </a:p>
-          <a:p>
-            <a:r>
-              <a:rPr lang="en-US" sz="1700" dirty="0">
+            <a:endParaRPr lang="en-US" sz="2100" dirty="0"/>
+          </a:p>
+          <a:p>
+            <a:r>
+              <a:rPr lang="en-US" sz="2100" dirty="0">
                 <a:solidFill>
                   <a:srgbClr val="17364A"/>
                 </a:solidFill>
@@ -10143,27 +10766,13 @@
               </a:rPr>
               <a:t>3. What is overfitting?</a:t>
             </a:r>
-            <a:endParaRPr lang="en-US" sz="1700" dirty="0"/>
-          </a:p>
-          <a:p>
-            <a:r>
-              <a:rPr lang="en-US" sz="1700" dirty="0">
-                <a:solidFill>
-                  <a:srgbClr val="17364A"/>
-                </a:solidFill>
-                <a:latin typeface="Aptos" pitchFamily="34" charset="0"/>
-                <a:ea typeface="Aptos" pitchFamily="34" charset="-122"/>
-                <a:cs typeface="Aptos" pitchFamily="34" charset="-120"/>
-              </a:rPr>
-              <a:t>4. What should determine model thresholds in public health workflows?</a:t>
-            </a:r>
-            <a:endParaRPr lang="en-US" sz="1700" dirty="0"/>
-          </a:p>
-        </p:txBody>
-      </p:sp>
-      <p:sp>
-        <p:nvSpPr>
-          <p:cNvPr id="11" name="Shape 9"/>
+            <a:endParaRPr lang="en-US" sz="2100" dirty="0"/>
+          </a:p>
+        </p:txBody>
+      </p:sp>
+      <p:sp>
+        <p:nvSpPr>
+          <p:cNvPr id="12" name="Shape 10"/>
           <p:cNvSpPr/>
           <p:nvPr/>
         </p:nvSpPr>
@@ -10190,14 +10799,14 @@
       </p:sp>
       <p:sp>
         <p:nvSpPr>
-          <p:cNvPr id="12" name="Text 10"/>
+          <p:cNvPr id="13" name="Text 11"/>
           <p:cNvSpPr/>
           <p:nvPr/>
         </p:nvSpPr>
         <p:spPr>
           <a:xfrm>
             <a:off x="8074152" y="1563624"/>
-            <a:ext cx="2825496" cy="201168"/>
+            <a:ext cx="2825496" cy="256032"/>
           </a:xfrm>
           <a:prstGeom prst="rect">
             <a:avLst/>
@@ -10213,7 +10822,7 @@
               <a:buNone/>
             </a:pPr>
             <a:r>
-              <a:rPr lang="en-US" sz="950" b="1" dirty="0">
+              <a:rPr lang="en-US" sz="1300" b="1" dirty="0">
                 <a:solidFill>
                   <a:srgbClr val="0068B7"/>
                 </a:solidFill>
@@ -10223,20 +10832,20 @@
               </a:rPr>
               <a:t>Key idea</a:t>
             </a:r>
-            <a:endParaRPr lang="en-US" sz="950" dirty="0"/>
-          </a:p>
-        </p:txBody>
-      </p:sp>
-      <p:sp>
-        <p:nvSpPr>
-          <p:cNvPr id="13" name="Text 11"/>
-          <p:cNvSpPr/>
-          <p:nvPr/>
-        </p:nvSpPr>
-        <p:spPr>
-          <a:xfrm>
-            <a:off x="8074152" y="1856232"/>
-            <a:ext cx="2825496" cy="1261872"/>
+            <a:endParaRPr lang="en-US" sz="1300" dirty="0"/>
+          </a:p>
+        </p:txBody>
+      </p:sp>
+      <p:sp>
+        <p:nvSpPr>
+          <p:cNvPr id="14" name="Text 12"/>
+          <p:cNvSpPr/>
+          <p:nvPr/>
+        </p:nvSpPr>
+        <p:spPr>
+          <a:xfrm>
+            <a:off x="8074152" y="1920240"/>
+            <a:ext cx="2825496" cy="1188720"/>
           </a:xfrm>
           <a:prstGeom prst="rect">
             <a:avLst/>
@@ -10254,7 +10863,7 @@
               <a:buNone/>
             </a:pPr>
             <a:r>
-              <a:rPr lang="en-US" sz="1250" dirty="0">
+              <a:rPr lang="en-US" sz="1550" dirty="0">
                 <a:solidFill>
                   <a:srgbClr val="17364A"/>
                 </a:solidFill>
@@ -10264,13 +10873,13 @@
               </a:rPr>
               <a:t>1. Which statement best describes supervised learning?</a:t>
             </a:r>
-            <a:endParaRPr lang="en-US" sz="1250" dirty="0"/>
-          </a:p>
-        </p:txBody>
-      </p:sp>
-      <p:sp>
-        <p:nvSpPr>
-          <p:cNvPr id="14" name="Shape 12"/>
+            <a:endParaRPr lang="en-US" sz="1550" dirty="0"/>
+          </a:p>
+        </p:txBody>
+      </p:sp>
+      <p:sp>
+        <p:nvSpPr>
+          <p:cNvPr id="15" name="Shape 13"/>
           <p:cNvSpPr/>
           <p:nvPr/>
         </p:nvSpPr>
@@ -10297,14 +10906,14 @@
       </p:sp>
       <p:sp>
         <p:nvSpPr>
-          <p:cNvPr id="15" name="Text 13"/>
+          <p:cNvPr id="16" name="Text 14"/>
           <p:cNvSpPr/>
           <p:nvPr/>
         </p:nvSpPr>
         <p:spPr>
           <a:xfrm>
             <a:off x="8074152" y="3666744"/>
-            <a:ext cx="2825496" cy="201168"/>
+            <a:ext cx="2825496" cy="256032"/>
           </a:xfrm>
           <a:prstGeom prst="rect">
             <a:avLst/>
@@ -10320,7 +10929,7 @@
               <a:buNone/>
             </a:pPr>
             <a:r>
-              <a:rPr lang="en-US" sz="950" b="1" dirty="0">
+              <a:rPr lang="en-US" sz="1300" b="1" dirty="0">
                 <a:solidFill>
                   <a:srgbClr val="0068B7"/>
                 </a:solidFill>
@@ -10330,20 +10939,20 @@
               </a:rPr>
               <a:t>Use this for</a:t>
             </a:r>
-            <a:endParaRPr lang="en-US" sz="950" dirty="0"/>
-          </a:p>
-        </p:txBody>
-      </p:sp>
-      <p:sp>
-        <p:nvSpPr>
-          <p:cNvPr id="16" name="Text 14"/>
-          <p:cNvSpPr/>
-          <p:nvPr/>
-        </p:nvSpPr>
-        <p:spPr>
-          <a:xfrm>
-            <a:off x="8074152" y="3959352"/>
-            <a:ext cx="2825496" cy="1170432"/>
+            <a:endParaRPr lang="en-US" sz="1300" dirty="0"/>
+          </a:p>
+        </p:txBody>
+      </p:sp>
+      <p:sp>
+        <p:nvSpPr>
+          <p:cNvPr id="17" name="Text 15"/>
+          <p:cNvSpPr/>
+          <p:nvPr/>
+        </p:nvSpPr>
+        <p:spPr>
+          <a:xfrm>
+            <a:off x="8074152" y="4023360"/>
+            <a:ext cx="2825496" cy="1097280"/>
           </a:xfrm>
           <a:prstGeom prst="rect">
             <a:avLst/>
@@ -10361,7 +10970,7 @@
               <a:buNone/>
             </a:pPr>
             <a:r>
-              <a:rPr lang="en-US" sz="1250" dirty="0">
+              <a:rPr lang="en-US" sz="1550" dirty="0">
                 <a:solidFill>
                   <a:srgbClr val="17364A"/>
                 </a:solidFill>
@@ -10371,7 +10980,7 @@
               </a:rPr>
               <a:t>Connect the concept to public health decisions, safeguards, documentation, or implementation work.</a:t>
             </a:r>
-            <a:endParaRPr lang="en-US" sz="1250" dirty="0"/>
+            <a:endParaRPr lang="en-US" sz="1550" dirty="0"/>
           </a:p>
         </p:txBody>
       </p:sp>
@@ -10568,7 +11177,7 @@
                 <a:ea typeface="Aptos" pitchFamily="34" charset="-122"/>
                 <a:cs typeface="Aptos" pitchFamily="34" charset="-120"/>
               </a:rPr>
-              <a:t>© Paula Soper</a:t>
+              <a:t>Â© Paula Soper</a:t>
             </a:r>
             <a:endParaRPr lang="en-US" sz="800" dirty="0"/>
           </a:p>
@@ -10576,7 +11185,46 @@
       </p:sp>
       <p:sp>
         <p:nvSpPr>
-          <p:cNvPr id="7" name="Shape 5"/>
+          <p:cNvPr id="7" name="Text 5"/>
+          <p:cNvSpPr/>
+          <p:nvPr/>
+        </p:nvSpPr>
+        <p:spPr>
+          <a:xfrm>
+            <a:off x="11137392" y="6510528"/>
+            <a:ext cx="411480" cy="201168"/>
+          </a:xfrm>
+          <a:prstGeom prst="rect">
+            <a:avLst/>
+          </a:prstGeom>
+          <a:noFill/>
+          <a:ln/>
+        </p:spPr>
+        <p:txBody>
+          <a:bodyPr wrap="square" lIns="0" tIns="0" rIns="0" bIns="0" rtlCol="0" anchor="ctr"/>
+          <a:lstStyle/>
+          <a:p>
+            <a:pPr algn="r" indent="0" marL="0">
+              <a:buNone/>
+            </a:pPr>
+            <a:r>
+              <a:rPr lang="en-US" sz="900" dirty="0">
+                <a:solidFill>
+                  <a:srgbClr val="5F7181"/>
+                </a:solidFill>
+                <a:latin typeface="Aptos" pitchFamily="34" charset="0"/>
+                <a:ea typeface="Aptos" pitchFamily="34" charset="-122"/>
+                <a:cs typeface="Aptos" pitchFamily="34" charset="-120"/>
+              </a:rPr>
+              <a:t>22</a:t>
+            </a:r>
+            <a:endParaRPr lang="en-US" sz="900" dirty="0"/>
+          </a:p>
+        </p:txBody>
+      </p:sp>
+      <p:sp>
+        <p:nvSpPr>
+          <p:cNvPr id="8" name="Shape 6"/>
           <p:cNvSpPr/>
           <p:nvPr/>
         </p:nvSpPr>
@@ -10601,7 +11249,7 @@
       </p:sp>
       <p:sp>
         <p:nvSpPr>
-          <p:cNvPr id="8" name="Text 6"/>
+          <p:cNvPr id="9" name="Text 7"/>
           <p:cNvSpPr/>
           <p:nvPr/>
         </p:nvSpPr>
@@ -10640,14 +11288,14 @@
       </p:sp>
       <p:sp>
         <p:nvSpPr>
-          <p:cNvPr id="9" name="Text 7"/>
+          <p:cNvPr id="10" name="Text 8"/>
           <p:cNvSpPr/>
           <p:nvPr/>
         </p:nvSpPr>
         <p:spPr>
           <a:xfrm>
             <a:off x="640080" y="621792"/>
-            <a:ext cx="10881360" cy="566928"/>
+            <a:ext cx="10881360" cy="713232"/>
           </a:xfrm>
           <a:prstGeom prst="rect">
             <a:avLst/>
@@ -10665,7 +11313,7 @@
               <a:buNone/>
             </a:pPr>
             <a:r>
-              <a:rPr lang="en-US" sz="2700" b="1" dirty="0">
+              <a:rPr lang="en-US" sz="3400" b="1" dirty="0">
                 <a:solidFill>
                   <a:srgbClr val="003A63"/>
                 </a:solidFill>
@@ -10675,20 +11323,20 @@
               </a:rPr>
               <a:t>References and Resources</a:t>
             </a:r>
-            <a:endParaRPr lang="en-US" sz="2700" dirty="0"/>
-          </a:p>
-        </p:txBody>
-      </p:sp>
-      <p:sp>
-        <p:nvSpPr>
-          <p:cNvPr id="10" name="Text 8"/>
-          <p:cNvSpPr/>
-          <p:nvPr/>
-        </p:nvSpPr>
-        <p:spPr>
-          <a:xfrm>
-            <a:off x="868680" y="1417320"/>
-            <a:ext cx="6675120" cy="4434840"/>
+            <a:endParaRPr lang="en-US" sz="3400" dirty="0"/>
+          </a:p>
+        </p:txBody>
+      </p:sp>
+      <p:sp>
+        <p:nvSpPr>
+          <p:cNvPr id="11" name="Text 9"/>
+          <p:cNvSpPr/>
+          <p:nvPr/>
+        </p:nvSpPr>
+        <p:spPr>
+          <a:xfrm>
+            <a:off x="868680" y="1508760"/>
+            <a:ext cx="6537960" cy="4160520"/>
           </a:xfrm>
           <a:prstGeom prst="rect">
             <a:avLst/>
@@ -10703,7 +11351,7 @@
           <a:lstStyle/>
           <a:p>
             <a:r>
-              <a:rPr lang="en-US" sz="1700" dirty="0">
+              <a:rPr lang="en-US" sz="2100" dirty="0">
                 <a:solidFill>
                   <a:srgbClr val="17364A"/>
                 </a:solidFill>
@@ -10713,11 +11361,11 @@
               </a:rPr>
               <a:t>CDC Evaluation Framework: https://www.cdc.gov/evaluation/</a:t>
             </a:r>
-            <a:endParaRPr lang="en-US" sz="1700" dirty="0"/>
-          </a:p>
-          <a:p>
-            <a:r>
-              <a:rPr lang="en-US" sz="1700" dirty="0">
+            <a:endParaRPr lang="en-US" sz="2100" dirty="0"/>
+          </a:p>
+          <a:p>
+            <a:r>
+              <a:rPr lang="en-US" sz="2100" dirty="0">
                 <a:solidFill>
                   <a:srgbClr val="17364A"/>
                 </a:solidFill>
@@ -10725,13 +11373,13 @@
                 <a:ea typeface="Aptos" pitchFamily="34" charset="-122"/>
                 <a:cs typeface="Aptos" pitchFamily="34" charset="-120"/>
               </a:rPr>
-              <a:t>NIST Artificial Intelligence Risk Management Framework: https://www.nist.gov/itl/ai-risk-management-framework</a:t>
-            </a:r>
-            <a:endParaRPr lang="en-US" sz="1700" dirty="0"/>
-          </a:p>
-          <a:p>
-            <a:r>
-              <a:rPr lang="en-US" sz="1700" dirty="0">
+              <a:t>NIST Artificial Intelligence Risk Management Framework:.</a:t>
+            </a:r>
+            <a:endParaRPr lang="en-US" sz="2100" dirty="0"/>
+          </a:p>
+          <a:p>
+            <a:r>
+              <a:rPr lang="en-US" sz="2100" dirty="0">
                 <a:solidFill>
                   <a:srgbClr val="17364A"/>
                 </a:solidFill>
@@ -10741,27 +11389,13 @@
               </a:rPr>
               <a:t>NIST AI RMF Generative AI Profile:.</a:t>
             </a:r>
-            <a:endParaRPr lang="en-US" sz="1700" dirty="0"/>
-          </a:p>
-          <a:p>
-            <a:r>
-              <a:rPr lang="en-US" sz="1700" dirty="0">
-                <a:solidFill>
-                  <a:srgbClr val="17364A"/>
-                </a:solidFill>
-                <a:latin typeface="Aptos" pitchFamily="34" charset="0"/>
-                <a:ea typeface="Aptos" pitchFamily="34" charset="-122"/>
-                <a:cs typeface="Aptos" pitchFamily="34" charset="-120"/>
-              </a:rPr>
-              <a:t>CDC Public Health Data Strategy: https://www.cdc.gov/public-health-data-strategy/php/about/index.html</a:t>
-            </a:r>
-            <a:endParaRPr lang="en-US" sz="1700" dirty="0"/>
-          </a:p>
-        </p:txBody>
-      </p:sp>
-      <p:sp>
-        <p:nvSpPr>
-          <p:cNvPr id="11" name="Shape 9"/>
+            <a:endParaRPr lang="en-US" sz="2100" dirty="0"/>
+          </a:p>
+        </p:txBody>
+      </p:sp>
+      <p:sp>
+        <p:nvSpPr>
+          <p:cNvPr id="12" name="Shape 10"/>
           <p:cNvSpPr/>
           <p:nvPr/>
         </p:nvSpPr>
@@ -10788,14 +11422,14 @@
       </p:sp>
       <p:sp>
         <p:nvSpPr>
-          <p:cNvPr id="12" name="Text 10"/>
+          <p:cNvPr id="13" name="Text 11"/>
           <p:cNvSpPr/>
           <p:nvPr/>
         </p:nvSpPr>
         <p:spPr>
           <a:xfrm>
             <a:off x="8074152" y="1563624"/>
-            <a:ext cx="2825496" cy="201168"/>
+            <a:ext cx="2825496" cy="256032"/>
           </a:xfrm>
           <a:prstGeom prst="rect">
             <a:avLst/>
@@ -10811,7 +11445,7 @@
               <a:buNone/>
             </a:pPr>
             <a:r>
-              <a:rPr lang="en-US" sz="950" b="1" dirty="0">
+              <a:rPr lang="en-US" sz="1300" b="1" dirty="0">
                 <a:solidFill>
                   <a:srgbClr val="0068B7"/>
                 </a:solidFill>
@@ -10821,20 +11455,20 @@
               </a:rPr>
               <a:t>Key idea</a:t>
             </a:r>
-            <a:endParaRPr lang="en-US" sz="950" dirty="0"/>
-          </a:p>
-        </p:txBody>
-      </p:sp>
-      <p:sp>
-        <p:nvSpPr>
-          <p:cNvPr id="13" name="Text 11"/>
-          <p:cNvSpPr/>
-          <p:nvPr/>
-        </p:nvSpPr>
-        <p:spPr>
-          <a:xfrm>
-            <a:off x="8074152" y="1856232"/>
-            <a:ext cx="2825496" cy="1261872"/>
+            <a:endParaRPr lang="en-US" sz="1300" dirty="0"/>
+          </a:p>
+        </p:txBody>
+      </p:sp>
+      <p:sp>
+        <p:nvSpPr>
+          <p:cNvPr id="14" name="Text 12"/>
+          <p:cNvSpPr/>
+          <p:nvPr/>
+        </p:nvSpPr>
+        <p:spPr>
+          <a:xfrm>
+            <a:off x="8074152" y="1920240"/>
+            <a:ext cx="2825496" cy="1188720"/>
           </a:xfrm>
           <a:prstGeom prst="rect">
             <a:avLst/>
@@ -10852,7 +11486,7 @@
               <a:buNone/>
             </a:pPr>
             <a:r>
-              <a:rPr lang="en-US" sz="1250" dirty="0">
+              <a:rPr lang="en-US" sz="1550" dirty="0">
                 <a:solidFill>
                   <a:srgbClr val="17364A"/>
                 </a:solidFill>
@@ -10862,13 +11496,13 @@
               </a:rPr>
               <a:t>CDC Evaluation Framework: https://www.cdc.gov/evaluation/</a:t>
             </a:r>
-            <a:endParaRPr lang="en-US" sz="1250" dirty="0"/>
-          </a:p>
-        </p:txBody>
-      </p:sp>
-      <p:sp>
-        <p:nvSpPr>
-          <p:cNvPr id="14" name="Shape 12"/>
+            <a:endParaRPr lang="en-US" sz="1550" dirty="0"/>
+          </a:p>
+        </p:txBody>
+      </p:sp>
+      <p:sp>
+        <p:nvSpPr>
+          <p:cNvPr id="15" name="Shape 13"/>
           <p:cNvSpPr/>
           <p:nvPr/>
         </p:nvSpPr>
@@ -10895,14 +11529,14 @@
       </p:sp>
       <p:sp>
         <p:nvSpPr>
-          <p:cNvPr id="15" name="Text 13"/>
+          <p:cNvPr id="16" name="Text 14"/>
           <p:cNvSpPr/>
           <p:nvPr/>
         </p:nvSpPr>
         <p:spPr>
           <a:xfrm>
             <a:off x="8074152" y="3666744"/>
-            <a:ext cx="2825496" cy="201168"/>
+            <a:ext cx="2825496" cy="256032"/>
           </a:xfrm>
           <a:prstGeom prst="rect">
             <a:avLst/>
@@ -10918,7 +11552,7 @@
               <a:buNone/>
             </a:pPr>
             <a:r>
-              <a:rPr lang="en-US" sz="950" b="1" dirty="0">
+              <a:rPr lang="en-US" sz="1300" b="1" dirty="0">
                 <a:solidFill>
                   <a:srgbClr val="0068B7"/>
                 </a:solidFill>
@@ -10928,20 +11562,20 @@
               </a:rPr>
               <a:t>Use this for</a:t>
             </a:r>
-            <a:endParaRPr lang="en-US" sz="950" dirty="0"/>
-          </a:p>
-        </p:txBody>
-      </p:sp>
-      <p:sp>
-        <p:nvSpPr>
-          <p:cNvPr id="16" name="Text 14"/>
-          <p:cNvSpPr/>
-          <p:nvPr/>
-        </p:nvSpPr>
-        <p:spPr>
-          <a:xfrm>
-            <a:off x="8074152" y="3959352"/>
-            <a:ext cx="2825496" cy="1170432"/>
+            <a:endParaRPr lang="en-US" sz="1300" dirty="0"/>
+          </a:p>
+        </p:txBody>
+      </p:sp>
+      <p:sp>
+        <p:nvSpPr>
+          <p:cNvPr id="17" name="Text 15"/>
+          <p:cNvSpPr/>
+          <p:nvPr/>
+        </p:nvSpPr>
+        <p:spPr>
+          <a:xfrm>
+            <a:off x="8074152" y="4023360"/>
+            <a:ext cx="2825496" cy="1097280"/>
           </a:xfrm>
           <a:prstGeom prst="rect">
             <a:avLst/>
@@ -10959,7 +11593,7 @@
               <a:buNone/>
             </a:pPr>
             <a:r>
-              <a:rPr lang="en-US" sz="1250" dirty="0">
+              <a:rPr lang="en-US" sz="1550" dirty="0">
                 <a:solidFill>
                   <a:srgbClr val="17364A"/>
                 </a:solidFill>
@@ -10969,7 +11603,7 @@
               </a:rPr>
               <a:t>Connect the concept to public health decisions, safeguards, documentation, or implementation work.</a:t>
             </a:r>
-            <a:endParaRPr lang="en-US" sz="1250" dirty="0"/>
+            <a:endParaRPr lang="en-US" sz="1550" dirty="0"/>
           </a:p>
         </p:txBody>
       </p:sp>
@@ -11166,7 +11800,7 @@
                 <a:ea typeface="Aptos" pitchFamily="34" charset="-122"/>
                 <a:cs typeface="Aptos" pitchFamily="34" charset="-120"/>
               </a:rPr>
-              <a:t>© Paula Soper</a:t>
+              <a:t>Â© Paula Soper</a:t>
             </a:r>
             <a:endParaRPr lang="en-US" sz="800" dirty="0"/>
           </a:p>
@@ -11180,8 +11814,47 @@
         </p:nvSpPr>
         <p:spPr>
           <a:xfrm>
+            <a:off x="11137392" y="6510528"/>
+            <a:ext cx="411480" cy="201168"/>
+          </a:xfrm>
+          <a:prstGeom prst="rect">
+            <a:avLst/>
+          </a:prstGeom>
+          <a:noFill/>
+          <a:ln/>
+        </p:spPr>
+        <p:txBody>
+          <a:bodyPr wrap="square" lIns="0" tIns="0" rIns="0" bIns="0" rtlCol="0" anchor="ctr"/>
+          <a:lstStyle/>
+          <a:p>
+            <a:pPr algn="r" indent="0" marL="0">
+              <a:buNone/>
+            </a:pPr>
+            <a:r>
+              <a:rPr lang="en-US" sz="900" dirty="0">
+                <a:solidFill>
+                  <a:srgbClr val="5F7181"/>
+                </a:solidFill>
+                <a:latin typeface="Aptos" pitchFamily="34" charset="0"/>
+                <a:ea typeface="Aptos" pitchFamily="34" charset="-122"/>
+                <a:cs typeface="Aptos" pitchFamily="34" charset="-120"/>
+              </a:rPr>
+              <a:t>3</a:t>
+            </a:r>
+            <a:endParaRPr lang="en-US" sz="900" dirty="0"/>
+          </a:p>
+        </p:txBody>
+      </p:sp>
+      <p:sp>
+        <p:nvSpPr>
+          <p:cNvPr id="8" name="Text 6"/>
+          <p:cNvSpPr/>
+          <p:nvPr/>
+        </p:nvSpPr>
+        <p:spPr>
+          <a:xfrm>
             <a:off x="640080" y="658368"/>
-            <a:ext cx="10881360" cy="566928"/>
+            <a:ext cx="10881360" cy="713232"/>
           </a:xfrm>
           <a:prstGeom prst="rect">
             <a:avLst/>
@@ -11199,7 +11872,7 @@
               <a:buNone/>
             </a:pPr>
             <a:r>
-              <a:rPr lang="en-US" sz="2700" b="1" dirty="0">
+              <a:rPr lang="en-US" sz="3400" b="1" dirty="0">
                 <a:solidFill>
                   <a:srgbClr val="003A63"/>
                 </a:solidFill>
@@ -11209,20 +11882,20 @@
               </a:rPr>
               <a:t>How this module connects to the playbook</a:t>
             </a:r>
-            <a:endParaRPr lang="en-US" sz="2700" dirty="0"/>
-          </a:p>
-        </p:txBody>
-      </p:sp>
-      <p:sp>
-        <p:nvSpPr>
-          <p:cNvPr id="8" name="Text 6"/>
-          <p:cNvSpPr/>
-          <p:nvPr/>
-        </p:nvSpPr>
-        <p:spPr>
-          <a:xfrm>
-            <a:off x="868680" y="1417320"/>
-            <a:ext cx="6903720" cy="4480560"/>
+            <a:endParaRPr lang="en-US" sz="3400" dirty="0"/>
+          </a:p>
+        </p:txBody>
+      </p:sp>
+      <p:sp>
+        <p:nvSpPr>
+          <p:cNvPr id="9" name="Text 7"/>
+          <p:cNvSpPr/>
+          <p:nvPr/>
+        </p:nvSpPr>
+        <p:spPr>
+          <a:xfrm>
+            <a:off x="868680" y="1508760"/>
+            <a:ext cx="6812280" cy="3977640"/>
           </a:xfrm>
           <a:prstGeom prst="rect">
             <a:avLst/>
@@ -11237,7 +11910,7 @@
           <a:lstStyle/>
           <a:p>
             <a:r>
-              <a:rPr lang="en-US" sz="1540" dirty="0">
+              <a:rPr lang="en-US" sz="1900" dirty="0">
                 <a:solidFill>
                   <a:srgbClr val="17364A"/>
                 </a:solidFill>
@@ -11245,13 +11918,13 @@
                 <a:ea typeface="Aptos" pitchFamily="34" charset="-122"/>
                 <a:cs typeface="Aptos" pitchFamily="34" charset="-120"/>
               </a:rPr>
-              <a:t>Play 13: Monitor and Evaluate AI Systems - This lesson informs Play 13 by helping learners connect the lesson topic to monitor and.</a:t>
-            </a:r>
-            <a:endParaRPr lang="en-US" sz="1540" dirty="0"/>
-          </a:p>
-          <a:p>
-            <a:r>
-              <a:rPr lang="en-US" sz="1540" dirty="0">
+              <a:t>Play 13: Monitor and Evaluate AI Systems - This lesson informs Play 13 by helping learners connect the.</a:t>
+            </a:r>
+            <a:endParaRPr lang="en-US" sz="1900" dirty="0"/>
+          </a:p>
+          <a:p>
+            <a:r>
+              <a:rPr lang="en-US" sz="1900" dirty="0">
                 <a:solidFill>
                   <a:srgbClr val="17364A"/>
                 </a:solidFill>
@@ -11259,13 +11932,13 @@
                 <a:ea typeface="Aptos" pitchFamily="34" charset="-122"/>
                 <a:cs typeface="Aptos" pitchFamily="34" charset="-120"/>
               </a:rPr>
-              <a:t>Play 11: Build and Deploy AI Solutions - This lesson informs Play 11 by helping learners connect the lesson topic to build and deploy.</a:t>
-            </a:r>
-            <a:endParaRPr lang="en-US" sz="1540" dirty="0"/>
-          </a:p>
-          <a:p>
-            <a:r>
-              <a:rPr lang="en-US" sz="1540" dirty="0">
+              <a:t>Play 11: Build and Deploy AI Solutions - This lesson informs Play 11 by helping learners connect the lesson.</a:t>
+            </a:r>
+            <a:endParaRPr lang="en-US" sz="1900" dirty="0"/>
+          </a:p>
+          <a:p>
+            <a:r>
+              <a:rPr lang="en-US" sz="1900" dirty="0">
                 <a:solidFill>
                   <a:srgbClr val="17364A"/>
                 </a:solidFill>
@@ -11273,13 +11946,13 @@
                 <a:ea typeface="Aptos" pitchFamily="34" charset="-122"/>
                 <a:cs typeface="Aptos" pitchFamily="34" charset="-120"/>
               </a:rPr>
-              <a:t>Play 1: Vision &amp; Guardrails - This lesson informs Play 1 by helping learners connect the lesson topic to vision &amp; guardrails work in.</a:t>
-            </a:r>
-            <a:endParaRPr lang="en-US" sz="1540" dirty="0"/>
-          </a:p>
-          <a:p>
-            <a:r>
-              <a:rPr lang="en-US" sz="1540" dirty="0">
+              <a:t>Play 1: Vision &amp; Guardrails - This lesson informs Play 1 by helping learners connect the lesson topic to.</a:t>
+            </a:r>
+            <a:endParaRPr lang="en-US" sz="1900" dirty="0"/>
+          </a:p>
+          <a:p>
+            <a:r>
+              <a:rPr lang="en-US" sz="1900" dirty="0">
                 <a:solidFill>
                   <a:srgbClr val="17364A"/>
                 </a:solidFill>
@@ -11287,15 +11960,15 @@
                 <a:ea typeface="Aptos" pitchFamily="34" charset="-122"/>
                 <a:cs typeface="Aptos" pitchFamily="34" charset="-120"/>
               </a:rPr>
-              <a:t>Play 7: Prioritize Use Cases - This lesson informs Play 7 by helping learners connect the lesson topic to prioritize use cases work.</a:t>
-            </a:r>
-            <a:endParaRPr lang="en-US" sz="1540" dirty="0"/>
-          </a:p>
-        </p:txBody>
-      </p:sp>
-      <p:sp>
-        <p:nvSpPr>
-          <p:cNvPr id="9" name="Shape 7"/>
+              <a:t>Play 7: Prioritize Use Cases - This lesson informs Play 7 by helping learners connect the lesson topic to.</a:t>
+            </a:r>
+            <a:endParaRPr lang="en-US" sz="1900" dirty="0"/>
+          </a:p>
+        </p:txBody>
+      </p:sp>
+      <p:sp>
+        <p:nvSpPr>
+          <p:cNvPr id="10" name="Shape 8"/>
           <p:cNvSpPr/>
           <p:nvPr/>
         </p:nvSpPr>
@@ -11322,14 +11995,14 @@
       </p:sp>
       <p:sp>
         <p:nvSpPr>
-          <p:cNvPr id="10" name="Text 8"/>
+          <p:cNvPr id="11" name="Text 9"/>
           <p:cNvSpPr/>
           <p:nvPr/>
         </p:nvSpPr>
         <p:spPr>
           <a:xfrm>
             <a:off x="8211312" y="1563624"/>
-            <a:ext cx="2734056" cy="201168"/>
+            <a:ext cx="2734056" cy="256032"/>
           </a:xfrm>
           <a:prstGeom prst="rect">
             <a:avLst/>
@@ -11345,7 +12018,7 @@
               <a:buNone/>
             </a:pPr>
             <a:r>
-              <a:rPr lang="en-US" sz="950" b="1" dirty="0">
+              <a:rPr lang="en-US" sz="1300" b="1" dirty="0">
                 <a:solidFill>
                   <a:srgbClr val="0068B7"/>
                 </a:solidFill>
@@ -11355,20 +12028,20 @@
               </a:rPr>
               <a:t>Apply the lesson</a:t>
             </a:r>
-            <a:endParaRPr lang="en-US" sz="950" dirty="0"/>
-          </a:p>
-        </p:txBody>
-      </p:sp>
-      <p:sp>
-        <p:nvSpPr>
-          <p:cNvPr id="11" name="Text 9"/>
-          <p:cNvSpPr/>
-          <p:nvPr/>
-        </p:nvSpPr>
-        <p:spPr>
-          <a:xfrm>
-            <a:off x="8211312" y="1856232"/>
-            <a:ext cx="2734056" cy="1536192"/>
+            <a:endParaRPr lang="en-US" sz="1300" dirty="0"/>
+          </a:p>
+        </p:txBody>
+      </p:sp>
+      <p:sp>
+        <p:nvSpPr>
+          <p:cNvPr id="12" name="Text 10"/>
+          <p:cNvSpPr/>
+          <p:nvPr/>
+        </p:nvSpPr>
+        <p:spPr>
+          <a:xfrm>
+            <a:off x="8211312" y="1920240"/>
+            <a:ext cx="2734056" cy="1463040"/>
           </a:xfrm>
           <a:prstGeom prst="rect">
             <a:avLst/>
@@ -11386,7 +12059,7 @@
               <a:buNone/>
             </a:pPr>
             <a:r>
-              <a:rPr lang="en-US" sz="1250" dirty="0">
+              <a:rPr lang="en-US" sz="1550" dirty="0">
                 <a:solidFill>
                   <a:srgbClr val="17364A"/>
                 </a:solidFill>
@@ -11396,32 +12069,32 @@
               </a:rPr>
               <a:t>Use the related plays to identify decisions, participants, timing, approvals, and documentation needed for responsible implementation.</a:t>
             </a:r>
-            <a:endParaRPr lang="en-US" sz="1250" dirty="0"/>
-          </a:p>
-        </p:txBody>
-      </p:sp>
-      <p:sp>
-        <p:nvSpPr>
-          <p:cNvPr id="12" name="Shape 10"/>
-          <p:cNvSpPr/>
-          <p:nvPr/>
-        </p:nvSpPr>
-        <p:spPr>
-          <a:xfrm>
-            <a:off x="8046720" y="3794760"/>
-            <a:ext cx="3063240" cy="1508760"/>
+            <a:endParaRPr lang="en-US" sz="1550" dirty="0"/>
+          </a:p>
+        </p:txBody>
+      </p:sp>
+      <p:sp>
+        <p:nvSpPr>
+          <p:cNvPr id="13" name="Shape 11"/>
+          <p:cNvSpPr/>
+          <p:nvPr/>
+        </p:nvSpPr>
+        <p:spPr>
+          <a:xfrm>
+            <a:off x="7818120" y="3977640"/>
+            <a:ext cx="972312" cy="749808"/>
           </a:xfrm>
           <a:prstGeom prst="roundRect">
             <a:avLst>
-              <a:gd name="adj" fmla="val 7273"/>
+              <a:gd name="adj" fmla="val 14634"/>
             </a:avLst>
           </a:prstGeom>
           <a:solidFill>
-            <a:srgbClr val="FFF4D9"/>
+            <a:srgbClr val="0068B7"/>
           </a:solidFill>
           <a:ln w="12700">
             <a:solidFill>
-              <a:srgbClr val="B9D7E6"/>
+              <a:srgbClr val="0068B7"/>
             </a:solidFill>
             <a:prstDash val="solid"/>
           </a:ln>
@@ -11429,81 +12102,256 @@
       </p:sp>
       <p:sp>
         <p:nvSpPr>
-          <p:cNvPr id="13" name="Text 11"/>
-          <p:cNvSpPr/>
-          <p:nvPr/>
-        </p:nvSpPr>
-        <p:spPr>
-          <a:xfrm>
-            <a:off x="8211312" y="3941064"/>
-            <a:ext cx="2734056" cy="201168"/>
-          </a:xfrm>
-          <a:prstGeom prst="rect">
-            <a:avLst/>
-          </a:prstGeom>
-          <a:noFill/>
-          <a:ln/>
-        </p:spPr>
-        <p:txBody>
-          <a:bodyPr wrap="square" lIns="0" tIns="0" rIns="0" bIns="0" rtlCol="0" anchor="ctr"/>
-          <a:lstStyle/>
-          <a:p>
-            <a:pPr indent="0" marL="0">
-              <a:buNone/>
-            </a:pPr>
-            <a:r>
-              <a:rPr lang="en-US" sz="950" b="1" dirty="0">
-                <a:solidFill>
-                  <a:srgbClr val="0068B7"/>
-                </a:solidFill>
-                <a:latin typeface="Aptos" pitchFamily="34" charset="0"/>
-                <a:ea typeface="Aptos" pitchFamily="34" charset="-122"/>
-                <a:cs typeface="Aptos" pitchFamily="34" charset="-120"/>
-              </a:rPr>
-              <a:t>Keep in mind</a:t>
-            </a:r>
-            <a:endParaRPr lang="en-US" sz="950" dirty="0"/>
-          </a:p>
-        </p:txBody>
-      </p:sp>
-      <p:sp>
-        <p:nvSpPr>
           <p:cNvPr id="14" name="Text 12"/>
           <p:cNvSpPr/>
           <p:nvPr/>
         </p:nvSpPr>
         <p:spPr>
           <a:xfrm>
-            <a:off x="8211312" y="4233672"/>
-            <a:ext cx="2734056" cy="941832"/>
-          </a:xfrm>
-          <a:prstGeom prst="rect">
-            <a:avLst/>
-          </a:prstGeom>
-          <a:noFill/>
-          <a:ln/>
-        </p:spPr>
-        <p:txBody>
-          <a:bodyPr wrap="square" lIns="0" tIns="0" rIns="0" bIns="0" rtlCol="0" anchor="t">
+            <a:off x="7891272" y="4169664"/>
+            <a:ext cx="826008" cy="310896"/>
+          </a:xfrm>
+          <a:prstGeom prst="rect">
+            <a:avLst/>
+          </a:prstGeom>
+          <a:noFill/>
+          <a:ln/>
+        </p:spPr>
+        <p:txBody>
+          <a:bodyPr wrap="square" lIns="0" tIns="0" rIns="0" bIns="0" rtlCol="0" anchor="ctr">
             <a:normAutofit/>
           </a:bodyPr>
           <a:lstStyle/>
           <a:p>
-            <a:pPr indent="0" marL="0">
-              <a:buNone/>
-            </a:pPr>
-            <a:r>
-              <a:rPr lang="en-US" sz="1250" dirty="0">
-                <a:solidFill>
-                  <a:srgbClr val="17364A"/>
-                </a:solidFill>
-                <a:latin typeface="Aptos" pitchFamily="34" charset="0"/>
-                <a:ea typeface="Aptos" pitchFamily="34" charset="-122"/>
-                <a:cs typeface="Aptos" pitchFamily="34" charset="-120"/>
-              </a:rPr>
-              <a:t>The playbook connection helps turn training into agency work, not just individual knowledge.</a:t>
-            </a:r>
-            <a:endParaRPr lang="en-US" sz="1250" dirty="0"/>
+            <a:pPr algn="ctr" indent="0" marL="0">
+              <a:buNone/>
+            </a:pPr>
+            <a:r>
+              <a:rPr lang="en-US" sz="1500" b="1" dirty="0">
+                <a:solidFill>
+                  <a:srgbClr val="FFFFFF"/>
+                </a:solidFill>
+                <a:latin typeface="Aptos" pitchFamily="34" charset="0"/>
+                <a:ea typeface="Aptos" pitchFamily="34" charset="-122"/>
+                <a:cs typeface="Aptos" pitchFamily="34" charset="-120"/>
+              </a:rPr>
+              <a:t>Lesson</a:t>
+            </a:r>
+            <a:endParaRPr lang="en-US" sz="1500" dirty="0"/>
+          </a:p>
+        </p:txBody>
+      </p:sp>
+      <p:sp>
+        <p:nvSpPr>
+          <p:cNvPr id="15" name="Text 13"/>
+          <p:cNvSpPr/>
+          <p:nvPr/>
+        </p:nvSpPr>
+        <p:spPr>
+          <a:xfrm>
+            <a:off x="8817864" y="4187952"/>
+            <a:ext cx="201168" cy="256032"/>
+          </a:xfrm>
+          <a:prstGeom prst="rect">
+            <a:avLst/>
+          </a:prstGeom>
+          <a:noFill/>
+          <a:ln/>
+        </p:spPr>
+        <p:txBody>
+          <a:bodyPr wrap="square" lIns="0" tIns="0" rIns="0" bIns="0" rtlCol="0" anchor="ctr"/>
+          <a:lstStyle/>
+          <a:p>
+            <a:pPr algn="ctr" indent="0" marL="0">
+              <a:buNone/>
+            </a:pPr>
+            <a:r>
+              <a:rPr lang="en-US" sz="1800" b="1" dirty="0">
+                <a:solidFill>
+                  <a:srgbClr val="0068B7"/>
+                </a:solidFill>
+                <a:latin typeface="Aptos" pitchFamily="34" charset="0"/>
+                <a:ea typeface="Aptos" pitchFamily="34" charset="-122"/>
+                <a:cs typeface="Aptos" pitchFamily="34" charset="-120"/>
+              </a:rPr>
+              <a:t>â†’</a:t>
+            </a:r>
+            <a:endParaRPr lang="en-US" sz="1800" dirty="0"/>
+          </a:p>
+        </p:txBody>
+      </p:sp>
+      <p:sp>
+        <p:nvSpPr>
+          <p:cNvPr id="16" name="Shape 14"/>
+          <p:cNvSpPr/>
+          <p:nvPr/>
+        </p:nvSpPr>
+        <p:spPr>
+          <a:xfrm>
+            <a:off x="9046464" y="3977640"/>
+            <a:ext cx="972312" cy="749808"/>
+          </a:xfrm>
+          <a:prstGeom prst="roundRect">
+            <a:avLst>
+              <a:gd name="adj" fmla="val 14634"/>
+            </a:avLst>
+          </a:prstGeom>
+          <a:solidFill>
+            <a:srgbClr val="2F8A28"/>
+          </a:solidFill>
+          <a:ln w="12700">
+            <a:solidFill>
+              <a:srgbClr val="2F8A28"/>
+            </a:solidFill>
+            <a:prstDash val="solid"/>
+          </a:ln>
+        </p:spPr>
+      </p:sp>
+      <p:sp>
+        <p:nvSpPr>
+          <p:cNvPr id="17" name="Text 15"/>
+          <p:cNvSpPr/>
+          <p:nvPr/>
+        </p:nvSpPr>
+        <p:spPr>
+          <a:xfrm>
+            <a:off x="9119616" y="4169664"/>
+            <a:ext cx="826008" cy="310896"/>
+          </a:xfrm>
+          <a:prstGeom prst="rect">
+            <a:avLst/>
+          </a:prstGeom>
+          <a:noFill/>
+          <a:ln/>
+        </p:spPr>
+        <p:txBody>
+          <a:bodyPr wrap="square" lIns="0" tIns="0" rIns="0" bIns="0" rtlCol="0" anchor="ctr">
+            <a:normAutofit/>
+          </a:bodyPr>
+          <a:lstStyle/>
+          <a:p>
+            <a:pPr algn="ctr" indent="0" marL="0">
+              <a:buNone/>
+            </a:pPr>
+            <a:r>
+              <a:rPr lang="en-US" sz="1500" b="1" dirty="0">
+                <a:solidFill>
+                  <a:srgbClr val="FFFFFF"/>
+                </a:solidFill>
+                <a:latin typeface="Aptos" pitchFamily="34" charset="0"/>
+                <a:ea typeface="Aptos" pitchFamily="34" charset="-122"/>
+                <a:cs typeface="Aptos" pitchFamily="34" charset="-120"/>
+              </a:rPr>
+              <a:t>Plays</a:t>
+            </a:r>
+            <a:endParaRPr lang="en-US" sz="1500" dirty="0"/>
+          </a:p>
+        </p:txBody>
+      </p:sp>
+      <p:sp>
+        <p:nvSpPr>
+          <p:cNvPr id="18" name="Text 16"/>
+          <p:cNvSpPr/>
+          <p:nvPr/>
+        </p:nvSpPr>
+        <p:spPr>
+          <a:xfrm>
+            <a:off x="10046208" y="4187952"/>
+            <a:ext cx="201168" cy="256032"/>
+          </a:xfrm>
+          <a:prstGeom prst="rect">
+            <a:avLst/>
+          </a:prstGeom>
+          <a:noFill/>
+          <a:ln/>
+        </p:spPr>
+        <p:txBody>
+          <a:bodyPr wrap="square" lIns="0" tIns="0" rIns="0" bIns="0" rtlCol="0" anchor="ctr"/>
+          <a:lstStyle/>
+          <a:p>
+            <a:pPr algn="ctr" indent="0" marL="0">
+              <a:buNone/>
+            </a:pPr>
+            <a:r>
+              <a:rPr lang="en-US" sz="1800" b="1" dirty="0">
+                <a:solidFill>
+                  <a:srgbClr val="0068B7"/>
+                </a:solidFill>
+                <a:latin typeface="Aptos" pitchFamily="34" charset="0"/>
+                <a:ea typeface="Aptos" pitchFamily="34" charset="-122"/>
+                <a:cs typeface="Aptos" pitchFamily="34" charset="-120"/>
+              </a:rPr>
+              <a:t>â†’</a:t>
+            </a:r>
+            <a:endParaRPr lang="en-US" sz="1800" dirty="0"/>
+          </a:p>
+        </p:txBody>
+      </p:sp>
+      <p:sp>
+        <p:nvSpPr>
+          <p:cNvPr id="19" name="Shape 17"/>
+          <p:cNvSpPr/>
+          <p:nvPr/>
+        </p:nvSpPr>
+        <p:spPr>
+          <a:xfrm>
+            <a:off x="10274808" y="3977640"/>
+            <a:ext cx="972312" cy="749808"/>
+          </a:xfrm>
+          <a:prstGeom prst="roundRect">
+            <a:avLst>
+              <a:gd name="adj" fmla="val 14634"/>
+            </a:avLst>
+          </a:prstGeom>
+          <a:solidFill>
+            <a:srgbClr val="6A4CA3"/>
+          </a:solidFill>
+          <a:ln w="12700">
+            <a:solidFill>
+              <a:srgbClr val="6A4CA3"/>
+            </a:solidFill>
+            <a:prstDash val="solid"/>
+          </a:ln>
+        </p:spPr>
+      </p:sp>
+      <p:sp>
+        <p:nvSpPr>
+          <p:cNvPr id="20" name="Text 18"/>
+          <p:cNvSpPr/>
+          <p:nvPr/>
+        </p:nvSpPr>
+        <p:spPr>
+          <a:xfrm>
+            <a:off x="10347960" y="4169664"/>
+            <a:ext cx="826008" cy="310896"/>
+          </a:xfrm>
+          <a:prstGeom prst="rect">
+            <a:avLst/>
+          </a:prstGeom>
+          <a:noFill/>
+          <a:ln/>
+        </p:spPr>
+        <p:txBody>
+          <a:bodyPr wrap="square" lIns="0" tIns="0" rIns="0" bIns="0" rtlCol="0" anchor="ctr">
+            <a:normAutofit/>
+          </a:bodyPr>
+          <a:lstStyle/>
+          <a:p>
+            <a:pPr algn="ctr" indent="0" marL="0">
+              <a:buNone/>
+            </a:pPr>
+            <a:r>
+              <a:rPr lang="en-US" sz="1500" b="1" dirty="0">
+                <a:solidFill>
+                  <a:srgbClr val="FFFFFF"/>
+                </a:solidFill>
+                <a:latin typeface="Aptos" pitchFamily="34" charset="0"/>
+                <a:ea typeface="Aptos" pitchFamily="34" charset="-122"/>
+                <a:cs typeface="Aptos" pitchFamily="34" charset="-120"/>
+              </a:rPr>
+              <a:t>Action</a:t>
+            </a:r>
+            <a:endParaRPr lang="en-US" sz="1500" dirty="0"/>
           </a:p>
         </p:txBody>
       </p:sp>
@@ -11700,7 +12548,7 @@
                 <a:ea typeface="Aptos" pitchFamily="34" charset="-122"/>
                 <a:cs typeface="Aptos" pitchFamily="34" charset="-120"/>
               </a:rPr>
-              <a:t>© Paula Soper</a:t>
+              <a:t>Â© Paula Soper</a:t>
             </a:r>
             <a:endParaRPr lang="en-US" sz="800" dirty="0"/>
           </a:p>
@@ -11714,8 +12562,47 @@
         </p:nvSpPr>
         <p:spPr>
           <a:xfrm>
+            <a:off x="11137392" y="6510528"/>
+            <a:ext cx="411480" cy="201168"/>
+          </a:xfrm>
+          <a:prstGeom prst="rect">
+            <a:avLst/>
+          </a:prstGeom>
+          <a:noFill/>
+          <a:ln/>
+        </p:spPr>
+        <p:txBody>
+          <a:bodyPr wrap="square" lIns="0" tIns="0" rIns="0" bIns="0" rtlCol="0" anchor="ctr"/>
+          <a:lstStyle/>
+          <a:p>
+            <a:pPr algn="r" indent="0" marL="0">
+              <a:buNone/>
+            </a:pPr>
+            <a:r>
+              <a:rPr lang="en-US" sz="900" dirty="0">
+                <a:solidFill>
+                  <a:srgbClr val="5F7181"/>
+                </a:solidFill>
+                <a:latin typeface="Aptos" pitchFamily="34" charset="0"/>
+                <a:ea typeface="Aptos" pitchFamily="34" charset="-122"/>
+                <a:cs typeface="Aptos" pitchFamily="34" charset="-120"/>
+              </a:rPr>
+              <a:t>4</a:t>
+            </a:r>
+            <a:endParaRPr lang="en-US" sz="900" dirty="0"/>
+          </a:p>
+        </p:txBody>
+      </p:sp>
+      <p:sp>
+        <p:nvSpPr>
+          <p:cNvPr id="8" name="Text 6"/>
+          <p:cNvSpPr/>
+          <p:nvPr/>
+        </p:nvSpPr>
+        <p:spPr>
+          <a:xfrm>
             <a:off x="640080" y="658368"/>
-            <a:ext cx="10881360" cy="566928"/>
+            <a:ext cx="10881360" cy="713232"/>
           </a:xfrm>
           <a:prstGeom prst="rect">
             <a:avLst/>
@@ -11733,7 +12620,7 @@
               <a:buNone/>
             </a:pPr>
             <a:r>
-              <a:rPr lang="en-US" sz="2700" b="1" dirty="0">
+              <a:rPr lang="en-US" sz="3400" b="1" dirty="0">
                 <a:solidFill>
                   <a:srgbClr val="003A63"/>
                 </a:solidFill>
@@ -11743,20 +12630,20 @@
               </a:rPr>
               <a:t>Related toolkit resources</a:t>
             </a:r>
-            <a:endParaRPr lang="en-US" sz="2700" dirty="0"/>
-          </a:p>
-        </p:txBody>
-      </p:sp>
-      <p:sp>
-        <p:nvSpPr>
-          <p:cNvPr id="8" name="Text 6"/>
-          <p:cNvSpPr/>
-          <p:nvPr/>
-        </p:nvSpPr>
-        <p:spPr>
-          <a:xfrm>
-            <a:off x="868680" y="1417320"/>
-            <a:ext cx="6903720" cy="4480560"/>
+            <a:endParaRPr lang="en-US" sz="3400" dirty="0"/>
+          </a:p>
+        </p:txBody>
+      </p:sp>
+      <p:sp>
+        <p:nvSpPr>
+          <p:cNvPr id="9" name="Text 7"/>
+          <p:cNvSpPr/>
+          <p:nvPr/>
+        </p:nvSpPr>
+        <p:spPr>
+          <a:xfrm>
+            <a:off x="868680" y="1508760"/>
+            <a:ext cx="6812280" cy="3977640"/>
           </a:xfrm>
           <a:prstGeom prst="rect">
             <a:avLst/>
@@ -11771,7 +12658,7 @@
           <a:lstStyle/>
           <a:p>
             <a:r>
-              <a:rPr lang="en-US" sz="1460" dirty="0">
+              <a:rPr lang="en-US" sz="1850" dirty="0">
                 <a:solidFill>
                   <a:srgbClr val="17364A"/>
                 </a:solidFill>
@@ -11779,13 +12666,13 @@
                 <a:ea typeface="Aptos" pitchFamily="34" charset="-122"/>
                 <a:cs typeface="Aptos" pitchFamily="34" charset="-120"/>
               </a:rPr>
-              <a:t>Tool 44: Performance Monitoring Dashboard (Dashboard) - Use this tool to complete or strengthen the practical exercise for the module.</a:t>
-            </a:r>
-            <a:endParaRPr lang="en-US" sz="1460" dirty="0"/>
-          </a:p>
-          <a:p>
-            <a:r>
-              <a:rPr lang="en-US" sz="1460" dirty="0">
+              <a:t>Tool 44: Performance Monitoring Dashboard (Dashboard) - Use this tool to complete or strengthen the.</a:t>
+            </a:r>
+            <a:endParaRPr lang="en-US" sz="1850" dirty="0"/>
+          </a:p>
+          <a:p>
+            <a:r>
+              <a:rPr lang="en-US" sz="1850" dirty="0">
                 <a:solidFill>
                   <a:srgbClr val="17364A"/>
                 </a:solidFill>
@@ -11793,13 +12680,13 @@
                 <a:ea typeface="Aptos" pitchFamily="34" charset="-122"/>
                 <a:cs typeface="Aptos" pitchFamily="34" charset="-120"/>
               </a:rPr>
-              <a:t>Tool 45: Continuous Improvement Log (Log) - Use this tool to complete or strengthen the practical exercise for the module using.</a:t>
-            </a:r>
-            <a:endParaRPr lang="en-US" sz="1460" dirty="0"/>
-          </a:p>
-          <a:p>
-            <a:r>
-              <a:rPr lang="en-US" sz="1460" dirty="0">
+              <a:t>Tool 45: Continuous Improvement Log (Log) - Use this tool to complete or strengthen the practical exercise.</a:t>
+            </a:r>
+            <a:endParaRPr lang="en-US" sz="1850" dirty="0"/>
+          </a:p>
+          <a:p>
+            <a:r>
+              <a:rPr lang="en-US" sz="1850" dirty="0">
                 <a:solidFill>
                   <a:srgbClr val="17364A"/>
                 </a:solidFill>
@@ -11807,13 +12694,13 @@
                 <a:ea typeface="Aptos" pitchFamily="34" charset="-122"/>
                 <a:cs typeface="Aptos" pitchFamily="34" charset="-120"/>
               </a:rPr>
-              <a:t>Tool 48: AI Evaluation &amp; Outcomes Reporting (Template) - Use this tool to complete or strengthen the practical exercise for the.</a:t>
-            </a:r>
-            <a:endParaRPr lang="en-US" sz="1460" dirty="0"/>
-          </a:p>
-          <a:p>
-            <a:r>
-              <a:rPr lang="en-US" sz="1460" dirty="0">
+              <a:t>Tool 48: AI Evaluation &amp; Outcomes Reporting (Template) - Use this tool to complete or strengthen the.</a:t>
+            </a:r>
+            <a:endParaRPr lang="en-US" sz="1850" dirty="0"/>
+          </a:p>
+          <a:p>
+            <a:r>
+              <a:rPr lang="en-US" sz="1850" dirty="0">
                 <a:solidFill>
                   <a:srgbClr val="17364A"/>
                 </a:solidFill>
@@ -11821,29 +12708,15 @@
                 <a:ea typeface="Aptos" pitchFamily="34" charset="-122"/>
                 <a:cs typeface="Aptos" pitchFamily="34" charset="-120"/>
               </a:rPr>
-              <a:t>Tool 1: AI Vision &amp; Principles Workshop (Workshop) - Use AI Vision &amp; Principles Workshop to translate this lesson into a documented.</a:t>
-            </a:r>
-            <a:endParaRPr lang="en-US" sz="1460" dirty="0"/>
-          </a:p>
-          <a:p>
-            <a:r>
-              <a:rPr lang="en-US" sz="1460" dirty="0">
-                <a:solidFill>
-                  <a:srgbClr val="17364A"/>
-                </a:solidFill>
-                <a:latin typeface="Aptos" pitchFamily="34" charset="0"/>
-                <a:ea typeface="Aptos" pitchFamily="34" charset="-122"/>
-                <a:cs typeface="Aptos" pitchFamily="34" charset="-120"/>
-              </a:rPr>
-              <a:t>Tool 3: Equity Impact Assessment Checklist (Checklist) - Use Equity Impact Assessment Checklist to translate this lesson into a.</a:t>
-            </a:r>
-            <a:endParaRPr lang="en-US" sz="1460" dirty="0"/>
-          </a:p>
-        </p:txBody>
-      </p:sp>
-      <p:sp>
-        <p:nvSpPr>
-          <p:cNvPr id="9" name="Shape 7"/>
+              <a:t>Tool 1: AI Vision &amp; Principles Workshop (Workshop) - Use AI Vision &amp; Principles Workshop to translate this.</a:t>
+            </a:r>
+            <a:endParaRPr lang="en-US" sz="1850" dirty="0"/>
+          </a:p>
+        </p:txBody>
+      </p:sp>
+      <p:sp>
+        <p:nvSpPr>
+          <p:cNvPr id="10" name="Shape 8"/>
           <p:cNvSpPr/>
           <p:nvPr/>
         </p:nvSpPr>
@@ -11870,14 +12743,14 @@
       </p:sp>
       <p:sp>
         <p:nvSpPr>
-          <p:cNvPr id="10" name="Text 8"/>
+          <p:cNvPr id="11" name="Text 9"/>
           <p:cNvSpPr/>
           <p:nvPr/>
         </p:nvSpPr>
         <p:spPr>
           <a:xfrm>
             <a:off x="8211312" y="1563624"/>
-            <a:ext cx="2734056" cy="201168"/>
+            <a:ext cx="2734056" cy="256032"/>
           </a:xfrm>
           <a:prstGeom prst="rect">
             <a:avLst/>
@@ -11893,7 +12766,7 @@
               <a:buNone/>
             </a:pPr>
             <a:r>
-              <a:rPr lang="en-US" sz="950" b="1" dirty="0">
+              <a:rPr lang="en-US" sz="1300" b="1" dirty="0">
                 <a:solidFill>
                   <a:srgbClr val="0068B7"/>
                 </a:solidFill>
@@ -11903,20 +12776,20 @@
               </a:rPr>
               <a:t>Use the tools</a:t>
             </a:r>
-            <a:endParaRPr lang="en-US" sz="950" dirty="0"/>
-          </a:p>
-        </p:txBody>
-      </p:sp>
-      <p:sp>
-        <p:nvSpPr>
-          <p:cNvPr id="11" name="Text 9"/>
-          <p:cNvSpPr/>
-          <p:nvPr/>
-        </p:nvSpPr>
-        <p:spPr>
-          <a:xfrm>
-            <a:off x="8211312" y="1856232"/>
-            <a:ext cx="2734056" cy="1536192"/>
+            <a:endParaRPr lang="en-US" sz="1300" dirty="0"/>
+          </a:p>
+        </p:txBody>
+      </p:sp>
+      <p:sp>
+        <p:nvSpPr>
+          <p:cNvPr id="12" name="Text 10"/>
+          <p:cNvSpPr/>
+          <p:nvPr/>
+        </p:nvSpPr>
+        <p:spPr>
+          <a:xfrm>
+            <a:off x="8211312" y="1920240"/>
+            <a:ext cx="2734056" cy="1463040"/>
           </a:xfrm>
           <a:prstGeom prst="rect">
             <a:avLst/>
@@ -11934,7 +12807,7 @@
               <a:buNone/>
             </a:pPr>
             <a:r>
-              <a:rPr lang="en-US" sz="1250" dirty="0">
+              <a:rPr lang="en-US" sz="1550" dirty="0">
                 <a:solidFill>
                   <a:srgbClr val="17364A"/>
                 </a:solidFill>
@@ -11944,32 +12817,32 @@
               </a:rPr>
               <a:t>Use linked tools when your department needs a structured worksheet, template, checklist, review process, or documentation artifact.</a:t>
             </a:r>
-            <a:endParaRPr lang="en-US" sz="1250" dirty="0"/>
-          </a:p>
-        </p:txBody>
-      </p:sp>
-      <p:sp>
-        <p:nvSpPr>
-          <p:cNvPr id="12" name="Shape 10"/>
-          <p:cNvSpPr/>
-          <p:nvPr/>
-        </p:nvSpPr>
-        <p:spPr>
-          <a:xfrm>
-            <a:off x="8046720" y="3794760"/>
-            <a:ext cx="3063240" cy="1508760"/>
+            <a:endParaRPr lang="en-US" sz="1550" dirty="0"/>
+          </a:p>
+        </p:txBody>
+      </p:sp>
+      <p:sp>
+        <p:nvSpPr>
+          <p:cNvPr id="13" name="Shape 11"/>
+          <p:cNvSpPr/>
+          <p:nvPr/>
+        </p:nvSpPr>
+        <p:spPr>
+          <a:xfrm>
+            <a:off x="7818120" y="3977640"/>
+            <a:ext cx="972312" cy="749808"/>
           </a:xfrm>
           <a:prstGeom prst="roundRect">
             <a:avLst>
-              <a:gd name="adj" fmla="val 7273"/>
+              <a:gd name="adj" fmla="val 14634"/>
             </a:avLst>
           </a:prstGeom>
           <a:solidFill>
-            <a:srgbClr val="EEF8ED"/>
+            <a:srgbClr val="0068B7"/>
           </a:solidFill>
           <a:ln w="12700">
             <a:solidFill>
-              <a:srgbClr val="B9D7E6"/>
+              <a:srgbClr val="0068B7"/>
             </a:solidFill>
             <a:prstDash val="solid"/>
           </a:ln>
@@ -11977,81 +12850,256 @@
       </p:sp>
       <p:sp>
         <p:nvSpPr>
-          <p:cNvPr id="13" name="Text 11"/>
-          <p:cNvSpPr/>
-          <p:nvPr/>
-        </p:nvSpPr>
-        <p:spPr>
-          <a:xfrm>
-            <a:off x="8211312" y="3941064"/>
-            <a:ext cx="2734056" cy="201168"/>
-          </a:xfrm>
-          <a:prstGeom prst="rect">
-            <a:avLst/>
-          </a:prstGeom>
-          <a:noFill/>
-          <a:ln/>
-        </p:spPr>
-        <p:txBody>
-          <a:bodyPr wrap="square" lIns="0" tIns="0" rIns="0" bIns="0" rtlCol="0" anchor="ctr"/>
-          <a:lstStyle/>
-          <a:p>
-            <a:pPr indent="0" marL="0">
-              <a:buNone/>
-            </a:pPr>
-            <a:r>
-              <a:rPr lang="en-US" sz="950" b="1" dirty="0">
-                <a:solidFill>
-                  <a:srgbClr val="0068B7"/>
-                </a:solidFill>
-                <a:latin typeface="Aptos" pitchFamily="34" charset="0"/>
-                <a:ea typeface="Aptos" pitchFamily="34" charset="-122"/>
-                <a:cs typeface="Aptos" pitchFamily="34" charset="-120"/>
-              </a:rPr>
-              <a:t>Avoid duplication</a:t>
-            </a:r>
-            <a:endParaRPr lang="en-US" sz="950" dirty="0"/>
-          </a:p>
-        </p:txBody>
-      </p:sp>
-      <p:sp>
-        <p:nvSpPr>
           <p:cNvPr id="14" name="Text 12"/>
           <p:cNvSpPr/>
           <p:nvPr/>
         </p:nvSpPr>
         <p:spPr>
           <a:xfrm>
-            <a:off x="8211312" y="4233672"/>
-            <a:ext cx="2734056" cy="941832"/>
-          </a:xfrm>
-          <a:prstGeom prst="rect">
-            <a:avLst/>
-          </a:prstGeom>
-          <a:noFill/>
-          <a:ln/>
-        </p:spPr>
-        <p:txBody>
-          <a:bodyPr wrap="square" lIns="0" tIns="0" rIns="0" bIns="0" rtlCol="0" anchor="t">
+            <a:off x="7891272" y="4169664"/>
+            <a:ext cx="826008" cy="310896"/>
+          </a:xfrm>
+          <a:prstGeom prst="rect">
+            <a:avLst/>
+          </a:prstGeom>
+          <a:noFill/>
+          <a:ln/>
+        </p:spPr>
+        <p:txBody>
+          <a:bodyPr wrap="square" lIns="0" tIns="0" rIns="0" bIns="0" rtlCol="0" anchor="ctr">
             <a:normAutofit/>
           </a:bodyPr>
           <a:lstStyle/>
           <a:p>
-            <a:pPr indent="0" marL="0">
-              <a:buNone/>
-            </a:pPr>
-            <a:r>
-              <a:rPr lang="en-US" sz="1250" dirty="0">
-                <a:solidFill>
-                  <a:srgbClr val="17364A"/>
-                </a:solidFill>
-                <a:latin typeface="Aptos" pitchFamily="34" charset="0"/>
-                <a:ea typeface="Aptos" pitchFamily="34" charset="-122"/>
-                <a:cs typeface="Aptos" pitchFamily="34" charset="-120"/>
-              </a:rPr>
-              <a:t>If your department already has a strong equivalent tool, adapt or use the existing process instead of recreating it.</a:t>
-            </a:r>
-            <a:endParaRPr lang="en-US" sz="1250" dirty="0"/>
+            <a:pPr algn="ctr" indent="0" marL="0">
+              <a:buNone/>
+            </a:pPr>
+            <a:r>
+              <a:rPr lang="en-US" sz="1500" b="1" dirty="0">
+                <a:solidFill>
+                  <a:srgbClr val="FFFFFF"/>
+                </a:solidFill>
+                <a:latin typeface="Aptos" pitchFamily="34" charset="0"/>
+                <a:ea typeface="Aptos" pitchFamily="34" charset="-122"/>
+                <a:cs typeface="Aptos" pitchFamily="34" charset="-120"/>
+              </a:rPr>
+              <a:t>Concept</a:t>
+            </a:r>
+            <a:endParaRPr lang="en-US" sz="1500" dirty="0"/>
+          </a:p>
+        </p:txBody>
+      </p:sp>
+      <p:sp>
+        <p:nvSpPr>
+          <p:cNvPr id="15" name="Text 13"/>
+          <p:cNvSpPr/>
+          <p:nvPr/>
+        </p:nvSpPr>
+        <p:spPr>
+          <a:xfrm>
+            <a:off x="8817864" y="4187952"/>
+            <a:ext cx="201168" cy="256032"/>
+          </a:xfrm>
+          <a:prstGeom prst="rect">
+            <a:avLst/>
+          </a:prstGeom>
+          <a:noFill/>
+          <a:ln/>
+        </p:spPr>
+        <p:txBody>
+          <a:bodyPr wrap="square" lIns="0" tIns="0" rIns="0" bIns="0" rtlCol="0" anchor="ctr"/>
+          <a:lstStyle/>
+          <a:p>
+            <a:pPr algn="ctr" indent="0" marL="0">
+              <a:buNone/>
+            </a:pPr>
+            <a:r>
+              <a:rPr lang="en-US" sz="1800" b="1" dirty="0">
+                <a:solidFill>
+                  <a:srgbClr val="0068B7"/>
+                </a:solidFill>
+                <a:latin typeface="Aptos" pitchFamily="34" charset="0"/>
+                <a:ea typeface="Aptos" pitchFamily="34" charset="-122"/>
+                <a:cs typeface="Aptos" pitchFamily="34" charset="-120"/>
+              </a:rPr>
+              <a:t>â†’</a:t>
+            </a:r>
+            <a:endParaRPr lang="en-US" sz="1800" dirty="0"/>
+          </a:p>
+        </p:txBody>
+      </p:sp>
+      <p:sp>
+        <p:nvSpPr>
+          <p:cNvPr id="16" name="Shape 14"/>
+          <p:cNvSpPr/>
+          <p:nvPr/>
+        </p:nvSpPr>
+        <p:spPr>
+          <a:xfrm>
+            <a:off x="9046464" y="3977640"/>
+            <a:ext cx="972312" cy="749808"/>
+          </a:xfrm>
+          <a:prstGeom prst="roundRect">
+            <a:avLst>
+              <a:gd name="adj" fmla="val 14634"/>
+            </a:avLst>
+          </a:prstGeom>
+          <a:solidFill>
+            <a:srgbClr val="2F8A28"/>
+          </a:solidFill>
+          <a:ln w="12700">
+            <a:solidFill>
+              <a:srgbClr val="2F8A28"/>
+            </a:solidFill>
+            <a:prstDash val="solid"/>
+          </a:ln>
+        </p:spPr>
+      </p:sp>
+      <p:sp>
+        <p:nvSpPr>
+          <p:cNvPr id="17" name="Text 15"/>
+          <p:cNvSpPr/>
+          <p:nvPr/>
+        </p:nvSpPr>
+        <p:spPr>
+          <a:xfrm>
+            <a:off x="9119616" y="4169664"/>
+            <a:ext cx="826008" cy="310896"/>
+          </a:xfrm>
+          <a:prstGeom prst="rect">
+            <a:avLst/>
+          </a:prstGeom>
+          <a:noFill/>
+          <a:ln/>
+        </p:spPr>
+        <p:txBody>
+          <a:bodyPr wrap="square" lIns="0" tIns="0" rIns="0" bIns="0" rtlCol="0" anchor="ctr">
+            <a:normAutofit/>
+          </a:bodyPr>
+          <a:lstStyle/>
+          <a:p>
+            <a:pPr algn="ctr" indent="0" marL="0">
+              <a:buNone/>
+            </a:pPr>
+            <a:r>
+              <a:rPr lang="en-US" sz="1500" b="1" dirty="0">
+                <a:solidFill>
+                  <a:srgbClr val="FFFFFF"/>
+                </a:solidFill>
+                <a:latin typeface="Aptos" pitchFamily="34" charset="0"/>
+                <a:ea typeface="Aptos" pitchFamily="34" charset="-122"/>
+                <a:cs typeface="Aptos" pitchFamily="34" charset="-120"/>
+              </a:rPr>
+              <a:t>Tool</a:t>
+            </a:r>
+            <a:endParaRPr lang="en-US" sz="1500" dirty="0"/>
+          </a:p>
+        </p:txBody>
+      </p:sp>
+      <p:sp>
+        <p:nvSpPr>
+          <p:cNvPr id="18" name="Text 16"/>
+          <p:cNvSpPr/>
+          <p:nvPr/>
+        </p:nvSpPr>
+        <p:spPr>
+          <a:xfrm>
+            <a:off x="10046208" y="4187952"/>
+            <a:ext cx="201168" cy="256032"/>
+          </a:xfrm>
+          <a:prstGeom prst="rect">
+            <a:avLst/>
+          </a:prstGeom>
+          <a:noFill/>
+          <a:ln/>
+        </p:spPr>
+        <p:txBody>
+          <a:bodyPr wrap="square" lIns="0" tIns="0" rIns="0" bIns="0" rtlCol="0" anchor="ctr"/>
+          <a:lstStyle/>
+          <a:p>
+            <a:pPr algn="ctr" indent="0" marL="0">
+              <a:buNone/>
+            </a:pPr>
+            <a:r>
+              <a:rPr lang="en-US" sz="1800" b="1" dirty="0">
+                <a:solidFill>
+                  <a:srgbClr val="0068B7"/>
+                </a:solidFill>
+                <a:latin typeface="Aptos" pitchFamily="34" charset="0"/>
+                <a:ea typeface="Aptos" pitchFamily="34" charset="-122"/>
+                <a:cs typeface="Aptos" pitchFamily="34" charset="-120"/>
+              </a:rPr>
+              <a:t>â†’</a:t>
+            </a:r>
+            <a:endParaRPr lang="en-US" sz="1800" dirty="0"/>
+          </a:p>
+        </p:txBody>
+      </p:sp>
+      <p:sp>
+        <p:nvSpPr>
+          <p:cNvPr id="19" name="Shape 17"/>
+          <p:cNvSpPr/>
+          <p:nvPr/>
+        </p:nvSpPr>
+        <p:spPr>
+          <a:xfrm>
+            <a:off x="10274808" y="3977640"/>
+            <a:ext cx="972312" cy="749808"/>
+          </a:xfrm>
+          <a:prstGeom prst="roundRect">
+            <a:avLst>
+              <a:gd name="adj" fmla="val 14634"/>
+            </a:avLst>
+          </a:prstGeom>
+          <a:solidFill>
+            <a:srgbClr val="D69A2D"/>
+          </a:solidFill>
+          <a:ln w="12700">
+            <a:solidFill>
+              <a:srgbClr val="D69A2D"/>
+            </a:solidFill>
+            <a:prstDash val="solid"/>
+          </a:ln>
+        </p:spPr>
+      </p:sp>
+      <p:sp>
+        <p:nvSpPr>
+          <p:cNvPr id="20" name="Text 18"/>
+          <p:cNvSpPr/>
+          <p:nvPr/>
+        </p:nvSpPr>
+        <p:spPr>
+          <a:xfrm>
+            <a:off x="10347960" y="4169664"/>
+            <a:ext cx="826008" cy="310896"/>
+          </a:xfrm>
+          <a:prstGeom prst="rect">
+            <a:avLst/>
+          </a:prstGeom>
+          <a:noFill/>
+          <a:ln/>
+        </p:spPr>
+        <p:txBody>
+          <a:bodyPr wrap="square" lIns="0" tIns="0" rIns="0" bIns="0" rtlCol="0" anchor="ctr">
+            <a:normAutofit/>
+          </a:bodyPr>
+          <a:lstStyle/>
+          <a:p>
+            <a:pPr algn="ctr" indent="0" marL="0">
+              <a:buNone/>
+            </a:pPr>
+            <a:r>
+              <a:rPr lang="en-US" sz="1500" b="1" dirty="0">
+                <a:solidFill>
+                  <a:srgbClr val="FFFFFF"/>
+                </a:solidFill>
+                <a:latin typeface="Aptos" pitchFamily="34" charset="0"/>
+                <a:ea typeface="Aptos" pitchFamily="34" charset="-122"/>
+                <a:cs typeface="Aptos" pitchFamily="34" charset="-120"/>
+              </a:rPr>
+              <a:t>Artifact</a:t>
+            </a:r>
+            <a:endParaRPr lang="en-US" sz="1500" dirty="0"/>
           </a:p>
         </p:txBody>
       </p:sp>
@@ -12248,7 +13296,7 @@
                 <a:ea typeface="Aptos" pitchFamily="34" charset="-122"/>
                 <a:cs typeface="Aptos" pitchFamily="34" charset="-120"/>
               </a:rPr>
-              <a:t>© Paula Soper</a:t>
+              <a:t>Â© Paula Soper</a:t>
             </a:r>
             <a:endParaRPr lang="en-US" sz="800" dirty="0"/>
           </a:p>
@@ -12256,7 +13304,46 @@
       </p:sp>
       <p:sp>
         <p:nvSpPr>
-          <p:cNvPr id="7" name="Shape 5"/>
+          <p:cNvPr id="7" name="Text 5"/>
+          <p:cNvSpPr/>
+          <p:nvPr/>
+        </p:nvSpPr>
+        <p:spPr>
+          <a:xfrm>
+            <a:off x="11137392" y="6510528"/>
+            <a:ext cx="411480" cy="201168"/>
+          </a:xfrm>
+          <a:prstGeom prst="rect">
+            <a:avLst/>
+          </a:prstGeom>
+          <a:noFill/>
+          <a:ln/>
+        </p:spPr>
+        <p:txBody>
+          <a:bodyPr wrap="square" lIns="0" tIns="0" rIns="0" bIns="0" rtlCol="0" anchor="ctr"/>
+          <a:lstStyle/>
+          <a:p>
+            <a:pPr algn="r" indent="0" marL="0">
+              <a:buNone/>
+            </a:pPr>
+            <a:r>
+              <a:rPr lang="en-US" sz="900" dirty="0">
+                <a:solidFill>
+                  <a:srgbClr val="5F7181"/>
+                </a:solidFill>
+                <a:latin typeface="Aptos" pitchFamily="34" charset="0"/>
+                <a:ea typeface="Aptos" pitchFamily="34" charset="-122"/>
+                <a:cs typeface="Aptos" pitchFamily="34" charset="-120"/>
+              </a:rPr>
+              <a:t>5</a:t>
+            </a:r>
+            <a:endParaRPr lang="en-US" sz="900" dirty="0"/>
+          </a:p>
+        </p:txBody>
+      </p:sp>
+      <p:sp>
+        <p:nvSpPr>
+          <p:cNvPr id="8" name="Shape 6"/>
           <p:cNvSpPr/>
           <p:nvPr/>
         </p:nvSpPr>
@@ -12281,7 +13368,7 @@
       </p:sp>
       <p:sp>
         <p:nvSpPr>
-          <p:cNvPr id="8" name="Text 6"/>
+          <p:cNvPr id="9" name="Text 7"/>
           <p:cNvSpPr/>
           <p:nvPr/>
         </p:nvSpPr>
@@ -12320,14 +13407,14 @@
       </p:sp>
       <p:sp>
         <p:nvSpPr>
-          <p:cNvPr id="9" name="Text 7"/>
+          <p:cNvPr id="10" name="Text 8"/>
           <p:cNvSpPr/>
           <p:nvPr/>
         </p:nvSpPr>
         <p:spPr>
           <a:xfrm>
             <a:off x="640080" y="621792"/>
-            <a:ext cx="10881360" cy="566928"/>
+            <a:ext cx="10881360" cy="713232"/>
           </a:xfrm>
           <a:prstGeom prst="rect">
             <a:avLst/>
@@ -12345,7 +13432,7 @@
               <a:buNone/>
             </a:pPr>
             <a:r>
-              <a:rPr lang="en-US" sz="2700" b="1" dirty="0">
+              <a:rPr lang="en-US" sz="3400" b="1" dirty="0">
                 <a:solidFill>
                   <a:srgbClr val="003A63"/>
                 </a:solidFill>
@@ -12355,20 +13442,20 @@
               </a:rPr>
               <a:t>Learning Objectives</a:t>
             </a:r>
-            <a:endParaRPr lang="en-US" sz="2700" dirty="0"/>
-          </a:p>
-        </p:txBody>
-      </p:sp>
-      <p:sp>
-        <p:nvSpPr>
-          <p:cNvPr id="10" name="Text 8"/>
-          <p:cNvSpPr/>
-          <p:nvPr/>
-        </p:nvSpPr>
-        <p:spPr>
-          <a:xfrm>
-            <a:off x="868680" y="1417320"/>
-            <a:ext cx="6675120" cy="4434840"/>
+            <a:endParaRPr lang="en-US" sz="3400" dirty="0"/>
+          </a:p>
+        </p:txBody>
+      </p:sp>
+      <p:sp>
+        <p:nvSpPr>
+          <p:cNvPr id="11" name="Text 9"/>
+          <p:cNvSpPr/>
+          <p:nvPr/>
+        </p:nvSpPr>
+        <p:spPr>
+          <a:xfrm>
+            <a:off x="868680" y="1508760"/>
+            <a:ext cx="6537960" cy="4160520"/>
           </a:xfrm>
           <a:prstGeom prst="rect">
             <a:avLst/>
@@ -12383,7 +13470,7 @@
           <a:lstStyle/>
           <a:p>
             <a:r>
-              <a:rPr lang="en-US" sz="1700" dirty="0">
+              <a:rPr lang="en-US" sz="2100" dirty="0">
                 <a:solidFill>
                   <a:srgbClr val="17364A"/>
                 </a:solidFill>
@@ -12391,13 +13478,13 @@
                 <a:ea typeface="Aptos" pitchFamily="34" charset="-122"/>
                 <a:cs typeface="Aptos" pitchFamily="34" charset="-120"/>
               </a:rPr>
-              <a:t>Explain the difference between supervised, unsupervised, and semi-supervised learning in public health terms.</a:t>
-            </a:r>
-            <a:endParaRPr lang="en-US" sz="1700" dirty="0"/>
-          </a:p>
-          <a:p>
-            <a:r>
-              <a:rPr lang="en-US" sz="1700" dirty="0">
+              <a:t>Explain the difference between supervised, unsupervised, and semi-supervised learning in public health.</a:t>
+            </a:r>
+            <a:endParaRPr lang="en-US" sz="2100" dirty="0"/>
+          </a:p>
+          <a:p>
+            <a:r>
+              <a:rPr lang="en-US" sz="2100" dirty="0">
                 <a:solidFill>
                   <a:srgbClr val="17364A"/>
                 </a:solidFill>
@@ -12407,11 +13494,11 @@
               </a:rPr>
               <a:t>Describe features, labels, training data, validation data, and test data.</a:t>
             </a:r>
-            <a:endParaRPr lang="en-US" sz="1700" dirty="0"/>
-          </a:p>
-          <a:p>
-            <a:r>
-              <a:rPr lang="en-US" sz="1700" dirty="0">
+            <a:endParaRPr lang="en-US" sz="2100" dirty="0"/>
+          </a:p>
+          <a:p>
+            <a:r>
+              <a:rPr lang="en-US" sz="2100" dirty="0">
                 <a:solidFill>
                   <a:srgbClr val="17364A"/>
                 </a:solidFill>
@@ -12419,29 +13506,15 @@
                 <a:ea typeface="Aptos" pitchFamily="34" charset="-122"/>
                 <a:cs typeface="Aptos" pitchFamily="34" charset="-120"/>
               </a:rPr>
-              <a:t>Identify when a machine learning approach may be appropriate for a public health workflow and when a simpler method may be.</a:t>
-            </a:r>
-            <a:endParaRPr lang="en-US" sz="1700" dirty="0"/>
-          </a:p>
-          <a:p>
-            <a:r>
-              <a:rPr lang="en-US" sz="1700" dirty="0">
-                <a:solidFill>
-                  <a:srgbClr val="17364A"/>
-                </a:solidFill>
-                <a:latin typeface="Aptos" pitchFamily="34" charset="0"/>
-                <a:ea typeface="Aptos" pitchFamily="34" charset="-122"/>
-                <a:cs typeface="Aptos" pitchFamily="34" charset="-120"/>
-              </a:rPr>
-              <a:t>Recognize common machine learning risks, including overfitting, biased labels, data leakage, and poor generalization.</a:t>
-            </a:r>
-            <a:endParaRPr lang="en-US" sz="1700" dirty="0"/>
-          </a:p>
-        </p:txBody>
-      </p:sp>
-      <p:sp>
-        <p:nvSpPr>
-          <p:cNvPr id="11" name="Shape 9"/>
+              <a:t>Identify when a machine learning approach may be appropriate for a public health workflow and when a.</a:t>
+            </a:r>
+            <a:endParaRPr lang="en-US" sz="2100" dirty="0"/>
+          </a:p>
+        </p:txBody>
+      </p:sp>
+      <p:sp>
+        <p:nvSpPr>
+          <p:cNvPr id="12" name="Shape 10"/>
           <p:cNvSpPr/>
           <p:nvPr/>
         </p:nvSpPr>
@@ -12468,14 +13541,14 @@
       </p:sp>
       <p:sp>
         <p:nvSpPr>
-          <p:cNvPr id="12" name="Text 10"/>
+          <p:cNvPr id="13" name="Text 11"/>
           <p:cNvSpPr/>
           <p:nvPr/>
         </p:nvSpPr>
         <p:spPr>
           <a:xfrm>
             <a:off x="8074152" y="1563624"/>
-            <a:ext cx="2825496" cy="201168"/>
+            <a:ext cx="2825496" cy="256032"/>
           </a:xfrm>
           <a:prstGeom prst="rect">
             <a:avLst/>
@@ -12491,7 +13564,7 @@
               <a:buNone/>
             </a:pPr>
             <a:r>
-              <a:rPr lang="en-US" sz="950" b="1" dirty="0">
+              <a:rPr lang="en-US" sz="1300" b="1" dirty="0">
                 <a:solidFill>
                   <a:srgbClr val="0068B7"/>
                 </a:solidFill>
@@ -12501,20 +13574,20 @@
               </a:rPr>
               <a:t>Key idea</a:t>
             </a:r>
-            <a:endParaRPr lang="en-US" sz="950" dirty="0"/>
-          </a:p>
-        </p:txBody>
-      </p:sp>
-      <p:sp>
-        <p:nvSpPr>
-          <p:cNvPr id="13" name="Text 11"/>
-          <p:cNvSpPr/>
-          <p:nvPr/>
-        </p:nvSpPr>
-        <p:spPr>
-          <a:xfrm>
-            <a:off x="8074152" y="1856232"/>
-            <a:ext cx="2825496" cy="1261872"/>
+            <a:endParaRPr lang="en-US" sz="1300" dirty="0"/>
+          </a:p>
+        </p:txBody>
+      </p:sp>
+      <p:sp>
+        <p:nvSpPr>
+          <p:cNvPr id="14" name="Text 12"/>
+          <p:cNvSpPr/>
+          <p:nvPr/>
+        </p:nvSpPr>
+        <p:spPr>
+          <a:xfrm>
+            <a:off x="8074152" y="1920240"/>
+            <a:ext cx="2825496" cy="1188720"/>
           </a:xfrm>
           <a:prstGeom prst="rect">
             <a:avLst/>
@@ -12532,7 +13605,7 @@
               <a:buNone/>
             </a:pPr>
             <a:r>
-              <a:rPr lang="en-US" sz="1250" dirty="0">
+              <a:rPr lang="en-US" sz="1550" dirty="0">
                 <a:solidFill>
                   <a:srgbClr val="17364A"/>
                 </a:solidFill>
@@ -12540,15 +13613,15 @@
                 <a:ea typeface="Aptos" pitchFamily="34" charset="-122"/>
                 <a:cs typeface="Aptos" pitchFamily="34" charset="-120"/>
               </a:rPr>
-              <a:t>Explain the difference between supervised, unsupervised, and semi-supervised learning in public health terms.</a:t>
-            </a:r>
-            <a:endParaRPr lang="en-US" sz="1250" dirty="0"/>
-          </a:p>
-        </p:txBody>
-      </p:sp>
-      <p:sp>
-        <p:nvSpPr>
-          <p:cNvPr id="14" name="Shape 12"/>
+              <a:t>Explain the difference between supervised, unsupervised, and semi-supervised learning in public health.</a:t>
+            </a:r>
+            <a:endParaRPr lang="en-US" sz="1550" dirty="0"/>
+          </a:p>
+        </p:txBody>
+      </p:sp>
+      <p:sp>
+        <p:nvSpPr>
+          <p:cNvPr id="15" name="Shape 13"/>
           <p:cNvSpPr/>
           <p:nvPr/>
         </p:nvSpPr>
@@ -12575,14 +13648,14 @@
       </p:sp>
       <p:sp>
         <p:nvSpPr>
-          <p:cNvPr id="15" name="Text 13"/>
+          <p:cNvPr id="16" name="Text 14"/>
           <p:cNvSpPr/>
           <p:nvPr/>
         </p:nvSpPr>
         <p:spPr>
           <a:xfrm>
             <a:off x="8074152" y="3666744"/>
-            <a:ext cx="2825496" cy="201168"/>
+            <a:ext cx="2825496" cy="256032"/>
           </a:xfrm>
           <a:prstGeom prst="rect">
             <a:avLst/>
@@ -12598,7 +13671,7 @@
               <a:buNone/>
             </a:pPr>
             <a:r>
-              <a:rPr lang="en-US" sz="950" b="1" dirty="0">
+              <a:rPr lang="en-US" sz="1300" b="1" dirty="0">
                 <a:solidFill>
                   <a:srgbClr val="0068B7"/>
                 </a:solidFill>
@@ -12608,20 +13681,20 @@
               </a:rPr>
               <a:t>Use this for</a:t>
             </a:r>
-            <a:endParaRPr lang="en-US" sz="950" dirty="0"/>
-          </a:p>
-        </p:txBody>
-      </p:sp>
-      <p:sp>
-        <p:nvSpPr>
-          <p:cNvPr id="16" name="Text 14"/>
-          <p:cNvSpPr/>
-          <p:nvPr/>
-        </p:nvSpPr>
-        <p:spPr>
-          <a:xfrm>
-            <a:off x="8074152" y="3959352"/>
-            <a:ext cx="2825496" cy="1170432"/>
+            <a:endParaRPr lang="en-US" sz="1300" dirty="0"/>
+          </a:p>
+        </p:txBody>
+      </p:sp>
+      <p:sp>
+        <p:nvSpPr>
+          <p:cNvPr id="17" name="Text 15"/>
+          <p:cNvSpPr/>
+          <p:nvPr/>
+        </p:nvSpPr>
+        <p:spPr>
+          <a:xfrm>
+            <a:off x="8074152" y="4023360"/>
+            <a:ext cx="2825496" cy="1097280"/>
           </a:xfrm>
           <a:prstGeom prst="rect">
             <a:avLst/>
@@ -12639,7 +13712,7 @@
               <a:buNone/>
             </a:pPr>
             <a:r>
-              <a:rPr lang="en-US" sz="1250" dirty="0">
+              <a:rPr lang="en-US" sz="1550" dirty="0">
                 <a:solidFill>
                   <a:srgbClr val="17364A"/>
                 </a:solidFill>
@@ -12649,7 +13722,7 @@
               </a:rPr>
               <a:t>Connect the concept to public health decisions, safeguards, documentation, or implementation work.</a:t>
             </a:r>
-            <a:endParaRPr lang="en-US" sz="1250" dirty="0"/>
+            <a:endParaRPr lang="en-US" sz="1550" dirty="0"/>
           </a:p>
         </p:txBody>
       </p:sp>
@@ -12846,7 +13919,7 @@
                 <a:ea typeface="Aptos" pitchFamily="34" charset="-122"/>
                 <a:cs typeface="Aptos" pitchFamily="34" charset="-120"/>
               </a:rPr>
-              <a:t>© Paula Soper</a:t>
+              <a:t>Â© Paula Soper</a:t>
             </a:r>
             <a:endParaRPr lang="en-US" sz="800" dirty="0"/>
           </a:p>
@@ -12860,8 +13933,47 @@
         </p:nvSpPr>
         <p:spPr>
           <a:xfrm>
+            <a:off x="11137392" y="6510528"/>
+            <a:ext cx="411480" cy="201168"/>
+          </a:xfrm>
+          <a:prstGeom prst="rect">
+            <a:avLst/>
+          </a:prstGeom>
+          <a:noFill/>
+          <a:ln/>
+        </p:spPr>
+        <p:txBody>
+          <a:bodyPr wrap="square" lIns="0" tIns="0" rIns="0" bIns="0" rtlCol="0" anchor="ctr"/>
+          <a:lstStyle/>
+          <a:p>
+            <a:pPr algn="r" indent="0" marL="0">
+              <a:buNone/>
+            </a:pPr>
+            <a:r>
+              <a:rPr lang="en-US" sz="900" dirty="0">
+                <a:solidFill>
+                  <a:srgbClr val="5F7181"/>
+                </a:solidFill>
+                <a:latin typeface="Aptos" pitchFamily="34" charset="0"/>
+                <a:ea typeface="Aptos" pitchFamily="34" charset="-122"/>
+                <a:cs typeface="Aptos" pitchFamily="34" charset="-120"/>
+              </a:rPr>
+              <a:t>6</a:t>
+            </a:r>
+            <a:endParaRPr lang="en-US" sz="900" dirty="0"/>
+          </a:p>
+        </p:txBody>
+      </p:sp>
+      <p:sp>
+        <p:nvSpPr>
+          <p:cNvPr id="8" name="Text 6"/>
+          <p:cNvSpPr/>
+          <p:nvPr/>
+        </p:nvSpPr>
+        <p:spPr>
+          <a:xfrm>
             <a:off x="640080" y="658368"/>
-            <a:ext cx="10881360" cy="566928"/>
+            <a:ext cx="10881360" cy="713232"/>
           </a:xfrm>
           <a:prstGeom prst="rect">
             <a:avLst/>
@@ -12879,7 +13991,7 @@
               <a:buNone/>
             </a:pPr>
             <a:r>
-              <a:rPr lang="en-US" sz="2700" b="1" dirty="0">
+              <a:rPr lang="en-US" sz="3400" b="1" dirty="0">
                 <a:solidFill>
                   <a:srgbClr val="003A63"/>
                 </a:solidFill>
@@ -12889,20 +14001,20 @@
               </a:rPr>
               <a:t>Learning Objectives Continued</a:t>
             </a:r>
-            <a:endParaRPr lang="en-US" sz="2700" dirty="0"/>
-          </a:p>
-        </p:txBody>
-      </p:sp>
-      <p:sp>
-        <p:nvSpPr>
-          <p:cNvPr id="8" name="Text 6"/>
-          <p:cNvSpPr/>
-          <p:nvPr/>
-        </p:nvSpPr>
-        <p:spPr>
-          <a:xfrm>
-            <a:off x="868680" y="1417320"/>
-            <a:ext cx="6675120" cy="4434840"/>
+            <a:endParaRPr lang="en-US" sz="3400" dirty="0"/>
+          </a:p>
+        </p:txBody>
+      </p:sp>
+      <p:sp>
+        <p:nvSpPr>
+          <p:cNvPr id="9" name="Text 7"/>
+          <p:cNvSpPr/>
+          <p:nvPr/>
+        </p:nvSpPr>
+        <p:spPr>
+          <a:xfrm>
+            <a:off x="868680" y="1508760"/>
+            <a:ext cx="6537960" cy="4160520"/>
           </a:xfrm>
           <a:prstGeom prst="rect">
             <a:avLst/>
@@ -12917,7 +14029,7 @@
           <a:lstStyle/>
           <a:p>
             <a:r>
-              <a:rPr lang="en-US" sz="1700" dirty="0">
+              <a:rPr lang="en-US" sz="2100" dirty="0">
                 <a:solidFill>
                   <a:srgbClr val="17364A"/>
                 </a:solidFill>
@@ -12927,13 +14039,13 @@
               </a:rPr>
               <a:t>Produce a machine learning use case review worksheet for a real or realistic public health workflow.</a:t>
             </a:r>
-            <a:endParaRPr lang="en-US" sz="1700" dirty="0"/>
-          </a:p>
-        </p:txBody>
-      </p:sp>
-      <p:sp>
-        <p:nvSpPr>
-          <p:cNvPr id="9" name="Shape 7"/>
+            <a:endParaRPr lang="en-US" sz="2100" dirty="0"/>
+          </a:p>
+        </p:txBody>
+      </p:sp>
+      <p:sp>
+        <p:nvSpPr>
+          <p:cNvPr id="10" name="Shape 8"/>
           <p:cNvSpPr/>
           <p:nvPr/>
         </p:nvSpPr>
@@ -12960,14 +14072,14 @@
       </p:sp>
       <p:sp>
         <p:nvSpPr>
-          <p:cNvPr id="10" name="Text 8"/>
+          <p:cNvPr id="11" name="Text 9"/>
           <p:cNvSpPr/>
           <p:nvPr/>
         </p:nvSpPr>
         <p:spPr>
           <a:xfrm>
             <a:off x="8074152" y="1563624"/>
-            <a:ext cx="2825496" cy="201168"/>
+            <a:ext cx="2825496" cy="256032"/>
           </a:xfrm>
           <a:prstGeom prst="rect">
             <a:avLst/>
@@ -12983,7 +14095,7 @@
               <a:buNone/>
             </a:pPr>
             <a:r>
-              <a:rPr lang="en-US" sz="950" b="1" dirty="0">
+              <a:rPr lang="en-US" sz="1300" b="1" dirty="0">
                 <a:solidFill>
                   <a:srgbClr val="0068B7"/>
                 </a:solidFill>
@@ -12993,20 +14105,20 @@
               </a:rPr>
               <a:t>Key idea</a:t>
             </a:r>
-            <a:endParaRPr lang="en-US" sz="950" dirty="0"/>
-          </a:p>
-        </p:txBody>
-      </p:sp>
-      <p:sp>
-        <p:nvSpPr>
-          <p:cNvPr id="11" name="Text 9"/>
-          <p:cNvSpPr/>
-          <p:nvPr/>
-        </p:nvSpPr>
-        <p:spPr>
-          <a:xfrm>
-            <a:off x="8074152" y="1856232"/>
-            <a:ext cx="2825496" cy="1261872"/>
+            <a:endParaRPr lang="en-US" sz="1300" dirty="0"/>
+          </a:p>
+        </p:txBody>
+      </p:sp>
+      <p:sp>
+        <p:nvSpPr>
+          <p:cNvPr id="12" name="Text 10"/>
+          <p:cNvSpPr/>
+          <p:nvPr/>
+        </p:nvSpPr>
+        <p:spPr>
+          <a:xfrm>
+            <a:off x="8074152" y="1920240"/>
+            <a:ext cx="2825496" cy="1188720"/>
           </a:xfrm>
           <a:prstGeom prst="rect">
             <a:avLst/>
@@ -13024,7 +14136,7 @@
               <a:buNone/>
             </a:pPr>
             <a:r>
-              <a:rPr lang="en-US" sz="1250" dirty="0">
+              <a:rPr lang="en-US" sz="1550" dirty="0">
                 <a:solidFill>
                   <a:srgbClr val="17364A"/>
                 </a:solidFill>
@@ -13034,13 +14146,13 @@
               </a:rPr>
               <a:t>Produce a machine learning use case review worksheet for a real or realistic public health workflow.</a:t>
             </a:r>
-            <a:endParaRPr lang="en-US" sz="1250" dirty="0"/>
-          </a:p>
-        </p:txBody>
-      </p:sp>
-      <p:sp>
-        <p:nvSpPr>
-          <p:cNvPr id="12" name="Shape 10"/>
+            <a:endParaRPr lang="en-US" sz="1550" dirty="0"/>
+          </a:p>
+        </p:txBody>
+      </p:sp>
+      <p:sp>
+        <p:nvSpPr>
+          <p:cNvPr id="13" name="Shape 11"/>
           <p:cNvSpPr/>
           <p:nvPr/>
         </p:nvSpPr>
@@ -13067,14 +14179,14 @@
       </p:sp>
       <p:sp>
         <p:nvSpPr>
-          <p:cNvPr id="13" name="Text 11"/>
+          <p:cNvPr id="14" name="Text 12"/>
           <p:cNvSpPr/>
           <p:nvPr/>
         </p:nvSpPr>
         <p:spPr>
           <a:xfrm>
             <a:off x="8074152" y="3666744"/>
-            <a:ext cx="2825496" cy="201168"/>
+            <a:ext cx="2825496" cy="256032"/>
           </a:xfrm>
           <a:prstGeom prst="rect">
             <a:avLst/>
@@ -13090,7 +14202,7 @@
               <a:buNone/>
             </a:pPr>
             <a:r>
-              <a:rPr lang="en-US" sz="950" b="1" dirty="0">
+              <a:rPr lang="en-US" sz="1300" b="1" dirty="0">
                 <a:solidFill>
                   <a:srgbClr val="0068B7"/>
                 </a:solidFill>
@@ -13100,20 +14212,20 @@
               </a:rPr>
               <a:t>Use this for</a:t>
             </a:r>
-            <a:endParaRPr lang="en-US" sz="950" dirty="0"/>
-          </a:p>
-        </p:txBody>
-      </p:sp>
-      <p:sp>
-        <p:nvSpPr>
-          <p:cNvPr id="14" name="Text 12"/>
-          <p:cNvSpPr/>
-          <p:nvPr/>
-        </p:nvSpPr>
-        <p:spPr>
-          <a:xfrm>
-            <a:off x="8074152" y="3959352"/>
-            <a:ext cx="2825496" cy="1170432"/>
+            <a:endParaRPr lang="en-US" sz="1300" dirty="0"/>
+          </a:p>
+        </p:txBody>
+      </p:sp>
+      <p:sp>
+        <p:nvSpPr>
+          <p:cNvPr id="15" name="Text 13"/>
+          <p:cNvSpPr/>
+          <p:nvPr/>
+        </p:nvSpPr>
+        <p:spPr>
+          <a:xfrm>
+            <a:off x="8074152" y="4023360"/>
+            <a:ext cx="2825496" cy="1097280"/>
           </a:xfrm>
           <a:prstGeom prst="rect">
             <a:avLst/>
@@ -13131,7 +14243,7 @@
               <a:buNone/>
             </a:pPr>
             <a:r>
-              <a:rPr lang="en-US" sz="1250" dirty="0">
+              <a:rPr lang="en-US" sz="1550" dirty="0">
                 <a:solidFill>
                   <a:srgbClr val="17364A"/>
                 </a:solidFill>
@@ -13141,7 +14253,7 @@
               </a:rPr>
               <a:t>Connect the concept to public health decisions, safeguards, documentation, or implementation work.</a:t>
             </a:r>
-            <a:endParaRPr lang="en-US" sz="1250" dirty="0"/>
+            <a:endParaRPr lang="en-US" sz="1550" dirty="0"/>
           </a:p>
         </p:txBody>
       </p:sp>
@@ -13338,7 +14450,7 @@
                 <a:ea typeface="Aptos" pitchFamily="34" charset="-122"/>
                 <a:cs typeface="Aptos" pitchFamily="34" charset="-120"/>
               </a:rPr>
-              <a:t>© Paula Soper</a:t>
+              <a:t>Â© Paula Soper</a:t>
             </a:r>
             <a:endParaRPr lang="en-US" sz="800" dirty="0"/>
           </a:p>
@@ -13346,7 +14458,46 @@
       </p:sp>
       <p:sp>
         <p:nvSpPr>
-          <p:cNvPr id="7" name="Shape 5"/>
+          <p:cNvPr id="7" name="Text 5"/>
+          <p:cNvSpPr/>
+          <p:nvPr/>
+        </p:nvSpPr>
+        <p:spPr>
+          <a:xfrm>
+            <a:off x="11137392" y="6510528"/>
+            <a:ext cx="411480" cy="201168"/>
+          </a:xfrm>
+          <a:prstGeom prst="rect">
+            <a:avLst/>
+          </a:prstGeom>
+          <a:noFill/>
+          <a:ln/>
+        </p:spPr>
+        <p:txBody>
+          <a:bodyPr wrap="square" lIns="0" tIns="0" rIns="0" bIns="0" rtlCol="0" anchor="ctr"/>
+          <a:lstStyle/>
+          <a:p>
+            <a:pPr algn="r" indent="0" marL="0">
+              <a:buNone/>
+            </a:pPr>
+            <a:r>
+              <a:rPr lang="en-US" sz="900" dirty="0">
+                <a:solidFill>
+                  <a:srgbClr val="5F7181"/>
+                </a:solidFill>
+                <a:latin typeface="Aptos" pitchFamily="34" charset="0"/>
+                <a:ea typeface="Aptos" pitchFamily="34" charset="-122"/>
+                <a:cs typeface="Aptos" pitchFamily="34" charset="-120"/>
+              </a:rPr>
+              <a:t>7</a:t>
+            </a:r>
+            <a:endParaRPr lang="en-US" sz="900" dirty="0"/>
+          </a:p>
+        </p:txBody>
+      </p:sp>
+      <p:sp>
+        <p:nvSpPr>
+          <p:cNvPr id="8" name="Shape 6"/>
           <p:cNvSpPr/>
           <p:nvPr/>
         </p:nvSpPr>
@@ -13371,7 +14522,7 @@
       </p:sp>
       <p:sp>
         <p:nvSpPr>
-          <p:cNvPr id="8" name="Text 6"/>
+          <p:cNvPr id="9" name="Text 7"/>
           <p:cNvSpPr/>
           <p:nvPr/>
         </p:nvSpPr>
@@ -13410,14 +14561,14 @@
       </p:sp>
       <p:sp>
         <p:nvSpPr>
-          <p:cNvPr id="9" name="Text 7"/>
+          <p:cNvPr id="10" name="Text 8"/>
           <p:cNvSpPr/>
           <p:nvPr/>
         </p:nvSpPr>
         <p:spPr>
           <a:xfrm>
             <a:off x="640080" y="621792"/>
-            <a:ext cx="10881360" cy="566928"/>
+            <a:ext cx="10881360" cy="713232"/>
           </a:xfrm>
           <a:prstGeom prst="rect">
             <a:avLst/>
@@ -13435,7 +14586,7 @@
               <a:buNone/>
             </a:pPr>
             <a:r>
-              <a:rPr lang="en-US" sz="2700" b="1" dirty="0">
+              <a:rPr lang="en-US" sz="3400" b="1" dirty="0">
                 <a:solidFill>
                   <a:srgbClr val="003A63"/>
                 </a:solidFill>
@@ -13445,20 +14596,20 @@
               </a:rPr>
               <a:t>Module Overview</a:t>
             </a:r>
-            <a:endParaRPr lang="en-US" sz="2700" dirty="0"/>
-          </a:p>
-        </p:txBody>
-      </p:sp>
-      <p:sp>
-        <p:nvSpPr>
-          <p:cNvPr id="10" name="Text 8"/>
-          <p:cNvSpPr/>
-          <p:nvPr/>
-        </p:nvSpPr>
-        <p:spPr>
-          <a:xfrm>
-            <a:off x="868680" y="1417320"/>
-            <a:ext cx="6675120" cy="4434840"/>
+            <a:endParaRPr lang="en-US" sz="3400" dirty="0"/>
+          </a:p>
+        </p:txBody>
+      </p:sp>
+      <p:sp>
+        <p:nvSpPr>
+          <p:cNvPr id="11" name="Text 9"/>
+          <p:cNvSpPr/>
+          <p:nvPr/>
+        </p:nvSpPr>
+        <p:spPr>
+          <a:xfrm>
+            <a:off x="868680" y="1508760"/>
+            <a:ext cx="6537960" cy="4160520"/>
           </a:xfrm>
           <a:prstGeom prst="rect">
             <a:avLst/>
@@ -13473,7 +14624,7 @@
           <a:lstStyle/>
           <a:p>
             <a:r>
-              <a:rPr lang="en-US" sz="1700" dirty="0">
+              <a:rPr lang="en-US" sz="2100" dirty="0">
                 <a:solidFill>
                   <a:srgbClr val="17364A"/>
                 </a:solidFill>
@@ -13481,13 +14632,13 @@
                 <a:ea typeface="Aptos" pitchFamily="34" charset="-122"/>
                 <a:cs typeface="Aptos" pitchFamily="34" charset="-120"/>
               </a:rPr>
-              <a:t>Machine learning is a set of methods that allow computer systems to identify patterns in data and use those patterns to.</a:t>
-            </a:r>
-            <a:endParaRPr lang="en-US" sz="1700" dirty="0"/>
-          </a:p>
-          <a:p>
-            <a:r>
-              <a:rPr lang="en-US" sz="1700" dirty="0">
+              <a:t>Machine learning is a set of methods that allow computer systems to identify patterns in data and use.</a:t>
+            </a:r>
+            <a:endParaRPr lang="en-US" sz="2100" dirty="0"/>
+          </a:p>
+          <a:p>
+            <a:r>
+              <a:rPr lang="en-US" sz="2100" dirty="0">
                 <a:solidFill>
                   <a:srgbClr val="17364A"/>
                 </a:solidFill>
@@ -13495,13 +14646,13 @@
                 <a:ea typeface="Aptos" pitchFamily="34" charset="-122"/>
                 <a:cs typeface="Aptos" pitchFamily="34" charset="-120"/>
               </a:rPr>
-              <a:t>In public health, machine learning may support surveillance triage, outbreak signal review, risk stratification, case.</a:t>
-            </a:r>
-            <a:endParaRPr lang="en-US" sz="1700" dirty="0"/>
-          </a:p>
-          <a:p>
-            <a:r>
-              <a:rPr lang="en-US" sz="1700" dirty="0">
+              <a:t>In public health, machine learning may support surveillance triage, outbreak signal review, risk.</a:t>
+            </a:r>
+            <a:endParaRPr lang="en-US" sz="2100" dirty="0"/>
+          </a:p>
+          <a:p>
+            <a:r>
+              <a:rPr lang="en-US" sz="2100" dirty="0">
                 <a:solidFill>
                   <a:srgbClr val="17364A"/>
                 </a:solidFill>
@@ -13511,27 +14662,13 @@
               </a:rPr>
               <a:t>The purpose of this module is not to turn every learner into a data scientist.</a:t>
             </a:r>
-            <a:endParaRPr lang="en-US" sz="1700" dirty="0"/>
-          </a:p>
-          <a:p>
-            <a:r>
-              <a:rPr lang="en-US" sz="1700" dirty="0">
-                <a:solidFill>
-                  <a:srgbClr val="17364A"/>
-                </a:solidFill>
-                <a:latin typeface="Aptos" pitchFamily="34" charset="0"/>
-                <a:ea typeface="Aptos" pitchFamily="34" charset="-122"/>
-                <a:cs typeface="Aptos" pitchFamily="34" charset="-120"/>
-              </a:rPr>
-              <a:t>The purpose is to help public health informaticians, epidemiologists, and technologists understand the concepts needed to.</a:t>
-            </a:r>
-            <a:endParaRPr lang="en-US" sz="1700" dirty="0"/>
-          </a:p>
-        </p:txBody>
-      </p:sp>
-      <p:sp>
-        <p:nvSpPr>
-          <p:cNvPr id="11" name="Shape 9"/>
+            <a:endParaRPr lang="en-US" sz="2100" dirty="0"/>
+          </a:p>
+        </p:txBody>
+      </p:sp>
+      <p:sp>
+        <p:nvSpPr>
+          <p:cNvPr id="12" name="Shape 10"/>
           <p:cNvSpPr/>
           <p:nvPr/>
         </p:nvSpPr>
@@ -13558,14 +14695,14 @@
       </p:sp>
       <p:sp>
         <p:nvSpPr>
-          <p:cNvPr id="12" name="Text 10"/>
+          <p:cNvPr id="13" name="Text 11"/>
           <p:cNvSpPr/>
           <p:nvPr/>
         </p:nvSpPr>
         <p:spPr>
           <a:xfrm>
             <a:off x="8074152" y="1563624"/>
-            <a:ext cx="2825496" cy="201168"/>
+            <a:ext cx="2825496" cy="256032"/>
           </a:xfrm>
           <a:prstGeom prst="rect">
             <a:avLst/>
@@ -13581,7 +14718,7 @@
               <a:buNone/>
             </a:pPr>
             <a:r>
-              <a:rPr lang="en-US" sz="950" b="1" dirty="0">
+              <a:rPr lang="en-US" sz="1300" b="1" dirty="0">
                 <a:solidFill>
                   <a:srgbClr val="0068B7"/>
                 </a:solidFill>
@@ -13591,20 +14728,20 @@
               </a:rPr>
               <a:t>Key idea</a:t>
             </a:r>
-            <a:endParaRPr lang="en-US" sz="950" dirty="0"/>
-          </a:p>
-        </p:txBody>
-      </p:sp>
-      <p:sp>
-        <p:nvSpPr>
-          <p:cNvPr id="13" name="Text 11"/>
-          <p:cNvSpPr/>
-          <p:nvPr/>
-        </p:nvSpPr>
-        <p:spPr>
-          <a:xfrm>
-            <a:off x="8074152" y="1856232"/>
-            <a:ext cx="2825496" cy="1261872"/>
+            <a:endParaRPr lang="en-US" sz="1300" dirty="0"/>
+          </a:p>
+        </p:txBody>
+      </p:sp>
+      <p:sp>
+        <p:nvSpPr>
+          <p:cNvPr id="14" name="Text 12"/>
+          <p:cNvSpPr/>
+          <p:nvPr/>
+        </p:nvSpPr>
+        <p:spPr>
+          <a:xfrm>
+            <a:off x="8074152" y="1920240"/>
+            <a:ext cx="2825496" cy="1188720"/>
           </a:xfrm>
           <a:prstGeom prst="rect">
             <a:avLst/>
@@ -13622,7 +14759,7 @@
               <a:buNone/>
             </a:pPr>
             <a:r>
-              <a:rPr lang="en-US" sz="1250" dirty="0">
+              <a:rPr lang="en-US" sz="1550" dirty="0">
                 <a:solidFill>
                   <a:srgbClr val="17364A"/>
                 </a:solidFill>
@@ -13630,15 +14767,15 @@
                 <a:ea typeface="Aptos" pitchFamily="34" charset="-122"/>
                 <a:cs typeface="Aptos" pitchFamily="34" charset="-120"/>
               </a:rPr>
-              <a:t>Machine learning is a set of methods that allow computer systems to identify patterns in data and use those patterns to.</a:t>
-            </a:r>
-            <a:endParaRPr lang="en-US" sz="1250" dirty="0"/>
-          </a:p>
-        </p:txBody>
-      </p:sp>
-      <p:sp>
-        <p:nvSpPr>
-          <p:cNvPr id="14" name="Shape 12"/>
+              <a:t>Machine learning is a set of methods that allow computer systems to identify patterns in data and use.</a:t>
+            </a:r>
+            <a:endParaRPr lang="en-US" sz="1550" dirty="0"/>
+          </a:p>
+        </p:txBody>
+      </p:sp>
+      <p:sp>
+        <p:nvSpPr>
+          <p:cNvPr id="15" name="Shape 13"/>
           <p:cNvSpPr/>
           <p:nvPr/>
         </p:nvSpPr>
@@ -13665,14 +14802,14 @@
       </p:sp>
       <p:sp>
         <p:nvSpPr>
-          <p:cNvPr id="15" name="Text 13"/>
+          <p:cNvPr id="16" name="Text 14"/>
           <p:cNvSpPr/>
           <p:nvPr/>
         </p:nvSpPr>
         <p:spPr>
           <a:xfrm>
             <a:off x="8074152" y="3666744"/>
-            <a:ext cx="2825496" cy="201168"/>
+            <a:ext cx="2825496" cy="256032"/>
           </a:xfrm>
           <a:prstGeom prst="rect">
             <a:avLst/>
@@ -13688,7 +14825,7 @@
               <a:buNone/>
             </a:pPr>
             <a:r>
-              <a:rPr lang="en-US" sz="950" b="1" dirty="0">
+              <a:rPr lang="en-US" sz="1300" b="1" dirty="0">
                 <a:solidFill>
                   <a:srgbClr val="0068B7"/>
                 </a:solidFill>
@@ -13698,20 +14835,20 @@
               </a:rPr>
               <a:t>Use this for</a:t>
             </a:r>
-            <a:endParaRPr lang="en-US" sz="950" dirty="0"/>
-          </a:p>
-        </p:txBody>
-      </p:sp>
-      <p:sp>
-        <p:nvSpPr>
-          <p:cNvPr id="16" name="Text 14"/>
-          <p:cNvSpPr/>
-          <p:nvPr/>
-        </p:nvSpPr>
-        <p:spPr>
-          <a:xfrm>
-            <a:off x="8074152" y="3959352"/>
-            <a:ext cx="2825496" cy="1170432"/>
+            <a:endParaRPr lang="en-US" sz="1300" dirty="0"/>
+          </a:p>
+        </p:txBody>
+      </p:sp>
+      <p:sp>
+        <p:nvSpPr>
+          <p:cNvPr id="17" name="Text 15"/>
+          <p:cNvSpPr/>
+          <p:nvPr/>
+        </p:nvSpPr>
+        <p:spPr>
+          <a:xfrm>
+            <a:off x="8074152" y="4023360"/>
+            <a:ext cx="2825496" cy="1097280"/>
           </a:xfrm>
           <a:prstGeom prst="rect">
             <a:avLst/>
@@ -13729,7 +14866,7 @@
               <a:buNone/>
             </a:pPr>
             <a:r>
-              <a:rPr lang="en-US" sz="1250" dirty="0">
+              <a:rPr lang="en-US" sz="1550" dirty="0">
                 <a:solidFill>
                   <a:srgbClr val="17364A"/>
                 </a:solidFill>
@@ -13739,7 +14876,7 @@
               </a:rPr>
               <a:t>Connect the concept to public health decisions, safeguards, documentation, or implementation work.</a:t>
             </a:r>
-            <a:endParaRPr lang="en-US" sz="1250" dirty="0"/>
+            <a:endParaRPr lang="en-US" sz="1550" dirty="0"/>
           </a:p>
         </p:txBody>
       </p:sp>
@@ -13936,7 +15073,7 @@
                 <a:ea typeface="Aptos" pitchFamily="34" charset="-122"/>
                 <a:cs typeface="Aptos" pitchFamily="34" charset="-120"/>
               </a:rPr>
-              <a:t>© Paula Soper</a:t>
+              <a:t>Â© Paula Soper</a:t>
             </a:r>
             <a:endParaRPr lang="en-US" sz="800" dirty="0"/>
           </a:p>
@@ -13944,7 +15081,46 @@
       </p:sp>
       <p:sp>
         <p:nvSpPr>
-          <p:cNvPr id="7" name="Shape 5"/>
+          <p:cNvPr id="7" name="Text 5"/>
+          <p:cNvSpPr/>
+          <p:nvPr/>
+        </p:nvSpPr>
+        <p:spPr>
+          <a:xfrm>
+            <a:off x="11137392" y="6510528"/>
+            <a:ext cx="411480" cy="201168"/>
+          </a:xfrm>
+          <a:prstGeom prst="rect">
+            <a:avLst/>
+          </a:prstGeom>
+          <a:noFill/>
+          <a:ln/>
+        </p:spPr>
+        <p:txBody>
+          <a:bodyPr wrap="square" lIns="0" tIns="0" rIns="0" bIns="0" rtlCol="0" anchor="ctr"/>
+          <a:lstStyle/>
+          <a:p>
+            <a:pPr algn="r" indent="0" marL="0">
+              <a:buNone/>
+            </a:pPr>
+            <a:r>
+              <a:rPr lang="en-US" sz="900" dirty="0">
+                <a:solidFill>
+                  <a:srgbClr val="5F7181"/>
+                </a:solidFill>
+                <a:latin typeface="Aptos" pitchFamily="34" charset="0"/>
+                <a:ea typeface="Aptos" pitchFamily="34" charset="-122"/>
+                <a:cs typeface="Aptos" pitchFamily="34" charset="-120"/>
+              </a:rPr>
+              <a:t>8</a:t>
+            </a:r>
+            <a:endParaRPr lang="en-US" sz="900" dirty="0"/>
+          </a:p>
+        </p:txBody>
+      </p:sp>
+      <p:sp>
+        <p:nvSpPr>
+          <p:cNvPr id="8" name="Shape 6"/>
           <p:cNvSpPr/>
           <p:nvPr/>
         </p:nvSpPr>
@@ -13969,7 +15145,7 @@
       </p:sp>
       <p:sp>
         <p:nvSpPr>
-          <p:cNvPr id="8" name="Text 6"/>
+          <p:cNvPr id="9" name="Text 7"/>
           <p:cNvSpPr/>
           <p:nvPr/>
         </p:nvSpPr>
@@ -14008,14 +15184,14 @@
       </p:sp>
       <p:sp>
         <p:nvSpPr>
-          <p:cNvPr id="9" name="Text 7"/>
+          <p:cNvPr id="10" name="Text 8"/>
           <p:cNvSpPr/>
           <p:nvPr/>
         </p:nvSpPr>
         <p:spPr>
           <a:xfrm>
             <a:off x="640080" y="621792"/>
-            <a:ext cx="10881360" cy="566928"/>
+            <a:ext cx="10881360" cy="713232"/>
           </a:xfrm>
           <a:prstGeom prst="rect">
             <a:avLst/>
@@ -14033,7 +15209,7 @@
               <a:buNone/>
             </a:pPr>
             <a:r>
-              <a:rPr lang="en-US" sz="2700" b="1" dirty="0">
+              <a:rPr lang="en-US" sz="3400" b="1" dirty="0">
                 <a:solidFill>
                   <a:srgbClr val="003A63"/>
                 </a:solidFill>
@@ -14043,20 +15219,20 @@
               </a:rPr>
               <a:t>Why This Topic Matters for Public Health AI</a:t>
             </a:r>
-            <a:endParaRPr lang="en-US" sz="2700" dirty="0"/>
-          </a:p>
-        </p:txBody>
-      </p:sp>
-      <p:sp>
-        <p:nvSpPr>
-          <p:cNvPr id="10" name="Text 8"/>
-          <p:cNvSpPr/>
-          <p:nvPr/>
-        </p:nvSpPr>
-        <p:spPr>
-          <a:xfrm>
-            <a:off x="868680" y="1417320"/>
-            <a:ext cx="6675120" cy="4434840"/>
+            <a:endParaRPr lang="en-US" sz="3400" dirty="0"/>
+          </a:p>
+        </p:txBody>
+      </p:sp>
+      <p:sp>
+        <p:nvSpPr>
+          <p:cNvPr id="11" name="Text 9"/>
+          <p:cNvSpPr/>
+          <p:nvPr/>
+        </p:nvSpPr>
+        <p:spPr>
+          <a:xfrm>
+            <a:off x="868680" y="1508760"/>
+            <a:ext cx="6537960" cy="4160520"/>
           </a:xfrm>
           <a:prstGeom prst="rect">
             <a:avLst/>
@@ -14071,7 +15247,7 @@
           <a:lstStyle/>
           <a:p>
             <a:r>
-              <a:rPr lang="en-US" sz="1700" dirty="0">
+              <a:rPr lang="en-US" sz="2100" dirty="0">
                 <a:solidFill>
                   <a:srgbClr val="17364A"/>
                 </a:solidFill>
@@ -14079,13 +15255,13 @@
                 <a:ea typeface="Aptos" pitchFamily="34" charset="-122"/>
                 <a:cs typeface="Aptos" pitchFamily="34" charset="-120"/>
               </a:rPr>
-              <a:t>Machine learning matters for public health AI because many proposed tools rely on classification, prediction, ranking, or.</a:t>
-            </a:r>
-            <a:endParaRPr lang="en-US" sz="1700" dirty="0"/>
-          </a:p>
-          <a:p>
-            <a:r>
-              <a:rPr lang="en-US" sz="1700" dirty="0">
+              <a:t>Machine learning matters for public health AI because many proposed tools rely on classification,.</a:t>
+            </a:r>
+            <a:endParaRPr lang="en-US" sz="2100" dirty="0"/>
+          </a:p>
+          <a:p>
+            <a:r>
+              <a:rPr lang="en-US" sz="2100" dirty="0">
                 <a:solidFill>
                   <a:srgbClr val="17364A"/>
                 </a:solidFill>
@@ -14095,11 +15271,11 @@
               </a:rPr>
               <a:t>A surveillance team may want to classify incoming reports by urgency.</a:t>
             </a:r>
-            <a:endParaRPr lang="en-US" sz="1700" dirty="0"/>
-          </a:p>
-          <a:p>
-            <a:r>
-              <a:rPr lang="en-US" sz="1700" dirty="0">
+            <a:endParaRPr lang="en-US" sz="2100" dirty="0"/>
+          </a:p>
+          <a:p>
+            <a:r>
+              <a:rPr lang="en-US" sz="2100" dirty="0">
                 <a:solidFill>
                   <a:srgbClr val="17364A"/>
                 </a:solidFill>
@@ -14109,27 +15285,13 @@
               </a:rPr>
               <a:t>An epidemiology team may want to detect unusual disease patterns.</a:t>
             </a:r>
-            <a:endParaRPr lang="en-US" sz="1700" dirty="0"/>
-          </a:p>
-          <a:p>
-            <a:r>
-              <a:rPr lang="en-US" sz="1700" dirty="0">
-                <a:solidFill>
-                  <a:srgbClr val="17364A"/>
-                </a:solidFill>
-                <a:latin typeface="Aptos" pitchFamily="34" charset="0"/>
-                <a:ea typeface="Aptos" pitchFamily="34" charset="-122"/>
-                <a:cs typeface="Aptos" pitchFamily="34" charset="-120"/>
-              </a:rPr>
-              <a:t>A program may want to prioritize outreach based on predicted risk.</a:t>
-            </a:r>
-            <a:endParaRPr lang="en-US" sz="1700" dirty="0"/>
-          </a:p>
-        </p:txBody>
-      </p:sp>
-      <p:sp>
-        <p:nvSpPr>
-          <p:cNvPr id="11" name="Shape 9"/>
+            <a:endParaRPr lang="en-US" sz="2100" dirty="0"/>
+          </a:p>
+        </p:txBody>
+      </p:sp>
+      <p:sp>
+        <p:nvSpPr>
+          <p:cNvPr id="12" name="Shape 10"/>
           <p:cNvSpPr/>
           <p:nvPr/>
         </p:nvSpPr>
@@ -14156,14 +15318,14 @@
       </p:sp>
       <p:sp>
         <p:nvSpPr>
-          <p:cNvPr id="12" name="Text 10"/>
+          <p:cNvPr id="13" name="Text 11"/>
           <p:cNvSpPr/>
           <p:nvPr/>
         </p:nvSpPr>
         <p:spPr>
           <a:xfrm>
             <a:off x="8074152" y="1563624"/>
-            <a:ext cx="2825496" cy="201168"/>
+            <a:ext cx="2825496" cy="256032"/>
           </a:xfrm>
           <a:prstGeom prst="rect">
             <a:avLst/>
@@ -14179,7 +15341,7 @@
               <a:buNone/>
             </a:pPr>
             <a:r>
-              <a:rPr lang="en-US" sz="950" b="1" dirty="0">
+              <a:rPr lang="en-US" sz="1300" b="1" dirty="0">
                 <a:solidFill>
                   <a:srgbClr val="0068B7"/>
                 </a:solidFill>
@@ -14189,20 +15351,20 @@
               </a:rPr>
               <a:t>Key idea</a:t>
             </a:r>
-            <a:endParaRPr lang="en-US" sz="950" dirty="0"/>
-          </a:p>
-        </p:txBody>
-      </p:sp>
-      <p:sp>
-        <p:nvSpPr>
-          <p:cNvPr id="13" name="Text 11"/>
-          <p:cNvSpPr/>
-          <p:nvPr/>
-        </p:nvSpPr>
-        <p:spPr>
-          <a:xfrm>
-            <a:off x="8074152" y="1856232"/>
-            <a:ext cx="2825496" cy="1261872"/>
+            <a:endParaRPr lang="en-US" sz="1300" dirty="0"/>
+          </a:p>
+        </p:txBody>
+      </p:sp>
+      <p:sp>
+        <p:nvSpPr>
+          <p:cNvPr id="14" name="Text 12"/>
+          <p:cNvSpPr/>
+          <p:nvPr/>
+        </p:nvSpPr>
+        <p:spPr>
+          <a:xfrm>
+            <a:off x="8074152" y="1920240"/>
+            <a:ext cx="2825496" cy="1188720"/>
           </a:xfrm>
           <a:prstGeom prst="rect">
             <a:avLst/>
@@ -14220,7 +15382,7 @@
               <a:buNone/>
             </a:pPr>
             <a:r>
-              <a:rPr lang="en-US" sz="1250" dirty="0">
+              <a:rPr lang="en-US" sz="1550" dirty="0">
                 <a:solidFill>
                   <a:srgbClr val="17364A"/>
                 </a:solidFill>
@@ -14228,15 +15390,15 @@
                 <a:ea typeface="Aptos" pitchFamily="34" charset="-122"/>
                 <a:cs typeface="Aptos" pitchFamily="34" charset="-120"/>
               </a:rPr>
-              <a:t>Machine learning matters for public health AI because many proposed tools rely on classification, prediction, ranking, or.</a:t>
-            </a:r>
-            <a:endParaRPr lang="en-US" sz="1250" dirty="0"/>
-          </a:p>
-        </p:txBody>
-      </p:sp>
-      <p:sp>
-        <p:nvSpPr>
-          <p:cNvPr id="14" name="Shape 12"/>
+              <a:t>Machine learning matters for public health AI because many proposed tools rely on classification,.</a:t>
+            </a:r>
+            <a:endParaRPr lang="en-US" sz="1550" dirty="0"/>
+          </a:p>
+        </p:txBody>
+      </p:sp>
+      <p:sp>
+        <p:nvSpPr>
+          <p:cNvPr id="15" name="Shape 13"/>
           <p:cNvSpPr/>
           <p:nvPr/>
         </p:nvSpPr>
@@ -14263,14 +15425,14 @@
       </p:sp>
       <p:sp>
         <p:nvSpPr>
-          <p:cNvPr id="15" name="Text 13"/>
+          <p:cNvPr id="16" name="Text 14"/>
           <p:cNvSpPr/>
           <p:nvPr/>
         </p:nvSpPr>
         <p:spPr>
           <a:xfrm>
             <a:off x="8074152" y="3666744"/>
-            <a:ext cx="2825496" cy="201168"/>
+            <a:ext cx="2825496" cy="256032"/>
           </a:xfrm>
           <a:prstGeom prst="rect">
             <a:avLst/>
@@ -14286,7 +15448,7 @@
               <a:buNone/>
             </a:pPr>
             <a:r>
-              <a:rPr lang="en-US" sz="950" b="1" dirty="0">
+              <a:rPr lang="en-US" sz="1300" b="1" dirty="0">
                 <a:solidFill>
                   <a:srgbClr val="0068B7"/>
                 </a:solidFill>
@@ -14296,20 +15458,20 @@
               </a:rPr>
               <a:t>Use this for</a:t>
             </a:r>
-            <a:endParaRPr lang="en-US" sz="950" dirty="0"/>
-          </a:p>
-        </p:txBody>
-      </p:sp>
-      <p:sp>
-        <p:nvSpPr>
-          <p:cNvPr id="16" name="Text 14"/>
-          <p:cNvSpPr/>
-          <p:nvPr/>
-        </p:nvSpPr>
-        <p:spPr>
-          <a:xfrm>
-            <a:off x="8074152" y="3959352"/>
-            <a:ext cx="2825496" cy="1170432"/>
+            <a:endParaRPr lang="en-US" sz="1300" dirty="0"/>
+          </a:p>
+        </p:txBody>
+      </p:sp>
+      <p:sp>
+        <p:nvSpPr>
+          <p:cNvPr id="17" name="Text 15"/>
+          <p:cNvSpPr/>
+          <p:nvPr/>
+        </p:nvSpPr>
+        <p:spPr>
+          <a:xfrm>
+            <a:off x="8074152" y="4023360"/>
+            <a:ext cx="2825496" cy="1097280"/>
           </a:xfrm>
           <a:prstGeom prst="rect">
             <a:avLst/>
@@ -14327,7 +15489,7 @@
               <a:buNone/>
             </a:pPr>
             <a:r>
-              <a:rPr lang="en-US" sz="1250" dirty="0">
+              <a:rPr lang="en-US" sz="1550" dirty="0">
                 <a:solidFill>
                   <a:srgbClr val="17364A"/>
                 </a:solidFill>
@@ -14337,7 +15499,7 @@
               </a:rPr>
               <a:t>Connect the concept to public health decisions, safeguards, documentation, or implementation work.</a:t>
             </a:r>
-            <a:endParaRPr lang="en-US" sz="1250" dirty="0"/>
+            <a:endParaRPr lang="en-US" sz="1550" dirty="0"/>
           </a:p>
         </p:txBody>
       </p:sp>
@@ -14534,7 +15696,7 @@
                 <a:ea typeface="Aptos" pitchFamily="34" charset="-122"/>
                 <a:cs typeface="Aptos" pitchFamily="34" charset="-120"/>
               </a:rPr>
-              <a:t>© Paula Soper</a:t>
+              <a:t>Â© Paula Soper</a:t>
             </a:r>
             <a:endParaRPr lang="en-US" sz="800" dirty="0"/>
           </a:p>
@@ -14542,7 +15704,46 @@
       </p:sp>
       <p:sp>
         <p:nvSpPr>
-          <p:cNvPr id="7" name="Shape 5"/>
+          <p:cNvPr id="7" name="Text 5"/>
+          <p:cNvSpPr/>
+          <p:nvPr/>
+        </p:nvSpPr>
+        <p:spPr>
+          <a:xfrm>
+            <a:off x="11137392" y="6510528"/>
+            <a:ext cx="411480" cy="201168"/>
+          </a:xfrm>
+          <a:prstGeom prst="rect">
+            <a:avLst/>
+          </a:prstGeom>
+          <a:noFill/>
+          <a:ln/>
+        </p:spPr>
+        <p:txBody>
+          <a:bodyPr wrap="square" lIns="0" tIns="0" rIns="0" bIns="0" rtlCol="0" anchor="ctr"/>
+          <a:lstStyle/>
+          <a:p>
+            <a:pPr algn="r" indent="0" marL="0">
+              <a:buNone/>
+            </a:pPr>
+            <a:r>
+              <a:rPr lang="en-US" sz="900" dirty="0">
+                <a:solidFill>
+                  <a:srgbClr val="5F7181"/>
+                </a:solidFill>
+                <a:latin typeface="Aptos" pitchFamily="34" charset="0"/>
+                <a:ea typeface="Aptos" pitchFamily="34" charset="-122"/>
+                <a:cs typeface="Aptos" pitchFamily="34" charset="-120"/>
+              </a:rPr>
+              <a:t>9</a:t>
+            </a:r>
+            <a:endParaRPr lang="en-US" sz="900" dirty="0"/>
+          </a:p>
+        </p:txBody>
+      </p:sp>
+      <p:sp>
+        <p:nvSpPr>
+          <p:cNvPr id="8" name="Shape 6"/>
           <p:cNvSpPr/>
           <p:nvPr/>
         </p:nvSpPr>
@@ -14567,7 +15768,7 @@
       </p:sp>
       <p:sp>
         <p:nvSpPr>
-          <p:cNvPr id="8" name="Text 6"/>
+          <p:cNvPr id="9" name="Text 7"/>
           <p:cNvSpPr/>
           <p:nvPr/>
         </p:nvSpPr>
@@ -14606,14 +15807,14 @@
       </p:sp>
       <p:sp>
         <p:nvSpPr>
-          <p:cNvPr id="9" name="Text 7"/>
+          <p:cNvPr id="10" name="Text 8"/>
           <p:cNvSpPr/>
           <p:nvPr/>
         </p:nvSpPr>
         <p:spPr>
           <a:xfrm>
             <a:off x="640080" y="621792"/>
-            <a:ext cx="10881360" cy="566928"/>
+            <a:ext cx="10881360" cy="713232"/>
           </a:xfrm>
           <a:prstGeom prst="rect">
             <a:avLst/>
@@ -14631,7 +15832,7 @@
               <a:buNone/>
             </a:pPr>
             <a:r>
-              <a:rPr lang="en-US" sz="2700" b="1" dirty="0">
+              <a:rPr lang="en-US" sz="3400" b="1" dirty="0">
                 <a:solidFill>
                   <a:srgbClr val="003A63"/>
                 </a:solidFill>
@@ -14641,20 +15842,20 @@
               </a:rPr>
               <a:t>Public Health Example</a:t>
             </a:r>
-            <a:endParaRPr lang="en-US" sz="2700" dirty="0"/>
-          </a:p>
-        </p:txBody>
-      </p:sp>
-      <p:sp>
-        <p:nvSpPr>
-          <p:cNvPr id="10" name="Text 8"/>
-          <p:cNvSpPr/>
-          <p:nvPr/>
-        </p:nvSpPr>
-        <p:spPr>
-          <a:xfrm>
-            <a:off x="868680" y="1417320"/>
-            <a:ext cx="6675120" cy="4434840"/>
+            <a:endParaRPr lang="en-US" sz="3400" dirty="0"/>
+          </a:p>
+        </p:txBody>
+      </p:sp>
+      <p:sp>
+        <p:nvSpPr>
+          <p:cNvPr id="11" name="Text 9"/>
+          <p:cNvSpPr/>
+          <p:nvPr/>
+        </p:nvSpPr>
+        <p:spPr>
+          <a:xfrm>
+            <a:off x="868680" y="1508760"/>
+            <a:ext cx="6537960" cy="4160520"/>
           </a:xfrm>
           <a:prstGeom prst="rect">
             <a:avLst/>
@@ -14669,7 +15870,7 @@
           <a:lstStyle/>
           <a:p>
             <a:r>
-              <a:rPr lang="en-US" sz="1700" dirty="0">
+              <a:rPr lang="en-US" sz="2100" dirty="0">
                 <a:solidFill>
                   <a:srgbClr val="17364A"/>
                 </a:solidFill>
@@ -14677,13 +15878,13 @@
                 <a:ea typeface="Aptos" pitchFamily="34" charset="-122"/>
                 <a:cs typeface="Aptos" pitchFamily="34" charset="-120"/>
               </a:rPr>
-              <a:t>A health department may consider a machine learning model to classify environmental health complaints by likely urgency.</a:t>
-            </a:r>
-            <a:endParaRPr lang="en-US" sz="1700" dirty="0"/>
-          </a:p>
-          <a:p>
-            <a:r>
-              <a:rPr lang="en-US" sz="1700" dirty="0">
+              <a:t>A health department may consider a machine learning model to classify environmental health complaints.</a:t>
+            </a:r>
+            <a:endParaRPr lang="en-US" sz="2100" dirty="0"/>
+          </a:p>
+          <a:p>
+            <a:r>
+              <a:rPr lang="en-US" sz="2100" dirty="0">
                 <a:solidFill>
                   <a:srgbClr val="17364A"/>
                 </a:solidFill>
@@ -14691,13 +15892,13 @@
                 <a:ea typeface="Aptos" pitchFamily="34" charset="-122"/>
                 <a:cs typeface="Aptos" pitchFamily="34" charset="-120"/>
               </a:rPr>
-              <a:t>Historical complaint text, location, facility type, prior violations, and resolution outcomes may be used as features.</a:t>
-            </a:r>
-            <a:endParaRPr lang="en-US" sz="1700" dirty="0"/>
-          </a:p>
-          <a:p>
-            <a:r>
-              <a:rPr lang="en-US" sz="1700" dirty="0">
+              <a:t>Historical complaint text, location, facility type, prior violations, and resolution outcomes may be.</a:t>
+            </a:r>
+            <a:endParaRPr lang="en-US" sz="2100" dirty="0"/>
+          </a:p>
+          <a:p>
+            <a:r>
+              <a:rPr lang="en-US" sz="2100" dirty="0">
                 <a:solidFill>
                   <a:srgbClr val="17364A"/>
                 </a:solidFill>
@@ -14707,27 +15908,13 @@
               </a:rPr>
               <a:t>The label might be whether the complaint was ultimately assigned high priority by trained staff.</a:t>
             </a:r>
-            <a:endParaRPr lang="en-US" sz="1700" dirty="0"/>
-          </a:p>
-          <a:p>
-            <a:r>
-              <a:rPr lang="en-US" sz="1700" dirty="0">
-                <a:solidFill>
-                  <a:srgbClr val="17364A"/>
-                </a:solidFill>
-                <a:latin typeface="Aptos" pitchFamily="34" charset="0"/>
-                <a:ea typeface="Aptos" pitchFamily="34" charset="-122"/>
-                <a:cs typeface="Aptos" pitchFamily="34" charset="-120"/>
-              </a:rPr>
-              <a:t>This sounds useful, but the label may reflect staffing capacity or historical prioritization patterns rather than true.</a:t>
-            </a:r>
-            <a:endParaRPr lang="en-US" sz="1700" dirty="0"/>
-          </a:p>
-        </p:txBody>
-      </p:sp>
-      <p:sp>
-        <p:nvSpPr>
-          <p:cNvPr id="11" name="Shape 9"/>
+            <a:endParaRPr lang="en-US" sz="2100" dirty="0"/>
+          </a:p>
+        </p:txBody>
+      </p:sp>
+      <p:sp>
+        <p:nvSpPr>
+          <p:cNvPr id="12" name="Shape 10"/>
           <p:cNvSpPr/>
           <p:nvPr/>
         </p:nvSpPr>
@@ -14754,14 +15941,14 @@
       </p:sp>
       <p:sp>
         <p:nvSpPr>
-          <p:cNvPr id="12" name="Text 10"/>
+          <p:cNvPr id="13" name="Text 11"/>
           <p:cNvSpPr/>
           <p:nvPr/>
         </p:nvSpPr>
         <p:spPr>
           <a:xfrm>
             <a:off x="8074152" y="1563624"/>
-            <a:ext cx="2825496" cy="201168"/>
+            <a:ext cx="2825496" cy="256032"/>
           </a:xfrm>
           <a:prstGeom prst="rect">
             <a:avLst/>
@@ -14777,7 +15964,7 @@
               <a:buNone/>
             </a:pPr>
             <a:r>
-              <a:rPr lang="en-US" sz="950" b="1" dirty="0">
+              <a:rPr lang="en-US" sz="1300" b="1" dirty="0">
                 <a:solidFill>
                   <a:srgbClr val="0068B7"/>
                 </a:solidFill>
@@ -14787,20 +15974,20 @@
               </a:rPr>
               <a:t>Key idea</a:t>
             </a:r>
-            <a:endParaRPr lang="en-US" sz="950" dirty="0"/>
-          </a:p>
-        </p:txBody>
-      </p:sp>
-      <p:sp>
-        <p:nvSpPr>
-          <p:cNvPr id="13" name="Text 11"/>
-          <p:cNvSpPr/>
-          <p:nvPr/>
-        </p:nvSpPr>
-        <p:spPr>
-          <a:xfrm>
-            <a:off x="8074152" y="1856232"/>
-            <a:ext cx="2825496" cy="1261872"/>
+            <a:endParaRPr lang="en-US" sz="1300" dirty="0"/>
+          </a:p>
+        </p:txBody>
+      </p:sp>
+      <p:sp>
+        <p:nvSpPr>
+          <p:cNvPr id="14" name="Text 12"/>
+          <p:cNvSpPr/>
+          <p:nvPr/>
+        </p:nvSpPr>
+        <p:spPr>
+          <a:xfrm>
+            <a:off x="8074152" y="1920240"/>
+            <a:ext cx="2825496" cy="1188720"/>
           </a:xfrm>
           <a:prstGeom prst="rect">
             <a:avLst/>
@@ -14818,7 +16005,7 @@
               <a:buNone/>
             </a:pPr>
             <a:r>
-              <a:rPr lang="en-US" sz="1250" dirty="0">
+              <a:rPr lang="en-US" sz="1550" dirty="0">
                 <a:solidFill>
                   <a:srgbClr val="17364A"/>
                 </a:solidFill>
@@ -14826,15 +16013,15 @@
                 <a:ea typeface="Aptos" pitchFamily="34" charset="-122"/>
                 <a:cs typeface="Aptos" pitchFamily="34" charset="-120"/>
               </a:rPr>
-              <a:t>A health department may consider a machine learning model to classify environmental health complaints by likely urgency.</a:t>
-            </a:r>
-            <a:endParaRPr lang="en-US" sz="1250" dirty="0"/>
-          </a:p>
-        </p:txBody>
-      </p:sp>
-      <p:sp>
-        <p:nvSpPr>
-          <p:cNvPr id="14" name="Shape 12"/>
+              <a:t>A health department may consider a machine learning model to classify environmental health complaints.</a:t>
+            </a:r>
+            <a:endParaRPr lang="en-US" sz="1550" dirty="0"/>
+          </a:p>
+        </p:txBody>
+      </p:sp>
+      <p:sp>
+        <p:nvSpPr>
+          <p:cNvPr id="15" name="Shape 13"/>
           <p:cNvSpPr/>
           <p:nvPr/>
         </p:nvSpPr>
@@ -14861,14 +16048,14 @@
       </p:sp>
       <p:sp>
         <p:nvSpPr>
-          <p:cNvPr id="15" name="Text 13"/>
+          <p:cNvPr id="16" name="Text 14"/>
           <p:cNvSpPr/>
           <p:nvPr/>
         </p:nvSpPr>
         <p:spPr>
           <a:xfrm>
             <a:off x="8074152" y="3666744"/>
-            <a:ext cx="2825496" cy="201168"/>
+            <a:ext cx="2825496" cy="256032"/>
           </a:xfrm>
           <a:prstGeom prst="rect">
             <a:avLst/>
@@ -14884,7 +16071,7 @@
               <a:buNone/>
             </a:pPr>
             <a:r>
-              <a:rPr lang="en-US" sz="950" b="1" dirty="0">
+              <a:rPr lang="en-US" sz="1300" b="1" dirty="0">
                 <a:solidFill>
                   <a:srgbClr val="0068B7"/>
                 </a:solidFill>
@@ -14894,20 +16081,20 @@
               </a:rPr>
               <a:t>Use this for</a:t>
             </a:r>
-            <a:endParaRPr lang="en-US" sz="950" dirty="0"/>
-          </a:p>
-        </p:txBody>
-      </p:sp>
-      <p:sp>
-        <p:nvSpPr>
-          <p:cNvPr id="16" name="Text 14"/>
-          <p:cNvSpPr/>
-          <p:nvPr/>
-        </p:nvSpPr>
-        <p:spPr>
-          <a:xfrm>
-            <a:off x="8074152" y="3959352"/>
-            <a:ext cx="2825496" cy="1170432"/>
+            <a:endParaRPr lang="en-US" sz="1300" dirty="0"/>
+          </a:p>
+        </p:txBody>
+      </p:sp>
+      <p:sp>
+        <p:nvSpPr>
+          <p:cNvPr id="17" name="Text 15"/>
+          <p:cNvSpPr/>
+          <p:nvPr/>
+        </p:nvSpPr>
+        <p:spPr>
+          <a:xfrm>
+            <a:off x="8074152" y="4023360"/>
+            <a:ext cx="2825496" cy="1097280"/>
           </a:xfrm>
           <a:prstGeom prst="rect">
             <a:avLst/>
@@ -14925,7 +16112,7 @@
               <a:buNone/>
             </a:pPr>
             <a:r>
-              <a:rPr lang="en-US" sz="1250" dirty="0">
+              <a:rPr lang="en-US" sz="1550" dirty="0">
                 <a:solidFill>
                   <a:srgbClr val="17364A"/>
                 </a:solidFill>
@@ -14935,7 +16122,7 @@
               </a:rPr>
               <a:t>Connect the concept to public health decisions, safeguards, documentation, or implementation work.</a:t>
             </a:r>
-            <a:endParaRPr lang="en-US" sz="1250" dirty="0"/>
+            <a:endParaRPr lang="en-US" sz="1550" dirty="0"/>
           </a:p>
         </p:txBody>
       </p:sp>
